--- a/images/drawingThePresentation.pptx
+++ b/images/drawingThePresentation.pptx
@@ -4,10 +4,14 @@
   <p:sldMasterIdLst>
     <p:sldMasterId id="2147483648" r:id="rId1"/>
   </p:sldMasterIdLst>
+  <p:notesMasterIdLst>
+    <p:notesMasterId r:id="rId6"/>
+  </p:notesMasterIdLst>
   <p:sldIdLst>
     <p:sldId id="256" r:id="rId2"/>
-    <p:sldId id="262" r:id="rId3"/>
-    <p:sldId id="263" r:id="rId4"/>
+    <p:sldId id="265" r:id="rId3"/>
+    <p:sldId id="266" r:id="rId4"/>
+    <p:sldId id="263" r:id="rId5"/>
   </p:sldIdLst>
   <p:sldSz cx="12192000" cy="6858000"/>
   <p:notesSz cx="6858000" cy="9144000"/>
@@ -112,6 +116,572 @@
     </p:ext>
   </p:extLst>
 </p:presentation>
+</file>
+
+<file path=ppt/notesMasters/notesMaster1.xml><?xml version="1.0" encoding="utf-8"?>
+<p:notesMaster xmlns:a="http://schemas.openxmlformats.org/drawingml/2006/main" xmlns:r="http://schemas.openxmlformats.org/officeDocument/2006/relationships" xmlns:p="http://schemas.openxmlformats.org/presentationml/2006/main">
+  <p:cSld>
+    <p:bg>
+      <p:bgRef idx="1001">
+        <a:schemeClr val="bg1"/>
+      </p:bgRef>
+    </p:bg>
+    <p:spTree>
+      <p:nvGrpSpPr>
+        <p:cNvPr id="1" name=""/>
+        <p:cNvGrpSpPr/>
+        <p:nvPr/>
+      </p:nvGrpSpPr>
+      <p:grpSpPr>
+        <a:xfrm>
+          <a:off x="0" y="0"/>
+          <a:ext cx="0" cy="0"/>
+          <a:chOff x="0" y="0"/>
+          <a:chExt cx="0" cy="0"/>
+        </a:xfrm>
+      </p:grpSpPr>
+      <p:sp>
+        <p:nvSpPr>
+          <p:cNvPr id="2" name="Espace réservé de l'en-tête 1"/>
+          <p:cNvSpPr>
+            <a:spLocks noGrp="1"/>
+          </p:cNvSpPr>
+          <p:nvPr>
+            <p:ph type="hdr" sz="quarter"/>
+          </p:nvPr>
+        </p:nvSpPr>
+        <p:spPr>
+          <a:xfrm>
+            <a:off x="0" y="0"/>
+            <a:ext cx="2971800" cy="458788"/>
+          </a:xfrm>
+          <a:prstGeom prst="rect">
+            <a:avLst/>
+          </a:prstGeom>
+        </p:spPr>
+        <p:txBody>
+          <a:bodyPr vert="horz" lIns="91440" tIns="45720" rIns="91440" bIns="45720" rtlCol="0"/>
+          <a:lstStyle>
+            <a:lvl1pPr algn="l">
+              <a:defRPr sz="1200"/>
+            </a:lvl1pPr>
+          </a:lstStyle>
+          <a:p>
+            <a:endParaRPr lang="fr-CA"/>
+          </a:p>
+        </p:txBody>
+      </p:sp>
+      <p:sp>
+        <p:nvSpPr>
+          <p:cNvPr id="3" name="Espace réservé de la date 2"/>
+          <p:cNvSpPr>
+            <a:spLocks noGrp="1"/>
+          </p:cNvSpPr>
+          <p:nvPr>
+            <p:ph type="dt" idx="1"/>
+          </p:nvPr>
+        </p:nvSpPr>
+        <p:spPr>
+          <a:xfrm>
+            <a:off x="3884613" y="0"/>
+            <a:ext cx="2971800" cy="458788"/>
+          </a:xfrm>
+          <a:prstGeom prst="rect">
+            <a:avLst/>
+          </a:prstGeom>
+        </p:spPr>
+        <p:txBody>
+          <a:bodyPr vert="horz" lIns="91440" tIns="45720" rIns="91440" bIns="45720" rtlCol="0"/>
+          <a:lstStyle>
+            <a:lvl1pPr algn="r">
+              <a:defRPr sz="1200"/>
+            </a:lvl1pPr>
+          </a:lstStyle>
+          <a:p>
+            <a:fld id="{1058D600-DAED-41A3-BBAD-B3A821407038}" type="datetimeFigureOut">
+              <a:rPr lang="fr-CA" smtClean="0"/>
+              <a:t>2026-05-07</a:t>
+            </a:fld>
+            <a:endParaRPr lang="fr-CA"/>
+          </a:p>
+        </p:txBody>
+      </p:sp>
+      <p:sp>
+        <p:nvSpPr>
+          <p:cNvPr id="4" name="Espace réservé de l'image des diapositives 3"/>
+          <p:cNvSpPr>
+            <a:spLocks noGrp="1" noRot="1" noChangeAspect="1"/>
+          </p:cNvSpPr>
+          <p:nvPr>
+            <p:ph type="sldImg" idx="2"/>
+          </p:nvPr>
+        </p:nvSpPr>
+        <p:spPr>
+          <a:xfrm>
+            <a:off x="685800" y="1143000"/>
+            <a:ext cx="5486400" cy="3086100"/>
+          </a:xfrm>
+          <a:prstGeom prst="rect">
+            <a:avLst/>
+          </a:prstGeom>
+          <a:noFill/>
+          <a:ln w="12700">
+            <a:solidFill>
+              <a:prstClr val="black"/>
+            </a:solidFill>
+          </a:ln>
+        </p:spPr>
+        <p:txBody>
+          <a:bodyPr vert="horz" lIns="91440" tIns="45720" rIns="91440" bIns="45720" rtlCol="0" anchor="ctr"/>
+          <a:lstStyle/>
+          <a:p>
+            <a:endParaRPr lang="fr-CA"/>
+          </a:p>
+        </p:txBody>
+      </p:sp>
+      <p:sp>
+        <p:nvSpPr>
+          <p:cNvPr id="5" name="Espace réservé des notes 4"/>
+          <p:cNvSpPr>
+            <a:spLocks noGrp="1"/>
+          </p:cNvSpPr>
+          <p:nvPr>
+            <p:ph type="body" sz="quarter" idx="3"/>
+          </p:nvPr>
+        </p:nvSpPr>
+        <p:spPr>
+          <a:xfrm>
+            <a:off x="685800" y="4400550"/>
+            <a:ext cx="5486400" cy="3600450"/>
+          </a:xfrm>
+          <a:prstGeom prst="rect">
+            <a:avLst/>
+          </a:prstGeom>
+        </p:spPr>
+        <p:txBody>
+          <a:bodyPr vert="horz" lIns="91440" tIns="45720" rIns="91440" bIns="45720" rtlCol="0"/>
+          <a:lstStyle/>
+          <a:p>
+            <a:pPr lvl="0"/>
+            <a:r>
+              <a:rPr lang="fr-FR"/>
+              <a:t>Cliquez pour modifier les styles du texte du masque</a:t>
+            </a:r>
+          </a:p>
+          <a:p>
+            <a:pPr lvl="1"/>
+            <a:r>
+              <a:rPr lang="fr-FR"/>
+              <a:t>Deuxième niveau</a:t>
+            </a:r>
+          </a:p>
+          <a:p>
+            <a:pPr lvl="2"/>
+            <a:r>
+              <a:rPr lang="fr-FR"/>
+              <a:t>Troisième niveau</a:t>
+            </a:r>
+          </a:p>
+          <a:p>
+            <a:pPr lvl="3"/>
+            <a:r>
+              <a:rPr lang="fr-FR"/>
+              <a:t>Quatrième niveau</a:t>
+            </a:r>
+          </a:p>
+          <a:p>
+            <a:pPr lvl="4"/>
+            <a:r>
+              <a:rPr lang="fr-FR"/>
+              <a:t>Cinquième niveau</a:t>
+            </a:r>
+            <a:endParaRPr lang="fr-CA"/>
+          </a:p>
+        </p:txBody>
+      </p:sp>
+      <p:sp>
+        <p:nvSpPr>
+          <p:cNvPr id="6" name="Espace réservé du pied de page 5"/>
+          <p:cNvSpPr>
+            <a:spLocks noGrp="1"/>
+          </p:cNvSpPr>
+          <p:nvPr>
+            <p:ph type="ftr" sz="quarter" idx="4"/>
+          </p:nvPr>
+        </p:nvSpPr>
+        <p:spPr>
+          <a:xfrm>
+            <a:off x="0" y="8685213"/>
+            <a:ext cx="2971800" cy="458787"/>
+          </a:xfrm>
+          <a:prstGeom prst="rect">
+            <a:avLst/>
+          </a:prstGeom>
+        </p:spPr>
+        <p:txBody>
+          <a:bodyPr vert="horz" lIns="91440" tIns="45720" rIns="91440" bIns="45720" rtlCol="0" anchor="b"/>
+          <a:lstStyle>
+            <a:lvl1pPr algn="l">
+              <a:defRPr sz="1200"/>
+            </a:lvl1pPr>
+          </a:lstStyle>
+          <a:p>
+            <a:endParaRPr lang="fr-CA"/>
+          </a:p>
+        </p:txBody>
+      </p:sp>
+      <p:sp>
+        <p:nvSpPr>
+          <p:cNvPr id="7" name="Espace réservé du numéro de diapositive 6"/>
+          <p:cNvSpPr>
+            <a:spLocks noGrp="1"/>
+          </p:cNvSpPr>
+          <p:nvPr>
+            <p:ph type="sldNum" sz="quarter" idx="5"/>
+          </p:nvPr>
+        </p:nvSpPr>
+        <p:spPr>
+          <a:xfrm>
+            <a:off x="3884613" y="8685213"/>
+            <a:ext cx="2971800" cy="458787"/>
+          </a:xfrm>
+          <a:prstGeom prst="rect">
+            <a:avLst/>
+          </a:prstGeom>
+        </p:spPr>
+        <p:txBody>
+          <a:bodyPr vert="horz" lIns="91440" tIns="45720" rIns="91440" bIns="45720" rtlCol="0" anchor="b"/>
+          <a:lstStyle>
+            <a:lvl1pPr algn="r">
+              <a:defRPr sz="1200"/>
+            </a:lvl1pPr>
+          </a:lstStyle>
+          <a:p>
+            <a:fld id="{58AF5C23-74FF-4D96-A9A6-9BDE17B3CC18}" type="slidenum">
+              <a:rPr lang="fr-CA" smtClean="0"/>
+              <a:t>‹N°›</a:t>
+            </a:fld>
+            <a:endParaRPr lang="fr-CA"/>
+          </a:p>
+        </p:txBody>
+      </p:sp>
+    </p:spTree>
+    <p:extLst>
+      <p:ext uri="{BB962C8B-B14F-4D97-AF65-F5344CB8AC3E}">
+        <p14:creationId xmlns:p14="http://schemas.microsoft.com/office/powerpoint/2010/main" val="2885286247"/>
+      </p:ext>
+    </p:extLst>
+  </p:cSld>
+  <p:clrMap bg1="lt1" tx1="dk1" bg2="lt2" tx2="dk2" accent1="accent1" accent2="accent2" accent3="accent3" accent4="accent4" accent5="accent5" accent6="accent6" hlink="hlink" folHlink="folHlink"/>
+  <p:notesStyle>
+    <a:lvl1pPr marL="0" algn="l" defTabSz="914400" rtl="0" eaLnBrk="1" latinLnBrk="0" hangingPunct="1">
+      <a:defRPr sz="1200" kern="1200">
+        <a:solidFill>
+          <a:schemeClr val="tx1"/>
+        </a:solidFill>
+        <a:latin typeface="+mn-lt"/>
+        <a:ea typeface="+mn-ea"/>
+        <a:cs typeface="+mn-cs"/>
+      </a:defRPr>
+    </a:lvl1pPr>
+    <a:lvl2pPr marL="457200" algn="l" defTabSz="914400" rtl="0" eaLnBrk="1" latinLnBrk="0" hangingPunct="1">
+      <a:defRPr sz="1200" kern="1200">
+        <a:solidFill>
+          <a:schemeClr val="tx1"/>
+        </a:solidFill>
+        <a:latin typeface="+mn-lt"/>
+        <a:ea typeface="+mn-ea"/>
+        <a:cs typeface="+mn-cs"/>
+      </a:defRPr>
+    </a:lvl2pPr>
+    <a:lvl3pPr marL="914400" algn="l" defTabSz="914400" rtl="0" eaLnBrk="1" latinLnBrk="0" hangingPunct="1">
+      <a:defRPr sz="1200" kern="1200">
+        <a:solidFill>
+          <a:schemeClr val="tx1"/>
+        </a:solidFill>
+        <a:latin typeface="+mn-lt"/>
+        <a:ea typeface="+mn-ea"/>
+        <a:cs typeface="+mn-cs"/>
+      </a:defRPr>
+    </a:lvl3pPr>
+    <a:lvl4pPr marL="1371600" algn="l" defTabSz="914400" rtl="0" eaLnBrk="1" latinLnBrk="0" hangingPunct="1">
+      <a:defRPr sz="1200" kern="1200">
+        <a:solidFill>
+          <a:schemeClr val="tx1"/>
+        </a:solidFill>
+        <a:latin typeface="+mn-lt"/>
+        <a:ea typeface="+mn-ea"/>
+        <a:cs typeface="+mn-cs"/>
+      </a:defRPr>
+    </a:lvl4pPr>
+    <a:lvl5pPr marL="1828800" algn="l" defTabSz="914400" rtl="0" eaLnBrk="1" latinLnBrk="0" hangingPunct="1">
+      <a:defRPr sz="1200" kern="1200">
+        <a:solidFill>
+          <a:schemeClr val="tx1"/>
+        </a:solidFill>
+        <a:latin typeface="+mn-lt"/>
+        <a:ea typeface="+mn-ea"/>
+        <a:cs typeface="+mn-cs"/>
+      </a:defRPr>
+    </a:lvl5pPr>
+    <a:lvl6pPr marL="2286000" algn="l" defTabSz="914400" rtl="0" eaLnBrk="1" latinLnBrk="0" hangingPunct="1">
+      <a:defRPr sz="1200" kern="1200">
+        <a:solidFill>
+          <a:schemeClr val="tx1"/>
+        </a:solidFill>
+        <a:latin typeface="+mn-lt"/>
+        <a:ea typeface="+mn-ea"/>
+        <a:cs typeface="+mn-cs"/>
+      </a:defRPr>
+    </a:lvl6pPr>
+    <a:lvl7pPr marL="2743200" algn="l" defTabSz="914400" rtl="0" eaLnBrk="1" latinLnBrk="0" hangingPunct="1">
+      <a:defRPr sz="1200" kern="1200">
+        <a:solidFill>
+          <a:schemeClr val="tx1"/>
+        </a:solidFill>
+        <a:latin typeface="+mn-lt"/>
+        <a:ea typeface="+mn-ea"/>
+        <a:cs typeface="+mn-cs"/>
+      </a:defRPr>
+    </a:lvl7pPr>
+    <a:lvl8pPr marL="3200400" algn="l" defTabSz="914400" rtl="0" eaLnBrk="1" latinLnBrk="0" hangingPunct="1">
+      <a:defRPr sz="1200" kern="1200">
+        <a:solidFill>
+          <a:schemeClr val="tx1"/>
+        </a:solidFill>
+        <a:latin typeface="+mn-lt"/>
+        <a:ea typeface="+mn-ea"/>
+        <a:cs typeface="+mn-cs"/>
+      </a:defRPr>
+    </a:lvl8pPr>
+    <a:lvl9pPr marL="3657600" algn="l" defTabSz="914400" rtl="0" eaLnBrk="1" latinLnBrk="0" hangingPunct="1">
+      <a:defRPr sz="1200" kern="1200">
+        <a:solidFill>
+          <a:schemeClr val="tx1"/>
+        </a:solidFill>
+        <a:latin typeface="+mn-lt"/>
+        <a:ea typeface="+mn-ea"/>
+        <a:cs typeface="+mn-cs"/>
+      </a:defRPr>
+    </a:lvl9pPr>
+  </p:notesStyle>
+</p:notesMaster>
+</file>
+
+<file path=ppt/notesSlides/notesSlide1.xml><?xml version="1.0" encoding="utf-8"?>
+<p:notes xmlns:a="http://schemas.openxmlformats.org/drawingml/2006/main" xmlns:r="http://schemas.openxmlformats.org/officeDocument/2006/relationships" xmlns:p="http://schemas.openxmlformats.org/presentationml/2006/main">
+  <p:cSld>
+    <p:spTree>
+      <p:nvGrpSpPr>
+        <p:cNvPr id="1" name="">
+          <a:extLst>
+            <a:ext uri="{FF2B5EF4-FFF2-40B4-BE49-F238E27FC236}">
+              <a16:creationId xmlns:a16="http://schemas.microsoft.com/office/drawing/2014/main" id="{C0F01042-3A65-6AAB-C832-9E22AD85BCE6}"/>
+            </a:ext>
+          </a:extLst>
+        </p:cNvPr>
+        <p:cNvGrpSpPr/>
+        <p:nvPr/>
+      </p:nvGrpSpPr>
+      <p:grpSpPr>
+        <a:xfrm>
+          <a:off x="0" y="0"/>
+          <a:ext cx="0" cy="0"/>
+          <a:chOff x="0" y="0"/>
+          <a:chExt cx="0" cy="0"/>
+        </a:xfrm>
+      </p:grpSpPr>
+      <p:sp>
+        <p:nvSpPr>
+          <p:cNvPr id="2" name="Espace réservé de l'image des diapositives 1">
+            <a:extLst>
+              <a:ext uri="{FF2B5EF4-FFF2-40B4-BE49-F238E27FC236}">
+                <a16:creationId xmlns:a16="http://schemas.microsoft.com/office/drawing/2014/main" id="{7220F407-EFC1-AC8B-B8B9-9D4062A441FF}"/>
+              </a:ext>
+            </a:extLst>
+          </p:cNvPr>
+          <p:cNvSpPr>
+            <a:spLocks noGrp="1" noRot="1" noChangeAspect="1"/>
+          </p:cNvSpPr>
+          <p:nvPr>
+            <p:ph type="sldImg"/>
+          </p:nvPr>
+        </p:nvSpPr>
+        <p:spPr/>
+      </p:sp>
+      <p:sp>
+        <p:nvSpPr>
+          <p:cNvPr id="3" name="Espace réservé des notes 2">
+            <a:extLst>
+              <a:ext uri="{FF2B5EF4-FFF2-40B4-BE49-F238E27FC236}">
+                <a16:creationId xmlns:a16="http://schemas.microsoft.com/office/drawing/2014/main" id="{C940B51C-83C9-A9D5-0AFB-573FC5125748}"/>
+              </a:ext>
+            </a:extLst>
+          </p:cNvPr>
+          <p:cNvSpPr>
+            <a:spLocks noGrp="1"/>
+          </p:cNvSpPr>
+          <p:nvPr>
+            <p:ph type="body" idx="1"/>
+          </p:nvPr>
+        </p:nvSpPr>
+        <p:spPr/>
+        <p:txBody>
+          <a:bodyPr/>
+          <a:lstStyle/>
+          <a:p>
+            <a:endParaRPr lang="fr-CA" dirty="0"/>
+          </a:p>
+        </p:txBody>
+      </p:sp>
+      <p:sp>
+        <p:nvSpPr>
+          <p:cNvPr id="4" name="Espace réservé du numéro de diapositive 3">
+            <a:extLst>
+              <a:ext uri="{FF2B5EF4-FFF2-40B4-BE49-F238E27FC236}">
+                <a16:creationId xmlns:a16="http://schemas.microsoft.com/office/drawing/2014/main" id="{4B77001C-EDF0-EB07-D178-9D48F2456E42}"/>
+              </a:ext>
+            </a:extLst>
+          </p:cNvPr>
+          <p:cNvSpPr>
+            <a:spLocks noGrp="1"/>
+          </p:cNvSpPr>
+          <p:nvPr>
+            <p:ph type="sldNum" sz="quarter" idx="5"/>
+          </p:nvPr>
+        </p:nvSpPr>
+        <p:spPr/>
+        <p:txBody>
+          <a:bodyPr/>
+          <a:lstStyle/>
+          <a:p>
+            <a:fld id="{58AF5C23-74FF-4D96-A9A6-9BDE17B3CC18}" type="slidenum">
+              <a:rPr lang="fr-CA" smtClean="0"/>
+              <a:t>2</a:t>
+            </a:fld>
+            <a:endParaRPr lang="fr-CA"/>
+          </a:p>
+        </p:txBody>
+      </p:sp>
+    </p:spTree>
+    <p:extLst>
+      <p:ext uri="{BB962C8B-B14F-4D97-AF65-F5344CB8AC3E}">
+        <p14:creationId xmlns:p14="http://schemas.microsoft.com/office/powerpoint/2010/main" val="1480299403"/>
+      </p:ext>
+    </p:extLst>
+  </p:cSld>
+  <p:clrMapOvr>
+    <a:masterClrMapping/>
+  </p:clrMapOvr>
+</p:notes>
+</file>
+
+<file path=ppt/notesSlides/notesSlide2.xml><?xml version="1.0" encoding="utf-8"?>
+<p:notes xmlns:a="http://schemas.openxmlformats.org/drawingml/2006/main" xmlns:r="http://schemas.openxmlformats.org/officeDocument/2006/relationships" xmlns:p="http://schemas.openxmlformats.org/presentationml/2006/main">
+  <p:cSld>
+    <p:spTree>
+      <p:nvGrpSpPr>
+        <p:cNvPr id="1" name="">
+          <a:extLst>
+            <a:ext uri="{FF2B5EF4-FFF2-40B4-BE49-F238E27FC236}">
+              <a16:creationId xmlns:a16="http://schemas.microsoft.com/office/drawing/2014/main" id="{29F5E44B-A274-98F8-21C6-67FE3609EDCF}"/>
+            </a:ext>
+          </a:extLst>
+        </p:cNvPr>
+        <p:cNvGrpSpPr/>
+        <p:nvPr/>
+      </p:nvGrpSpPr>
+      <p:grpSpPr>
+        <a:xfrm>
+          <a:off x="0" y="0"/>
+          <a:ext cx="0" cy="0"/>
+          <a:chOff x="0" y="0"/>
+          <a:chExt cx="0" cy="0"/>
+        </a:xfrm>
+      </p:grpSpPr>
+      <p:sp>
+        <p:nvSpPr>
+          <p:cNvPr id="2" name="Espace réservé de l'image des diapositives 1">
+            <a:extLst>
+              <a:ext uri="{FF2B5EF4-FFF2-40B4-BE49-F238E27FC236}">
+                <a16:creationId xmlns:a16="http://schemas.microsoft.com/office/drawing/2014/main" id="{C4DD34B0-714A-1D95-7B84-EC1B0763A2C2}"/>
+              </a:ext>
+            </a:extLst>
+          </p:cNvPr>
+          <p:cNvSpPr>
+            <a:spLocks noGrp="1" noRot="1" noChangeAspect="1"/>
+          </p:cNvSpPr>
+          <p:nvPr>
+            <p:ph type="sldImg"/>
+          </p:nvPr>
+        </p:nvSpPr>
+        <p:spPr/>
+      </p:sp>
+      <p:sp>
+        <p:nvSpPr>
+          <p:cNvPr id="3" name="Espace réservé des notes 2">
+            <a:extLst>
+              <a:ext uri="{FF2B5EF4-FFF2-40B4-BE49-F238E27FC236}">
+                <a16:creationId xmlns:a16="http://schemas.microsoft.com/office/drawing/2014/main" id="{83F703F4-BDE8-42C0-877C-ACB072D95F07}"/>
+              </a:ext>
+            </a:extLst>
+          </p:cNvPr>
+          <p:cNvSpPr>
+            <a:spLocks noGrp="1"/>
+          </p:cNvSpPr>
+          <p:nvPr>
+            <p:ph type="body" idx="1"/>
+          </p:nvPr>
+        </p:nvSpPr>
+        <p:spPr/>
+        <p:txBody>
+          <a:bodyPr/>
+          <a:lstStyle/>
+          <a:p>
+            <a:endParaRPr lang="fr-CA" dirty="0"/>
+          </a:p>
+        </p:txBody>
+      </p:sp>
+      <p:sp>
+        <p:nvSpPr>
+          <p:cNvPr id="4" name="Espace réservé du numéro de diapositive 3">
+            <a:extLst>
+              <a:ext uri="{FF2B5EF4-FFF2-40B4-BE49-F238E27FC236}">
+                <a16:creationId xmlns:a16="http://schemas.microsoft.com/office/drawing/2014/main" id="{B1B551B6-0FC0-41C8-8BDE-91A2E886B72E}"/>
+              </a:ext>
+            </a:extLst>
+          </p:cNvPr>
+          <p:cNvSpPr>
+            <a:spLocks noGrp="1"/>
+          </p:cNvSpPr>
+          <p:nvPr>
+            <p:ph type="sldNum" sz="quarter" idx="5"/>
+          </p:nvPr>
+        </p:nvSpPr>
+        <p:spPr/>
+        <p:txBody>
+          <a:bodyPr/>
+          <a:lstStyle/>
+          <a:p>
+            <a:fld id="{58AF5C23-74FF-4D96-A9A6-9BDE17B3CC18}" type="slidenum">
+              <a:rPr lang="fr-CA" smtClean="0"/>
+              <a:t>3</a:t>
+            </a:fld>
+            <a:endParaRPr lang="fr-CA"/>
+          </a:p>
+        </p:txBody>
+      </p:sp>
+    </p:spTree>
+    <p:extLst>
+      <p:ext uri="{BB962C8B-B14F-4D97-AF65-F5344CB8AC3E}">
+        <p14:creationId xmlns:p14="http://schemas.microsoft.com/office/powerpoint/2010/main" val="904536691"/>
+      </p:ext>
+    </p:extLst>
+  </p:cSld>
+  <p:clrMapOvr>
+    <a:masterClrMapping/>
+  </p:clrMapOvr>
+</p:notes>
 </file>
 
 <file path=ppt/slideLayouts/slideLayout1.xml><?xml version="1.0" encoding="utf-8"?>
@@ -3665,7 +4235,7 @@
         <p:cNvPr id="1" name="">
           <a:extLst>
             <a:ext uri="{FF2B5EF4-FFF2-40B4-BE49-F238E27FC236}">
-              <a16:creationId xmlns:a16="http://schemas.microsoft.com/office/drawing/2014/main" id="{28E3726A-A57B-BE70-265A-763E44F69E25}"/>
+              <a16:creationId xmlns:a16="http://schemas.microsoft.com/office/drawing/2014/main" id="{889059A4-DA9A-6158-F6D7-CA05C0240890}"/>
             </a:ext>
           </a:extLst>
         </p:cNvPr>
@@ -3685,7 +4255,7 @@
           <p:cNvPr id="8" name="Image 7">
             <a:extLst>
               <a:ext uri="{FF2B5EF4-FFF2-40B4-BE49-F238E27FC236}">
-                <a16:creationId xmlns:a16="http://schemas.microsoft.com/office/drawing/2014/main" id="{2FA0E937-D6BC-5EFD-F0C7-E51B4A3A65E8}"/>
+                <a16:creationId xmlns:a16="http://schemas.microsoft.com/office/drawing/2014/main" id="{19CE3EB3-EBB2-AA75-BFF3-9E872276646C}"/>
               </a:ext>
             </a:extLst>
           </p:cNvPr>
@@ -3699,7 +4269,7 @@
           </p:nvPr>
         </p:nvPicPr>
         <p:blipFill>
-          <a:blip r:embed="rId5"/>
+          <a:blip r:embed="rId6"/>
           <a:srcRect l="4895" t="76969" r="85984"/>
           <a:stretch>
             <a:fillRect/>
@@ -3720,7 +4290,7 @@
           <p:cNvPr id="18" name="Rectangle 17">
             <a:extLst>
               <a:ext uri="{FF2B5EF4-FFF2-40B4-BE49-F238E27FC236}">
-                <a16:creationId xmlns:a16="http://schemas.microsoft.com/office/drawing/2014/main" id="{D11FB429-0F10-44B5-FABA-1C4ED9F97932}"/>
+                <a16:creationId xmlns:a16="http://schemas.microsoft.com/office/drawing/2014/main" id="{01A7F9D4-2AC8-53C5-2794-40E2B353ECFC}"/>
               </a:ext>
             </a:extLst>
           </p:cNvPr>
@@ -3776,7 +4346,7 @@
           <p:cNvPr id="6" name="Image 5">
             <a:extLst>
               <a:ext uri="{FF2B5EF4-FFF2-40B4-BE49-F238E27FC236}">
-                <a16:creationId xmlns:a16="http://schemas.microsoft.com/office/drawing/2014/main" id="{57EDE7A2-7374-50AA-CD0F-59F6102B960C}"/>
+                <a16:creationId xmlns:a16="http://schemas.microsoft.com/office/drawing/2014/main" id="{89FAEF05-9DEE-7326-4239-B9E5198FE0A6}"/>
               </a:ext>
             </a:extLst>
           </p:cNvPr>
@@ -3786,7 +4356,7 @@
           <p:nvPr/>
         </p:nvPicPr>
         <p:blipFill>
-          <a:blip r:embed="rId6">
+          <a:blip r:embed="rId7">
             <a:duotone>
               <a:schemeClr val="bg2">
                 <a:shade val="45000"/>
@@ -3797,7 +4367,7 @@
             <a:extLst>
               <a:ext uri="{BEBA8EAE-BF5A-486C-A8C5-ECC9F3942E4B}">
                 <a14:imgProps xmlns:a14="http://schemas.microsoft.com/office/drawing/2010/main">
-                  <a14:imgLayer r:embed="rId7">
+                  <a14:imgLayer r:embed="rId8">
                     <a14:imgEffect>
                       <a14:colorTemperature colorTemp="4700"/>
                     </a14:imgEffect>
@@ -3829,7 +4399,7 @@
           <p:cNvPr id="5" name="Image 4">
             <a:extLst>
               <a:ext uri="{FF2B5EF4-FFF2-40B4-BE49-F238E27FC236}">
-                <a16:creationId xmlns:a16="http://schemas.microsoft.com/office/drawing/2014/main" id="{B30F35BC-DAB6-EE74-D215-EE433191D3C6}"/>
+                <a16:creationId xmlns:a16="http://schemas.microsoft.com/office/drawing/2014/main" id="{F7B12E81-FFFF-8DF4-3402-28FF2A34D612}"/>
               </a:ext>
             </a:extLst>
           </p:cNvPr>
@@ -3839,7 +4409,7 @@
           <p:nvPr/>
         </p:nvPicPr>
         <p:blipFill>
-          <a:blip r:embed="rId8"/>
+          <a:blip r:embed="rId9"/>
           <a:stretch>
             <a:fillRect/>
           </a:stretch>
@@ -3854,33 +4424,206 @@
           </a:prstGeom>
         </p:spPr>
       </p:pic>
-      <p:sp>
-        <p:nvSpPr>
-          <p:cNvPr id="2" name="Rectangle 1">
-            <a:extLst>
-              <a:ext uri="{FF2B5EF4-FFF2-40B4-BE49-F238E27FC236}">
-                <a16:creationId xmlns:a16="http://schemas.microsoft.com/office/drawing/2014/main" id="{F48EB47C-3A23-DC00-B21C-7DA93E8B7B17}"/>
+      <p:pic>
+        <p:nvPicPr>
+          <p:cNvPr id="3" name="Image 2">
+            <a:extLst>
+              <a:ext uri="{FF2B5EF4-FFF2-40B4-BE49-F238E27FC236}">
+                <a16:creationId xmlns:a16="http://schemas.microsoft.com/office/drawing/2014/main" id="{36847BAC-FA89-6ECB-3429-40B71540BE8F}"/>
+              </a:ext>
+            </a:extLst>
+          </p:cNvPr>
+          <p:cNvPicPr>
+            <a:picLocks noChangeAspect="1"/>
+          </p:cNvPicPr>
+          <p:nvPr/>
+        </p:nvPicPr>
+        <p:blipFill>
+          <a:blip r:embed="rId7">
+            <a:duotone>
+              <a:schemeClr val="bg2">
+                <a:shade val="45000"/>
+                <a:satMod val="135000"/>
+              </a:schemeClr>
+              <a:prstClr val="white"/>
+            </a:duotone>
+            <a:extLst>
+              <a:ext uri="{BEBA8EAE-BF5A-486C-A8C5-ECC9F3942E4B}">
+                <a14:imgProps xmlns:a14="http://schemas.microsoft.com/office/drawing/2010/main">
+                  <a14:imgLayer r:embed="rId8">
+                    <a14:imgEffect>
+                      <a14:colorTemperature colorTemp="4700"/>
+                    </a14:imgEffect>
+                    <a14:imgEffect>
+                      <a14:saturation sat="0"/>
+                    </a14:imgEffect>
+                  </a14:imgLayer>
+                </a14:imgProps>
+              </a:ext>
+            </a:extLst>
+          </a:blip>
+          <a:srcRect l="1287" t="17358" r="73201" b="14299"/>
+          <a:stretch>
+            <a:fillRect/>
+          </a:stretch>
+        </p:blipFill>
+        <p:spPr>
+          <a:xfrm>
+            <a:off x="0" y="6098266"/>
+            <a:ext cx="758627" cy="759734"/>
+          </a:xfrm>
+          <a:prstGeom prst="rect">
+            <a:avLst/>
+          </a:prstGeom>
+        </p:spPr>
+      </p:pic>
+      <p:pic>
+        <p:nvPicPr>
+          <p:cNvPr id="7" name="Image 6">
+            <a:extLst>
+              <a:ext uri="{FF2B5EF4-FFF2-40B4-BE49-F238E27FC236}">
+                <a16:creationId xmlns:a16="http://schemas.microsoft.com/office/drawing/2014/main" id="{8648ED29-632E-1B99-FE35-2F08BDFFE572}"/>
+              </a:ext>
+            </a:extLst>
+          </p:cNvPr>
+          <p:cNvPicPr>
+            <a:picLocks noChangeAspect="1"/>
+          </p:cNvPicPr>
+          <p:nvPr/>
+        </p:nvPicPr>
+        <p:blipFill>
+          <a:blip r:embed="rId10"/>
+          <a:stretch>
+            <a:fillRect/>
+          </a:stretch>
+        </p:blipFill>
+        <p:spPr>
+          <a:xfrm>
+            <a:off x="678258" y="1929609"/>
+            <a:ext cx="10894476" cy="942792"/>
+          </a:xfrm>
+          <a:prstGeom prst="rect">
+            <a:avLst/>
+          </a:prstGeom>
+        </p:spPr>
+      </p:pic>
+      <p:pic>
+        <p:nvPicPr>
+          <p:cNvPr id="10" name="Image 9">
+            <a:extLst>
+              <a:ext uri="{FF2B5EF4-FFF2-40B4-BE49-F238E27FC236}">
+                <a16:creationId xmlns:a16="http://schemas.microsoft.com/office/drawing/2014/main" id="{18229DEA-3D2D-4ADA-CFE6-B30BDEAE9B1F}"/>
+              </a:ext>
+            </a:extLst>
+          </p:cNvPr>
+          <p:cNvPicPr>
+            <a:picLocks noChangeAspect="1"/>
+          </p:cNvPicPr>
+          <p:nvPr/>
+        </p:nvPicPr>
+        <p:blipFill>
+          <a:blip r:embed="rId11"/>
+          <a:stretch>
+            <a:fillRect/>
+          </a:stretch>
+        </p:blipFill>
+        <p:spPr>
+          <a:xfrm>
+            <a:off x="678258" y="2934653"/>
+            <a:ext cx="1323577" cy="3348258"/>
+          </a:xfrm>
+          <a:prstGeom prst="rect">
+            <a:avLst/>
+          </a:prstGeom>
+        </p:spPr>
+      </p:pic>
+      <p:pic>
+        <p:nvPicPr>
+          <p:cNvPr id="13" name="Image 12">
+            <a:extLst>
+              <a:ext uri="{FF2B5EF4-FFF2-40B4-BE49-F238E27FC236}">
+                <a16:creationId xmlns:a16="http://schemas.microsoft.com/office/drawing/2014/main" id="{C8443343-9B91-1894-E3FC-267C9DFAE362}"/>
+              </a:ext>
+            </a:extLst>
+          </p:cNvPr>
+          <p:cNvPicPr>
+            <a:picLocks noChangeAspect="1"/>
+          </p:cNvPicPr>
+          <p:nvPr/>
+        </p:nvPicPr>
+        <p:blipFill>
+          <a:blip r:embed="rId12"/>
+          <a:srcRect b="57456"/>
+          <a:stretch>
+            <a:fillRect/>
+          </a:stretch>
+        </p:blipFill>
+        <p:spPr>
+          <a:xfrm>
+            <a:off x="1990367" y="2934653"/>
+            <a:ext cx="6122235" cy="3348258"/>
+          </a:xfrm>
+          <a:prstGeom prst="rect">
+            <a:avLst/>
+          </a:prstGeom>
+        </p:spPr>
+      </p:pic>
+      <p:pic>
+        <p:nvPicPr>
+          <p:cNvPr id="12" name="Image 11">
+            <a:extLst>
+              <a:ext uri="{FF2B5EF4-FFF2-40B4-BE49-F238E27FC236}">
+                <a16:creationId xmlns:a16="http://schemas.microsoft.com/office/drawing/2014/main" id="{49B9C759-C1BD-75E8-6615-E5BBF95FFAF0}"/>
+              </a:ext>
+            </a:extLst>
+          </p:cNvPr>
+          <p:cNvPicPr>
+            <a:picLocks noChangeAspect="1"/>
+          </p:cNvPicPr>
+          <p:nvPr/>
+        </p:nvPicPr>
+        <p:blipFill>
+          <a:blip r:embed="rId12"/>
+          <a:srcRect t="41579"/>
+          <a:stretch>
+            <a:fillRect/>
+          </a:stretch>
+        </p:blipFill>
+        <p:spPr>
+          <a:xfrm>
+            <a:off x="6983111" y="2901986"/>
+            <a:ext cx="4511222" cy="3387933"/>
+          </a:xfrm>
+          <a:prstGeom prst="rect">
+            <a:avLst/>
+          </a:prstGeom>
+        </p:spPr>
+      </p:pic>
+      <p:sp>
+        <p:nvSpPr>
+          <p:cNvPr id="14" name="Rectangle 13">
+            <a:extLst>
+              <a:ext uri="{FF2B5EF4-FFF2-40B4-BE49-F238E27FC236}">
+                <a16:creationId xmlns:a16="http://schemas.microsoft.com/office/drawing/2014/main" id="{14D62A51-AE84-28E6-897E-C1EDC743760B}"/>
               </a:ext>
             </a:extLst>
           </p:cNvPr>
           <p:cNvSpPr/>
-          <p:nvPr>
-            <p:custDataLst>
-              <p:tags r:id="rId3"/>
-            </p:custDataLst>
-          </p:nvPr>
+          <p:nvPr/>
         </p:nvSpPr>
         <p:spPr>
           <a:xfrm>
-            <a:off x="742334" y="986817"/>
-            <a:ext cx="10707329" cy="942792"/>
+            <a:off x="2795985" y="3874238"/>
+            <a:ext cx="1003855" cy="2062480"/>
           </a:xfrm>
           <a:prstGeom prst="rect">
             <a:avLst/>
           </a:prstGeom>
           <a:noFill/>
           <a:ln>
-            <a:noFill/>
+            <a:solidFill>
+              <a:srgbClr val="FFC000"/>
+            </a:solidFill>
           </a:ln>
         </p:spPr>
         <p:style>
@@ -3904,21 +4647,120 @@
           <a:lstStyle/>
           <a:p>
             <a:pPr algn="ctr"/>
-            <a:r>
-              <a:rPr lang="fr-CA" sz="3000" dirty="0">
-                <a:latin typeface="Pixel Operator 8" panose="02000503000000000000" pitchFamily="2" charset="0"/>
-              </a:rPr>
-              <a:t>Difficulté rencontrée par Alexis :</a:t>
-            </a:r>
+            <a:endParaRPr lang="fr-CA"/>
+          </a:p>
+        </p:txBody>
+      </p:sp>
+      <p:sp>
+        <p:nvSpPr>
+          <p:cNvPr id="15" name="Rectangle 14">
+            <a:extLst>
+              <a:ext uri="{FF2B5EF4-FFF2-40B4-BE49-F238E27FC236}">
+                <a16:creationId xmlns:a16="http://schemas.microsoft.com/office/drawing/2014/main" id="{2F0A2E73-1091-ECDF-AB20-0D69AA6DFE96}"/>
+              </a:ext>
+            </a:extLst>
+          </p:cNvPr>
+          <p:cNvSpPr/>
+          <p:nvPr/>
+        </p:nvSpPr>
+        <p:spPr>
+          <a:xfrm>
+            <a:off x="7701581" y="3370302"/>
+            <a:ext cx="1723130" cy="163744"/>
+          </a:xfrm>
+          <a:prstGeom prst="rect">
+            <a:avLst/>
+          </a:prstGeom>
+          <a:noFill/>
+          <a:ln>
+            <a:solidFill>
+              <a:srgbClr val="FFC000"/>
+            </a:solidFill>
+          </a:ln>
+        </p:spPr>
+        <p:style>
+          <a:lnRef idx="2">
+            <a:schemeClr val="accent1">
+              <a:shade val="15000"/>
+            </a:schemeClr>
+          </a:lnRef>
+          <a:fillRef idx="1">
+            <a:schemeClr val="accent1"/>
+          </a:fillRef>
+          <a:effectRef idx="0">
+            <a:schemeClr val="accent1"/>
+          </a:effectRef>
+          <a:fontRef idx="minor">
+            <a:schemeClr val="lt1"/>
+          </a:fontRef>
+        </p:style>
+        <p:txBody>
+          <a:bodyPr rtlCol="0" anchor="ctr"/>
+          <a:lstStyle/>
+          <a:p>
+            <a:pPr algn="ctr"/>
+            <a:endParaRPr lang="fr-CA"/>
+          </a:p>
+        </p:txBody>
+      </p:sp>
+      <p:sp>
+        <p:nvSpPr>
+          <p:cNvPr id="16" name="Rectangle 15">
+            <a:extLst>
+              <a:ext uri="{FF2B5EF4-FFF2-40B4-BE49-F238E27FC236}">
+                <a16:creationId xmlns:a16="http://schemas.microsoft.com/office/drawing/2014/main" id="{3329828A-1695-9EAE-1245-F9E5D5D27BB8}"/>
+              </a:ext>
+            </a:extLst>
+          </p:cNvPr>
+          <p:cNvSpPr/>
+          <p:nvPr/>
+        </p:nvSpPr>
+        <p:spPr>
+          <a:xfrm>
+            <a:off x="7730523" y="3735607"/>
+            <a:ext cx="1723130" cy="163744"/>
+          </a:xfrm>
+          <a:prstGeom prst="rect">
+            <a:avLst/>
+          </a:prstGeom>
+          <a:noFill/>
+          <a:ln>
+            <a:solidFill>
+              <a:srgbClr val="FFC000"/>
+            </a:solidFill>
+          </a:ln>
+        </p:spPr>
+        <p:style>
+          <a:lnRef idx="2">
+            <a:schemeClr val="accent1">
+              <a:shade val="15000"/>
+            </a:schemeClr>
+          </a:lnRef>
+          <a:fillRef idx="1">
+            <a:schemeClr val="accent1"/>
+          </a:fillRef>
+          <a:effectRef idx="0">
+            <a:schemeClr val="accent1"/>
+          </a:effectRef>
+          <a:fontRef idx="minor">
+            <a:schemeClr val="lt1"/>
+          </a:fontRef>
+        </p:style>
+        <p:txBody>
+          <a:bodyPr rtlCol="0" anchor="ctr"/>
+          <a:lstStyle/>
+          <a:p>
+            <a:pPr algn="ctr"/>
+            <a:endParaRPr lang="fr-CA"/>
           </a:p>
         </p:txBody>
       </p:sp>
       <p:pic>
         <p:nvPicPr>
-          <p:cNvPr id="3" name="Image 2">
-            <a:extLst>
-              <a:ext uri="{FF2B5EF4-FFF2-40B4-BE49-F238E27FC236}">
-                <a16:creationId xmlns:a16="http://schemas.microsoft.com/office/drawing/2014/main" id="{6F7F48A0-C81D-E3CC-A83D-C95F621638ED}"/>
+          <p:cNvPr id="19" name="Image 18">
+            <a:extLst>
+              <a:ext uri="{FF2B5EF4-FFF2-40B4-BE49-F238E27FC236}">
+                <a16:creationId xmlns:a16="http://schemas.microsoft.com/office/drawing/2014/main" id="{216C9B9C-684F-11A1-A2D2-B5CA0127EDBD}"/>
               </a:ext>
             </a:extLst>
           </p:cNvPr>
@@ -3928,48 +4770,170 @@
           <p:nvPr/>
         </p:nvPicPr>
         <p:blipFill>
-          <a:blip r:embed="rId6">
-            <a:duotone>
-              <a:schemeClr val="bg2">
-                <a:shade val="45000"/>
-                <a:satMod val="135000"/>
-              </a:schemeClr>
-              <a:prstClr val="white"/>
-            </a:duotone>
-            <a:extLst>
-              <a:ext uri="{BEBA8EAE-BF5A-486C-A8C5-ECC9F3942E4B}">
-                <a14:imgProps xmlns:a14="http://schemas.microsoft.com/office/drawing/2010/main">
-                  <a14:imgLayer r:embed="rId7">
-                    <a14:imgEffect>
-                      <a14:colorTemperature colorTemp="4700"/>
-                    </a14:imgEffect>
-                    <a14:imgEffect>
-                      <a14:saturation sat="0"/>
-                    </a14:imgEffect>
-                  </a14:imgLayer>
-                </a14:imgProps>
-              </a:ext>
-            </a:extLst>
-          </a:blip>
-          <a:srcRect l="1287" t="17358" r="73201" b="14299"/>
+          <a:blip r:embed="rId13"/>
           <a:stretch>
             <a:fillRect/>
           </a:stretch>
         </p:blipFill>
         <p:spPr>
           <a:xfrm>
-            <a:off x="0" y="6098266"/>
-            <a:ext cx="758627" cy="759734"/>
+            <a:off x="3913769" y="4398887"/>
+            <a:ext cx="3607446" cy="853833"/>
           </a:xfrm>
           <a:prstGeom prst="rect">
             <a:avLst/>
           </a:prstGeom>
         </p:spPr>
       </p:pic>
+      <p:cxnSp>
+        <p:nvCxnSpPr>
+          <p:cNvPr id="21" name="Connecteur droit avec flèche 20">
+            <a:extLst>
+              <a:ext uri="{FF2B5EF4-FFF2-40B4-BE49-F238E27FC236}">
+                <a16:creationId xmlns:a16="http://schemas.microsoft.com/office/drawing/2014/main" id="{5B270111-F29C-8403-900D-3755569109CA}"/>
+              </a:ext>
+            </a:extLst>
+          </p:cNvPr>
+          <p:cNvCxnSpPr/>
+          <p:nvPr/>
+        </p:nvCxnSpPr>
+        <p:spPr>
+          <a:xfrm>
+            <a:off x="3799840" y="4003040"/>
+            <a:ext cx="904240" cy="395847"/>
+          </a:xfrm>
+          <a:prstGeom prst="straightConnector1">
+            <a:avLst/>
+          </a:prstGeom>
+          <a:ln>
+            <a:solidFill>
+              <a:srgbClr val="FFC000"/>
+            </a:solidFill>
+            <a:tailEnd type="triangle"/>
+          </a:ln>
+        </p:spPr>
+        <p:style>
+          <a:lnRef idx="2">
+            <a:schemeClr val="accent1"/>
+          </a:lnRef>
+          <a:fillRef idx="0">
+            <a:schemeClr val="accent1"/>
+          </a:fillRef>
+          <a:effectRef idx="1">
+            <a:schemeClr val="accent1"/>
+          </a:effectRef>
+          <a:fontRef idx="minor">
+            <a:schemeClr val="tx1"/>
+          </a:fontRef>
+        </p:style>
+      </p:cxnSp>
+      <p:cxnSp>
+        <p:nvCxnSpPr>
+          <p:cNvPr id="23" name="Connecteur droit avec flèche 22">
+            <a:extLst>
+              <a:ext uri="{FF2B5EF4-FFF2-40B4-BE49-F238E27FC236}">
+                <a16:creationId xmlns:a16="http://schemas.microsoft.com/office/drawing/2014/main" id="{0F3C4BF0-45F7-D0CD-DE44-4FADD2A61112}"/>
+              </a:ext>
+            </a:extLst>
+          </p:cNvPr>
+          <p:cNvCxnSpPr>
+            <a:stCxn id="16" idx="1"/>
+          </p:cNvCxnSpPr>
+          <p:nvPr/>
+        </p:nvCxnSpPr>
+        <p:spPr>
+          <a:xfrm flipH="1">
+            <a:off x="6451600" y="3817479"/>
+            <a:ext cx="1278923" cy="581408"/>
+          </a:xfrm>
+          <a:prstGeom prst="straightConnector1">
+            <a:avLst/>
+          </a:prstGeom>
+          <a:ln>
+            <a:solidFill>
+              <a:srgbClr val="FFC000"/>
+            </a:solidFill>
+            <a:tailEnd type="triangle"/>
+          </a:ln>
+        </p:spPr>
+        <p:style>
+          <a:lnRef idx="2">
+            <a:schemeClr val="accent1"/>
+          </a:lnRef>
+          <a:fillRef idx="0">
+            <a:schemeClr val="accent1"/>
+          </a:fillRef>
+          <a:effectRef idx="1">
+            <a:schemeClr val="accent1"/>
+          </a:effectRef>
+          <a:fontRef idx="minor">
+            <a:schemeClr val="tx1"/>
+          </a:fontRef>
+        </p:style>
+      </p:cxnSp>
+      <p:sp>
+        <p:nvSpPr>
+          <p:cNvPr id="4" name="Rectangle 3">
+            <a:extLst>
+              <a:ext uri="{FF2B5EF4-FFF2-40B4-BE49-F238E27FC236}">
+                <a16:creationId xmlns:a16="http://schemas.microsoft.com/office/drawing/2014/main" id="{65893BF0-0020-B479-3D5B-C4D0F944DD18}"/>
+              </a:ext>
+            </a:extLst>
+          </p:cNvPr>
+          <p:cNvSpPr/>
+          <p:nvPr>
+            <p:custDataLst>
+              <p:tags r:id="rId3"/>
+            </p:custDataLst>
+          </p:nvPr>
+        </p:nvSpPr>
+        <p:spPr>
+          <a:xfrm>
+            <a:off x="655646" y="703384"/>
+            <a:ext cx="10880706" cy="942792"/>
+          </a:xfrm>
+          <a:prstGeom prst="rect">
+            <a:avLst/>
+          </a:prstGeom>
+          <a:noFill/>
+          <a:ln>
+            <a:noFill/>
+          </a:ln>
+        </p:spPr>
+        <p:style>
+          <a:lnRef idx="2">
+            <a:schemeClr val="accent1">
+              <a:shade val="15000"/>
+            </a:schemeClr>
+          </a:lnRef>
+          <a:fillRef idx="1">
+            <a:schemeClr val="accent1"/>
+          </a:fillRef>
+          <a:effectRef idx="0">
+            <a:schemeClr val="accent1"/>
+          </a:effectRef>
+          <a:fontRef idx="minor">
+            <a:schemeClr val="lt1"/>
+          </a:fontRef>
+        </p:style>
+        <p:txBody>
+          <a:bodyPr rtlCol="0" anchor="ctr"/>
+          <a:lstStyle/>
+          <a:p>
+            <a:pPr algn="ctr"/>
+            <a:r>
+              <a:rPr lang="fr-CA" sz="3000" dirty="0">
+                <a:latin typeface="Pixel Operator 8" panose="02000503000000000000" pitchFamily="2" charset="0"/>
+              </a:rPr>
+              <a:t>Difficultés rencontrées par Alexis :</a:t>
+            </a:r>
+          </a:p>
+        </p:txBody>
+      </p:sp>
     </p:spTree>
     <p:extLst>
       <p:ext uri="{BB962C8B-B14F-4D97-AF65-F5344CB8AC3E}">
-        <p14:creationId xmlns:p14="http://schemas.microsoft.com/office/powerpoint/2010/main" val="659218490"/>
+        <p14:creationId xmlns:p14="http://schemas.microsoft.com/office/powerpoint/2010/main" val="4043715842"/>
       </p:ext>
     </p:extLst>
   </p:cSld>
@@ -3980,6 +4944,328 @@
 </file>
 
 <file path=ppt/slides/slide3.xml><?xml version="1.0" encoding="utf-8"?>
+<p:sld xmlns:a="http://schemas.openxmlformats.org/drawingml/2006/main" xmlns:r="http://schemas.openxmlformats.org/officeDocument/2006/relationships" xmlns:p="http://schemas.openxmlformats.org/presentationml/2006/main">
+  <p:cSld>
+    <p:spTree>
+      <p:nvGrpSpPr>
+        <p:cNvPr id="1" name="">
+          <a:extLst>
+            <a:ext uri="{FF2B5EF4-FFF2-40B4-BE49-F238E27FC236}">
+              <a16:creationId xmlns:a16="http://schemas.microsoft.com/office/drawing/2014/main" id="{DFE22B24-9DA2-326D-FC7C-737548310AA9}"/>
+            </a:ext>
+          </a:extLst>
+        </p:cNvPr>
+        <p:cNvGrpSpPr/>
+        <p:nvPr/>
+      </p:nvGrpSpPr>
+      <p:grpSpPr>
+        <a:xfrm>
+          <a:off x="0" y="0"/>
+          <a:ext cx="0" cy="0"/>
+          <a:chOff x="0" y="0"/>
+          <a:chExt cx="0" cy="0"/>
+        </a:xfrm>
+      </p:grpSpPr>
+      <p:pic>
+        <p:nvPicPr>
+          <p:cNvPr id="8" name="Image 7">
+            <a:extLst>
+              <a:ext uri="{FF2B5EF4-FFF2-40B4-BE49-F238E27FC236}">
+                <a16:creationId xmlns:a16="http://schemas.microsoft.com/office/drawing/2014/main" id="{530919BA-D069-32FD-A4C4-8449C29B503B}"/>
+              </a:ext>
+            </a:extLst>
+          </p:cNvPr>
+          <p:cNvPicPr>
+            <a:picLocks noChangeAspect="1"/>
+          </p:cNvPicPr>
+          <p:nvPr>
+            <p:custDataLst>
+              <p:tags r:id="rId1"/>
+            </p:custDataLst>
+          </p:nvPr>
+        </p:nvPicPr>
+        <p:blipFill>
+          <a:blip r:embed="rId6"/>
+          <a:srcRect l="4895" t="76969" r="85984"/>
+          <a:stretch>
+            <a:fillRect/>
+          </a:stretch>
+        </p:blipFill>
+        <p:spPr>
+          <a:xfrm>
+            <a:off x="0" y="0"/>
+            <a:ext cx="12192000" cy="6858000"/>
+          </a:xfrm>
+          <a:prstGeom prst="rect">
+            <a:avLst/>
+          </a:prstGeom>
+        </p:spPr>
+      </p:pic>
+      <p:sp>
+        <p:nvSpPr>
+          <p:cNvPr id="18" name="Rectangle 17">
+            <a:extLst>
+              <a:ext uri="{FF2B5EF4-FFF2-40B4-BE49-F238E27FC236}">
+                <a16:creationId xmlns:a16="http://schemas.microsoft.com/office/drawing/2014/main" id="{561A6EF9-710A-1CF5-AFD4-2CF7F4F588D5}"/>
+              </a:ext>
+            </a:extLst>
+          </p:cNvPr>
+          <p:cNvSpPr/>
+          <p:nvPr>
+            <p:custDataLst>
+              <p:tags r:id="rId2"/>
+            </p:custDataLst>
+          </p:nvPr>
+        </p:nvSpPr>
+        <p:spPr>
+          <a:xfrm>
+            <a:off x="245806" y="403123"/>
+            <a:ext cx="11759381" cy="6194321"/>
+          </a:xfrm>
+          <a:prstGeom prst="rect">
+            <a:avLst/>
+          </a:prstGeom>
+          <a:noFill/>
+          <a:ln>
+            <a:solidFill>
+              <a:schemeClr val="bg1"/>
+            </a:solidFill>
+          </a:ln>
+        </p:spPr>
+        <p:style>
+          <a:lnRef idx="2">
+            <a:schemeClr val="accent1">
+              <a:shade val="15000"/>
+            </a:schemeClr>
+          </a:lnRef>
+          <a:fillRef idx="1">
+            <a:schemeClr val="accent1"/>
+          </a:fillRef>
+          <a:effectRef idx="0">
+            <a:schemeClr val="accent1"/>
+          </a:effectRef>
+          <a:fontRef idx="minor">
+            <a:schemeClr val="lt1"/>
+          </a:fontRef>
+        </p:style>
+        <p:txBody>
+          <a:bodyPr rtlCol="0" anchor="ctr"/>
+          <a:lstStyle/>
+          <a:p>
+            <a:pPr algn="ctr"/>
+            <a:endParaRPr lang="fr-CA"/>
+          </a:p>
+        </p:txBody>
+      </p:sp>
+      <p:pic>
+        <p:nvPicPr>
+          <p:cNvPr id="6" name="Image 5">
+            <a:extLst>
+              <a:ext uri="{FF2B5EF4-FFF2-40B4-BE49-F238E27FC236}">
+                <a16:creationId xmlns:a16="http://schemas.microsoft.com/office/drawing/2014/main" id="{719FBE27-6AAC-3ACD-67F5-B4C0FB5D6256}"/>
+              </a:ext>
+            </a:extLst>
+          </p:cNvPr>
+          <p:cNvPicPr>
+            <a:picLocks noChangeAspect="1"/>
+          </p:cNvPicPr>
+          <p:nvPr/>
+        </p:nvPicPr>
+        <p:blipFill>
+          <a:blip r:embed="rId7">
+            <a:duotone>
+              <a:schemeClr val="bg2">
+                <a:shade val="45000"/>
+                <a:satMod val="135000"/>
+              </a:schemeClr>
+              <a:prstClr val="white"/>
+            </a:duotone>
+            <a:extLst>
+              <a:ext uri="{BEBA8EAE-BF5A-486C-A8C5-ECC9F3942E4B}">
+                <a14:imgProps xmlns:a14="http://schemas.microsoft.com/office/drawing/2010/main">
+                  <a14:imgLayer r:embed="rId8">
+                    <a14:imgEffect>
+                      <a14:colorTemperature colorTemp="4700"/>
+                    </a14:imgEffect>
+                    <a14:imgEffect>
+                      <a14:saturation sat="0"/>
+                    </a14:imgEffect>
+                  </a14:imgLayer>
+                </a14:imgProps>
+              </a:ext>
+            </a:extLst>
+          </a:blip>
+          <a:srcRect l="1287" t="17358" r="73201" b="14299"/>
+          <a:stretch>
+            <a:fillRect/>
+          </a:stretch>
+        </p:blipFill>
+        <p:spPr>
+          <a:xfrm rot="10800000">
+            <a:off x="11433373" y="6098266"/>
+            <a:ext cx="758627" cy="759734"/>
+          </a:xfrm>
+          <a:prstGeom prst="rect">
+            <a:avLst/>
+          </a:prstGeom>
+        </p:spPr>
+      </p:pic>
+      <p:pic>
+        <p:nvPicPr>
+          <p:cNvPr id="5" name="Image 4">
+            <a:extLst>
+              <a:ext uri="{FF2B5EF4-FFF2-40B4-BE49-F238E27FC236}">
+                <a16:creationId xmlns:a16="http://schemas.microsoft.com/office/drawing/2014/main" id="{0ACFE0E4-327D-BD27-2430-47794A9F65FE}"/>
+              </a:ext>
+            </a:extLst>
+          </p:cNvPr>
+          <p:cNvPicPr>
+            <a:picLocks noChangeAspect="1"/>
+          </p:cNvPicPr>
+          <p:nvPr/>
+        </p:nvPicPr>
+        <p:blipFill>
+          <a:blip r:embed="rId9"/>
+          <a:stretch>
+            <a:fillRect/>
+          </a:stretch>
+        </p:blipFill>
+        <p:spPr>
+          <a:xfrm>
+            <a:off x="1776083" y="120059"/>
+            <a:ext cx="8639833" cy="860963"/>
+          </a:xfrm>
+          <a:prstGeom prst="rect">
+            <a:avLst/>
+          </a:prstGeom>
+        </p:spPr>
+      </p:pic>
+      <p:pic>
+        <p:nvPicPr>
+          <p:cNvPr id="3" name="Image 2">
+            <a:extLst>
+              <a:ext uri="{FF2B5EF4-FFF2-40B4-BE49-F238E27FC236}">
+                <a16:creationId xmlns:a16="http://schemas.microsoft.com/office/drawing/2014/main" id="{F14475DE-BE3E-6818-6144-AB3FFE38BBDC}"/>
+              </a:ext>
+            </a:extLst>
+          </p:cNvPr>
+          <p:cNvPicPr>
+            <a:picLocks noChangeAspect="1"/>
+          </p:cNvPicPr>
+          <p:nvPr/>
+        </p:nvPicPr>
+        <p:blipFill>
+          <a:blip r:embed="rId7">
+            <a:duotone>
+              <a:schemeClr val="bg2">
+                <a:shade val="45000"/>
+                <a:satMod val="135000"/>
+              </a:schemeClr>
+              <a:prstClr val="white"/>
+            </a:duotone>
+            <a:extLst>
+              <a:ext uri="{BEBA8EAE-BF5A-486C-A8C5-ECC9F3942E4B}">
+                <a14:imgProps xmlns:a14="http://schemas.microsoft.com/office/drawing/2010/main">
+                  <a14:imgLayer r:embed="rId8">
+                    <a14:imgEffect>
+                      <a14:colorTemperature colorTemp="4700"/>
+                    </a14:imgEffect>
+                    <a14:imgEffect>
+                      <a14:saturation sat="0"/>
+                    </a14:imgEffect>
+                  </a14:imgLayer>
+                </a14:imgProps>
+              </a:ext>
+            </a:extLst>
+          </a:blip>
+          <a:srcRect l="1287" t="17358" r="73201" b="14299"/>
+          <a:stretch>
+            <a:fillRect/>
+          </a:stretch>
+        </p:blipFill>
+        <p:spPr>
+          <a:xfrm>
+            <a:off x="0" y="6098266"/>
+            <a:ext cx="758627" cy="759734"/>
+          </a:xfrm>
+          <a:prstGeom prst="rect">
+            <a:avLst/>
+          </a:prstGeom>
+        </p:spPr>
+      </p:pic>
+      <p:sp>
+        <p:nvSpPr>
+          <p:cNvPr id="4" name="Rectangle 3">
+            <a:extLst>
+              <a:ext uri="{FF2B5EF4-FFF2-40B4-BE49-F238E27FC236}">
+                <a16:creationId xmlns:a16="http://schemas.microsoft.com/office/drawing/2014/main" id="{AE37F1A0-94B6-8206-6859-AB1AA117C7C8}"/>
+              </a:ext>
+            </a:extLst>
+          </p:cNvPr>
+          <p:cNvSpPr/>
+          <p:nvPr>
+            <p:custDataLst>
+              <p:tags r:id="rId3"/>
+            </p:custDataLst>
+          </p:nvPr>
+        </p:nvSpPr>
+        <p:spPr>
+          <a:xfrm>
+            <a:off x="655646" y="703384"/>
+            <a:ext cx="10880706" cy="942792"/>
+          </a:xfrm>
+          <a:prstGeom prst="rect">
+            <a:avLst/>
+          </a:prstGeom>
+          <a:noFill/>
+          <a:ln>
+            <a:noFill/>
+          </a:ln>
+        </p:spPr>
+        <p:style>
+          <a:lnRef idx="2">
+            <a:schemeClr val="accent1">
+              <a:shade val="15000"/>
+            </a:schemeClr>
+          </a:lnRef>
+          <a:fillRef idx="1">
+            <a:schemeClr val="accent1"/>
+          </a:fillRef>
+          <a:effectRef idx="0">
+            <a:schemeClr val="accent1"/>
+          </a:effectRef>
+          <a:fontRef idx="minor">
+            <a:schemeClr val="lt1"/>
+          </a:fontRef>
+        </p:style>
+        <p:txBody>
+          <a:bodyPr rtlCol="0" anchor="ctr"/>
+          <a:lstStyle/>
+          <a:p>
+            <a:pPr algn="ctr"/>
+            <a:r>
+              <a:rPr lang="fr-CA" sz="3000" dirty="0">
+                <a:latin typeface="Pixel Operator 8" panose="02000503000000000000" pitchFamily="2" charset="0"/>
+              </a:rPr>
+              <a:t>Difficultés rencontrées par Alexis :</a:t>
+            </a:r>
+          </a:p>
+        </p:txBody>
+      </p:sp>
+    </p:spTree>
+    <p:extLst>
+      <p:ext uri="{BB962C8B-B14F-4D97-AF65-F5344CB8AC3E}">
+        <p14:creationId xmlns:p14="http://schemas.microsoft.com/office/powerpoint/2010/main" val="129906060"/>
+      </p:ext>
+    </p:extLst>
+  </p:cSld>
+  <p:clrMapOvr>
+    <a:masterClrMapping/>
+  </p:clrMapOvr>
+</p:sld>
+</file>
+
+<file path=ppt/slides/slide4.xml><?xml version="1.0" encoding="utf-8"?>
 <p:sld xmlns:a="http://schemas.openxmlformats.org/drawingml/2006/main" xmlns:r="http://schemas.openxmlformats.org/officeDocument/2006/relationships" xmlns:p="http://schemas.openxmlformats.org/presentationml/2006/main">
   <p:cSld>
     <p:spTree>
@@ -4123,12 +5409,65 @@
           </a:prstGeom>
         </p:spPr>
       </p:pic>
-      <p:sp>
-        <p:nvSpPr>
-          <p:cNvPr id="2" name="Rectangle 1">
-            <a:extLst>
-              <a:ext uri="{FF2B5EF4-FFF2-40B4-BE49-F238E27FC236}">
-                <a16:creationId xmlns:a16="http://schemas.microsoft.com/office/drawing/2014/main" id="{41B47DFC-502C-3F38-1E28-B1162E2A9463}"/>
+      <p:pic>
+        <p:nvPicPr>
+          <p:cNvPr id="3" name="Image 2">
+            <a:extLst>
+              <a:ext uri="{FF2B5EF4-FFF2-40B4-BE49-F238E27FC236}">
+                <a16:creationId xmlns:a16="http://schemas.microsoft.com/office/drawing/2014/main" id="{D02D078E-DA87-D5DC-C22F-5DC46374FF16}"/>
+              </a:ext>
+            </a:extLst>
+          </p:cNvPr>
+          <p:cNvPicPr>
+            <a:picLocks noChangeAspect="1"/>
+          </p:cNvPicPr>
+          <p:nvPr/>
+        </p:nvPicPr>
+        <p:blipFill>
+          <a:blip r:embed="rId7">
+            <a:duotone>
+              <a:schemeClr val="bg2">
+                <a:shade val="45000"/>
+                <a:satMod val="135000"/>
+              </a:schemeClr>
+              <a:prstClr val="white"/>
+            </a:duotone>
+            <a:extLst>
+              <a:ext uri="{BEBA8EAE-BF5A-486C-A8C5-ECC9F3942E4B}">
+                <a14:imgProps xmlns:a14="http://schemas.microsoft.com/office/drawing/2010/main">
+                  <a14:imgLayer r:embed="rId8">
+                    <a14:imgEffect>
+                      <a14:colorTemperature colorTemp="4700"/>
+                    </a14:imgEffect>
+                    <a14:imgEffect>
+                      <a14:saturation sat="0"/>
+                    </a14:imgEffect>
+                  </a14:imgLayer>
+                </a14:imgProps>
+              </a:ext>
+            </a:extLst>
+          </a:blip>
+          <a:srcRect l="1287" t="17358" r="73201" b="14299"/>
+          <a:stretch>
+            <a:fillRect/>
+          </a:stretch>
+        </p:blipFill>
+        <p:spPr>
+          <a:xfrm>
+            <a:off x="0" y="6098266"/>
+            <a:ext cx="758627" cy="759734"/>
+          </a:xfrm>
+          <a:prstGeom prst="rect">
+            <a:avLst/>
+          </a:prstGeom>
+        </p:spPr>
+      </p:pic>
+      <p:sp>
+        <p:nvSpPr>
+          <p:cNvPr id="7" name="Rectangle 6">
+            <a:extLst>
+              <a:ext uri="{FF2B5EF4-FFF2-40B4-BE49-F238E27FC236}">
+                <a16:creationId xmlns:a16="http://schemas.microsoft.com/office/drawing/2014/main" id="{1770D01E-791E-5D48-EBA3-103791B7F16A}"/>
               </a:ext>
             </a:extLst>
           </p:cNvPr>
@@ -4141,8 +5480,8 @@
         </p:nvSpPr>
         <p:spPr>
           <a:xfrm>
-            <a:off x="742334" y="986817"/>
-            <a:ext cx="10707329" cy="942792"/>
+            <a:off x="450725" y="700864"/>
+            <a:ext cx="11290548" cy="942792"/>
           </a:xfrm>
           <a:prstGeom prst="rect">
             <a:avLst/>
@@ -4177,64 +5516,11 @@
               <a:rPr lang="fr-CA" sz="3000" dirty="0">
                 <a:latin typeface="Pixel Operator 8" panose="02000503000000000000" pitchFamily="2" charset="0"/>
               </a:rPr>
-              <a:t>Difficulté rencontrée par Nicolas :</a:t>
-            </a:r>
-          </a:p>
-        </p:txBody>
-      </p:sp>
-      <p:pic>
-        <p:nvPicPr>
-          <p:cNvPr id="3" name="Image 2">
-            <a:extLst>
-              <a:ext uri="{FF2B5EF4-FFF2-40B4-BE49-F238E27FC236}">
-                <a16:creationId xmlns:a16="http://schemas.microsoft.com/office/drawing/2014/main" id="{D02D078E-DA87-D5DC-C22F-5DC46374FF16}"/>
-              </a:ext>
-            </a:extLst>
-          </p:cNvPr>
-          <p:cNvPicPr>
-            <a:picLocks noChangeAspect="1"/>
-          </p:cNvPicPr>
-          <p:nvPr/>
-        </p:nvPicPr>
-        <p:blipFill>
-          <a:blip r:embed="rId7">
-            <a:duotone>
-              <a:schemeClr val="bg2">
-                <a:shade val="45000"/>
-                <a:satMod val="135000"/>
-              </a:schemeClr>
-              <a:prstClr val="white"/>
-            </a:duotone>
-            <a:extLst>
-              <a:ext uri="{BEBA8EAE-BF5A-486C-A8C5-ECC9F3942E4B}">
-                <a14:imgProps xmlns:a14="http://schemas.microsoft.com/office/drawing/2010/main">
-                  <a14:imgLayer r:embed="rId8">
-                    <a14:imgEffect>
-                      <a14:colorTemperature colorTemp="4700"/>
-                    </a14:imgEffect>
-                    <a14:imgEffect>
-                      <a14:saturation sat="0"/>
-                    </a14:imgEffect>
-                  </a14:imgLayer>
-                </a14:imgProps>
-              </a:ext>
-            </a:extLst>
-          </a:blip>
-          <a:srcRect l="1287" t="17358" r="73201" b="14299"/>
-          <a:stretch>
-            <a:fillRect/>
-          </a:stretch>
-        </p:blipFill>
-        <p:spPr>
-          <a:xfrm>
-            <a:off x="0" y="6098266"/>
-            <a:ext cx="758627" cy="759734"/>
-          </a:xfrm>
-          <a:prstGeom prst="rect">
-            <a:avLst/>
-          </a:prstGeom>
-        </p:spPr>
-      </p:pic>
+              <a:t>Difficultés rencontrées par Nicolas :</a:t>
+            </a:r>
+          </a:p>
+        </p:txBody>
+      </p:sp>
     </p:spTree>
     <p:extLst>
       <p:ext uri="{BB962C8B-B14F-4D97-AF65-F5344CB8AC3E}">
@@ -4251,6 +5537,18 @@
 <file path=ppt/tags/tag1.xml><?xml version="1.0" encoding="utf-8"?>
 <p:tagLst xmlns:a="http://schemas.openxmlformats.org/drawingml/2006/main" xmlns:r="http://schemas.openxmlformats.org/officeDocument/2006/relationships" xmlns:p="http://schemas.openxmlformats.org/presentationml/2006/main">
   <p:tag name="NUM" val="1"/>
+</p:tagLst>
+</file>
+
+<file path=ppt/tags/tag10.xml><?xml version="1.0" encoding="utf-8"?>
+<p:tagLst xmlns:a="http://schemas.openxmlformats.org/drawingml/2006/main" xmlns:r="http://schemas.openxmlformats.org/officeDocument/2006/relationships" xmlns:p="http://schemas.openxmlformats.org/presentationml/2006/main">
+  <p:tag name="NUM" val="10"/>
+</p:tagLst>
+</file>
+
+<file path=ppt/tags/tag11.xml><?xml version="1.0" encoding="utf-8"?>
+<p:tagLst xmlns:a="http://schemas.openxmlformats.org/drawingml/2006/main" xmlns:r="http://schemas.openxmlformats.org/officeDocument/2006/relationships" xmlns:p="http://schemas.openxmlformats.org/presentationml/2006/main">
+  <p:tag name="NUM" val="2"/>
 </p:tagLst>
 </file>
 
@@ -4293,6 +5591,12 @@
 <file path=ppt/tags/tag8.xml><?xml version="1.0" encoding="utf-8"?>
 <p:tagLst xmlns:a="http://schemas.openxmlformats.org/drawingml/2006/main" xmlns:r="http://schemas.openxmlformats.org/officeDocument/2006/relationships" xmlns:p="http://schemas.openxmlformats.org/presentationml/2006/main">
   <p:tag name="NUM" val="2"/>
+</p:tagLst>
+</file>
+
+<file path=ppt/tags/tag9.xml><?xml version="1.0" encoding="utf-8"?>
+<p:tagLst xmlns:a="http://schemas.openxmlformats.org/drawingml/2006/main" xmlns:r="http://schemas.openxmlformats.org/officeDocument/2006/relationships" xmlns:p="http://schemas.openxmlformats.org/presentationml/2006/main">
+  <p:tag name="NUM" val="1"/>
 </p:tagLst>
 </file>
 
@@ -4609,4 +5913,319 @@
     </a:ext>
   </a:extLst>
 </a:theme>
+</file>
+
+<file path=ppt/theme/theme2.xml><?xml version="1.0" encoding="utf-8"?>
+<a:theme xmlns:a="http://schemas.openxmlformats.org/drawingml/2006/main" name="Thème Office">
+  <a:themeElements>
+    <a:clrScheme name="Office">
+      <a:dk1>
+        <a:sysClr val="windowText" lastClr="000000"/>
+      </a:dk1>
+      <a:lt1>
+        <a:sysClr val="window" lastClr="FFFFFF"/>
+      </a:lt1>
+      <a:dk2>
+        <a:srgbClr val="0E2841"/>
+      </a:dk2>
+      <a:lt2>
+        <a:srgbClr val="E8E8E8"/>
+      </a:lt2>
+      <a:accent1>
+        <a:srgbClr val="156082"/>
+      </a:accent1>
+      <a:accent2>
+        <a:srgbClr val="E97132"/>
+      </a:accent2>
+      <a:accent3>
+        <a:srgbClr val="196B24"/>
+      </a:accent3>
+      <a:accent4>
+        <a:srgbClr val="0F9ED5"/>
+      </a:accent4>
+      <a:accent5>
+        <a:srgbClr val="A02B93"/>
+      </a:accent5>
+      <a:accent6>
+        <a:srgbClr val="4EA72E"/>
+      </a:accent6>
+      <a:hlink>
+        <a:srgbClr val="467886"/>
+      </a:hlink>
+      <a:folHlink>
+        <a:srgbClr val="96607D"/>
+      </a:folHlink>
+    </a:clrScheme>
+    <a:fontScheme name="Office">
+      <a:majorFont>
+        <a:latin typeface="Aptos Display" panose="02110004020202020204"/>
+        <a:ea typeface=""/>
+        <a:cs typeface=""/>
+        <a:font script="Jpan" typeface="游ゴシック Light"/>
+        <a:font script="Hang" typeface="맑은 고딕"/>
+        <a:font script="Hans" typeface="等线 Light"/>
+        <a:font script="Hant" typeface="新細明體"/>
+        <a:font script="Arab" typeface="Times New Roman"/>
+        <a:font script="Hebr" typeface="Times New Roman"/>
+        <a:font script="Thai" typeface="Angsana New"/>
+        <a:font script="Ethi" typeface="Nyala"/>
+        <a:font script="Beng" typeface="Vrinda"/>
+        <a:font script="Gujr" typeface="Shruti"/>
+        <a:font script="Khmr" typeface="MoolBoran"/>
+        <a:font script="Knda" typeface="Tunga"/>
+        <a:font script="Guru" typeface="Raavi"/>
+        <a:font script="Cans" typeface="Euphemia"/>
+        <a:font script="Cher" typeface="Plantagenet Cherokee"/>
+        <a:font script="Yiii" typeface="Microsoft Yi Baiti"/>
+        <a:font script="Tibt" typeface="Microsoft Himalaya"/>
+        <a:font script="Thaa" typeface="MV Boli"/>
+        <a:font script="Deva" typeface="Mangal"/>
+        <a:font script="Telu" typeface="Gautami"/>
+        <a:font script="Taml" typeface="Latha"/>
+        <a:font script="Syrc" typeface="Estrangelo Edessa"/>
+        <a:font script="Orya" typeface="Kalinga"/>
+        <a:font script="Mlym" typeface="Kartika"/>
+        <a:font script="Laoo" typeface="DokChampa"/>
+        <a:font script="Sinh" typeface="Iskoola Pota"/>
+        <a:font script="Mong" typeface="Mongolian Baiti"/>
+        <a:font script="Viet" typeface="Times New Roman"/>
+        <a:font script="Uigh" typeface="Microsoft Uighur"/>
+        <a:font script="Geor" typeface="Sylfaen"/>
+        <a:font script="Armn" typeface="Arial"/>
+        <a:font script="Bugi" typeface="Leelawadee UI"/>
+        <a:font script="Bopo" typeface="Microsoft JhengHei"/>
+        <a:font script="Java" typeface="Javanese Text"/>
+        <a:font script="Lisu" typeface="Segoe UI"/>
+        <a:font script="Mymr" typeface="Myanmar Text"/>
+        <a:font script="Nkoo" typeface="Ebrima"/>
+        <a:font script="Olck" typeface="Nirmala UI"/>
+        <a:font script="Osma" typeface="Ebrima"/>
+        <a:font script="Phag" typeface="Phagspa"/>
+        <a:font script="Syrn" typeface="Estrangelo Edessa"/>
+        <a:font script="Syrj" typeface="Estrangelo Edessa"/>
+        <a:font script="Syre" typeface="Estrangelo Edessa"/>
+        <a:font script="Sora" typeface="Nirmala UI"/>
+        <a:font script="Tale" typeface="Microsoft Tai Le"/>
+        <a:font script="Talu" typeface="Microsoft New Tai Lue"/>
+        <a:font script="Tfng" typeface="Ebrima"/>
+      </a:majorFont>
+      <a:minorFont>
+        <a:latin typeface="Aptos" panose="02110004020202020204"/>
+        <a:ea typeface=""/>
+        <a:cs typeface=""/>
+        <a:font script="Jpan" typeface="游ゴシック"/>
+        <a:font script="Hang" typeface="맑은 고딕"/>
+        <a:font script="Hans" typeface="等线"/>
+        <a:font script="Hant" typeface="新細明體"/>
+        <a:font script="Arab" typeface="Arial"/>
+        <a:font script="Hebr" typeface="Arial"/>
+        <a:font script="Thai" typeface="Cordia New"/>
+        <a:font script="Ethi" typeface="Nyala"/>
+        <a:font script="Beng" typeface="Vrinda"/>
+        <a:font script="Gujr" typeface="Shruti"/>
+        <a:font script="Khmr" typeface="DaunPenh"/>
+        <a:font script="Knda" typeface="Tunga"/>
+        <a:font script="Guru" typeface="Raavi"/>
+        <a:font script="Cans" typeface="Euphemia"/>
+        <a:font script="Cher" typeface="Plantagenet Cherokee"/>
+        <a:font script="Yiii" typeface="Microsoft Yi Baiti"/>
+        <a:font script="Tibt" typeface="Microsoft Himalaya"/>
+        <a:font script="Thaa" typeface="MV Boli"/>
+        <a:font script="Deva" typeface="Mangal"/>
+        <a:font script="Telu" typeface="Gautami"/>
+        <a:font script="Taml" typeface="Latha"/>
+        <a:font script="Syrc" typeface="Estrangelo Edessa"/>
+        <a:font script="Orya" typeface="Kalinga"/>
+        <a:font script="Mlym" typeface="Kartika"/>
+        <a:font script="Laoo" typeface="DokChampa"/>
+        <a:font script="Sinh" typeface="Iskoola Pota"/>
+        <a:font script="Mong" typeface="Mongolian Baiti"/>
+        <a:font script="Viet" typeface="Arial"/>
+        <a:font script="Uigh" typeface="Microsoft Uighur"/>
+        <a:font script="Geor" typeface="Sylfaen"/>
+        <a:font script="Armn" typeface="Arial"/>
+        <a:font script="Bugi" typeface="Leelawadee UI"/>
+        <a:font script="Bopo" typeface="Microsoft JhengHei"/>
+        <a:font script="Java" typeface="Javanese Text"/>
+        <a:font script="Lisu" typeface="Segoe UI"/>
+        <a:font script="Mymr" typeface="Myanmar Text"/>
+        <a:font script="Nkoo" typeface="Ebrima"/>
+        <a:font script="Olck" typeface="Nirmala UI"/>
+        <a:font script="Osma" typeface="Ebrima"/>
+        <a:font script="Phag" typeface="Phagspa"/>
+        <a:font script="Syrn" typeface="Estrangelo Edessa"/>
+        <a:font script="Syrj" typeface="Estrangelo Edessa"/>
+        <a:font script="Syre" typeface="Estrangelo Edessa"/>
+        <a:font script="Sora" typeface="Nirmala UI"/>
+        <a:font script="Tale" typeface="Microsoft Tai Le"/>
+        <a:font script="Talu" typeface="Microsoft New Tai Lue"/>
+        <a:font script="Tfng" typeface="Ebrima"/>
+      </a:minorFont>
+    </a:fontScheme>
+    <a:fmtScheme name="Office">
+      <a:fillStyleLst>
+        <a:solidFill>
+          <a:schemeClr val="phClr"/>
+        </a:solidFill>
+        <a:gradFill rotWithShape="1">
+          <a:gsLst>
+            <a:gs pos="0">
+              <a:schemeClr val="phClr">
+                <a:lumMod val="110000"/>
+                <a:satMod val="105000"/>
+                <a:tint val="67000"/>
+              </a:schemeClr>
+            </a:gs>
+            <a:gs pos="50000">
+              <a:schemeClr val="phClr">
+                <a:lumMod val="105000"/>
+                <a:satMod val="103000"/>
+                <a:tint val="73000"/>
+              </a:schemeClr>
+            </a:gs>
+            <a:gs pos="100000">
+              <a:schemeClr val="phClr">
+                <a:lumMod val="105000"/>
+                <a:satMod val="109000"/>
+                <a:tint val="81000"/>
+              </a:schemeClr>
+            </a:gs>
+          </a:gsLst>
+          <a:lin ang="5400000" scaled="0"/>
+        </a:gradFill>
+        <a:gradFill rotWithShape="1">
+          <a:gsLst>
+            <a:gs pos="0">
+              <a:schemeClr val="phClr">
+                <a:satMod val="103000"/>
+                <a:lumMod val="102000"/>
+                <a:tint val="94000"/>
+              </a:schemeClr>
+            </a:gs>
+            <a:gs pos="50000">
+              <a:schemeClr val="phClr">
+                <a:satMod val="110000"/>
+                <a:lumMod val="100000"/>
+                <a:shade val="100000"/>
+              </a:schemeClr>
+            </a:gs>
+            <a:gs pos="100000">
+              <a:schemeClr val="phClr">
+                <a:lumMod val="99000"/>
+                <a:satMod val="120000"/>
+                <a:shade val="78000"/>
+              </a:schemeClr>
+            </a:gs>
+          </a:gsLst>
+          <a:lin ang="5400000" scaled="0"/>
+        </a:gradFill>
+      </a:fillStyleLst>
+      <a:lnStyleLst>
+        <a:ln w="12700" cap="flat" cmpd="sng" algn="ctr">
+          <a:solidFill>
+            <a:schemeClr val="phClr"/>
+          </a:solidFill>
+          <a:prstDash val="solid"/>
+          <a:miter lim="800000"/>
+        </a:ln>
+        <a:ln w="19050" cap="flat" cmpd="sng" algn="ctr">
+          <a:solidFill>
+            <a:schemeClr val="phClr"/>
+          </a:solidFill>
+          <a:prstDash val="solid"/>
+          <a:miter lim="800000"/>
+        </a:ln>
+        <a:ln w="25400" cap="flat" cmpd="sng" algn="ctr">
+          <a:solidFill>
+            <a:schemeClr val="phClr"/>
+          </a:solidFill>
+          <a:prstDash val="solid"/>
+          <a:miter lim="800000"/>
+        </a:ln>
+      </a:lnStyleLst>
+      <a:effectStyleLst>
+        <a:effectStyle>
+          <a:effectLst/>
+        </a:effectStyle>
+        <a:effectStyle>
+          <a:effectLst/>
+        </a:effectStyle>
+        <a:effectStyle>
+          <a:effectLst>
+            <a:outerShdw blurRad="57150" dist="19050" dir="5400000" algn="ctr" rotWithShape="0">
+              <a:srgbClr val="000000">
+                <a:alpha val="63000"/>
+              </a:srgbClr>
+            </a:outerShdw>
+          </a:effectLst>
+        </a:effectStyle>
+      </a:effectStyleLst>
+      <a:bgFillStyleLst>
+        <a:solidFill>
+          <a:schemeClr val="phClr"/>
+        </a:solidFill>
+        <a:solidFill>
+          <a:schemeClr val="phClr">
+            <a:tint val="95000"/>
+            <a:satMod val="170000"/>
+          </a:schemeClr>
+        </a:solidFill>
+        <a:gradFill rotWithShape="1">
+          <a:gsLst>
+            <a:gs pos="0">
+              <a:schemeClr val="phClr">
+                <a:tint val="93000"/>
+                <a:satMod val="150000"/>
+                <a:shade val="98000"/>
+                <a:lumMod val="102000"/>
+              </a:schemeClr>
+            </a:gs>
+            <a:gs pos="50000">
+              <a:schemeClr val="phClr">
+                <a:tint val="98000"/>
+                <a:satMod val="130000"/>
+                <a:shade val="90000"/>
+                <a:lumMod val="103000"/>
+              </a:schemeClr>
+            </a:gs>
+            <a:gs pos="100000">
+              <a:schemeClr val="phClr">
+                <a:shade val="63000"/>
+                <a:satMod val="120000"/>
+              </a:schemeClr>
+            </a:gs>
+          </a:gsLst>
+          <a:lin ang="5400000" scaled="0"/>
+        </a:gradFill>
+      </a:bgFillStyleLst>
+    </a:fmtScheme>
+  </a:themeElements>
+  <a:objectDefaults>
+    <a:lnDef>
+      <a:spPr/>
+      <a:bodyPr/>
+      <a:lstStyle/>
+      <a:style>
+        <a:lnRef idx="2">
+          <a:schemeClr val="accent1"/>
+        </a:lnRef>
+        <a:fillRef idx="0">
+          <a:schemeClr val="accent1"/>
+        </a:fillRef>
+        <a:effectRef idx="1">
+          <a:schemeClr val="accent1"/>
+        </a:effectRef>
+        <a:fontRef idx="minor">
+          <a:schemeClr val="tx1"/>
+        </a:fontRef>
+      </a:style>
+    </a:lnDef>
+  </a:objectDefaults>
+  <a:extraClrSchemeLst/>
+  <a:extLst>
+    <a:ext uri="{05A4C25C-085E-4340-85A3-A5531E510DB2}">
+      <thm15:themeFamily xmlns:thm15="http://schemas.microsoft.com/office/thememl/2012/main" name="Office Theme" id="{2E142A2C-CD16-42D6-873A-C26D2A0506FA}" vid="{1BDDFF52-6CD6-40A5-AB3C-68EB2F1E4D0A}"/>
+    </a:ext>
+  </a:extLst>
+</a:theme>
 </file>
--- a/images/drawingThePresentation.pptx
+++ b/images/drawingThePresentation.pptx
@@ -5,13 +5,21 @@
     <p:sldMasterId id="2147483648" r:id="rId1"/>
   </p:sldMasterIdLst>
   <p:notesMasterIdLst>
-    <p:notesMasterId r:id="rId6"/>
+    <p:notesMasterId r:id="rId14"/>
   </p:notesMasterIdLst>
   <p:sldIdLst>
     <p:sldId id="256" r:id="rId2"/>
-    <p:sldId id="265" r:id="rId3"/>
-    <p:sldId id="266" r:id="rId4"/>
-    <p:sldId id="263" r:id="rId5"/>
+    <p:sldId id="269" r:id="rId3"/>
+    <p:sldId id="265" r:id="rId4"/>
+    <p:sldId id="270" r:id="rId5"/>
+    <p:sldId id="272" r:id="rId6"/>
+    <p:sldId id="268" r:id="rId7"/>
+    <p:sldId id="274" r:id="rId8"/>
+    <p:sldId id="267" r:id="rId9"/>
+    <p:sldId id="266" r:id="rId10"/>
+    <p:sldId id="273" r:id="rId11"/>
+    <p:sldId id="263" r:id="rId12"/>
+    <p:sldId id="271" r:id="rId13"/>
   </p:sldIdLst>
   <p:sldSz cx="12192000" cy="6858000"/>
   <p:notesSz cx="6858000" cy="9144000"/>
@@ -110,12 +118,16 @@
       </a:defRPr>
     </a:lvl9pPr>
   </p:defaultTextStyle>
-  <p:extLst>
-    <p:ext uri="{EFAFB233-063F-42B5-8137-9DF3F51BA10A}">
-      <p15:sldGuideLst xmlns:p15="http://schemas.microsoft.com/office/powerpoint/2012/main"/>
-    </p:ext>
-  </p:extLst>
 </p:presentation>
+</file>
+
+<file path=ppt/revisionInfo.xml><?xml version="1.0" encoding="utf-8"?>
+<p1510:revInfo xmlns:a="http://schemas.openxmlformats.org/drawingml/2006/main" xmlns:r="http://schemas.openxmlformats.org/officeDocument/2006/relationships" xmlns:p1510="http://schemas.microsoft.com/office/powerpoint/2015/10/main">
+  <p1510:revLst>
+    <p1510:client id="{188E849E-91B6-4381-BE0F-A98210DE5F15}" v="559" dt="2026-05-07T14:11:13.442"/>
+    <p1510:client id="{7177E366-E0F3-424F-9CA9-66AA42B7DAC1}" v="175" dt="2026-05-07T15:26:36.781"/>
+  </p1510:revLst>
+</p1510:revInfo>
 </file>
 
 <file path=ppt/notesMasters/notesMaster1.xml><?xml version="1.0" encoding="utf-8"?>
@@ -200,7 +212,7 @@
           <a:p>
             <a:fld id="{1058D600-DAED-41A3-BBAD-B3A821407038}" type="datetimeFigureOut">
               <a:rPr lang="fr-CA" smtClean="0"/>
-              <a:t>2026-05-07</a:t>
+              <a:t>2026-05-08</a:t>
             </a:fld>
             <a:endParaRPr lang="fr-CA"/>
           </a:p>
@@ -476,6 +488,114 @@
         <p:cNvPr id="1" name="">
           <a:extLst>
             <a:ext uri="{FF2B5EF4-FFF2-40B4-BE49-F238E27FC236}">
+              <a16:creationId xmlns:a16="http://schemas.microsoft.com/office/drawing/2014/main" id="{4C9F0803-5277-EBDA-4539-168182BEC82C}"/>
+            </a:ext>
+          </a:extLst>
+        </p:cNvPr>
+        <p:cNvGrpSpPr/>
+        <p:nvPr/>
+      </p:nvGrpSpPr>
+      <p:grpSpPr>
+        <a:xfrm>
+          <a:off x="0" y="0"/>
+          <a:ext cx="0" cy="0"/>
+          <a:chOff x="0" y="0"/>
+          <a:chExt cx="0" cy="0"/>
+        </a:xfrm>
+      </p:grpSpPr>
+      <p:sp>
+        <p:nvSpPr>
+          <p:cNvPr id="2" name="Espace réservé de l'image des diapositives 1">
+            <a:extLst>
+              <a:ext uri="{FF2B5EF4-FFF2-40B4-BE49-F238E27FC236}">
+                <a16:creationId xmlns:a16="http://schemas.microsoft.com/office/drawing/2014/main" id="{37ED371C-856A-CA25-75F7-A82DC7F77316}"/>
+              </a:ext>
+            </a:extLst>
+          </p:cNvPr>
+          <p:cNvSpPr>
+            <a:spLocks noGrp="1" noRot="1" noChangeAspect="1"/>
+          </p:cNvSpPr>
+          <p:nvPr>
+            <p:ph type="sldImg"/>
+          </p:nvPr>
+        </p:nvSpPr>
+        <p:spPr/>
+      </p:sp>
+      <p:sp>
+        <p:nvSpPr>
+          <p:cNvPr id="3" name="Espace réservé des notes 2">
+            <a:extLst>
+              <a:ext uri="{FF2B5EF4-FFF2-40B4-BE49-F238E27FC236}">
+                <a16:creationId xmlns:a16="http://schemas.microsoft.com/office/drawing/2014/main" id="{B87D50D7-297F-DA48-CF34-EB6501C41967}"/>
+              </a:ext>
+            </a:extLst>
+          </p:cNvPr>
+          <p:cNvSpPr>
+            <a:spLocks noGrp="1"/>
+          </p:cNvSpPr>
+          <p:nvPr>
+            <p:ph type="body" idx="1"/>
+          </p:nvPr>
+        </p:nvSpPr>
+        <p:spPr/>
+        <p:txBody>
+          <a:bodyPr/>
+          <a:lstStyle/>
+          <a:p>
+            <a:endParaRPr lang="fr-CA"/>
+          </a:p>
+        </p:txBody>
+      </p:sp>
+      <p:sp>
+        <p:nvSpPr>
+          <p:cNvPr id="4" name="Espace réservé du numéro de diapositive 3">
+            <a:extLst>
+              <a:ext uri="{FF2B5EF4-FFF2-40B4-BE49-F238E27FC236}">
+                <a16:creationId xmlns:a16="http://schemas.microsoft.com/office/drawing/2014/main" id="{3F47FB81-04E9-50A4-7D8C-6AEA9E21E799}"/>
+              </a:ext>
+            </a:extLst>
+          </p:cNvPr>
+          <p:cNvSpPr>
+            <a:spLocks noGrp="1"/>
+          </p:cNvSpPr>
+          <p:nvPr>
+            <p:ph type="sldNum" sz="quarter" idx="5"/>
+          </p:nvPr>
+        </p:nvSpPr>
+        <p:spPr/>
+        <p:txBody>
+          <a:bodyPr/>
+          <a:lstStyle/>
+          <a:p>
+            <a:fld id="{58AF5C23-74FF-4D96-A9A6-9BDE17B3CC18}" type="slidenum">
+              <a:rPr lang="fr-CA" smtClean="0"/>
+              <a:t>2</a:t>
+            </a:fld>
+            <a:endParaRPr lang="fr-CA"/>
+          </a:p>
+        </p:txBody>
+      </p:sp>
+    </p:spTree>
+    <p:extLst>
+      <p:ext uri="{BB962C8B-B14F-4D97-AF65-F5344CB8AC3E}">
+        <p14:creationId xmlns:p14="http://schemas.microsoft.com/office/powerpoint/2010/main" val="3087543484"/>
+      </p:ext>
+    </p:extLst>
+  </p:cSld>
+  <p:clrMapOvr>
+    <a:masterClrMapping/>
+  </p:clrMapOvr>
+</p:notes>
+</file>
+
+<file path=ppt/notesSlides/notesSlide2.xml><?xml version="1.0" encoding="utf-8"?>
+<p:notes xmlns:a="http://schemas.openxmlformats.org/drawingml/2006/main" xmlns:r="http://schemas.openxmlformats.org/officeDocument/2006/relationships" xmlns:p="http://schemas.openxmlformats.org/presentationml/2006/main">
+  <p:cSld>
+    <p:spTree>
+      <p:nvGrpSpPr>
+        <p:cNvPr id="1" name="">
+          <a:extLst>
+            <a:ext uri="{FF2B5EF4-FFF2-40B4-BE49-F238E27FC236}">
               <a16:creationId xmlns:a16="http://schemas.microsoft.com/office/drawing/2014/main" id="{C0F01042-3A65-6AAB-C832-9E22AD85BCE6}"/>
             </a:ext>
           </a:extLst>
@@ -530,7 +650,7 @@
           <a:bodyPr/>
           <a:lstStyle/>
           <a:p>
-            <a:endParaRPr lang="fr-CA" dirty="0"/>
+            <a:endParaRPr lang="fr-CA"/>
           </a:p>
         </p:txBody>
       </p:sp>
@@ -557,7 +677,7 @@
           <a:p>
             <a:fld id="{58AF5C23-74FF-4D96-A9A6-9BDE17B3CC18}" type="slidenum">
               <a:rPr lang="fr-CA" smtClean="0"/>
-              <a:t>2</a:t>
+              <a:t>3</a:t>
             </a:fld>
             <a:endParaRPr lang="fr-CA"/>
           </a:p>
@@ -576,7 +696,547 @@
 </p:notes>
 </file>
 
-<file path=ppt/notesSlides/notesSlide2.xml><?xml version="1.0" encoding="utf-8"?>
+<file path=ppt/notesSlides/notesSlide3.xml><?xml version="1.0" encoding="utf-8"?>
+<p:notes xmlns:a="http://schemas.openxmlformats.org/drawingml/2006/main" xmlns:r="http://schemas.openxmlformats.org/officeDocument/2006/relationships" xmlns:p="http://schemas.openxmlformats.org/presentationml/2006/main">
+  <p:cSld>
+    <p:spTree>
+      <p:nvGrpSpPr>
+        <p:cNvPr id="1" name="">
+          <a:extLst>
+            <a:ext uri="{FF2B5EF4-FFF2-40B4-BE49-F238E27FC236}">
+              <a16:creationId xmlns:a16="http://schemas.microsoft.com/office/drawing/2014/main" id="{E1E314E0-9A3B-1912-481D-356463CDC0AE}"/>
+            </a:ext>
+          </a:extLst>
+        </p:cNvPr>
+        <p:cNvGrpSpPr/>
+        <p:nvPr/>
+      </p:nvGrpSpPr>
+      <p:grpSpPr>
+        <a:xfrm>
+          <a:off x="0" y="0"/>
+          <a:ext cx="0" cy="0"/>
+          <a:chOff x="0" y="0"/>
+          <a:chExt cx="0" cy="0"/>
+        </a:xfrm>
+      </p:grpSpPr>
+      <p:sp>
+        <p:nvSpPr>
+          <p:cNvPr id="2" name="Espace réservé de l'image des diapositives 1">
+            <a:extLst>
+              <a:ext uri="{FF2B5EF4-FFF2-40B4-BE49-F238E27FC236}">
+                <a16:creationId xmlns:a16="http://schemas.microsoft.com/office/drawing/2014/main" id="{2ECF178C-DEE3-E957-98E1-71633EC377A5}"/>
+              </a:ext>
+            </a:extLst>
+          </p:cNvPr>
+          <p:cNvSpPr>
+            <a:spLocks noGrp="1" noRot="1" noChangeAspect="1"/>
+          </p:cNvSpPr>
+          <p:nvPr>
+            <p:ph type="sldImg"/>
+          </p:nvPr>
+        </p:nvSpPr>
+        <p:spPr/>
+      </p:sp>
+      <p:sp>
+        <p:nvSpPr>
+          <p:cNvPr id="3" name="Espace réservé des notes 2">
+            <a:extLst>
+              <a:ext uri="{FF2B5EF4-FFF2-40B4-BE49-F238E27FC236}">
+                <a16:creationId xmlns:a16="http://schemas.microsoft.com/office/drawing/2014/main" id="{363B6681-171F-15F1-95E2-AC6605F28B3D}"/>
+              </a:ext>
+            </a:extLst>
+          </p:cNvPr>
+          <p:cNvSpPr>
+            <a:spLocks noGrp="1"/>
+          </p:cNvSpPr>
+          <p:nvPr>
+            <p:ph type="body" idx="1"/>
+          </p:nvPr>
+        </p:nvSpPr>
+        <p:spPr/>
+        <p:txBody>
+          <a:bodyPr/>
+          <a:lstStyle/>
+          <a:p>
+            <a:endParaRPr lang="fr-CA"/>
+          </a:p>
+        </p:txBody>
+      </p:sp>
+      <p:sp>
+        <p:nvSpPr>
+          <p:cNvPr id="4" name="Espace réservé du numéro de diapositive 3">
+            <a:extLst>
+              <a:ext uri="{FF2B5EF4-FFF2-40B4-BE49-F238E27FC236}">
+                <a16:creationId xmlns:a16="http://schemas.microsoft.com/office/drawing/2014/main" id="{41015C83-2F1D-0309-4DB9-E62594B43387}"/>
+              </a:ext>
+            </a:extLst>
+          </p:cNvPr>
+          <p:cNvSpPr>
+            <a:spLocks noGrp="1"/>
+          </p:cNvSpPr>
+          <p:nvPr>
+            <p:ph type="sldNum" sz="quarter" idx="5"/>
+          </p:nvPr>
+        </p:nvSpPr>
+        <p:spPr/>
+        <p:txBody>
+          <a:bodyPr/>
+          <a:lstStyle/>
+          <a:p>
+            <a:fld id="{58AF5C23-74FF-4D96-A9A6-9BDE17B3CC18}" type="slidenum">
+              <a:rPr lang="fr-CA" smtClean="0"/>
+              <a:t>4</a:t>
+            </a:fld>
+            <a:endParaRPr lang="fr-CA"/>
+          </a:p>
+        </p:txBody>
+      </p:sp>
+    </p:spTree>
+    <p:extLst>
+      <p:ext uri="{BB962C8B-B14F-4D97-AF65-F5344CB8AC3E}">
+        <p14:creationId xmlns:p14="http://schemas.microsoft.com/office/powerpoint/2010/main" val="1514402159"/>
+      </p:ext>
+    </p:extLst>
+  </p:cSld>
+  <p:clrMapOvr>
+    <a:masterClrMapping/>
+  </p:clrMapOvr>
+</p:notes>
+</file>
+
+<file path=ppt/notesSlides/notesSlide4.xml><?xml version="1.0" encoding="utf-8"?>
+<p:notes xmlns:a="http://schemas.openxmlformats.org/drawingml/2006/main" xmlns:r="http://schemas.openxmlformats.org/officeDocument/2006/relationships" xmlns:p="http://schemas.openxmlformats.org/presentationml/2006/main">
+  <p:cSld>
+    <p:spTree>
+      <p:nvGrpSpPr>
+        <p:cNvPr id="1" name="">
+          <a:extLst>
+            <a:ext uri="{FF2B5EF4-FFF2-40B4-BE49-F238E27FC236}">
+              <a16:creationId xmlns:a16="http://schemas.microsoft.com/office/drawing/2014/main" id="{F49C3FCE-BE95-BDFE-CEAA-0A4D86FC41F6}"/>
+            </a:ext>
+          </a:extLst>
+        </p:cNvPr>
+        <p:cNvGrpSpPr/>
+        <p:nvPr/>
+      </p:nvGrpSpPr>
+      <p:grpSpPr>
+        <a:xfrm>
+          <a:off x="0" y="0"/>
+          <a:ext cx="0" cy="0"/>
+          <a:chOff x="0" y="0"/>
+          <a:chExt cx="0" cy="0"/>
+        </a:xfrm>
+      </p:grpSpPr>
+      <p:sp>
+        <p:nvSpPr>
+          <p:cNvPr id="2" name="Espace réservé de l'image des diapositives 1">
+            <a:extLst>
+              <a:ext uri="{FF2B5EF4-FFF2-40B4-BE49-F238E27FC236}">
+                <a16:creationId xmlns:a16="http://schemas.microsoft.com/office/drawing/2014/main" id="{715A4BC5-3CA5-E2C6-3172-3E07D1D72869}"/>
+              </a:ext>
+            </a:extLst>
+          </p:cNvPr>
+          <p:cNvSpPr>
+            <a:spLocks noGrp="1" noRot="1" noChangeAspect="1"/>
+          </p:cNvSpPr>
+          <p:nvPr>
+            <p:ph type="sldImg"/>
+          </p:nvPr>
+        </p:nvSpPr>
+        <p:spPr/>
+      </p:sp>
+      <p:sp>
+        <p:nvSpPr>
+          <p:cNvPr id="3" name="Espace réservé des notes 2">
+            <a:extLst>
+              <a:ext uri="{FF2B5EF4-FFF2-40B4-BE49-F238E27FC236}">
+                <a16:creationId xmlns:a16="http://schemas.microsoft.com/office/drawing/2014/main" id="{A5D1401C-A1BA-3CDF-2BE1-B21885BED540}"/>
+              </a:ext>
+            </a:extLst>
+          </p:cNvPr>
+          <p:cNvSpPr>
+            <a:spLocks noGrp="1"/>
+          </p:cNvSpPr>
+          <p:nvPr>
+            <p:ph type="body" idx="1"/>
+          </p:nvPr>
+        </p:nvSpPr>
+        <p:spPr/>
+        <p:txBody>
+          <a:bodyPr/>
+          <a:lstStyle/>
+          <a:p>
+            <a:endParaRPr lang="fr-CA"/>
+          </a:p>
+        </p:txBody>
+      </p:sp>
+      <p:sp>
+        <p:nvSpPr>
+          <p:cNvPr id="4" name="Espace réservé du numéro de diapositive 3">
+            <a:extLst>
+              <a:ext uri="{FF2B5EF4-FFF2-40B4-BE49-F238E27FC236}">
+                <a16:creationId xmlns:a16="http://schemas.microsoft.com/office/drawing/2014/main" id="{936EEFE4-9A52-8352-4925-0D4E3CAE8008}"/>
+              </a:ext>
+            </a:extLst>
+          </p:cNvPr>
+          <p:cNvSpPr>
+            <a:spLocks noGrp="1"/>
+          </p:cNvSpPr>
+          <p:nvPr>
+            <p:ph type="sldNum" sz="quarter" idx="5"/>
+          </p:nvPr>
+        </p:nvSpPr>
+        <p:spPr/>
+        <p:txBody>
+          <a:bodyPr/>
+          <a:lstStyle/>
+          <a:p>
+            <a:fld id="{58AF5C23-74FF-4D96-A9A6-9BDE17B3CC18}" type="slidenum">
+              <a:rPr lang="fr-CA" smtClean="0"/>
+              <a:t>5</a:t>
+            </a:fld>
+            <a:endParaRPr lang="fr-CA"/>
+          </a:p>
+        </p:txBody>
+      </p:sp>
+    </p:spTree>
+    <p:extLst>
+      <p:ext uri="{BB962C8B-B14F-4D97-AF65-F5344CB8AC3E}">
+        <p14:creationId xmlns:p14="http://schemas.microsoft.com/office/powerpoint/2010/main" val="4060176763"/>
+      </p:ext>
+    </p:extLst>
+  </p:cSld>
+  <p:clrMapOvr>
+    <a:masterClrMapping/>
+  </p:clrMapOvr>
+</p:notes>
+</file>
+
+<file path=ppt/notesSlides/notesSlide5.xml><?xml version="1.0" encoding="utf-8"?>
+<p:notes xmlns:a="http://schemas.openxmlformats.org/drawingml/2006/main" xmlns:r="http://schemas.openxmlformats.org/officeDocument/2006/relationships" xmlns:p="http://schemas.openxmlformats.org/presentationml/2006/main">
+  <p:cSld>
+    <p:spTree>
+      <p:nvGrpSpPr>
+        <p:cNvPr id="1" name="">
+          <a:extLst>
+            <a:ext uri="{FF2B5EF4-FFF2-40B4-BE49-F238E27FC236}">
+              <a16:creationId xmlns:a16="http://schemas.microsoft.com/office/drawing/2014/main" id="{56C9EA99-FCF4-2B82-2E42-C6A8E022AE9A}"/>
+            </a:ext>
+          </a:extLst>
+        </p:cNvPr>
+        <p:cNvGrpSpPr/>
+        <p:nvPr/>
+      </p:nvGrpSpPr>
+      <p:grpSpPr>
+        <a:xfrm>
+          <a:off x="0" y="0"/>
+          <a:ext cx="0" cy="0"/>
+          <a:chOff x="0" y="0"/>
+          <a:chExt cx="0" cy="0"/>
+        </a:xfrm>
+      </p:grpSpPr>
+      <p:sp>
+        <p:nvSpPr>
+          <p:cNvPr id="2" name="Espace réservé de l'image des diapositives 1">
+            <a:extLst>
+              <a:ext uri="{FF2B5EF4-FFF2-40B4-BE49-F238E27FC236}">
+                <a16:creationId xmlns:a16="http://schemas.microsoft.com/office/drawing/2014/main" id="{B0AE5A69-716F-3625-F051-79B30F59EDF2}"/>
+              </a:ext>
+            </a:extLst>
+          </p:cNvPr>
+          <p:cNvSpPr>
+            <a:spLocks noGrp="1" noRot="1" noChangeAspect="1"/>
+          </p:cNvSpPr>
+          <p:nvPr>
+            <p:ph type="sldImg"/>
+          </p:nvPr>
+        </p:nvSpPr>
+        <p:spPr/>
+      </p:sp>
+      <p:sp>
+        <p:nvSpPr>
+          <p:cNvPr id="3" name="Espace réservé des notes 2">
+            <a:extLst>
+              <a:ext uri="{FF2B5EF4-FFF2-40B4-BE49-F238E27FC236}">
+                <a16:creationId xmlns:a16="http://schemas.microsoft.com/office/drawing/2014/main" id="{92294E1E-60D6-0DDD-B5AE-27FD248C0381}"/>
+              </a:ext>
+            </a:extLst>
+          </p:cNvPr>
+          <p:cNvSpPr>
+            <a:spLocks noGrp="1"/>
+          </p:cNvSpPr>
+          <p:nvPr>
+            <p:ph type="body" idx="1"/>
+          </p:nvPr>
+        </p:nvSpPr>
+        <p:spPr/>
+        <p:txBody>
+          <a:bodyPr/>
+          <a:lstStyle/>
+          <a:p>
+            <a:endParaRPr lang="fr-CA"/>
+          </a:p>
+        </p:txBody>
+      </p:sp>
+      <p:sp>
+        <p:nvSpPr>
+          <p:cNvPr id="4" name="Espace réservé du numéro de diapositive 3">
+            <a:extLst>
+              <a:ext uri="{FF2B5EF4-FFF2-40B4-BE49-F238E27FC236}">
+                <a16:creationId xmlns:a16="http://schemas.microsoft.com/office/drawing/2014/main" id="{8569FBA2-85CA-8539-DB1C-7B93FAE44A14}"/>
+              </a:ext>
+            </a:extLst>
+          </p:cNvPr>
+          <p:cNvSpPr>
+            <a:spLocks noGrp="1"/>
+          </p:cNvSpPr>
+          <p:nvPr>
+            <p:ph type="sldNum" sz="quarter" idx="5"/>
+          </p:nvPr>
+        </p:nvSpPr>
+        <p:spPr/>
+        <p:txBody>
+          <a:bodyPr/>
+          <a:lstStyle/>
+          <a:p>
+            <a:fld id="{58AF5C23-74FF-4D96-A9A6-9BDE17B3CC18}" type="slidenum">
+              <a:rPr lang="fr-CA" smtClean="0"/>
+              <a:t>6</a:t>
+            </a:fld>
+            <a:endParaRPr lang="fr-CA"/>
+          </a:p>
+        </p:txBody>
+      </p:sp>
+    </p:spTree>
+    <p:extLst>
+      <p:ext uri="{BB962C8B-B14F-4D97-AF65-F5344CB8AC3E}">
+        <p14:creationId xmlns:p14="http://schemas.microsoft.com/office/powerpoint/2010/main" val="439655725"/>
+      </p:ext>
+    </p:extLst>
+  </p:cSld>
+  <p:clrMapOvr>
+    <a:masterClrMapping/>
+  </p:clrMapOvr>
+</p:notes>
+</file>
+
+<file path=ppt/notesSlides/notesSlide6.xml><?xml version="1.0" encoding="utf-8"?>
+<p:notes xmlns:a="http://schemas.openxmlformats.org/drawingml/2006/main" xmlns:r="http://schemas.openxmlformats.org/officeDocument/2006/relationships" xmlns:p="http://schemas.openxmlformats.org/presentationml/2006/main">
+  <p:cSld>
+    <p:spTree>
+      <p:nvGrpSpPr>
+        <p:cNvPr id="1" name="">
+          <a:extLst>
+            <a:ext uri="{FF2B5EF4-FFF2-40B4-BE49-F238E27FC236}">
+              <a16:creationId xmlns:a16="http://schemas.microsoft.com/office/drawing/2014/main" id="{9B6FA89B-5811-85BD-ACB8-BAD2E7E145B4}"/>
+            </a:ext>
+          </a:extLst>
+        </p:cNvPr>
+        <p:cNvGrpSpPr/>
+        <p:nvPr/>
+      </p:nvGrpSpPr>
+      <p:grpSpPr>
+        <a:xfrm>
+          <a:off x="0" y="0"/>
+          <a:ext cx="0" cy="0"/>
+          <a:chOff x="0" y="0"/>
+          <a:chExt cx="0" cy="0"/>
+        </a:xfrm>
+      </p:grpSpPr>
+      <p:sp>
+        <p:nvSpPr>
+          <p:cNvPr id="2" name="Espace réservé de l'image des diapositives 1">
+            <a:extLst>
+              <a:ext uri="{FF2B5EF4-FFF2-40B4-BE49-F238E27FC236}">
+                <a16:creationId xmlns:a16="http://schemas.microsoft.com/office/drawing/2014/main" id="{CA74CA30-E319-3312-C521-17D2F2D509A0}"/>
+              </a:ext>
+            </a:extLst>
+          </p:cNvPr>
+          <p:cNvSpPr>
+            <a:spLocks noGrp="1" noRot="1" noChangeAspect="1"/>
+          </p:cNvSpPr>
+          <p:nvPr>
+            <p:ph type="sldImg"/>
+          </p:nvPr>
+        </p:nvSpPr>
+        <p:spPr/>
+      </p:sp>
+      <p:sp>
+        <p:nvSpPr>
+          <p:cNvPr id="3" name="Espace réservé des notes 2">
+            <a:extLst>
+              <a:ext uri="{FF2B5EF4-FFF2-40B4-BE49-F238E27FC236}">
+                <a16:creationId xmlns:a16="http://schemas.microsoft.com/office/drawing/2014/main" id="{A9F909EA-15F3-3FCC-A03B-FEF78401CD02}"/>
+              </a:ext>
+            </a:extLst>
+          </p:cNvPr>
+          <p:cNvSpPr>
+            <a:spLocks noGrp="1"/>
+          </p:cNvSpPr>
+          <p:nvPr>
+            <p:ph type="body" idx="1"/>
+          </p:nvPr>
+        </p:nvSpPr>
+        <p:spPr/>
+        <p:txBody>
+          <a:bodyPr/>
+          <a:lstStyle/>
+          <a:p>
+            <a:endParaRPr lang="fr-CA"/>
+          </a:p>
+        </p:txBody>
+      </p:sp>
+      <p:sp>
+        <p:nvSpPr>
+          <p:cNvPr id="4" name="Espace réservé du numéro de diapositive 3">
+            <a:extLst>
+              <a:ext uri="{FF2B5EF4-FFF2-40B4-BE49-F238E27FC236}">
+                <a16:creationId xmlns:a16="http://schemas.microsoft.com/office/drawing/2014/main" id="{B7DD732C-41E2-1392-6EA9-DFAE4D3EB19A}"/>
+              </a:ext>
+            </a:extLst>
+          </p:cNvPr>
+          <p:cNvSpPr>
+            <a:spLocks noGrp="1"/>
+          </p:cNvSpPr>
+          <p:nvPr>
+            <p:ph type="sldNum" sz="quarter" idx="5"/>
+          </p:nvPr>
+        </p:nvSpPr>
+        <p:spPr/>
+        <p:txBody>
+          <a:bodyPr/>
+          <a:lstStyle/>
+          <a:p>
+            <a:fld id="{58AF5C23-74FF-4D96-A9A6-9BDE17B3CC18}" type="slidenum">
+              <a:rPr lang="fr-CA" smtClean="0"/>
+              <a:t>7</a:t>
+            </a:fld>
+            <a:endParaRPr lang="fr-CA"/>
+          </a:p>
+        </p:txBody>
+      </p:sp>
+    </p:spTree>
+    <p:extLst>
+      <p:ext uri="{BB962C8B-B14F-4D97-AF65-F5344CB8AC3E}">
+        <p14:creationId xmlns:p14="http://schemas.microsoft.com/office/powerpoint/2010/main" val="3785412715"/>
+      </p:ext>
+    </p:extLst>
+  </p:cSld>
+  <p:clrMapOvr>
+    <a:masterClrMapping/>
+  </p:clrMapOvr>
+</p:notes>
+</file>
+
+<file path=ppt/notesSlides/notesSlide7.xml><?xml version="1.0" encoding="utf-8"?>
+<p:notes xmlns:a="http://schemas.openxmlformats.org/drawingml/2006/main" xmlns:r="http://schemas.openxmlformats.org/officeDocument/2006/relationships" xmlns:p="http://schemas.openxmlformats.org/presentationml/2006/main">
+  <p:cSld>
+    <p:spTree>
+      <p:nvGrpSpPr>
+        <p:cNvPr id="1" name="">
+          <a:extLst>
+            <a:ext uri="{FF2B5EF4-FFF2-40B4-BE49-F238E27FC236}">
+              <a16:creationId xmlns:a16="http://schemas.microsoft.com/office/drawing/2014/main" id="{5FAB63D5-EAAA-D172-0F1A-02AB0BF00011}"/>
+            </a:ext>
+          </a:extLst>
+        </p:cNvPr>
+        <p:cNvGrpSpPr/>
+        <p:nvPr/>
+      </p:nvGrpSpPr>
+      <p:grpSpPr>
+        <a:xfrm>
+          <a:off x="0" y="0"/>
+          <a:ext cx="0" cy="0"/>
+          <a:chOff x="0" y="0"/>
+          <a:chExt cx="0" cy="0"/>
+        </a:xfrm>
+      </p:grpSpPr>
+      <p:sp>
+        <p:nvSpPr>
+          <p:cNvPr id="2" name="Espace réservé de l'image des diapositives 1">
+            <a:extLst>
+              <a:ext uri="{FF2B5EF4-FFF2-40B4-BE49-F238E27FC236}">
+                <a16:creationId xmlns:a16="http://schemas.microsoft.com/office/drawing/2014/main" id="{58AD74A1-963D-B46F-C807-678AE694EF4A}"/>
+              </a:ext>
+            </a:extLst>
+          </p:cNvPr>
+          <p:cNvSpPr>
+            <a:spLocks noGrp="1" noRot="1" noChangeAspect="1"/>
+          </p:cNvSpPr>
+          <p:nvPr>
+            <p:ph type="sldImg"/>
+          </p:nvPr>
+        </p:nvSpPr>
+        <p:spPr/>
+      </p:sp>
+      <p:sp>
+        <p:nvSpPr>
+          <p:cNvPr id="3" name="Espace réservé des notes 2">
+            <a:extLst>
+              <a:ext uri="{FF2B5EF4-FFF2-40B4-BE49-F238E27FC236}">
+                <a16:creationId xmlns:a16="http://schemas.microsoft.com/office/drawing/2014/main" id="{4CD87183-EA90-71E6-DF09-3C4D71B29E5B}"/>
+              </a:ext>
+            </a:extLst>
+          </p:cNvPr>
+          <p:cNvSpPr>
+            <a:spLocks noGrp="1"/>
+          </p:cNvSpPr>
+          <p:nvPr>
+            <p:ph type="body" idx="1"/>
+          </p:nvPr>
+        </p:nvSpPr>
+        <p:spPr/>
+        <p:txBody>
+          <a:bodyPr/>
+          <a:lstStyle/>
+          <a:p>
+            <a:endParaRPr lang="fr-CA"/>
+          </a:p>
+        </p:txBody>
+      </p:sp>
+      <p:sp>
+        <p:nvSpPr>
+          <p:cNvPr id="4" name="Espace réservé du numéro de diapositive 3">
+            <a:extLst>
+              <a:ext uri="{FF2B5EF4-FFF2-40B4-BE49-F238E27FC236}">
+                <a16:creationId xmlns:a16="http://schemas.microsoft.com/office/drawing/2014/main" id="{2D995605-973F-8C1B-1795-B70AA8C03F99}"/>
+              </a:ext>
+            </a:extLst>
+          </p:cNvPr>
+          <p:cNvSpPr>
+            <a:spLocks noGrp="1"/>
+          </p:cNvSpPr>
+          <p:nvPr>
+            <p:ph type="sldNum" sz="quarter" idx="5"/>
+          </p:nvPr>
+        </p:nvSpPr>
+        <p:spPr/>
+        <p:txBody>
+          <a:bodyPr/>
+          <a:lstStyle/>
+          <a:p>
+            <a:fld id="{58AF5C23-74FF-4D96-A9A6-9BDE17B3CC18}" type="slidenum">
+              <a:rPr lang="fr-CA" smtClean="0"/>
+              <a:t>8</a:t>
+            </a:fld>
+            <a:endParaRPr lang="fr-CA"/>
+          </a:p>
+        </p:txBody>
+      </p:sp>
+    </p:spTree>
+    <p:extLst>
+      <p:ext uri="{BB962C8B-B14F-4D97-AF65-F5344CB8AC3E}">
+        <p14:creationId xmlns:p14="http://schemas.microsoft.com/office/powerpoint/2010/main" val="2991208777"/>
+      </p:ext>
+    </p:extLst>
+  </p:cSld>
+  <p:clrMapOvr>
+    <a:masterClrMapping/>
+  </p:clrMapOvr>
+</p:notes>
+</file>
+
+<file path=ppt/notesSlides/notesSlide8.xml><?xml version="1.0" encoding="utf-8"?>
 <p:notes xmlns:a="http://schemas.openxmlformats.org/drawingml/2006/main" xmlns:r="http://schemas.openxmlformats.org/officeDocument/2006/relationships" xmlns:p="http://schemas.openxmlformats.org/presentationml/2006/main">
   <p:cSld>
     <p:spTree>
@@ -638,7 +1298,7 @@
           <a:bodyPr/>
           <a:lstStyle/>
           <a:p>
-            <a:endParaRPr lang="fr-CA" dirty="0"/>
+            <a:endParaRPr lang="fr-CA"/>
           </a:p>
         </p:txBody>
       </p:sp>
@@ -665,7 +1325,7 @@
           <a:p>
             <a:fld id="{58AF5C23-74FF-4D96-A9A6-9BDE17B3CC18}" type="slidenum">
               <a:rPr lang="fr-CA" smtClean="0"/>
-              <a:t>3</a:t>
+              <a:t>9</a:t>
             </a:fld>
             <a:endParaRPr lang="fr-CA"/>
           </a:p>
@@ -675,6 +1335,114 @@
     <p:extLst>
       <p:ext uri="{BB962C8B-B14F-4D97-AF65-F5344CB8AC3E}">
         <p14:creationId xmlns:p14="http://schemas.microsoft.com/office/powerpoint/2010/main" val="904536691"/>
+      </p:ext>
+    </p:extLst>
+  </p:cSld>
+  <p:clrMapOvr>
+    <a:masterClrMapping/>
+  </p:clrMapOvr>
+</p:notes>
+</file>
+
+<file path=ppt/notesSlides/notesSlide9.xml><?xml version="1.0" encoding="utf-8"?>
+<p:notes xmlns:a="http://schemas.openxmlformats.org/drawingml/2006/main" xmlns:r="http://schemas.openxmlformats.org/officeDocument/2006/relationships" xmlns:p="http://schemas.openxmlformats.org/presentationml/2006/main">
+  <p:cSld>
+    <p:spTree>
+      <p:nvGrpSpPr>
+        <p:cNvPr id="1" name="">
+          <a:extLst>
+            <a:ext uri="{FF2B5EF4-FFF2-40B4-BE49-F238E27FC236}">
+              <a16:creationId xmlns:a16="http://schemas.microsoft.com/office/drawing/2014/main" id="{038550F6-96E0-4054-0DB6-7B3E76C6C01B}"/>
+            </a:ext>
+          </a:extLst>
+        </p:cNvPr>
+        <p:cNvGrpSpPr/>
+        <p:nvPr/>
+      </p:nvGrpSpPr>
+      <p:grpSpPr>
+        <a:xfrm>
+          <a:off x="0" y="0"/>
+          <a:ext cx="0" cy="0"/>
+          <a:chOff x="0" y="0"/>
+          <a:chExt cx="0" cy="0"/>
+        </a:xfrm>
+      </p:grpSpPr>
+      <p:sp>
+        <p:nvSpPr>
+          <p:cNvPr id="2" name="Espace réservé de l'image des diapositives 1">
+            <a:extLst>
+              <a:ext uri="{FF2B5EF4-FFF2-40B4-BE49-F238E27FC236}">
+                <a16:creationId xmlns:a16="http://schemas.microsoft.com/office/drawing/2014/main" id="{AE19C10D-93FB-B76A-609A-91962794DD00}"/>
+              </a:ext>
+            </a:extLst>
+          </p:cNvPr>
+          <p:cNvSpPr>
+            <a:spLocks noGrp="1" noRot="1" noChangeAspect="1"/>
+          </p:cNvSpPr>
+          <p:nvPr>
+            <p:ph type="sldImg"/>
+          </p:nvPr>
+        </p:nvSpPr>
+        <p:spPr/>
+      </p:sp>
+      <p:sp>
+        <p:nvSpPr>
+          <p:cNvPr id="3" name="Espace réservé des notes 2">
+            <a:extLst>
+              <a:ext uri="{FF2B5EF4-FFF2-40B4-BE49-F238E27FC236}">
+                <a16:creationId xmlns:a16="http://schemas.microsoft.com/office/drawing/2014/main" id="{5A332C07-9B3A-AAC6-DA8D-8C8361893DF1}"/>
+              </a:ext>
+            </a:extLst>
+          </p:cNvPr>
+          <p:cNvSpPr>
+            <a:spLocks noGrp="1"/>
+          </p:cNvSpPr>
+          <p:nvPr>
+            <p:ph type="body" idx="1"/>
+          </p:nvPr>
+        </p:nvSpPr>
+        <p:spPr/>
+        <p:txBody>
+          <a:bodyPr/>
+          <a:lstStyle/>
+          <a:p>
+            <a:endParaRPr lang="fr-CA"/>
+          </a:p>
+        </p:txBody>
+      </p:sp>
+      <p:sp>
+        <p:nvSpPr>
+          <p:cNvPr id="4" name="Espace réservé du numéro de diapositive 3">
+            <a:extLst>
+              <a:ext uri="{FF2B5EF4-FFF2-40B4-BE49-F238E27FC236}">
+                <a16:creationId xmlns:a16="http://schemas.microsoft.com/office/drawing/2014/main" id="{F590E14E-F2E8-4389-ECA5-40EB7F163A6C}"/>
+              </a:ext>
+            </a:extLst>
+          </p:cNvPr>
+          <p:cNvSpPr>
+            <a:spLocks noGrp="1"/>
+          </p:cNvSpPr>
+          <p:nvPr>
+            <p:ph type="sldNum" sz="quarter" idx="5"/>
+          </p:nvPr>
+        </p:nvSpPr>
+        <p:spPr/>
+        <p:txBody>
+          <a:bodyPr/>
+          <a:lstStyle/>
+          <a:p>
+            <a:fld id="{58AF5C23-74FF-4D96-A9A6-9BDE17B3CC18}" type="slidenum">
+              <a:rPr lang="fr-CA" smtClean="0"/>
+              <a:t>10</a:t>
+            </a:fld>
+            <a:endParaRPr lang="fr-CA"/>
+          </a:p>
+        </p:txBody>
+      </p:sp>
+    </p:spTree>
+    <p:extLst>
+      <p:ext uri="{BB962C8B-B14F-4D97-AF65-F5344CB8AC3E}">
+        <p14:creationId xmlns:p14="http://schemas.microsoft.com/office/powerpoint/2010/main" val="2217068579"/>
       </p:ext>
     </p:extLst>
   </p:cSld>
@@ -833,7 +1601,7 @@
           <a:p>
             <a:fld id="{7D80224B-D26D-4BBF-93A6-090E4F9F4A69}" type="datetimeFigureOut">
               <a:rPr lang="fr-CA" smtClean="0"/>
-              <a:t>2026-05-07</a:t>
+              <a:t>2026-05-08</a:t>
             </a:fld>
             <a:endParaRPr lang="fr-CA"/>
           </a:p>
@@ -1033,7 +1801,7 @@
           <a:p>
             <a:fld id="{7D80224B-D26D-4BBF-93A6-090E4F9F4A69}" type="datetimeFigureOut">
               <a:rPr lang="fr-CA" smtClean="0"/>
-              <a:t>2026-05-07</a:t>
+              <a:t>2026-05-08</a:t>
             </a:fld>
             <a:endParaRPr lang="fr-CA"/>
           </a:p>
@@ -1243,7 +2011,7 @@
           <a:p>
             <a:fld id="{7D80224B-D26D-4BBF-93A6-090E4F9F4A69}" type="datetimeFigureOut">
               <a:rPr lang="fr-CA" smtClean="0"/>
-              <a:t>2026-05-07</a:t>
+              <a:t>2026-05-08</a:t>
             </a:fld>
             <a:endParaRPr lang="fr-CA"/>
           </a:p>
@@ -1443,7 +2211,7 @@
           <a:p>
             <a:fld id="{7D80224B-D26D-4BBF-93A6-090E4F9F4A69}" type="datetimeFigureOut">
               <a:rPr lang="fr-CA" smtClean="0"/>
-              <a:t>2026-05-07</a:t>
+              <a:t>2026-05-08</a:t>
             </a:fld>
             <a:endParaRPr lang="fr-CA"/>
           </a:p>
@@ -1719,7 +2487,7 @@
           <a:p>
             <a:fld id="{7D80224B-D26D-4BBF-93A6-090E4F9F4A69}" type="datetimeFigureOut">
               <a:rPr lang="fr-CA" smtClean="0"/>
-              <a:t>2026-05-07</a:t>
+              <a:t>2026-05-08</a:t>
             </a:fld>
             <a:endParaRPr lang="fr-CA"/>
           </a:p>
@@ -1987,7 +2755,7 @@
           <a:p>
             <a:fld id="{7D80224B-D26D-4BBF-93A6-090E4F9F4A69}" type="datetimeFigureOut">
               <a:rPr lang="fr-CA" smtClean="0"/>
-              <a:t>2026-05-07</a:t>
+              <a:t>2026-05-08</a:t>
             </a:fld>
             <a:endParaRPr lang="fr-CA"/>
           </a:p>
@@ -2402,7 +3170,7 @@
           <a:p>
             <a:fld id="{7D80224B-D26D-4BBF-93A6-090E4F9F4A69}" type="datetimeFigureOut">
               <a:rPr lang="fr-CA" smtClean="0"/>
-              <a:t>2026-05-07</a:t>
+              <a:t>2026-05-08</a:t>
             </a:fld>
             <a:endParaRPr lang="fr-CA"/>
           </a:p>
@@ -2544,7 +3312,7 @@
           <a:p>
             <a:fld id="{7D80224B-D26D-4BBF-93A6-090E4F9F4A69}" type="datetimeFigureOut">
               <a:rPr lang="fr-CA" smtClean="0"/>
-              <a:t>2026-05-07</a:t>
+              <a:t>2026-05-08</a:t>
             </a:fld>
             <a:endParaRPr lang="fr-CA"/>
           </a:p>
@@ -2657,7 +3425,7 @@
           <a:p>
             <a:fld id="{7D80224B-D26D-4BBF-93A6-090E4F9F4A69}" type="datetimeFigureOut">
               <a:rPr lang="fr-CA" smtClean="0"/>
-              <a:t>2026-05-07</a:t>
+              <a:t>2026-05-08</a:t>
             </a:fld>
             <a:endParaRPr lang="fr-CA"/>
           </a:p>
@@ -2970,7 +3738,7 @@
           <a:p>
             <a:fld id="{7D80224B-D26D-4BBF-93A6-090E4F9F4A69}" type="datetimeFigureOut">
               <a:rPr lang="fr-CA" smtClean="0"/>
-              <a:t>2026-05-07</a:t>
+              <a:t>2026-05-08</a:t>
             </a:fld>
             <a:endParaRPr lang="fr-CA"/>
           </a:p>
@@ -3259,7 +4027,7 @@
           <a:p>
             <a:fld id="{7D80224B-D26D-4BBF-93A6-090E4F9F4A69}" type="datetimeFigureOut">
               <a:rPr lang="fr-CA" smtClean="0"/>
-              <a:t>2026-05-07</a:t>
+              <a:t>2026-05-08</a:t>
             </a:fld>
             <a:endParaRPr lang="fr-CA"/>
           </a:p>
@@ -3502,7 +4270,7 @@
           <a:p>
             <a:fld id="{7D80224B-D26D-4BBF-93A6-090E4F9F4A69}" type="datetimeFigureOut">
               <a:rPr lang="fr-CA" smtClean="0"/>
-              <a:t>2026-05-07</a:t>
+              <a:t>2026-05-08</a:t>
             </a:fld>
             <a:endParaRPr lang="fr-CA"/>
           </a:p>
@@ -4227,7 +4995,2876 @@
 </p:sld>
 </file>
 
+<file path=ppt/slides/slide10.xml><?xml version="1.0" encoding="utf-8"?>
+<p:sld xmlns:a="http://schemas.openxmlformats.org/drawingml/2006/main" xmlns:r="http://schemas.openxmlformats.org/officeDocument/2006/relationships" xmlns:p="http://schemas.openxmlformats.org/presentationml/2006/main">
+  <p:cSld>
+    <p:spTree>
+      <p:nvGrpSpPr>
+        <p:cNvPr id="1" name="">
+          <a:extLst>
+            <a:ext uri="{FF2B5EF4-FFF2-40B4-BE49-F238E27FC236}">
+              <a16:creationId xmlns:a16="http://schemas.microsoft.com/office/drawing/2014/main" id="{9C15F07F-FCB6-4DF6-6C38-0DF6F744C7DD}"/>
+            </a:ext>
+          </a:extLst>
+        </p:cNvPr>
+        <p:cNvGrpSpPr/>
+        <p:nvPr/>
+      </p:nvGrpSpPr>
+      <p:grpSpPr>
+        <a:xfrm>
+          <a:off x="0" y="0"/>
+          <a:ext cx="0" cy="0"/>
+          <a:chOff x="0" y="0"/>
+          <a:chExt cx="0" cy="0"/>
+        </a:xfrm>
+      </p:grpSpPr>
+      <p:pic>
+        <p:nvPicPr>
+          <p:cNvPr id="8" name="Image 7">
+            <a:extLst>
+              <a:ext uri="{FF2B5EF4-FFF2-40B4-BE49-F238E27FC236}">
+                <a16:creationId xmlns:a16="http://schemas.microsoft.com/office/drawing/2014/main" id="{A88E2000-FCC5-9C7E-9336-C68C34E4CAEC}"/>
+              </a:ext>
+            </a:extLst>
+          </p:cNvPr>
+          <p:cNvPicPr>
+            <a:picLocks noChangeAspect="1"/>
+          </p:cNvPicPr>
+          <p:nvPr>
+            <p:custDataLst>
+              <p:tags r:id="rId1"/>
+            </p:custDataLst>
+          </p:nvPr>
+        </p:nvPicPr>
+        <p:blipFill>
+          <a:blip r:embed="rId6"/>
+          <a:srcRect l="4895" t="76969" r="85984"/>
+          <a:stretch>
+            <a:fillRect/>
+          </a:stretch>
+        </p:blipFill>
+        <p:spPr>
+          <a:xfrm>
+            <a:off x="0" y="0"/>
+            <a:ext cx="12192000" cy="6858000"/>
+          </a:xfrm>
+          <a:prstGeom prst="rect">
+            <a:avLst/>
+          </a:prstGeom>
+        </p:spPr>
+      </p:pic>
+      <p:sp>
+        <p:nvSpPr>
+          <p:cNvPr id="18" name="Rectangle 17">
+            <a:extLst>
+              <a:ext uri="{FF2B5EF4-FFF2-40B4-BE49-F238E27FC236}">
+                <a16:creationId xmlns:a16="http://schemas.microsoft.com/office/drawing/2014/main" id="{2E184E5D-55D4-E061-2AB9-CA5A3AB82955}"/>
+              </a:ext>
+            </a:extLst>
+          </p:cNvPr>
+          <p:cNvSpPr/>
+          <p:nvPr>
+            <p:custDataLst>
+              <p:tags r:id="rId2"/>
+            </p:custDataLst>
+          </p:nvPr>
+        </p:nvSpPr>
+        <p:spPr>
+          <a:xfrm>
+            <a:off x="245806" y="403123"/>
+            <a:ext cx="11759381" cy="6194321"/>
+          </a:xfrm>
+          <a:prstGeom prst="rect">
+            <a:avLst/>
+          </a:prstGeom>
+          <a:noFill/>
+          <a:ln>
+            <a:solidFill>
+              <a:schemeClr val="bg1"/>
+            </a:solidFill>
+          </a:ln>
+        </p:spPr>
+        <p:style>
+          <a:lnRef idx="2">
+            <a:schemeClr val="accent1">
+              <a:shade val="15000"/>
+            </a:schemeClr>
+          </a:lnRef>
+          <a:fillRef idx="1">
+            <a:schemeClr val="accent1"/>
+          </a:fillRef>
+          <a:effectRef idx="0">
+            <a:schemeClr val="accent1"/>
+          </a:effectRef>
+          <a:fontRef idx="minor">
+            <a:schemeClr val="lt1"/>
+          </a:fontRef>
+        </p:style>
+        <p:txBody>
+          <a:bodyPr rtlCol="0" anchor="ctr"/>
+          <a:lstStyle/>
+          <a:p>
+            <a:pPr algn="ctr"/>
+            <a:endParaRPr lang="fr-CA"/>
+          </a:p>
+        </p:txBody>
+      </p:sp>
+      <p:pic>
+        <p:nvPicPr>
+          <p:cNvPr id="6" name="Image 5">
+            <a:extLst>
+              <a:ext uri="{FF2B5EF4-FFF2-40B4-BE49-F238E27FC236}">
+                <a16:creationId xmlns:a16="http://schemas.microsoft.com/office/drawing/2014/main" id="{8AE81A5D-FF80-6FDF-7410-23997F36BD74}"/>
+              </a:ext>
+            </a:extLst>
+          </p:cNvPr>
+          <p:cNvPicPr>
+            <a:picLocks noChangeAspect="1"/>
+          </p:cNvPicPr>
+          <p:nvPr/>
+        </p:nvPicPr>
+        <p:blipFill>
+          <a:blip r:embed="rId7">
+            <a:duotone>
+              <a:schemeClr val="bg2">
+                <a:shade val="45000"/>
+                <a:satMod val="135000"/>
+              </a:schemeClr>
+              <a:prstClr val="white"/>
+            </a:duotone>
+            <a:extLst>
+              <a:ext uri="{BEBA8EAE-BF5A-486C-A8C5-ECC9F3942E4B}">
+                <a14:imgProps xmlns:a14="http://schemas.microsoft.com/office/drawing/2010/main">
+                  <a14:imgLayer r:embed="rId8">
+                    <a14:imgEffect>
+                      <a14:colorTemperature colorTemp="4700"/>
+                    </a14:imgEffect>
+                    <a14:imgEffect>
+                      <a14:saturation sat="0"/>
+                    </a14:imgEffect>
+                  </a14:imgLayer>
+                </a14:imgProps>
+              </a:ext>
+            </a:extLst>
+          </a:blip>
+          <a:srcRect l="1287" t="17358" r="73201" b="14299"/>
+          <a:stretch>
+            <a:fillRect/>
+          </a:stretch>
+        </p:blipFill>
+        <p:spPr>
+          <a:xfrm rot="10800000">
+            <a:off x="11433373" y="6098266"/>
+            <a:ext cx="758627" cy="759734"/>
+          </a:xfrm>
+          <a:prstGeom prst="rect">
+            <a:avLst/>
+          </a:prstGeom>
+        </p:spPr>
+      </p:pic>
+      <p:pic>
+        <p:nvPicPr>
+          <p:cNvPr id="5" name="Image 4">
+            <a:extLst>
+              <a:ext uri="{FF2B5EF4-FFF2-40B4-BE49-F238E27FC236}">
+                <a16:creationId xmlns:a16="http://schemas.microsoft.com/office/drawing/2014/main" id="{0DECEA10-B65A-4773-B5B7-114BBD2C1A07}"/>
+              </a:ext>
+            </a:extLst>
+          </p:cNvPr>
+          <p:cNvPicPr>
+            <a:picLocks noChangeAspect="1"/>
+          </p:cNvPicPr>
+          <p:nvPr/>
+        </p:nvPicPr>
+        <p:blipFill>
+          <a:blip r:embed="rId9"/>
+          <a:stretch>
+            <a:fillRect/>
+          </a:stretch>
+        </p:blipFill>
+        <p:spPr>
+          <a:xfrm>
+            <a:off x="1776083" y="120059"/>
+            <a:ext cx="8639833" cy="860963"/>
+          </a:xfrm>
+          <a:prstGeom prst="rect">
+            <a:avLst/>
+          </a:prstGeom>
+        </p:spPr>
+      </p:pic>
+      <p:pic>
+        <p:nvPicPr>
+          <p:cNvPr id="3" name="Image 2">
+            <a:extLst>
+              <a:ext uri="{FF2B5EF4-FFF2-40B4-BE49-F238E27FC236}">
+                <a16:creationId xmlns:a16="http://schemas.microsoft.com/office/drawing/2014/main" id="{6A2B7228-EE68-9774-1222-FBF455600B6C}"/>
+              </a:ext>
+            </a:extLst>
+          </p:cNvPr>
+          <p:cNvPicPr>
+            <a:picLocks noChangeAspect="1"/>
+          </p:cNvPicPr>
+          <p:nvPr/>
+        </p:nvPicPr>
+        <p:blipFill>
+          <a:blip r:embed="rId7">
+            <a:duotone>
+              <a:schemeClr val="bg2">
+                <a:shade val="45000"/>
+                <a:satMod val="135000"/>
+              </a:schemeClr>
+              <a:prstClr val="white"/>
+            </a:duotone>
+            <a:extLst>
+              <a:ext uri="{BEBA8EAE-BF5A-486C-A8C5-ECC9F3942E4B}">
+                <a14:imgProps xmlns:a14="http://schemas.microsoft.com/office/drawing/2010/main">
+                  <a14:imgLayer r:embed="rId8">
+                    <a14:imgEffect>
+                      <a14:colorTemperature colorTemp="4700"/>
+                    </a14:imgEffect>
+                    <a14:imgEffect>
+                      <a14:saturation sat="0"/>
+                    </a14:imgEffect>
+                  </a14:imgLayer>
+                </a14:imgProps>
+              </a:ext>
+            </a:extLst>
+          </a:blip>
+          <a:srcRect l="1287" t="17358" r="73201" b="14299"/>
+          <a:stretch>
+            <a:fillRect/>
+          </a:stretch>
+        </p:blipFill>
+        <p:spPr>
+          <a:xfrm>
+            <a:off x="0" y="6098266"/>
+            <a:ext cx="758627" cy="759734"/>
+          </a:xfrm>
+          <a:prstGeom prst="rect">
+            <a:avLst/>
+          </a:prstGeom>
+        </p:spPr>
+      </p:pic>
+      <p:sp>
+        <p:nvSpPr>
+          <p:cNvPr id="4" name="Rectangle 3">
+            <a:extLst>
+              <a:ext uri="{FF2B5EF4-FFF2-40B4-BE49-F238E27FC236}">
+                <a16:creationId xmlns:a16="http://schemas.microsoft.com/office/drawing/2014/main" id="{285BEB37-42C3-054F-CA2C-64D73259005F}"/>
+              </a:ext>
+            </a:extLst>
+          </p:cNvPr>
+          <p:cNvSpPr/>
+          <p:nvPr>
+            <p:custDataLst>
+              <p:tags r:id="rId3"/>
+            </p:custDataLst>
+          </p:nvPr>
+        </p:nvSpPr>
+        <p:spPr>
+          <a:xfrm>
+            <a:off x="655646" y="703384"/>
+            <a:ext cx="10880706" cy="942792"/>
+          </a:xfrm>
+          <a:prstGeom prst="rect">
+            <a:avLst/>
+          </a:prstGeom>
+          <a:noFill/>
+          <a:ln>
+            <a:noFill/>
+          </a:ln>
+        </p:spPr>
+        <p:style>
+          <a:lnRef idx="2">
+            <a:schemeClr val="accent1">
+              <a:shade val="15000"/>
+            </a:schemeClr>
+          </a:lnRef>
+          <a:fillRef idx="1">
+            <a:schemeClr val="accent1"/>
+          </a:fillRef>
+          <a:effectRef idx="0">
+            <a:schemeClr val="accent1"/>
+          </a:effectRef>
+          <a:fontRef idx="minor">
+            <a:schemeClr val="lt1"/>
+          </a:fontRef>
+        </p:style>
+        <p:txBody>
+          <a:bodyPr rtlCol="0" anchor="ctr"/>
+          <a:lstStyle/>
+          <a:p>
+            <a:pPr algn="ctr"/>
+            <a:r>
+              <a:rPr lang="fr-CA" sz="3000">
+                <a:latin typeface="Pixel Operator 8" panose="02000503000000000000" pitchFamily="2" charset="0"/>
+              </a:rPr>
+              <a:t>Difficultés rencontrées par Alexis :</a:t>
+            </a:r>
+          </a:p>
+        </p:txBody>
+      </p:sp>
+      <p:pic>
+        <p:nvPicPr>
+          <p:cNvPr id="10" name="Image 9">
+            <a:extLst>
+              <a:ext uri="{FF2B5EF4-FFF2-40B4-BE49-F238E27FC236}">
+                <a16:creationId xmlns:a16="http://schemas.microsoft.com/office/drawing/2014/main" id="{EA923406-5194-976B-AB3A-26ED97E9CA4D}"/>
+              </a:ext>
+            </a:extLst>
+          </p:cNvPr>
+          <p:cNvPicPr>
+            <a:picLocks noChangeAspect="1"/>
+          </p:cNvPicPr>
+          <p:nvPr/>
+        </p:nvPicPr>
+        <p:blipFill>
+          <a:blip r:embed="rId10"/>
+          <a:srcRect r="74656"/>
+          <a:stretch>
+            <a:fillRect/>
+          </a:stretch>
+        </p:blipFill>
+        <p:spPr>
+          <a:xfrm>
+            <a:off x="655646" y="1533447"/>
+            <a:ext cx="3169102" cy="515852"/>
+          </a:xfrm>
+          <a:prstGeom prst="rect">
+            <a:avLst/>
+          </a:prstGeom>
+        </p:spPr>
+      </p:pic>
+      <p:pic>
+        <p:nvPicPr>
+          <p:cNvPr id="11" name="Image 10">
+            <a:extLst>
+              <a:ext uri="{FF2B5EF4-FFF2-40B4-BE49-F238E27FC236}">
+                <a16:creationId xmlns:a16="http://schemas.microsoft.com/office/drawing/2014/main" id="{107EBA50-2F18-8985-80D1-0D035216F533}"/>
+              </a:ext>
+            </a:extLst>
+          </p:cNvPr>
+          <p:cNvPicPr>
+            <a:picLocks noChangeAspect="1"/>
+          </p:cNvPicPr>
+          <p:nvPr/>
+        </p:nvPicPr>
+        <p:blipFill>
+          <a:blip r:embed="rId10"/>
+          <a:srcRect l="89076" t="-601" r="-163" b="601"/>
+          <a:stretch>
+            <a:fillRect/>
+          </a:stretch>
+        </p:blipFill>
+        <p:spPr>
+          <a:xfrm>
+            <a:off x="3824748" y="1528360"/>
+            <a:ext cx="1386348" cy="515852"/>
+          </a:xfrm>
+          <a:prstGeom prst="rect">
+            <a:avLst/>
+          </a:prstGeom>
+        </p:spPr>
+      </p:pic>
+      <p:pic>
+        <p:nvPicPr>
+          <p:cNvPr id="12" name="Image 11">
+            <a:extLst>
+              <a:ext uri="{FF2B5EF4-FFF2-40B4-BE49-F238E27FC236}">
+                <a16:creationId xmlns:a16="http://schemas.microsoft.com/office/drawing/2014/main" id="{F7B079DA-BC97-C9E9-3929-6A416FF61D8A}"/>
+              </a:ext>
+            </a:extLst>
+          </p:cNvPr>
+          <p:cNvPicPr>
+            <a:picLocks noChangeAspect="1"/>
+          </p:cNvPicPr>
+          <p:nvPr/>
+        </p:nvPicPr>
+        <p:blipFill>
+          <a:blip r:embed="rId11"/>
+          <a:srcRect l="19752" t="3394" r="36382"/>
+          <a:stretch>
+            <a:fillRect/>
+          </a:stretch>
+        </p:blipFill>
+        <p:spPr>
+          <a:xfrm>
+            <a:off x="9744842" y="1528360"/>
+            <a:ext cx="2037316" cy="2251012"/>
+          </a:xfrm>
+          <a:prstGeom prst="rect">
+            <a:avLst/>
+          </a:prstGeom>
+        </p:spPr>
+      </p:pic>
+      <p:pic>
+        <p:nvPicPr>
+          <p:cNvPr id="16" name="Image 15">
+            <a:extLst>
+              <a:ext uri="{FF2B5EF4-FFF2-40B4-BE49-F238E27FC236}">
+                <a16:creationId xmlns:a16="http://schemas.microsoft.com/office/drawing/2014/main" id="{EC013560-BA6B-FC5B-D98C-81A9851A51AE}"/>
+              </a:ext>
+            </a:extLst>
+          </p:cNvPr>
+          <p:cNvPicPr>
+            <a:picLocks noChangeAspect="1"/>
+          </p:cNvPicPr>
+          <p:nvPr/>
+        </p:nvPicPr>
+        <p:blipFill>
+          <a:blip r:embed="rId12"/>
+          <a:srcRect r="3155"/>
+          <a:stretch>
+            <a:fillRect/>
+          </a:stretch>
+        </p:blipFill>
+        <p:spPr>
+          <a:xfrm>
+            <a:off x="655645" y="2125867"/>
+            <a:ext cx="8721569" cy="1728378"/>
+          </a:xfrm>
+          <a:prstGeom prst="rect">
+            <a:avLst/>
+          </a:prstGeom>
+        </p:spPr>
+      </p:pic>
+      <p:pic>
+        <p:nvPicPr>
+          <p:cNvPr id="22" name="Image 21">
+            <a:extLst>
+              <a:ext uri="{FF2B5EF4-FFF2-40B4-BE49-F238E27FC236}">
+                <a16:creationId xmlns:a16="http://schemas.microsoft.com/office/drawing/2014/main" id="{981C36D8-C375-EA7A-C8CB-9EB5949065B0}"/>
+              </a:ext>
+            </a:extLst>
+          </p:cNvPr>
+          <p:cNvPicPr>
+            <a:picLocks noChangeAspect="1"/>
+          </p:cNvPicPr>
+          <p:nvPr/>
+        </p:nvPicPr>
+        <p:blipFill>
+          <a:blip r:embed="rId13"/>
+          <a:stretch>
+            <a:fillRect/>
+          </a:stretch>
+        </p:blipFill>
+        <p:spPr>
+          <a:xfrm>
+            <a:off x="3824748" y="4257368"/>
+            <a:ext cx="6812589" cy="1728378"/>
+          </a:xfrm>
+          <a:prstGeom prst="rect">
+            <a:avLst/>
+          </a:prstGeom>
+        </p:spPr>
+      </p:pic>
+      <p:pic>
+        <p:nvPicPr>
+          <p:cNvPr id="24" name="Image 23">
+            <a:extLst>
+              <a:ext uri="{FF2B5EF4-FFF2-40B4-BE49-F238E27FC236}">
+                <a16:creationId xmlns:a16="http://schemas.microsoft.com/office/drawing/2014/main" id="{E191DD28-7061-8D63-756B-AAFC28CCB024}"/>
+              </a:ext>
+            </a:extLst>
+          </p:cNvPr>
+          <p:cNvPicPr>
+            <a:picLocks noChangeAspect="1"/>
+          </p:cNvPicPr>
+          <p:nvPr/>
+        </p:nvPicPr>
+        <p:blipFill>
+          <a:blip r:embed="rId14"/>
+          <a:stretch>
+            <a:fillRect/>
+          </a:stretch>
+        </p:blipFill>
+        <p:spPr>
+          <a:xfrm>
+            <a:off x="655645" y="4257366"/>
+            <a:ext cx="2958576" cy="1728377"/>
+          </a:xfrm>
+          <a:prstGeom prst="rect">
+            <a:avLst/>
+          </a:prstGeom>
+        </p:spPr>
+      </p:pic>
+    </p:spTree>
+    <p:extLst>
+      <p:ext uri="{BB962C8B-B14F-4D97-AF65-F5344CB8AC3E}">
+        <p14:creationId xmlns:p14="http://schemas.microsoft.com/office/powerpoint/2010/main" val="1151722994"/>
+      </p:ext>
+    </p:extLst>
+  </p:cSld>
+  <p:clrMapOvr>
+    <a:masterClrMapping/>
+  </p:clrMapOvr>
+</p:sld>
+</file>
+
+<file path=ppt/slides/slide11.xml><?xml version="1.0" encoding="utf-8"?>
+<p:sld xmlns:a="http://schemas.openxmlformats.org/drawingml/2006/main" xmlns:r="http://schemas.openxmlformats.org/officeDocument/2006/relationships" xmlns:p="http://schemas.openxmlformats.org/presentationml/2006/main">
+  <p:cSld>
+    <p:spTree>
+      <p:nvGrpSpPr>
+        <p:cNvPr id="1" name="">
+          <a:extLst>
+            <a:ext uri="{FF2B5EF4-FFF2-40B4-BE49-F238E27FC236}">
+              <a16:creationId xmlns:a16="http://schemas.microsoft.com/office/drawing/2014/main" id="{A65196FC-0B46-0EDB-5AEC-AA3D5581E253}"/>
+            </a:ext>
+          </a:extLst>
+        </p:cNvPr>
+        <p:cNvGrpSpPr/>
+        <p:nvPr/>
+      </p:nvGrpSpPr>
+      <p:grpSpPr>
+        <a:xfrm>
+          <a:off x="0" y="0"/>
+          <a:ext cx="0" cy="0"/>
+          <a:chOff x="0" y="0"/>
+          <a:chExt cx="0" cy="0"/>
+        </a:xfrm>
+      </p:grpSpPr>
+      <p:pic>
+        <p:nvPicPr>
+          <p:cNvPr id="8" name="Image 7">
+            <a:extLst>
+              <a:ext uri="{FF2B5EF4-FFF2-40B4-BE49-F238E27FC236}">
+                <a16:creationId xmlns:a16="http://schemas.microsoft.com/office/drawing/2014/main" id="{A5FBD2F9-C621-09DC-EFDD-0496965C5F24}"/>
+              </a:ext>
+            </a:extLst>
+          </p:cNvPr>
+          <p:cNvPicPr>
+            <a:picLocks noChangeAspect="1"/>
+          </p:cNvPicPr>
+          <p:nvPr>
+            <p:custDataLst>
+              <p:tags r:id="rId1"/>
+            </p:custDataLst>
+          </p:nvPr>
+        </p:nvPicPr>
+        <p:blipFill>
+          <a:blip r:embed="rId5"/>
+          <a:srcRect l="4895" t="76969" r="85984"/>
+          <a:stretch>
+            <a:fillRect/>
+          </a:stretch>
+        </p:blipFill>
+        <p:spPr>
+          <a:xfrm>
+            <a:off x="0" y="71283"/>
+            <a:ext cx="12192000" cy="6858000"/>
+          </a:xfrm>
+          <a:prstGeom prst="rect">
+            <a:avLst/>
+          </a:prstGeom>
+        </p:spPr>
+      </p:pic>
+      <p:sp>
+        <p:nvSpPr>
+          <p:cNvPr id="18" name="Rectangle 17">
+            <a:extLst>
+              <a:ext uri="{FF2B5EF4-FFF2-40B4-BE49-F238E27FC236}">
+                <a16:creationId xmlns:a16="http://schemas.microsoft.com/office/drawing/2014/main" id="{0BC01DBA-B6CC-8FF8-457B-86E0EB52E851}"/>
+              </a:ext>
+            </a:extLst>
+          </p:cNvPr>
+          <p:cNvSpPr/>
+          <p:nvPr>
+            <p:custDataLst>
+              <p:tags r:id="rId2"/>
+            </p:custDataLst>
+          </p:nvPr>
+        </p:nvSpPr>
+        <p:spPr>
+          <a:xfrm>
+            <a:off x="245806" y="403123"/>
+            <a:ext cx="11759381" cy="6194321"/>
+          </a:xfrm>
+          <a:prstGeom prst="rect">
+            <a:avLst/>
+          </a:prstGeom>
+          <a:noFill/>
+          <a:ln>
+            <a:solidFill>
+              <a:schemeClr val="bg1"/>
+            </a:solidFill>
+          </a:ln>
+        </p:spPr>
+        <p:style>
+          <a:lnRef idx="2">
+            <a:schemeClr val="accent1">
+              <a:shade val="15000"/>
+            </a:schemeClr>
+          </a:lnRef>
+          <a:fillRef idx="1">
+            <a:schemeClr val="accent1"/>
+          </a:fillRef>
+          <a:effectRef idx="0">
+            <a:schemeClr val="accent1"/>
+          </a:effectRef>
+          <a:fontRef idx="minor">
+            <a:schemeClr val="lt1"/>
+          </a:fontRef>
+        </p:style>
+        <p:txBody>
+          <a:bodyPr rtlCol="0" anchor="ctr"/>
+          <a:lstStyle/>
+          <a:p>
+            <a:pPr algn="ctr"/>
+            <a:endParaRPr lang="fr-CA"/>
+          </a:p>
+        </p:txBody>
+      </p:sp>
+      <p:pic>
+        <p:nvPicPr>
+          <p:cNvPr id="5" name="Image 4">
+            <a:extLst>
+              <a:ext uri="{FF2B5EF4-FFF2-40B4-BE49-F238E27FC236}">
+                <a16:creationId xmlns:a16="http://schemas.microsoft.com/office/drawing/2014/main" id="{9617497B-C0AA-5E50-35E0-B4FFA39CDBBF}"/>
+              </a:ext>
+            </a:extLst>
+          </p:cNvPr>
+          <p:cNvPicPr>
+            <a:picLocks noChangeAspect="1"/>
+          </p:cNvPicPr>
+          <p:nvPr/>
+        </p:nvPicPr>
+        <p:blipFill>
+          <a:blip r:embed="rId6"/>
+          <a:stretch>
+            <a:fillRect/>
+          </a:stretch>
+        </p:blipFill>
+        <p:spPr>
+          <a:xfrm>
+            <a:off x="1776083" y="120059"/>
+            <a:ext cx="8639833" cy="860963"/>
+          </a:xfrm>
+          <a:prstGeom prst="rect">
+            <a:avLst/>
+          </a:prstGeom>
+        </p:spPr>
+      </p:pic>
+      <p:pic>
+        <p:nvPicPr>
+          <p:cNvPr id="3" name="Image 2">
+            <a:extLst>
+              <a:ext uri="{FF2B5EF4-FFF2-40B4-BE49-F238E27FC236}">
+                <a16:creationId xmlns:a16="http://schemas.microsoft.com/office/drawing/2014/main" id="{D02D078E-DA87-D5DC-C22F-5DC46374FF16}"/>
+              </a:ext>
+            </a:extLst>
+          </p:cNvPr>
+          <p:cNvPicPr>
+            <a:picLocks noChangeAspect="1"/>
+          </p:cNvPicPr>
+          <p:nvPr/>
+        </p:nvPicPr>
+        <p:blipFill>
+          <a:blip r:embed="rId7">
+            <a:duotone>
+              <a:schemeClr val="bg2">
+                <a:shade val="45000"/>
+                <a:satMod val="135000"/>
+              </a:schemeClr>
+              <a:prstClr val="white"/>
+            </a:duotone>
+            <a:extLst>
+              <a:ext uri="{BEBA8EAE-BF5A-486C-A8C5-ECC9F3942E4B}">
+                <a14:imgProps xmlns:a14="http://schemas.microsoft.com/office/drawing/2010/main">
+                  <a14:imgLayer r:embed="rId8">
+                    <a14:imgEffect>
+                      <a14:colorTemperature colorTemp="4700"/>
+                    </a14:imgEffect>
+                    <a14:imgEffect>
+                      <a14:saturation sat="0"/>
+                    </a14:imgEffect>
+                  </a14:imgLayer>
+                </a14:imgProps>
+              </a:ext>
+            </a:extLst>
+          </a:blip>
+          <a:srcRect l="1287" t="17358" r="73201" b="14299"/>
+          <a:stretch>
+            <a:fillRect/>
+          </a:stretch>
+        </p:blipFill>
+        <p:spPr>
+          <a:xfrm>
+            <a:off x="0" y="6098266"/>
+            <a:ext cx="758627" cy="759734"/>
+          </a:xfrm>
+          <a:prstGeom prst="rect">
+            <a:avLst/>
+          </a:prstGeom>
+        </p:spPr>
+      </p:pic>
+      <p:sp>
+        <p:nvSpPr>
+          <p:cNvPr id="7" name="Rectangle 6">
+            <a:extLst>
+              <a:ext uri="{FF2B5EF4-FFF2-40B4-BE49-F238E27FC236}">
+                <a16:creationId xmlns:a16="http://schemas.microsoft.com/office/drawing/2014/main" id="{1770D01E-791E-5D48-EBA3-103791B7F16A}"/>
+              </a:ext>
+            </a:extLst>
+          </p:cNvPr>
+          <p:cNvSpPr/>
+          <p:nvPr>
+            <p:custDataLst>
+              <p:tags r:id="rId3"/>
+            </p:custDataLst>
+          </p:nvPr>
+        </p:nvSpPr>
+        <p:spPr>
+          <a:xfrm>
+            <a:off x="450725" y="700864"/>
+            <a:ext cx="11290548" cy="942792"/>
+          </a:xfrm>
+          <a:prstGeom prst="rect">
+            <a:avLst/>
+          </a:prstGeom>
+          <a:noFill/>
+          <a:ln>
+            <a:noFill/>
+          </a:ln>
+        </p:spPr>
+        <p:style>
+          <a:lnRef idx="2">
+            <a:schemeClr val="accent1">
+              <a:shade val="15000"/>
+            </a:schemeClr>
+          </a:lnRef>
+          <a:fillRef idx="1">
+            <a:schemeClr val="accent1"/>
+          </a:fillRef>
+          <a:effectRef idx="0">
+            <a:schemeClr val="accent1"/>
+          </a:effectRef>
+          <a:fontRef idx="minor">
+            <a:schemeClr val="lt1"/>
+          </a:fontRef>
+        </p:style>
+        <p:txBody>
+          <a:bodyPr rtlCol="0" anchor="ctr"/>
+          <a:lstStyle/>
+          <a:p>
+            <a:pPr algn="ctr"/>
+            <a:r>
+              <a:rPr lang="fr-CA" sz="3000">
+                <a:latin typeface="Pixel Operator 8" panose="02000503000000000000" pitchFamily="2" charset="0"/>
+              </a:rPr>
+              <a:t>Difficultés rencontrées par Nicolas :</a:t>
+            </a:r>
+          </a:p>
+        </p:txBody>
+      </p:sp>
+      <p:pic>
+        <p:nvPicPr>
+          <p:cNvPr id="9" name="Image 8">
+            <a:extLst>
+              <a:ext uri="{FF2B5EF4-FFF2-40B4-BE49-F238E27FC236}">
+                <a16:creationId xmlns:a16="http://schemas.microsoft.com/office/drawing/2014/main" id="{56585F7A-6B36-23D8-D95B-0309E7A1F498}"/>
+              </a:ext>
+            </a:extLst>
+          </p:cNvPr>
+          <p:cNvPicPr>
+            <a:picLocks noChangeAspect="1"/>
+          </p:cNvPicPr>
+          <p:nvPr/>
+        </p:nvPicPr>
+        <p:blipFill>
+          <a:blip r:embed="rId9"/>
+          <a:stretch>
+            <a:fillRect/>
+          </a:stretch>
+        </p:blipFill>
+        <p:spPr>
+          <a:xfrm>
+            <a:off x="4789448" y="2639938"/>
+            <a:ext cx="6682140" cy="1578123"/>
+          </a:xfrm>
+          <a:prstGeom prst="rect">
+            <a:avLst/>
+          </a:prstGeom>
+        </p:spPr>
+      </p:pic>
+      <p:pic>
+        <p:nvPicPr>
+          <p:cNvPr id="11" name="Image 10">
+            <a:extLst>
+              <a:ext uri="{FF2B5EF4-FFF2-40B4-BE49-F238E27FC236}">
+                <a16:creationId xmlns:a16="http://schemas.microsoft.com/office/drawing/2014/main" id="{9B0BBCF3-31AE-3903-E5AA-46A11F359CB7}"/>
+              </a:ext>
+            </a:extLst>
+          </p:cNvPr>
+          <p:cNvPicPr>
+            <a:picLocks noChangeAspect="1"/>
+          </p:cNvPicPr>
+          <p:nvPr/>
+        </p:nvPicPr>
+        <p:blipFill>
+          <a:blip r:embed="rId10"/>
+          <a:stretch>
+            <a:fillRect/>
+          </a:stretch>
+        </p:blipFill>
+        <p:spPr>
+          <a:xfrm>
+            <a:off x="1357273" y="2972312"/>
+            <a:ext cx="562053" cy="590632"/>
+          </a:xfrm>
+          <a:prstGeom prst="rect">
+            <a:avLst/>
+          </a:prstGeom>
+        </p:spPr>
+      </p:pic>
+      <p:cxnSp>
+        <p:nvCxnSpPr>
+          <p:cNvPr id="13" name="Connecteur droit avec flèche 12">
+            <a:extLst>
+              <a:ext uri="{FF2B5EF4-FFF2-40B4-BE49-F238E27FC236}">
+                <a16:creationId xmlns:a16="http://schemas.microsoft.com/office/drawing/2014/main" id="{EF4A4860-9413-5CD3-F71F-4A8CEFAC3D0D}"/>
+              </a:ext>
+            </a:extLst>
+          </p:cNvPr>
+          <p:cNvCxnSpPr>
+            <a:cxnSpLocks/>
+          </p:cNvCxnSpPr>
+          <p:nvPr/>
+        </p:nvCxnSpPr>
+        <p:spPr>
+          <a:xfrm>
+            <a:off x="1919326" y="3267628"/>
+            <a:ext cx="2870122" cy="0"/>
+          </a:xfrm>
+          <a:prstGeom prst="straightConnector1">
+            <a:avLst/>
+          </a:prstGeom>
+          <a:ln w="76200" cap="flat" cmpd="sng" algn="ctr">
+            <a:solidFill>
+              <a:srgbClr val="FF0000"/>
+            </a:solidFill>
+            <a:prstDash val="solid"/>
+            <a:round/>
+            <a:headEnd type="none" w="med" len="med"/>
+            <a:tailEnd type="arrow" w="med" len="med"/>
+          </a:ln>
+        </p:spPr>
+        <p:style>
+          <a:lnRef idx="0">
+            <a:scrgbClr r="0" g="0" b="0"/>
+          </a:lnRef>
+          <a:fillRef idx="0">
+            <a:scrgbClr r="0" g="0" b="0"/>
+          </a:fillRef>
+          <a:effectRef idx="0">
+            <a:scrgbClr r="0" g="0" b="0"/>
+          </a:effectRef>
+          <a:fontRef idx="minor">
+            <a:schemeClr val="tx1"/>
+          </a:fontRef>
+        </p:style>
+      </p:cxnSp>
+      <p:pic>
+        <p:nvPicPr>
+          <p:cNvPr id="15" name="Image 14">
+            <a:extLst>
+              <a:ext uri="{FF2B5EF4-FFF2-40B4-BE49-F238E27FC236}">
+                <a16:creationId xmlns:a16="http://schemas.microsoft.com/office/drawing/2014/main" id="{EFC8E63B-6B50-F5C5-204C-4AF7F8648A7C}"/>
+              </a:ext>
+            </a:extLst>
+          </p:cNvPr>
+          <p:cNvPicPr>
+            <a:picLocks noChangeAspect="1"/>
+          </p:cNvPicPr>
+          <p:nvPr/>
+        </p:nvPicPr>
+        <p:blipFill>
+          <a:blip r:embed="rId11"/>
+          <a:stretch>
+            <a:fillRect/>
+          </a:stretch>
+        </p:blipFill>
+        <p:spPr>
+          <a:xfrm>
+            <a:off x="758627" y="4997034"/>
+            <a:ext cx="4393653" cy="590623"/>
+          </a:xfrm>
+          <a:prstGeom prst="rect">
+            <a:avLst/>
+          </a:prstGeom>
+        </p:spPr>
+      </p:pic>
+      <p:cxnSp>
+        <p:nvCxnSpPr>
+          <p:cNvPr id="16" name="Connecteur droit avec flèche 15">
+            <a:extLst>
+              <a:ext uri="{FF2B5EF4-FFF2-40B4-BE49-F238E27FC236}">
+                <a16:creationId xmlns:a16="http://schemas.microsoft.com/office/drawing/2014/main" id="{9C0834DD-5521-3CF5-E26B-BC1F435617F8}"/>
+              </a:ext>
+            </a:extLst>
+          </p:cNvPr>
+          <p:cNvCxnSpPr>
+            <a:cxnSpLocks/>
+          </p:cNvCxnSpPr>
+          <p:nvPr/>
+        </p:nvCxnSpPr>
+        <p:spPr>
+          <a:xfrm flipH="1">
+            <a:off x="2955453" y="4218061"/>
+            <a:ext cx="1833995" cy="778973"/>
+          </a:xfrm>
+          <a:prstGeom prst="straightConnector1">
+            <a:avLst/>
+          </a:prstGeom>
+          <a:ln w="76200" cap="flat" cmpd="sng" algn="ctr">
+            <a:solidFill>
+              <a:srgbClr val="FF0000"/>
+            </a:solidFill>
+            <a:prstDash val="solid"/>
+            <a:round/>
+            <a:headEnd type="none" w="med" len="med"/>
+            <a:tailEnd type="arrow" w="med" len="med"/>
+          </a:ln>
+        </p:spPr>
+        <p:style>
+          <a:lnRef idx="0">
+            <a:scrgbClr r="0" g="0" b="0"/>
+          </a:lnRef>
+          <a:fillRef idx="0">
+            <a:scrgbClr r="0" g="0" b="0"/>
+          </a:fillRef>
+          <a:effectRef idx="0">
+            <a:scrgbClr r="0" g="0" b="0"/>
+          </a:effectRef>
+          <a:fontRef idx="minor">
+            <a:schemeClr val="tx1"/>
+          </a:fontRef>
+        </p:style>
+      </p:cxnSp>
+      <p:pic>
+        <p:nvPicPr>
+          <p:cNvPr id="23" name="Image 22">
+            <a:extLst>
+              <a:ext uri="{FF2B5EF4-FFF2-40B4-BE49-F238E27FC236}">
+                <a16:creationId xmlns:a16="http://schemas.microsoft.com/office/drawing/2014/main" id="{C2010731-E551-B7F1-4EFE-411A19C203D7}"/>
+              </a:ext>
+            </a:extLst>
+          </p:cNvPr>
+          <p:cNvPicPr>
+            <a:picLocks noChangeAspect="1"/>
+          </p:cNvPicPr>
+          <p:nvPr/>
+        </p:nvPicPr>
+        <p:blipFill>
+          <a:blip r:embed="rId12"/>
+          <a:stretch>
+            <a:fillRect/>
+          </a:stretch>
+        </p:blipFill>
+        <p:spPr>
+          <a:xfrm>
+            <a:off x="7039722" y="5130397"/>
+            <a:ext cx="362001" cy="323895"/>
+          </a:xfrm>
+          <a:prstGeom prst="rect">
+            <a:avLst/>
+          </a:prstGeom>
+        </p:spPr>
+      </p:pic>
+      <p:cxnSp>
+        <p:nvCxnSpPr>
+          <p:cNvPr id="24" name="Connecteur droit avec flèche 23">
+            <a:extLst>
+              <a:ext uri="{FF2B5EF4-FFF2-40B4-BE49-F238E27FC236}">
+                <a16:creationId xmlns:a16="http://schemas.microsoft.com/office/drawing/2014/main" id="{BA7511DF-71EC-8092-4770-9F4DBF2D5B12}"/>
+              </a:ext>
+            </a:extLst>
+          </p:cNvPr>
+          <p:cNvCxnSpPr>
+            <a:cxnSpLocks/>
+          </p:cNvCxnSpPr>
+          <p:nvPr/>
+        </p:nvCxnSpPr>
+        <p:spPr>
+          <a:xfrm flipV="1">
+            <a:off x="5152280" y="5288362"/>
+            <a:ext cx="1887442" cy="1"/>
+          </a:xfrm>
+          <a:prstGeom prst="straightConnector1">
+            <a:avLst/>
+          </a:prstGeom>
+          <a:ln w="76200" cap="flat" cmpd="sng" algn="ctr">
+            <a:solidFill>
+              <a:srgbClr val="FF0000"/>
+            </a:solidFill>
+            <a:prstDash val="solid"/>
+            <a:round/>
+            <a:headEnd type="none" w="med" len="med"/>
+            <a:tailEnd type="arrow" w="med" len="med"/>
+          </a:ln>
+        </p:spPr>
+        <p:style>
+          <a:lnRef idx="0">
+            <a:scrgbClr r="0" g="0" b="0"/>
+          </a:lnRef>
+          <a:fillRef idx="0">
+            <a:scrgbClr r="0" g="0" b="0"/>
+          </a:fillRef>
+          <a:effectRef idx="0">
+            <a:scrgbClr r="0" g="0" b="0"/>
+          </a:effectRef>
+          <a:fontRef idx="minor">
+            <a:schemeClr val="tx1"/>
+          </a:fontRef>
+        </p:style>
+      </p:cxnSp>
+      <p:pic>
+        <p:nvPicPr>
+          <p:cNvPr id="28" name="Image 27">
+            <a:extLst>
+              <a:ext uri="{FF2B5EF4-FFF2-40B4-BE49-F238E27FC236}">
+                <a16:creationId xmlns:a16="http://schemas.microsoft.com/office/drawing/2014/main" id="{59742456-1B9A-1F8F-0963-F23963C52285}"/>
+              </a:ext>
+            </a:extLst>
+          </p:cNvPr>
+          <p:cNvPicPr>
+            <a:picLocks noChangeAspect="1"/>
+          </p:cNvPicPr>
+          <p:nvPr/>
+        </p:nvPicPr>
+        <p:blipFill>
+          <a:blip r:embed="rId13"/>
+          <a:stretch>
+            <a:fillRect/>
+          </a:stretch>
+        </p:blipFill>
+        <p:spPr>
+          <a:xfrm>
+            <a:off x="7418741" y="4808684"/>
+            <a:ext cx="4254384" cy="778973"/>
+          </a:xfrm>
+          <a:prstGeom prst="rect">
+            <a:avLst/>
+          </a:prstGeom>
+        </p:spPr>
+      </p:pic>
+      <p:sp>
+        <p:nvSpPr>
+          <p:cNvPr id="29" name="Rectangle 28">
+            <a:extLst>
+              <a:ext uri="{FF2B5EF4-FFF2-40B4-BE49-F238E27FC236}">
+                <a16:creationId xmlns:a16="http://schemas.microsoft.com/office/drawing/2014/main" id="{033018A1-C20C-0743-7C24-ED35BEFDEA38}"/>
+              </a:ext>
+            </a:extLst>
+          </p:cNvPr>
+          <p:cNvSpPr/>
+          <p:nvPr/>
+        </p:nvSpPr>
+        <p:spPr>
+          <a:xfrm>
+            <a:off x="7056740" y="5126424"/>
+            <a:ext cx="315044" cy="323875"/>
+          </a:xfrm>
+          <a:prstGeom prst="rect">
+            <a:avLst/>
+          </a:prstGeom>
+          <a:solidFill>
+            <a:schemeClr val="bg1"/>
+          </a:solidFill>
+        </p:spPr>
+        <p:style>
+          <a:lnRef idx="2">
+            <a:schemeClr val="accent1">
+              <a:shade val="15000"/>
+            </a:schemeClr>
+          </a:lnRef>
+          <a:fillRef idx="1">
+            <a:schemeClr val="accent1"/>
+          </a:fillRef>
+          <a:effectRef idx="0">
+            <a:schemeClr val="accent1"/>
+          </a:effectRef>
+          <a:fontRef idx="minor">
+            <a:schemeClr val="lt1"/>
+          </a:fontRef>
+        </p:style>
+        <p:txBody>
+          <a:bodyPr rtlCol="0" anchor="ctr"/>
+          <a:lstStyle/>
+          <a:p>
+            <a:pPr algn="ctr"/>
+            <a:endParaRPr lang="fr-CA"/>
+          </a:p>
+        </p:txBody>
+      </p:sp>
+      <p:pic>
+        <p:nvPicPr>
+          <p:cNvPr id="2" name="Image 1">
+            <a:extLst>
+              <a:ext uri="{FF2B5EF4-FFF2-40B4-BE49-F238E27FC236}">
+                <a16:creationId xmlns:a16="http://schemas.microsoft.com/office/drawing/2014/main" id="{22FCBAC7-5B5A-4774-3374-FA7380D83595}"/>
+              </a:ext>
+            </a:extLst>
+          </p:cNvPr>
+          <p:cNvPicPr>
+            <a:picLocks noChangeAspect="1"/>
+          </p:cNvPicPr>
+          <p:nvPr/>
+        </p:nvPicPr>
+        <p:blipFill>
+          <a:blip r:embed="rId7">
+            <a:duotone>
+              <a:schemeClr val="bg2">
+                <a:shade val="45000"/>
+                <a:satMod val="135000"/>
+              </a:schemeClr>
+              <a:prstClr val="white"/>
+            </a:duotone>
+            <a:extLst>
+              <a:ext uri="{BEBA8EAE-BF5A-486C-A8C5-ECC9F3942E4B}">
+                <a14:imgProps xmlns:a14="http://schemas.microsoft.com/office/drawing/2010/main">
+                  <a14:imgLayer r:embed="rId8">
+                    <a14:imgEffect>
+                      <a14:colorTemperature colorTemp="4700"/>
+                    </a14:imgEffect>
+                    <a14:imgEffect>
+                      <a14:saturation sat="0"/>
+                    </a14:imgEffect>
+                  </a14:imgLayer>
+                </a14:imgProps>
+              </a:ext>
+            </a:extLst>
+          </a:blip>
+          <a:srcRect l="1287" t="17358" r="73201" b="14299"/>
+          <a:stretch>
+            <a:fillRect/>
+          </a:stretch>
+        </p:blipFill>
+        <p:spPr>
+          <a:xfrm rot="10800000">
+            <a:off x="11433373" y="6098266"/>
+            <a:ext cx="758627" cy="759734"/>
+          </a:xfrm>
+          <a:prstGeom prst="rect">
+            <a:avLst/>
+          </a:prstGeom>
+        </p:spPr>
+      </p:pic>
+    </p:spTree>
+    <p:extLst>
+      <p:ext uri="{BB962C8B-B14F-4D97-AF65-F5344CB8AC3E}">
+        <p14:creationId xmlns:p14="http://schemas.microsoft.com/office/powerpoint/2010/main" val="1792551695"/>
+      </p:ext>
+    </p:extLst>
+  </p:cSld>
+  <p:clrMapOvr>
+    <a:masterClrMapping/>
+  </p:clrMapOvr>
+  <p:timing>
+    <p:tnLst>
+      <p:par>
+        <p:cTn id="1" dur="indefinite" restart="never" nodeType="tmRoot">
+          <p:childTnLst>
+            <p:seq concurrent="1" nextAc="seek">
+              <p:cTn id="2" dur="indefinite" nodeType="mainSeq">
+                <p:childTnLst>
+                  <p:par>
+                    <p:cTn id="3" fill="hold">
+                      <p:stCondLst>
+                        <p:cond delay="indefinite"/>
+                      </p:stCondLst>
+                      <p:childTnLst>
+                        <p:par>
+                          <p:cTn id="4" fill="hold">
+                            <p:stCondLst>
+                              <p:cond delay="0"/>
+                            </p:stCondLst>
+                            <p:childTnLst>
+                              <p:par>
+                                <p:cTn id="5" presetID="10" presetClass="entr" presetSubtype="0" fill="hold" nodeType="clickEffect">
+                                  <p:stCondLst>
+                                    <p:cond delay="0"/>
+                                  </p:stCondLst>
+                                  <p:childTnLst>
+                                    <p:set>
+                                      <p:cBhvr>
+                                        <p:cTn id="6" dur="1" fill="hold">
+                                          <p:stCondLst>
+                                            <p:cond delay="0"/>
+                                          </p:stCondLst>
+                                        </p:cTn>
+                                        <p:tgtEl>
+                                          <p:spTgt spid="11"/>
+                                        </p:tgtEl>
+                                        <p:attrNameLst>
+                                          <p:attrName>style.visibility</p:attrName>
+                                        </p:attrNameLst>
+                                      </p:cBhvr>
+                                      <p:to>
+                                        <p:strVal val="visible"/>
+                                      </p:to>
+                                    </p:set>
+                                    <p:animEffect transition="in" filter="fade">
+                                      <p:cBhvr>
+                                        <p:cTn id="7" dur="500"/>
+                                        <p:tgtEl>
+                                          <p:spTgt spid="11"/>
+                                        </p:tgtEl>
+                                      </p:cBhvr>
+                                    </p:animEffect>
+                                  </p:childTnLst>
+                                </p:cTn>
+                              </p:par>
+                            </p:childTnLst>
+                          </p:cTn>
+                        </p:par>
+                      </p:childTnLst>
+                    </p:cTn>
+                  </p:par>
+                  <p:par>
+                    <p:cTn id="8" fill="hold">
+                      <p:stCondLst>
+                        <p:cond delay="indefinite"/>
+                      </p:stCondLst>
+                      <p:childTnLst>
+                        <p:par>
+                          <p:cTn id="9" fill="hold">
+                            <p:stCondLst>
+                              <p:cond delay="0"/>
+                            </p:stCondLst>
+                            <p:childTnLst>
+                              <p:par>
+                                <p:cTn id="10" presetID="10" presetClass="entr" presetSubtype="0" fill="hold" nodeType="clickEffect">
+                                  <p:stCondLst>
+                                    <p:cond delay="0"/>
+                                  </p:stCondLst>
+                                  <p:childTnLst>
+                                    <p:set>
+                                      <p:cBhvr>
+                                        <p:cTn id="11" dur="1" fill="hold">
+                                          <p:stCondLst>
+                                            <p:cond delay="0"/>
+                                          </p:stCondLst>
+                                        </p:cTn>
+                                        <p:tgtEl>
+                                          <p:spTgt spid="13"/>
+                                        </p:tgtEl>
+                                        <p:attrNameLst>
+                                          <p:attrName>style.visibility</p:attrName>
+                                        </p:attrNameLst>
+                                      </p:cBhvr>
+                                      <p:to>
+                                        <p:strVal val="visible"/>
+                                      </p:to>
+                                    </p:set>
+                                    <p:animEffect transition="in" filter="fade">
+                                      <p:cBhvr>
+                                        <p:cTn id="12" dur="500"/>
+                                        <p:tgtEl>
+                                          <p:spTgt spid="13"/>
+                                        </p:tgtEl>
+                                      </p:cBhvr>
+                                    </p:animEffect>
+                                  </p:childTnLst>
+                                </p:cTn>
+                              </p:par>
+                              <p:par>
+                                <p:cTn id="13" presetID="10" presetClass="entr" presetSubtype="0" fill="hold" nodeType="withEffect">
+                                  <p:stCondLst>
+                                    <p:cond delay="0"/>
+                                  </p:stCondLst>
+                                  <p:childTnLst>
+                                    <p:set>
+                                      <p:cBhvr>
+                                        <p:cTn id="14" dur="1" fill="hold">
+                                          <p:stCondLst>
+                                            <p:cond delay="0"/>
+                                          </p:stCondLst>
+                                        </p:cTn>
+                                        <p:tgtEl>
+                                          <p:spTgt spid="9"/>
+                                        </p:tgtEl>
+                                        <p:attrNameLst>
+                                          <p:attrName>style.visibility</p:attrName>
+                                        </p:attrNameLst>
+                                      </p:cBhvr>
+                                      <p:to>
+                                        <p:strVal val="visible"/>
+                                      </p:to>
+                                    </p:set>
+                                    <p:animEffect transition="in" filter="fade">
+                                      <p:cBhvr>
+                                        <p:cTn id="15" dur="500"/>
+                                        <p:tgtEl>
+                                          <p:spTgt spid="9"/>
+                                        </p:tgtEl>
+                                      </p:cBhvr>
+                                    </p:animEffect>
+                                  </p:childTnLst>
+                                </p:cTn>
+                              </p:par>
+                            </p:childTnLst>
+                          </p:cTn>
+                        </p:par>
+                      </p:childTnLst>
+                    </p:cTn>
+                  </p:par>
+                  <p:par>
+                    <p:cTn id="16" fill="hold">
+                      <p:stCondLst>
+                        <p:cond delay="indefinite"/>
+                      </p:stCondLst>
+                      <p:childTnLst>
+                        <p:par>
+                          <p:cTn id="17" fill="hold">
+                            <p:stCondLst>
+                              <p:cond delay="0"/>
+                            </p:stCondLst>
+                            <p:childTnLst>
+                              <p:par>
+                                <p:cTn id="18" presetID="10" presetClass="entr" presetSubtype="0" fill="hold" nodeType="clickEffect">
+                                  <p:stCondLst>
+                                    <p:cond delay="0"/>
+                                  </p:stCondLst>
+                                  <p:childTnLst>
+                                    <p:set>
+                                      <p:cBhvr>
+                                        <p:cTn id="19" dur="1" fill="hold">
+                                          <p:stCondLst>
+                                            <p:cond delay="0"/>
+                                          </p:stCondLst>
+                                        </p:cTn>
+                                        <p:tgtEl>
+                                          <p:spTgt spid="16"/>
+                                        </p:tgtEl>
+                                        <p:attrNameLst>
+                                          <p:attrName>style.visibility</p:attrName>
+                                        </p:attrNameLst>
+                                      </p:cBhvr>
+                                      <p:to>
+                                        <p:strVal val="visible"/>
+                                      </p:to>
+                                    </p:set>
+                                    <p:animEffect transition="in" filter="fade">
+                                      <p:cBhvr>
+                                        <p:cTn id="20" dur="500"/>
+                                        <p:tgtEl>
+                                          <p:spTgt spid="16"/>
+                                        </p:tgtEl>
+                                      </p:cBhvr>
+                                    </p:animEffect>
+                                  </p:childTnLst>
+                                </p:cTn>
+                              </p:par>
+                              <p:par>
+                                <p:cTn id="21" presetID="10" presetClass="entr" presetSubtype="0" fill="hold" nodeType="withEffect">
+                                  <p:stCondLst>
+                                    <p:cond delay="0"/>
+                                  </p:stCondLst>
+                                  <p:childTnLst>
+                                    <p:set>
+                                      <p:cBhvr>
+                                        <p:cTn id="22" dur="1" fill="hold">
+                                          <p:stCondLst>
+                                            <p:cond delay="0"/>
+                                          </p:stCondLst>
+                                        </p:cTn>
+                                        <p:tgtEl>
+                                          <p:spTgt spid="15"/>
+                                        </p:tgtEl>
+                                        <p:attrNameLst>
+                                          <p:attrName>style.visibility</p:attrName>
+                                        </p:attrNameLst>
+                                      </p:cBhvr>
+                                      <p:to>
+                                        <p:strVal val="visible"/>
+                                      </p:to>
+                                    </p:set>
+                                    <p:animEffect transition="in" filter="fade">
+                                      <p:cBhvr>
+                                        <p:cTn id="23" dur="500"/>
+                                        <p:tgtEl>
+                                          <p:spTgt spid="15"/>
+                                        </p:tgtEl>
+                                      </p:cBhvr>
+                                    </p:animEffect>
+                                  </p:childTnLst>
+                                </p:cTn>
+                              </p:par>
+                            </p:childTnLst>
+                          </p:cTn>
+                        </p:par>
+                      </p:childTnLst>
+                    </p:cTn>
+                  </p:par>
+                  <p:par>
+                    <p:cTn id="24" fill="hold">
+                      <p:stCondLst>
+                        <p:cond delay="indefinite"/>
+                      </p:stCondLst>
+                      <p:childTnLst>
+                        <p:par>
+                          <p:cTn id="25" fill="hold">
+                            <p:stCondLst>
+                              <p:cond delay="0"/>
+                            </p:stCondLst>
+                            <p:childTnLst>
+                              <p:par>
+                                <p:cTn id="26" presetID="10" presetClass="entr" presetSubtype="0" fill="hold" nodeType="clickEffect">
+                                  <p:stCondLst>
+                                    <p:cond delay="0"/>
+                                  </p:stCondLst>
+                                  <p:childTnLst>
+                                    <p:set>
+                                      <p:cBhvr>
+                                        <p:cTn id="27" dur="1" fill="hold">
+                                          <p:stCondLst>
+                                            <p:cond delay="0"/>
+                                          </p:stCondLst>
+                                        </p:cTn>
+                                        <p:tgtEl>
+                                          <p:spTgt spid="24"/>
+                                        </p:tgtEl>
+                                        <p:attrNameLst>
+                                          <p:attrName>style.visibility</p:attrName>
+                                        </p:attrNameLst>
+                                      </p:cBhvr>
+                                      <p:to>
+                                        <p:strVal val="visible"/>
+                                      </p:to>
+                                    </p:set>
+                                    <p:animEffect transition="in" filter="fade">
+                                      <p:cBhvr>
+                                        <p:cTn id="28" dur="500"/>
+                                        <p:tgtEl>
+                                          <p:spTgt spid="24"/>
+                                        </p:tgtEl>
+                                      </p:cBhvr>
+                                    </p:animEffect>
+                                  </p:childTnLst>
+                                </p:cTn>
+                              </p:par>
+                              <p:par>
+                                <p:cTn id="29" presetID="10" presetClass="entr" presetSubtype="0" fill="hold" nodeType="withEffect">
+                                  <p:stCondLst>
+                                    <p:cond delay="0"/>
+                                  </p:stCondLst>
+                                  <p:childTnLst>
+                                    <p:set>
+                                      <p:cBhvr>
+                                        <p:cTn id="30" dur="1" fill="hold">
+                                          <p:stCondLst>
+                                            <p:cond delay="0"/>
+                                          </p:stCondLst>
+                                        </p:cTn>
+                                        <p:tgtEl>
+                                          <p:spTgt spid="23"/>
+                                        </p:tgtEl>
+                                        <p:attrNameLst>
+                                          <p:attrName>style.visibility</p:attrName>
+                                        </p:attrNameLst>
+                                      </p:cBhvr>
+                                      <p:to>
+                                        <p:strVal val="visible"/>
+                                      </p:to>
+                                    </p:set>
+                                    <p:animEffect transition="in" filter="fade">
+                                      <p:cBhvr>
+                                        <p:cTn id="31" dur="500"/>
+                                        <p:tgtEl>
+                                          <p:spTgt spid="23"/>
+                                        </p:tgtEl>
+                                      </p:cBhvr>
+                                    </p:animEffect>
+                                  </p:childTnLst>
+                                </p:cTn>
+                              </p:par>
+                            </p:childTnLst>
+                          </p:cTn>
+                        </p:par>
+                      </p:childTnLst>
+                    </p:cTn>
+                  </p:par>
+                  <p:par>
+                    <p:cTn id="32" fill="hold">
+                      <p:stCondLst>
+                        <p:cond delay="indefinite"/>
+                      </p:stCondLst>
+                      <p:childTnLst>
+                        <p:par>
+                          <p:cTn id="33" fill="hold">
+                            <p:stCondLst>
+                              <p:cond delay="0"/>
+                            </p:stCondLst>
+                            <p:childTnLst>
+                              <p:par>
+                                <p:cTn id="34" presetID="10" presetClass="entr" presetSubtype="0" fill="hold" grpId="0" nodeType="clickEffect">
+                                  <p:stCondLst>
+                                    <p:cond delay="0"/>
+                                  </p:stCondLst>
+                                  <p:childTnLst>
+                                    <p:set>
+                                      <p:cBhvr>
+                                        <p:cTn id="35" dur="1" fill="hold">
+                                          <p:stCondLst>
+                                            <p:cond delay="0"/>
+                                          </p:stCondLst>
+                                        </p:cTn>
+                                        <p:tgtEl>
+                                          <p:spTgt spid="29"/>
+                                        </p:tgtEl>
+                                        <p:attrNameLst>
+                                          <p:attrName>style.visibility</p:attrName>
+                                        </p:attrNameLst>
+                                      </p:cBhvr>
+                                      <p:to>
+                                        <p:strVal val="visible"/>
+                                      </p:to>
+                                    </p:set>
+                                    <p:animEffect transition="in" filter="fade">
+                                      <p:cBhvr>
+                                        <p:cTn id="36" dur="500"/>
+                                        <p:tgtEl>
+                                          <p:spTgt spid="29"/>
+                                        </p:tgtEl>
+                                      </p:cBhvr>
+                                    </p:animEffect>
+                                  </p:childTnLst>
+                                </p:cTn>
+                              </p:par>
+                            </p:childTnLst>
+                          </p:cTn>
+                        </p:par>
+                      </p:childTnLst>
+                    </p:cTn>
+                  </p:par>
+                  <p:par>
+                    <p:cTn id="37" fill="hold">
+                      <p:stCondLst>
+                        <p:cond delay="indefinite"/>
+                      </p:stCondLst>
+                      <p:childTnLst>
+                        <p:par>
+                          <p:cTn id="38" fill="hold">
+                            <p:stCondLst>
+                              <p:cond delay="0"/>
+                            </p:stCondLst>
+                            <p:childTnLst>
+                              <p:par>
+                                <p:cTn id="39" presetID="10" presetClass="entr" presetSubtype="0" fill="hold" nodeType="clickEffect">
+                                  <p:stCondLst>
+                                    <p:cond delay="0"/>
+                                  </p:stCondLst>
+                                  <p:childTnLst>
+                                    <p:set>
+                                      <p:cBhvr>
+                                        <p:cTn id="40" dur="1" fill="hold">
+                                          <p:stCondLst>
+                                            <p:cond delay="0"/>
+                                          </p:stCondLst>
+                                        </p:cTn>
+                                        <p:tgtEl>
+                                          <p:spTgt spid="28"/>
+                                        </p:tgtEl>
+                                        <p:attrNameLst>
+                                          <p:attrName>style.visibility</p:attrName>
+                                        </p:attrNameLst>
+                                      </p:cBhvr>
+                                      <p:to>
+                                        <p:strVal val="visible"/>
+                                      </p:to>
+                                    </p:set>
+                                    <p:animEffect transition="in" filter="fade">
+                                      <p:cBhvr>
+                                        <p:cTn id="41" dur="500"/>
+                                        <p:tgtEl>
+                                          <p:spTgt spid="28"/>
+                                        </p:tgtEl>
+                                      </p:cBhvr>
+                                    </p:animEffect>
+                                  </p:childTnLst>
+                                </p:cTn>
+                              </p:par>
+                            </p:childTnLst>
+                          </p:cTn>
+                        </p:par>
+                      </p:childTnLst>
+                    </p:cTn>
+                  </p:par>
+                </p:childTnLst>
+              </p:cTn>
+              <p:prevCondLst>
+                <p:cond evt="onPrev" delay="0">
+                  <p:tgtEl>
+                    <p:sldTgt/>
+                  </p:tgtEl>
+                </p:cond>
+              </p:prevCondLst>
+              <p:nextCondLst>
+                <p:cond evt="onNext" delay="0">
+                  <p:tgtEl>
+                    <p:sldTgt/>
+                  </p:tgtEl>
+                </p:cond>
+              </p:nextCondLst>
+            </p:seq>
+          </p:childTnLst>
+        </p:cTn>
+      </p:par>
+    </p:tnLst>
+    <p:bldLst>
+      <p:bldP spid="29" grpId="0" animBg="1"/>
+    </p:bldLst>
+  </p:timing>
+</p:sld>
+</file>
+
+<file path=ppt/slides/slide12.xml><?xml version="1.0" encoding="utf-8"?>
+<p:sld xmlns:a="http://schemas.openxmlformats.org/drawingml/2006/main" xmlns:r="http://schemas.openxmlformats.org/officeDocument/2006/relationships" xmlns:p="http://schemas.openxmlformats.org/presentationml/2006/main">
+  <p:cSld>
+    <p:spTree>
+      <p:nvGrpSpPr>
+        <p:cNvPr id="1" name="">
+          <a:extLst>
+            <a:ext uri="{FF2B5EF4-FFF2-40B4-BE49-F238E27FC236}">
+              <a16:creationId xmlns:a16="http://schemas.microsoft.com/office/drawing/2014/main" id="{41C8F8FD-23F4-62FF-7F90-5A3DCD1BD59C}"/>
+            </a:ext>
+          </a:extLst>
+        </p:cNvPr>
+        <p:cNvGrpSpPr/>
+        <p:nvPr/>
+      </p:nvGrpSpPr>
+      <p:grpSpPr>
+        <a:xfrm>
+          <a:off x="0" y="0"/>
+          <a:ext cx="0" cy="0"/>
+          <a:chOff x="0" y="0"/>
+          <a:chExt cx="0" cy="0"/>
+        </a:xfrm>
+      </p:grpSpPr>
+      <p:pic>
+        <p:nvPicPr>
+          <p:cNvPr id="8" name="Image 7">
+            <a:extLst>
+              <a:ext uri="{FF2B5EF4-FFF2-40B4-BE49-F238E27FC236}">
+                <a16:creationId xmlns:a16="http://schemas.microsoft.com/office/drawing/2014/main" id="{233718AC-89CE-38D1-D3C3-D5CDDEE84EE0}"/>
+              </a:ext>
+            </a:extLst>
+          </p:cNvPr>
+          <p:cNvPicPr>
+            <a:picLocks noChangeAspect="1"/>
+          </p:cNvPicPr>
+          <p:nvPr>
+            <p:custDataLst>
+              <p:tags r:id="rId1"/>
+            </p:custDataLst>
+          </p:nvPr>
+        </p:nvPicPr>
+        <p:blipFill>
+          <a:blip r:embed="rId5"/>
+          <a:srcRect l="4895" t="76969" r="85984"/>
+          <a:stretch>
+            <a:fillRect/>
+          </a:stretch>
+        </p:blipFill>
+        <p:spPr>
+          <a:xfrm>
+            <a:off x="0" y="0"/>
+            <a:ext cx="12192000" cy="6858000"/>
+          </a:xfrm>
+          <a:prstGeom prst="rect">
+            <a:avLst/>
+          </a:prstGeom>
+        </p:spPr>
+      </p:pic>
+      <p:sp>
+        <p:nvSpPr>
+          <p:cNvPr id="18" name="Rectangle 17">
+            <a:extLst>
+              <a:ext uri="{FF2B5EF4-FFF2-40B4-BE49-F238E27FC236}">
+                <a16:creationId xmlns:a16="http://schemas.microsoft.com/office/drawing/2014/main" id="{D16E07D6-C0AB-82A6-8DA7-444D205790B8}"/>
+              </a:ext>
+            </a:extLst>
+          </p:cNvPr>
+          <p:cNvSpPr/>
+          <p:nvPr>
+            <p:custDataLst>
+              <p:tags r:id="rId2"/>
+            </p:custDataLst>
+          </p:nvPr>
+        </p:nvSpPr>
+        <p:spPr>
+          <a:xfrm>
+            <a:off x="245806" y="403123"/>
+            <a:ext cx="11759381" cy="6194321"/>
+          </a:xfrm>
+          <a:prstGeom prst="rect">
+            <a:avLst/>
+          </a:prstGeom>
+          <a:noFill/>
+          <a:ln>
+            <a:solidFill>
+              <a:schemeClr val="bg1"/>
+            </a:solidFill>
+          </a:ln>
+        </p:spPr>
+        <p:style>
+          <a:lnRef idx="2">
+            <a:schemeClr val="accent1">
+              <a:shade val="15000"/>
+            </a:schemeClr>
+          </a:lnRef>
+          <a:fillRef idx="1">
+            <a:schemeClr val="accent1"/>
+          </a:fillRef>
+          <a:effectRef idx="0">
+            <a:schemeClr val="accent1"/>
+          </a:effectRef>
+          <a:fontRef idx="minor">
+            <a:schemeClr val="lt1"/>
+          </a:fontRef>
+        </p:style>
+        <p:txBody>
+          <a:bodyPr rtlCol="0" anchor="ctr"/>
+          <a:lstStyle/>
+          <a:p>
+            <a:pPr algn="ctr"/>
+            <a:endParaRPr lang="fr-CA"/>
+          </a:p>
+        </p:txBody>
+      </p:sp>
+      <p:pic>
+        <p:nvPicPr>
+          <p:cNvPr id="5" name="Image 4">
+            <a:extLst>
+              <a:ext uri="{FF2B5EF4-FFF2-40B4-BE49-F238E27FC236}">
+                <a16:creationId xmlns:a16="http://schemas.microsoft.com/office/drawing/2014/main" id="{9C2524F2-7607-984F-FB63-9D45C610AEF6}"/>
+              </a:ext>
+            </a:extLst>
+          </p:cNvPr>
+          <p:cNvPicPr>
+            <a:picLocks noChangeAspect="1"/>
+          </p:cNvPicPr>
+          <p:nvPr/>
+        </p:nvPicPr>
+        <p:blipFill>
+          <a:blip r:embed="rId6"/>
+          <a:stretch>
+            <a:fillRect/>
+          </a:stretch>
+        </p:blipFill>
+        <p:spPr>
+          <a:xfrm>
+            <a:off x="1776083" y="120059"/>
+            <a:ext cx="8639833" cy="860963"/>
+          </a:xfrm>
+          <a:prstGeom prst="rect">
+            <a:avLst/>
+          </a:prstGeom>
+        </p:spPr>
+      </p:pic>
+      <p:pic>
+        <p:nvPicPr>
+          <p:cNvPr id="3" name="Image 2">
+            <a:extLst>
+              <a:ext uri="{FF2B5EF4-FFF2-40B4-BE49-F238E27FC236}">
+                <a16:creationId xmlns:a16="http://schemas.microsoft.com/office/drawing/2014/main" id="{68217BF8-169F-FF42-343A-9C2143492F87}"/>
+              </a:ext>
+            </a:extLst>
+          </p:cNvPr>
+          <p:cNvPicPr>
+            <a:picLocks noChangeAspect="1"/>
+          </p:cNvPicPr>
+          <p:nvPr/>
+        </p:nvPicPr>
+        <p:blipFill>
+          <a:blip r:embed="rId7">
+            <a:duotone>
+              <a:schemeClr val="bg2">
+                <a:shade val="45000"/>
+                <a:satMod val="135000"/>
+              </a:schemeClr>
+              <a:prstClr val="white"/>
+            </a:duotone>
+            <a:extLst>
+              <a:ext uri="{BEBA8EAE-BF5A-486C-A8C5-ECC9F3942E4B}">
+                <a14:imgProps xmlns:a14="http://schemas.microsoft.com/office/drawing/2010/main">
+                  <a14:imgLayer r:embed="rId8">
+                    <a14:imgEffect>
+                      <a14:colorTemperature colorTemp="4700"/>
+                    </a14:imgEffect>
+                    <a14:imgEffect>
+                      <a14:saturation sat="0"/>
+                    </a14:imgEffect>
+                  </a14:imgLayer>
+                </a14:imgProps>
+              </a:ext>
+            </a:extLst>
+          </a:blip>
+          <a:srcRect l="1287" t="17358" r="73201" b="14299"/>
+          <a:stretch>
+            <a:fillRect/>
+          </a:stretch>
+        </p:blipFill>
+        <p:spPr>
+          <a:xfrm>
+            <a:off x="0" y="6098266"/>
+            <a:ext cx="758627" cy="759734"/>
+          </a:xfrm>
+          <a:prstGeom prst="rect">
+            <a:avLst/>
+          </a:prstGeom>
+        </p:spPr>
+      </p:pic>
+      <p:sp>
+        <p:nvSpPr>
+          <p:cNvPr id="7" name="Rectangle 6">
+            <a:extLst>
+              <a:ext uri="{FF2B5EF4-FFF2-40B4-BE49-F238E27FC236}">
+                <a16:creationId xmlns:a16="http://schemas.microsoft.com/office/drawing/2014/main" id="{7EEB8C01-6D09-38E6-098F-E39FF4B263DA}"/>
+              </a:ext>
+            </a:extLst>
+          </p:cNvPr>
+          <p:cNvSpPr/>
+          <p:nvPr>
+            <p:custDataLst>
+              <p:tags r:id="rId3"/>
+            </p:custDataLst>
+          </p:nvPr>
+        </p:nvSpPr>
+        <p:spPr>
+          <a:xfrm>
+            <a:off x="450725" y="700864"/>
+            <a:ext cx="11290548" cy="942792"/>
+          </a:xfrm>
+          <a:prstGeom prst="rect">
+            <a:avLst/>
+          </a:prstGeom>
+          <a:noFill/>
+          <a:ln>
+            <a:noFill/>
+          </a:ln>
+        </p:spPr>
+        <p:style>
+          <a:lnRef idx="2">
+            <a:schemeClr val="accent1">
+              <a:shade val="15000"/>
+            </a:schemeClr>
+          </a:lnRef>
+          <a:fillRef idx="1">
+            <a:schemeClr val="accent1"/>
+          </a:fillRef>
+          <a:effectRef idx="0">
+            <a:schemeClr val="accent1"/>
+          </a:effectRef>
+          <a:fontRef idx="minor">
+            <a:schemeClr val="lt1"/>
+          </a:fontRef>
+        </p:style>
+        <p:txBody>
+          <a:bodyPr rtlCol="0" anchor="ctr"/>
+          <a:lstStyle/>
+          <a:p>
+            <a:pPr algn="ctr"/>
+            <a:r>
+              <a:rPr lang="fr-CA" sz="3000">
+                <a:latin typeface="Pixel Operator 8" panose="02000503000000000000" pitchFamily="2" charset="0"/>
+              </a:rPr>
+              <a:t>Difficultés rencontrées par Nicolas :</a:t>
+            </a:r>
+          </a:p>
+        </p:txBody>
+      </p:sp>
+      <p:pic>
+        <p:nvPicPr>
+          <p:cNvPr id="10" name="Image 9">
+            <a:extLst>
+              <a:ext uri="{FF2B5EF4-FFF2-40B4-BE49-F238E27FC236}">
+                <a16:creationId xmlns:a16="http://schemas.microsoft.com/office/drawing/2014/main" id="{47CD8725-8CB0-6CD1-830E-3674D3C2ECF1}"/>
+              </a:ext>
+            </a:extLst>
+          </p:cNvPr>
+          <p:cNvPicPr>
+            <a:picLocks noChangeAspect="1"/>
+          </p:cNvPicPr>
+          <p:nvPr/>
+        </p:nvPicPr>
+        <p:blipFill>
+          <a:blip r:embed="rId9"/>
+          <a:stretch>
+            <a:fillRect/>
+          </a:stretch>
+        </p:blipFill>
+        <p:spPr>
+          <a:xfrm>
+            <a:off x="1026295" y="1757466"/>
+            <a:ext cx="8773749" cy="1133633"/>
+          </a:xfrm>
+          <a:prstGeom prst="rect">
+            <a:avLst/>
+          </a:prstGeom>
+        </p:spPr>
+      </p:pic>
+      <p:pic>
+        <p:nvPicPr>
+          <p:cNvPr id="12" name="Image 11">
+            <a:extLst>
+              <a:ext uri="{FF2B5EF4-FFF2-40B4-BE49-F238E27FC236}">
+                <a16:creationId xmlns:a16="http://schemas.microsoft.com/office/drawing/2014/main" id="{DE109F82-EE98-FA37-04F4-2355B7859C32}"/>
+              </a:ext>
+            </a:extLst>
+          </p:cNvPr>
+          <p:cNvPicPr>
+            <a:picLocks noChangeAspect="1"/>
+          </p:cNvPicPr>
+          <p:nvPr/>
+        </p:nvPicPr>
+        <p:blipFill>
+          <a:blip r:embed="rId10"/>
+          <a:stretch>
+            <a:fillRect/>
+          </a:stretch>
+        </p:blipFill>
+        <p:spPr>
+          <a:xfrm>
+            <a:off x="1026295" y="2891099"/>
+            <a:ext cx="8773749" cy="3417782"/>
+          </a:xfrm>
+          <a:prstGeom prst="rect">
+            <a:avLst/>
+          </a:prstGeom>
+        </p:spPr>
+      </p:pic>
+    </p:spTree>
+    <p:extLst>
+      <p:ext uri="{BB962C8B-B14F-4D97-AF65-F5344CB8AC3E}">
+        <p14:creationId xmlns:p14="http://schemas.microsoft.com/office/powerpoint/2010/main" val="2521088874"/>
+      </p:ext>
+    </p:extLst>
+  </p:cSld>
+  <p:clrMapOvr>
+    <a:masterClrMapping/>
+  </p:clrMapOvr>
+</p:sld>
+</file>
+
 <file path=ppt/slides/slide2.xml><?xml version="1.0" encoding="utf-8"?>
+<p:sld xmlns:a="http://schemas.openxmlformats.org/drawingml/2006/main" xmlns:r="http://schemas.openxmlformats.org/officeDocument/2006/relationships" xmlns:p="http://schemas.openxmlformats.org/presentationml/2006/main">
+  <p:cSld>
+    <p:spTree>
+      <p:nvGrpSpPr>
+        <p:cNvPr id="1" name="">
+          <a:extLst>
+            <a:ext uri="{FF2B5EF4-FFF2-40B4-BE49-F238E27FC236}">
+              <a16:creationId xmlns:a16="http://schemas.microsoft.com/office/drawing/2014/main" id="{FC021226-4FDF-0EB4-8F68-D15126874AB6}"/>
+            </a:ext>
+          </a:extLst>
+        </p:cNvPr>
+        <p:cNvGrpSpPr/>
+        <p:nvPr/>
+      </p:nvGrpSpPr>
+      <p:grpSpPr>
+        <a:xfrm>
+          <a:off x="0" y="0"/>
+          <a:ext cx="0" cy="0"/>
+          <a:chOff x="0" y="0"/>
+          <a:chExt cx="0" cy="0"/>
+        </a:xfrm>
+      </p:grpSpPr>
+      <p:pic>
+        <p:nvPicPr>
+          <p:cNvPr id="8" name="Image 7">
+            <a:extLst>
+              <a:ext uri="{FF2B5EF4-FFF2-40B4-BE49-F238E27FC236}">
+                <a16:creationId xmlns:a16="http://schemas.microsoft.com/office/drawing/2014/main" id="{4A2DD215-B61C-E263-780A-C216CC580FE8}"/>
+              </a:ext>
+            </a:extLst>
+          </p:cNvPr>
+          <p:cNvPicPr>
+            <a:picLocks noChangeAspect="1"/>
+          </p:cNvPicPr>
+          <p:nvPr>
+            <p:custDataLst>
+              <p:tags r:id="rId1"/>
+            </p:custDataLst>
+          </p:nvPr>
+        </p:nvPicPr>
+        <p:blipFill>
+          <a:blip r:embed="rId8"/>
+          <a:srcRect l="4895" t="76969" r="85984"/>
+          <a:stretch>
+            <a:fillRect/>
+          </a:stretch>
+        </p:blipFill>
+        <p:spPr>
+          <a:xfrm>
+            <a:off x="0" y="0"/>
+            <a:ext cx="12192000" cy="6858000"/>
+          </a:xfrm>
+          <a:prstGeom prst="rect">
+            <a:avLst/>
+          </a:prstGeom>
+        </p:spPr>
+      </p:pic>
+      <p:sp>
+        <p:nvSpPr>
+          <p:cNvPr id="18" name="Rectangle 17">
+            <a:extLst>
+              <a:ext uri="{FF2B5EF4-FFF2-40B4-BE49-F238E27FC236}">
+                <a16:creationId xmlns:a16="http://schemas.microsoft.com/office/drawing/2014/main" id="{77A08CF9-5A3C-F53C-555A-BBB30997F7E2}"/>
+              </a:ext>
+            </a:extLst>
+          </p:cNvPr>
+          <p:cNvSpPr/>
+          <p:nvPr>
+            <p:custDataLst>
+              <p:tags r:id="rId2"/>
+            </p:custDataLst>
+          </p:nvPr>
+        </p:nvSpPr>
+        <p:spPr>
+          <a:xfrm>
+            <a:off x="245806" y="403123"/>
+            <a:ext cx="11759381" cy="6194321"/>
+          </a:xfrm>
+          <a:prstGeom prst="rect">
+            <a:avLst/>
+          </a:prstGeom>
+          <a:noFill/>
+          <a:ln>
+            <a:solidFill>
+              <a:schemeClr val="bg1"/>
+            </a:solidFill>
+          </a:ln>
+        </p:spPr>
+        <p:style>
+          <a:lnRef idx="2">
+            <a:schemeClr val="accent1">
+              <a:shade val="15000"/>
+            </a:schemeClr>
+          </a:lnRef>
+          <a:fillRef idx="1">
+            <a:schemeClr val="accent1"/>
+          </a:fillRef>
+          <a:effectRef idx="0">
+            <a:schemeClr val="accent1"/>
+          </a:effectRef>
+          <a:fontRef idx="minor">
+            <a:schemeClr val="lt1"/>
+          </a:fontRef>
+        </p:style>
+        <p:txBody>
+          <a:bodyPr rtlCol="0" anchor="ctr"/>
+          <a:lstStyle/>
+          <a:p>
+            <a:pPr algn="ctr"/>
+            <a:endParaRPr lang="fr-CA"/>
+          </a:p>
+        </p:txBody>
+      </p:sp>
+      <p:pic>
+        <p:nvPicPr>
+          <p:cNvPr id="6" name="Image 5">
+            <a:extLst>
+              <a:ext uri="{FF2B5EF4-FFF2-40B4-BE49-F238E27FC236}">
+                <a16:creationId xmlns:a16="http://schemas.microsoft.com/office/drawing/2014/main" id="{89E107F6-10F5-6EAB-40B2-A46951B5B7BD}"/>
+              </a:ext>
+            </a:extLst>
+          </p:cNvPr>
+          <p:cNvPicPr>
+            <a:picLocks noChangeAspect="1"/>
+          </p:cNvPicPr>
+          <p:nvPr/>
+        </p:nvPicPr>
+        <p:blipFill>
+          <a:blip r:embed="rId9">
+            <a:duotone>
+              <a:schemeClr val="bg2">
+                <a:shade val="45000"/>
+                <a:satMod val="135000"/>
+              </a:schemeClr>
+              <a:prstClr val="white"/>
+            </a:duotone>
+            <a:extLst>
+              <a:ext uri="{BEBA8EAE-BF5A-486C-A8C5-ECC9F3942E4B}">
+                <a14:imgProps xmlns:a14="http://schemas.microsoft.com/office/drawing/2010/main">
+                  <a14:imgLayer r:embed="rId10">
+                    <a14:imgEffect>
+                      <a14:colorTemperature colorTemp="4700"/>
+                    </a14:imgEffect>
+                    <a14:imgEffect>
+                      <a14:saturation sat="0"/>
+                    </a14:imgEffect>
+                  </a14:imgLayer>
+                </a14:imgProps>
+              </a:ext>
+            </a:extLst>
+          </a:blip>
+          <a:srcRect l="1287" t="17358" r="73201" b="14299"/>
+          <a:stretch>
+            <a:fillRect/>
+          </a:stretch>
+        </p:blipFill>
+        <p:spPr>
+          <a:xfrm rot="10800000">
+            <a:off x="11433373" y="6098266"/>
+            <a:ext cx="758627" cy="759734"/>
+          </a:xfrm>
+          <a:prstGeom prst="rect">
+            <a:avLst/>
+          </a:prstGeom>
+        </p:spPr>
+      </p:pic>
+      <p:pic>
+        <p:nvPicPr>
+          <p:cNvPr id="5" name="Image 4">
+            <a:extLst>
+              <a:ext uri="{FF2B5EF4-FFF2-40B4-BE49-F238E27FC236}">
+                <a16:creationId xmlns:a16="http://schemas.microsoft.com/office/drawing/2014/main" id="{0C27F133-101B-E400-EE64-5B7787CCC131}"/>
+              </a:ext>
+            </a:extLst>
+          </p:cNvPr>
+          <p:cNvPicPr>
+            <a:picLocks noChangeAspect="1"/>
+          </p:cNvPicPr>
+          <p:nvPr/>
+        </p:nvPicPr>
+        <p:blipFill>
+          <a:blip r:embed="rId11"/>
+          <a:stretch>
+            <a:fillRect/>
+          </a:stretch>
+        </p:blipFill>
+        <p:spPr>
+          <a:xfrm>
+            <a:off x="1776083" y="120059"/>
+            <a:ext cx="8639833" cy="860963"/>
+          </a:xfrm>
+          <a:prstGeom prst="rect">
+            <a:avLst/>
+          </a:prstGeom>
+        </p:spPr>
+      </p:pic>
+      <p:pic>
+        <p:nvPicPr>
+          <p:cNvPr id="3" name="Image 2">
+            <a:extLst>
+              <a:ext uri="{FF2B5EF4-FFF2-40B4-BE49-F238E27FC236}">
+                <a16:creationId xmlns:a16="http://schemas.microsoft.com/office/drawing/2014/main" id="{10782246-4088-5B03-7261-1116337D6E90}"/>
+              </a:ext>
+            </a:extLst>
+          </p:cNvPr>
+          <p:cNvPicPr>
+            <a:picLocks noChangeAspect="1"/>
+          </p:cNvPicPr>
+          <p:nvPr/>
+        </p:nvPicPr>
+        <p:blipFill>
+          <a:blip r:embed="rId9">
+            <a:duotone>
+              <a:schemeClr val="bg2">
+                <a:shade val="45000"/>
+                <a:satMod val="135000"/>
+              </a:schemeClr>
+              <a:prstClr val="white"/>
+            </a:duotone>
+            <a:extLst>
+              <a:ext uri="{BEBA8EAE-BF5A-486C-A8C5-ECC9F3942E4B}">
+                <a14:imgProps xmlns:a14="http://schemas.microsoft.com/office/drawing/2010/main">
+                  <a14:imgLayer r:embed="rId10">
+                    <a14:imgEffect>
+                      <a14:colorTemperature colorTemp="4700"/>
+                    </a14:imgEffect>
+                    <a14:imgEffect>
+                      <a14:saturation sat="0"/>
+                    </a14:imgEffect>
+                  </a14:imgLayer>
+                </a14:imgProps>
+              </a:ext>
+            </a:extLst>
+          </a:blip>
+          <a:srcRect l="1287" t="17358" r="73201" b="14299"/>
+          <a:stretch>
+            <a:fillRect/>
+          </a:stretch>
+        </p:blipFill>
+        <p:spPr>
+          <a:xfrm>
+            <a:off x="0" y="6098266"/>
+            <a:ext cx="758627" cy="759734"/>
+          </a:xfrm>
+          <a:prstGeom prst="rect">
+            <a:avLst/>
+          </a:prstGeom>
+        </p:spPr>
+      </p:pic>
+      <p:sp>
+        <p:nvSpPr>
+          <p:cNvPr id="4" name="Rectangle 3">
+            <a:extLst>
+              <a:ext uri="{FF2B5EF4-FFF2-40B4-BE49-F238E27FC236}">
+                <a16:creationId xmlns:a16="http://schemas.microsoft.com/office/drawing/2014/main" id="{52154251-5361-96FE-BCB6-02C572689A14}"/>
+              </a:ext>
+            </a:extLst>
+          </p:cNvPr>
+          <p:cNvSpPr/>
+          <p:nvPr>
+            <p:custDataLst>
+              <p:tags r:id="rId3"/>
+            </p:custDataLst>
+          </p:nvPr>
+        </p:nvSpPr>
+        <p:spPr>
+          <a:xfrm>
+            <a:off x="655646" y="703384"/>
+            <a:ext cx="10880706" cy="942792"/>
+          </a:xfrm>
+          <a:prstGeom prst="rect">
+            <a:avLst/>
+          </a:prstGeom>
+          <a:noFill/>
+          <a:ln>
+            <a:noFill/>
+          </a:ln>
+        </p:spPr>
+        <p:style>
+          <a:lnRef idx="2">
+            <a:schemeClr val="accent1">
+              <a:shade val="15000"/>
+            </a:schemeClr>
+          </a:lnRef>
+          <a:fillRef idx="1">
+            <a:schemeClr val="accent1"/>
+          </a:fillRef>
+          <a:effectRef idx="0">
+            <a:schemeClr val="accent1"/>
+          </a:effectRef>
+          <a:fontRef idx="minor">
+            <a:schemeClr val="lt1"/>
+          </a:fontRef>
+        </p:style>
+        <p:txBody>
+          <a:bodyPr rtlCol="0" anchor="ctr"/>
+          <a:lstStyle/>
+          <a:p>
+            <a:pPr algn="ctr"/>
+            <a:r>
+              <a:rPr lang="fr-CA" sz="3000">
+                <a:latin typeface="Pixel Operator 8" panose="02000503000000000000" pitchFamily="2" charset="0"/>
+              </a:rPr>
+              <a:t>Séparation des tâches effectuées :</a:t>
+            </a:r>
+          </a:p>
+        </p:txBody>
+      </p:sp>
+      <p:pic>
+        <p:nvPicPr>
+          <p:cNvPr id="9" name="Image 8">
+            <a:extLst>
+              <a:ext uri="{FF2B5EF4-FFF2-40B4-BE49-F238E27FC236}">
+                <a16:creationId xmlns:a16="http://schemas.microsoft.com/office/drawing/2014/main" id="{9F71A0C8-77D7-A66E-B708-D8AC28E81AF4}"/>
+              </a:ext>
+            </a:extLst>
+          </p:cNvPr>
+          <p:cNvPicPr>
+            <a:picLocks noChangeAspect="1"/>
+          </p:cNvPicPr>
+          <p:nvPr/>
+        </p:nvPicPr>
+        <p:blipFill>
+          <a:blip r:embed="rId12"/>
+          <a:srcRect l="14513" t="64295" r="44214" b="32559"/>
+          <a:stretch>
+            <a:fillRect/>
+          </a:stretch>
+        </p:blipFill>
+        <p:spPr>
+          <a:xfrm>
+            <a:off x="9548545" y="2289402"/>
+            <a:ext cx="1927123" cy="361676"/>
+          </a:xfrm>
+          <a:prstGeom prst="rect">
+            <a:avLst/>
+          </a:prstGeom>
+        </p:spPr>
+      </p:pic>
+      <p:pic>
+        <p:nvPicPr>
+          <p:cNvPr id="20" name="Image 19">
+            <a:extLst>
+              <a:ext uri="{FF2B5EF4-FFF2-40B4-BE49-F238E27FC236}">
+                <a16:creationId xmlns:a16="http://schemas.microsoft.com/office/drawing/2014/main" id="{4759ECC9-78C0-94F6-3760-27CA297330A1}"/>
+              </a:ext>
+            </a:extLst>
+          </p:cNvPr>
+          <p:cNvPicPr>
+            <a:picLocks noChangeAspect="1"/>
+          </p:cNvPicPr>
+          <p:nvPr/>
+        </p:nvPicPr>
+        <p:blipFill>
+          <a:blip r:embed="rId12"/>
+          <a:srcRect l="14513" t="67288" r="46846" b="29566"/>
+          <a:stretch>
+            <a:fillRect/>
+          </a:stretch>
+        </p:blipFill>
+        <p:spPr>
+          <a:xfrm>
+            <a:off x="585994" y="1931103"/>
+            <a:ext cx="2113789" cy="423733"/>
+          </a:xfrm>
+          <a:prstGeom prst="rect">
+            <a:avLst/>
+          </a:prstGeom>
+        </p:spPr>
+      </p:pic>
+      <p:pic>
+        <p:nvPicPr>
+          <p:cNvPr id="22" name="Image 21">
+            <a:extLst>
+              <a:ext uri="{FF2B5EF4-FFF2-40B4-BE49-F238E27FC236}">
+                <a16:creationId xmlns:a16="http://schemas.microsoft.com/office/drawing/2014/main" id="{D472EB71-B9F5-699A-1082-DE1B329B9244}"/>
+              </a:ext>
+            </a:extLst>
+          </p:cNvPr>
+          <p:cNvPicPr>
+            <a:picLocks noChangeAspect="1"/>
+          </p:cNvPicPr>
+          <p:nvPr/>
+        </p:nvPicPr>
+        <p:blipFill>
+          <a:blip r:embed="rId12"/>
+          <a:srcRect l="14513" t="70297" r="45261" b="26557"/>
+          <a:stretch>
+            <a:fillRect/>
+          </a:stretch>
+        </p:blipFill>
+        <p:spPr>
+          <a:xfrm>
+            <a:off x="585994" y="2322265"/>
+            <a:ext cx="2187796" cy="421294"/>
+          </a:xfrm>
+          <a:prstGeom prst="rect">
+            <a:avLst/>
+          </a:prstGeom>
+        </p:spPr>
+      </p:pic>
+      <p:pic>
+        <p:nvPicPr>
+          <p:cNvPr id="24" name="Image 23">
+            <a:extLst>
+              <a:ext uri="{FF2B5EF4-FFF2-40B4-BE49-F238E27FC236}">
+                <a16:creationId xmlns:a16="http://schemas.microsoft.com/office/drawing/2014/main" id="{14782BED-92DB-8A32-0312-C7A5E58B69E8}"/>
+              </a:ext>
+            </a:extLst>
+          </p:cNvPr>
+          <p:cNvPicPr>
+            <a:picLocks noChangeAspect="1"/>
+          </p:cNvPicPr>
+          <p:nvPr/>
+        </p:nvPicPr>
+        <p:blipFill>
+          <a:blip r:embed="rId12"/>
+          <a:srcRect l="14513" t="73442" r="45261" b="23635"/>
+          <a:stretch>
+            <a:fillRect/>
+          </a:stretch>
+        </p:blipFill>
+        <p:spPr>
+          <a:xfrm>
+            <a:off x="7276518" y="2903346"/>
+            <a:ext cx="1878197" cy="336038"/>
+          </a:xfrm>
+          <a:prstGeom prst="rect">
+            <a:avLst/>
+          </a:prstGeom>
+        </p:spPr>
+      </p:pic>
+      <p:pic>
+        <p:nvPicPr>
+          <p:cNvPr id="26" name="Image 25">
+            <a:extLst>
+              <a:ext uri="{FF2B5EF4-FFF2-40B4-BE49-F238E27FC236}">
+                <a16:creationId xmlns:a16="http://schemas.microsoft.com/office/drawing/2014/main" id="{D0DC277D-58EE-F3A4-A5B4-D0129DD81779}"/>
+              </a:ext>
+            </a:extLst>
+          </p:cNvPr>
+          <p:cNvPicPr>
+            <a:picLocks noChangeAspect="1"/>
+          </p:cNvPicPr>
+          <p:nvPr/>
+        </p:nvPicPr>
+        <p:blipFill>
+          <a:blip r:embed="rId12"/>
+          <a:srcRect l="14513" t="79709" r="45261" b="17710"/>
+          <a:stretch>
+            <a:fillRect/>
+          </a:stretch>
+        </p:blipFill>
+        <p:spPr>
+          <a:xfrm>
+            <a:off x="4876249" y="2903346"/>
+            <a:ext cx="1878197" cy="296709"/>
+          </a:xfrm>
+          <a:prstGeom prst="rect">
+            <a:avLst/>
+          </a:prstGeom>
+        </p:spPr>
+      </p:pic>
+      <p:pic>
+        <p:nvPicPr>
+          <p:cNvPr id="27" name="Image 26">
+            <a:extLst>
+              <a:ext uri="{FF2B5EF4-FFF2-40B4-BE49-F238E27FC236}">
+                <a16:creationId xmlns:a16="http://schemas.microsoft.com/office/drawing/2014/main" id="{75852515-2AA3-7B45-228B-EFC14833F744}"/>
+              </a:ext>
+            </a:extLst>
+          </p:cNvPr>
+          <p:cNvPicPr>
+            <a:picLocks noChangeAspect="1"/>
+          </p:cNvPicPr>
+          <p:nvPr/>
+        </p:nvPicPr>
+        <p:blipFill>
+          <a:blip r:embed="rId12"/>
+          <a:srcRect l="14512" t="85555" r="41058" b="11299"/>
+          <a:stretch>
+            <a:fillRect/>
+          </a:stretch>
+        </p:blipFill>
+        <p:spPr>
+          <a:xfrm>
+            <a:off x="585994" y="2743559"/>
+            <a:ext cx="2187796" cy="381436"/>
+          </a:xfrm>
+          <a:prstGeom prst="rect">
+            <a:avLst/>
+          </a:prstGeom>
+        </p:spPr>
+      </p:pic>
+      <p:pic>
+        <p:nvPicPr>
+          <p:cNvPr id="29" name="Image 28">
+            <a:extLst>
+              <a:ext uri="{FF2B5EF4-FFF2-40B4-BE49-F238E27FC236}">
+                <a16:creationId xmlns:a16="http://schemas.microsoft.com/office/drawing/2014/main" id="{73D1CF65-F120-1FBC-4BE4-A30B53450157}"/>
+              </a:ext>
+            </a:extLst>
+          </p:cNvPr>
+          <p:cNvPicPr>
+            <a:picLocks noChangeAspect="1"/>
+          </p:cNvPicPr>
+          <p:nvPr/>
+        </p:nvPicPr>
+        <p:blipFill>
+          <a:blip r:embed="rId13"/>
+          <a:srcRect l="6670"/>
+          <a:stretch>
+            <a:fillRect/>
+          </a:stretch>
+        </p:blipFill>
+        <p:spPr>
+          <a:xfrm>
+            <a:off x="4612221" y="3277847"/>
+            <a:ext cx="2406254" cy="335707"/>
+          </a:xfrm>
+          <a:prstGeom prst="rect">
+            <a:avLst/>
+          </a:prstGeom>
+        </p:spPr>
+      </p:pic>
+      <p:pic>
+        <p:nvPicPr>
+          <p:cNvPr id="30" name="Image 29">
+            <a:extLst>
+              <a:ext uri="{FF2B5EF4-FFF2-40B4-BE49-F238E27FC236}">
+                <a16:creationId xmlns:a16="http://schemas.microsoft.com/office/drawing/2014/main" id="{C927C0B2-5D09-B9D8-2221-7544C336D05C}"/>
+              </a:ext>
+            </a:extLst>
+          </p:cNvPr>
+          <p:cNvPicPr>
+            <a:picLocks noChangeAspect="1"/>
+          </p:cNvPicPr>
+          <p:nvPr/>
+        </p:nvPicPr>
+        <p:blipFill>
+          <a:blip r:embed="rId12"/>
+          <a:srcRect l="14513" t="88662" r="42842" b="8192"/>
+          <a:stretch>
+            <a:fillRect/>
+          </a:stretch>
+        </p:blipFill>
+        <p:spPr>
+          <a:xfrm>
+            <a:off x="9548544" y="1952789"/>
+            <a:ext cx="1927123" cy="350047"/>
+          </a:xfrm>
+          <a:prstGeom prst="rect">
+            <a:avLst/>
+          </a:prstGeom>
+        </p:spPr>
+      </p:pic>
+      <p:pic>
+        <p:nvPicPr>
+          <p:cNvPr id="31" name="Image 30">
+            <a:extLst>
+              <a:ext uri="{FF2B5EF4-FFF2-40B4-BE49-F238E27FC236}">
+                <a16:creationId xmlns:a16="http://schemas.microsoft.com/office/drawing/2014/main" id="{97D90A0C-05D2-DE7F-3861-908DB0CF9894}"/>
+              </a:ext>
+            </a:extLst>
+          </p:cNvPr>
+          <p:cNvPicPr>
+            <a:picLocks noChangeAspect="1"/>
+          </p:cNvPicPr>
+          <p:nvPr/>
+        </p:nvPicPr>
+        <p:blipFill>
+          <a:blip r:embed="rId12"/>
+          <a:srcRect l="14513" t="91143" r="38630" b="5711"/>
+          <a:stretch>
+            <a:fillRect/>
+          </a:stretch>
+        </p:blipFill>
+        <p:spPr>
+          <a:xfrm>
+            <a:off x="585994" y="3124995"/>
+            <a:ext cx="2187797" cy="361676"/>
+          </a:xfrm>
+          <a:prstGeom prst="rect">
+            <a:avLst/>
+          </a:prstGeom>
+        </p:spPr>
+      </p:pic>
+      <p:pic>
+        <p:nvPicPr>
+          <p:cNvPr id="32" name="Image 31">
+            <a:extLst>
+              <a:ext uri="{FF2B5EF4-FFF2-40B4-BE49-F238E27FC236}">
+                <a16:creationId xmlns:a16="http://schemas.microsoft.com/office/drawing/2014/main" id="{1C5A4847-E77E-292D-4026-A088A29D2C81}"/>
+              </a:ext>
+            </a:extLst>
+          </p:cNvPr>
+          <p:cNvPicPr>
+            <a:picLocks noChangeAspect="1"/>
+          </p:cNvPicPr>
+          <p:nvPr/>
+        </p:nvPicPr>
+        <p:blipFill>
+          <a:blip r:embed="rId12"/>
+          <a:srcRect l="14513" t="94189" r="38630" b="2665"/>
+          <a:stretch>
+            <a:fillRect/>
+          </a:stretch>
+        </p:blipFill>
+        <p:spPr>
+          <a:xfrm>
+            <a:off x="9539737" y="3407388"/>
+            <a:ext cx="2187797" cy="361676"/>
+          </a:xfrm>
+          <a:prstGeom prst="rect">
+            <a:avLst/>
+          </a:prstGeom>
+        </p:spPr>
+      </p:pic>
+      <p:pic>
+        <p:nvPicPr>
+          <p:cNvPr id="2" name="Image 1">
+            <a:extLst>
+              <a:ext uri="{FF2B5EF4-FFF2-40B4-BE49-F238E27FC236}">
+                <a16:creationId xmlns:a16="http://schemas.microsoft.com/office/drawing/2014/main" id="{7E4FDECD-A97C-1770-C7D6-B6CC2CA8E785}"/>
+              </a:ext>
+            </a:extLst>
+          </p:cNvPr>
+          <p:cNvPicPr>
+            <a:picLocks noChangeAspect="1"/>
+          </p:cNvPicPr>
+          <p:nvPr/>
+        </p:nvPicPr>
+        <p:blipFill>
+          <a:blip r:embed="rId9">
+            <a:duotone>
+              <a:schemeClr val="bg2">
+                <a:shade val="45000"/>
+                <a:satMod val="135000"/>
+              </a:schemeClr>
+              <a:prstClr val="white"/>
+            </a:duotone>
+            <a:extLst>
+              <a:ext uri="{BEBA8EAE-BF5A-486C-A8C5-ECC9F3942E4B}">
+                <a14:imgProps xmlns:a14="http://schemas.microsoft.com/office/drawing/2010/main">
+                  <a14:imgLayer r:embed="rId10">
+                    <a14:imgEffect>
+                      <a14:colorTemperature colorTemp="4700"/>
+                    </a14:imgEffect>
+                    <a14:imgEffect>
+                      <a14:saturation sat="0"/>
+                    </a14:imgEffect>
+                  </a14:imgLayer>
+                </a14:imgProps>
+              </a:ext>
+            </a:extLst>
+          </a:blip>
+          <a:srcRect l="1287" t="17358" r="73201" b="14299"/>
+          <a:stretch>
+            <a:fillRect/>
+          </a:stretch>
+        </p:blipFill>
+        <p:spPr>
+          <a:xfrm rot="10800000">
+            <a:off x="10124587" y="4402769"/>
+            <a:ext cx="758627" cy="759734"/>
+          </a:xfrm>
+          <a:prstGeom prst="rect">
+            <a:avLst/>
+          </a:prstGeom>
+        </p:spPr>
+      </p:pic>
+      <p:pic>
+        <p:nvPicPr>
+          <p:cNvPr id="7" name="Image 6">
+            <a:extLst>
+              <a:ext uri="{FF2B5EF4-FFF2-40B4-BE49-F238E27FC236}">
+                <a16:creationId xmlns:a16="http://schemas.microsoft.com/office/drawing/2014/main" id="{A914A321-473B-1414-5797-92326A775794}"/>
+              </a:ext>
+            </a:extLst>
+          </p:cNvPr>
+          <p:cNvPicPr>
+            <a:picLocks noChangeAspect="1"/>
+          </p:cNvPicPr>
+          <p:nvPr/>
+        </p:nvPicPr>
+        <p:blipFill>
+          <a:blip r:embed="rId9">
+            <a:duotone>
+              <a:schemeClr val="bg2">
+                <a:shade val="45000"/>
+                <a:satMod val="135000"/>
+              </a:schemeClr>
+              <a:prstClr val="white"/>
+            </a:duotone>
+            <a:extLst>
+              <a:ext uri="{BEBA8EAE-BF5A-486C-A8C5-ECC9F3942E4B}">
+                <a14:imgProps xmlns:a14="http://schemas.microsoft.com/office/drawing/2010/main">
+                  <a14:imgLayer r:embed="rId10">
+                    <a14:imgEffect>
+                      <a14:colorTemperature colorTemp="4700"/>
+                    </a14:imgEffect>
+                    <a14:imgEffect>
+                      <a14:saturation sat="0"/>
+                    </a14:imgEffect>
+                  </a14:imgLayer>
+                </a14:imgProps>
+              </a:ext>
+            </a:extLst>
+          </a:blip>
+          <a:srcRect l="1287" t="17358" r="73201" b="14299"/>
+          <a:stretch>
+            <a:fillRect/>
+          </a:stretch>
+        </p:blipFill>
+        <p:spPr>
+          <a:xfrm>
+            <a:off x="1259117" y="4412601"/>
+            <a:ext cx="758627" cy="759734"/>
+          </a:xfrm>
+          <a:prstGeom prst="rect">
+            <a:avLst/>
+          </a:prstGeom>
+        </p:spPr>
+      </p:pic>
+      <p:sp>
+        <p:nvSpPr>
+          <p:cNvPr id="10" name="Rectangle 9">
+            <a:extLst>
+              <a:ext uri="{FF2B5EF4-FFF2-40B4-BE49-F238E27FC236}">
+                <a16:creationId xmlns:a16="http://schemas.microsoft.com/office/drawing/2014/main" id="{BFE19E26-44EF-9929-0DD4-2332F71D2D02}"/>
+              </a:ext>
+            </a:extLst>
+          </p:cNvPr>
+          <p:cNvSpPr/>
+          <p:nvPr/>
+        </p:nvSpPr>
+        <p:spPr>
+          <a:xfrm>
+            <a:off x="1995948" y="4678874"/>
+            <a:ext cx="8209935" cy="218159"/>
+          </a:xfrm>
+          <a:prstGeom prst="rect">
+            <a:avLst/>
+          </a:prstGeom>
+          <a:noFill/>
+          <a:ln w="38100">
+            <a:solidFill>
+              <a:schemeClr val="bg2">
+                <a:lumMod val="75000"/>
+              </a:schemeClr>
+            </a:solidFill>
+          </a:ln>
+        </p:spPr>
+        <p:style>
+          <a:lnRef idx="2">
+            <a:schemeClr val="accent1">
+              <a:shade val="15000"/>
+            </a:schemeClr>
+          </a:lnRef>
+          <a:fillRef idx="1">
+            <a:schemeClr val="accent1"/>
+          </a:fillRef>
+          <a:effectRef idx="0">
+            <a:schemeClr val="accent1"/>
+          </a:effectRef>
+          <a:fontRef idx="minor">
+            <a:schemeClr val="lt1"/>
+          </a:fontRef>
+        </p:style>
+        <p:txBody>
+          <a:bodyPr rtlCol="0" anchor="ctr"/>
+          <a:lstStyle/>
+          <a:p>
+            <a:pPr algn="ctr"/>
+            <a:endParaRPr lang="fr-CA"/>
+          </a:p>
+        </p:txBody>
+      </p:sp>
+      <p:sp>
+        <p:nvSpPr>
+          <p:cNvPr id="12" name="Rectangle 11">
+            <a:extLst>
+              <a:ext uri="{FF2B5EF4-FFF2-40B4-BE49-F238E27FC236}">
+                <a16:creationId xmlns:a16="http://schemas.microsoft.com/office/drawing/2014/main" id="{C1526B86-6090-814A-C4D9-6EEE9C3F9C2E}"/>
+              </a:ext>
+            </a:extLst>
+          </p:cNvPr>
+          <p:cNvSpPr/>
+          <p:nvPr>
+            <p:custDataLst>
+              <p:tags r:id="rId4"/>
+            </p:custDataLst>
+          </p:nvPr>
+        </p:nvSpPr>
+        <p:spPr>
+          <a:xfrm>
+            <a:off x="655646" y="5136400"/>
+            <a:ext cx="10880706" cy="942792"/>
+          </a:xfrm>
+          <a:prstGeom prst="rect">
+            <a:avLst/>
+          </a:prstGeom>
+          <a:noFill/>
+          <a:ln>
+            <a:noFill/>
+          </a:ln>
+        </p:spPr>
+        <p:style>
+          <a:lnRef idx="2">
+            <a:schemeClr val="accent1">
+              <a:shade val="15000"/>
+            </a:schemeClr>
+          </a:lnRef>
+          <a:fillRef idx="1">
+            <a:schemeClr val="accent1"/>
+          </a:fillRef>
+          <a:effectRef idx="0">
+            <a:schemeClr val="accent1"/>
+          </a:effectRef>
+          <a:fontRef idx="minor">
+            <a:schemeClr val="lt1"/>
+          </a:fontRef>
+        </p:style>
+        <p:txBody>
+          <a:bodyPr rtlCol="0" anchor="ctr"/>
+          <a:lstStyle/>
+          <a:p>
+            <a:pPr algn="ctr"/>
+            <a:r>
+              <a:rPr lang="fr-FR" sz="3000">
+                <a:latin typeface="Pixel Operator 8" panose="02000503000000000000" pitchFamily="2" charset="0"/>
+              </a:rPr>
+              <a:t>Alexis		Les deux		Nicolas </a:t>
+            </a:r>
+            <a:endParaRPr lang="fr-CA" sz="3000">
+              <a:latin typeface="Pixel Operator 8" panose="02000503000000000000" pitchFamily="2" charset="0"/>
+            </a:endParaRPr>
+          </a:p>
+        </p:txBody>
+      </p:sp>
+      <p:sp>
+        <p:nvSpPr>
+          <p:cNvPr id="13" name="Rectangle 12">
+            <a:extLst>
+              <a:ext uri="{FF2B5EF4-FFF2-40B4-BE49-F238E27FC236}">
+                <a16:creationId xmlns:a16="http://schemas.microsoft.com/office/drawing/2014/main" id="{15BFA4E3-62D7-2C05-6B52-53D962B26940}"/>
+              </a:ext>
+            </a:extLst>
+          </p:cNvPr>
+          <p:cNvSpPr/>
+          <p:nvPr>
+            <p:custDataLst>
+              <p:tags r:id="rId5"/>
+            </p:custDataLst>
+          </p:nvPr>
+        </p:nvSpPr>
+        <p:spPr>
+          <a:xfrm>
+            <a:off x="9199549" y="2710276"/>
+            <a:ext cx="2760804" cy="942792"/>
+          </a:xfrm>
+          <a:prstGeom prst="rect">
+            <a:avLst/>
+          </a:prstGeom>
+          <a:noFill/>
+          <a:ln>
+            <a:noFill/>
+          </a:ln>
+        </p:spPr>
+        <p:style>
+          <a:lnRef idx="2">
+            <a:schemeClr val="accent1">
+              <a:shade val="15000"/>
+            </a:schemeClr>
+          </a:lnRef>
+          <a:fillRef idx="1">
+            <a:schemeClr val="accent1"/>
+          </a:fillRef>
+          <a:effectRef idx="0">
+            <a:schemeClr val="accent1"/>
+          </a:effectRef>
+          <a:fontRef idx="minor">
+            <a:schemeClr val="lt1"/>
+          </a:fontRef>
+        </p:style>
+        <p:txBody>
+          <a:bodyPr rtlCol="0" anchor="ctr"/>
+          <a:lstStyle/>
+          <a:p>
+            <a:pPr algn="ctr"/>
+            <a:r>
+              <a:rPr lang="fr-FR">
+                <a:latin typeface="Pixel Operator 8" panose="02000503000000000000" pitchFamily="2" charset="0"/>
+              </a:rPr>
+              <a:t>Nouveau</a:t>
+            </a:r>
+            <a:endParaRPr lang="fr-CA">
+              <a:latin typeface="Pixel Operator 8" panose="02000503000000000000" pitchFamily="2" charset="0"/>
+            </a:endParaRPr>
+          </a:p>
+        </p:txBody>
+      </p:sp>
+    </p:spTree>
+    <p:extLst>
+      <p:ext uri="{BB962C8B-B14F-4D97-AF65-F5344CB8AC3E}">
+        <p14:creationId xmlns:p14="http://schemas.microsoft.com/office/powerpoint/2010/main" val="1936484689"/>
+      </p:ext>
+    </p:extLst>
+  </p:cSld>
+  <p:clrMapOvr>
+    <a:masterClrMapping/>
+  </p:clrMapOvr>
+</p:sld>
+</file>
+
+<file path=ppt/slides/slide3.xml><?xml version="1.0" encoding="utf-8"?>
 <p:sld xmlns:a="http://schemas.openxmlformats.org/drawingml/2006/main" xmlns:r="http://schemas.openxmlformats.org/officeDocument/2006/relationships" xmlns:p="http://schemas.openxmlformats.org/presentationml/2006/main">
   <p:cSld>
     <p:spTree>
@@ -4477,153 +8114,33 @@
           </a:prstGeom>
         </p:spPr>
       </p:pic>
-      <p:pic>
-        <p:nvPicPr>
-          <p:cNvPr id="7" name="Image 6">
-            <a:extLst>
-              <a:ext uri="{FF2B5EF4-FFF2-40B4-BE49-F238E27FC236}">
-                <a16:creationId xmlns:a16="http://schemas.microsoft.com/office/drawing/2014/main" id="{8648ED29-632E-1B99-FE35-2F08BDFFE572}"/>
-              </a:ext>
-            </a:extLst>
-          </p:cNvPr>
-          <p:cNvPicPr>
-            <a:picLocks noChangeAspect="1"/>
-          </p:cNvPicPr>
-          <p:nvPr/>
-        </p:nvPicPr>
-        <p:blipFill>
-          <a:blip r:embed="rId10"/>
-          <a:stretch>
-            <a:fillRect/>
-          </a:stretch>
-        </p:blipFill>
-        <p:spPr>
-          <a:xfrm>
-            <a:off x="678258" y="1929609"/>
-            <a:ext cx="10894476" cy="942792"/>
-          </a:xfrm>
-          <a:prstGeom prst="rect">
-            <a:avLst/>
-          </a:prstGeom>
-        </p:spPr>
-      </p:pic>
-      <p:pic>
-        <p:nvPicPr>
-          <p:cNvPr id="10" name="Image 9">
-            <a:extLst>
-              <a:ext uri="{FF2B5EF4-FFF2-40B4-BE49-F238E27FC236}">
-                <a16:creationId xmlns:a16="http://schemas.microsoft.com/office/drawing/2014/main" id="{18229DEA-3D2D-4ADA-CFE6-B30BDEAE9B1F}"/>
-              </a:ext>
-            </a:extLst>
-          </p:cNvPr>
-          <p:cNvPicPr>
-            <a:picLocks noChangeAspect="1"/>
-          </p:cNvPicPr>
-          <p:nvPr/>
-        </p:nvPicPr>
-        <p:blipFill>
-          <a:blip r:embed="rId11"/>
-          <a:stretch>
-            <a:fillRect/>
-          </a:stretch>
-        </p:blipFill>
-        <p:spPr>
-          <a:xfrm>
-            <a:off x="678258" y="2934653"/>
-            <a:ext cx="1323577" cy="3348258"/>
-          </a:xfrm>
-          <a:prstGeom prst="rect">
-            <a:avLst/>
-          </a:prstGeom>
-        </p:spPr>
-      </p:pic>
-      <p:pic>
-        <p:nvPicPr>
-          <p:cNvPr id="13" name="Image 12">
-            <a:extLst>
-              <a:ext uri="{FF2B5EF4-FFF2-40B4-BE49-F238E27FC236}">
-                <a16:creationId xmlns:a16="http://schemas.microsoft.com/office/drawing/2014/main" id="{C8443343-9B91-1894-E3FC-267C9DFAE362}"/>
-              </a:ext>
-            </a:extLst>
-          </p:cNvPr>
-          <p:cNvPicPr>
-            <a:picLocks noChangeAspect="1"/>
-          </p:cNvPicPr>
-          <p:nvPr/>
-        </p:nvPicPr>
-        <p:blipFill>
-          <a:blip r:embed="rId12"/>
-          <a:srcRect b="57456"/>
-          <a:stretch>
-            <a:fillRect/>
-          </a:stretch>
-        </p:blipFill>
-        <p:spPr>
-          <a:xfrm>
-            <a:off x="1990367" y="2934653"/>
-            <a:ext cx="6122235" cy="3348258"/>
-          </a:xfrm>
-          <a:prstGeom prst="rect">
-            <a:avLst/>
-          </a:prstGeom>
-        </p:spPr>
-      </p:pic>
-      <p:pic>
-        <p:nvPicPr>
-          <p:cNvPr id="12" name="Image 11">
-            <a:extLst>
-              <a:ext uri="{FF2B5EF4-FFF2-40B4-BE49-F238E27FC236}">
-                <a16:creationId xmlns:a16="http://schemas.microsoft.com/office/drawing/2014/main" id="{49B9C759-C1BD-75E8-6615-E5BBF95FFAF0}"/>
-              </a:ext>
-            </a:extLst>
-          </p:cNvPr>
-          <p:cNvPicPr>
-            <a:picLocks noChangeAspect="1"/>
-          </p:cNvPicPr>
-          <p:nvPr/>
-        </p:nvPicPr>
-        <p:blipFill>
-          <a:blip r:embed="rId12"/>
-          <a:srcRect t="41579"/>
-          <a:stretch>
-            <a:fillRect/>
-          </a:stretch>
-        </p:blipFill>
-        <p:spPr>
-          <a:xfrm>
-            <a:off x="6983111" y="2901986"/>
-            <a:ext cx="4511222" cy="3387933"/>
-          </a:xfrm>
-          <a:prstGeom prst="rect">
-            <a:avLst/>
-          </a:prstGeom>
-        </p:spPr>
-      </p:pic>
-      <p:sp>
-        <p:nvSpPr>
-          <p:cNvPr id="14" name="Rectangle 13">
-            <a:extLst>
-              <a:ext uri="{FF2B5EF4-FFF2-40B4-BE49-F238E27FC236}">
-                <a16:creationId xmlns:a16="http://schemas.microsoft.com/office/drawing/2014/main" id="{14D62A51-AE84-28E6-897E-C1EDC743760B}"/>
+      <p:sp>
+        <p:nvSpPr>
+          <p:cNvPr id="4" name="Rectangle 3">
+            <a:extLst>
+              <a:ext uri="{FF2B5EF4-FFF2-40B4-BE49-F238E27FC236}">
+                <a16:creationId xmlns:a16="http://schemas.microsoft.com/office/drawing/2014/main" id="{65893BF0-0020-B479-3D5B-C4D0F944DD18}"/>
               </a:ext>
             </a:extLst>
           </p:cNvPr>
           <p:cNvSpPr/>
-          <p:nvPr/>
-        </p:nvSpPr>
-        <p:spPr>
-          <a:xfrm>
-            <a:off x="2795985" y="3874238"/>
-            <a:ext cx="1003855" cy="2062480"/>
+          <p:nvPr>
+            <p:custDataLst>
+              <p:tags r:id="rId3"/>
+            </p:custDataLst>
+          </p:nvPr>
+        </p:nvSpPr>
+        <p:spPr>
+          <a:xfrm>
+            <a:off x="655646" y="703384"/>
+            <a:ext cx="10880706" cy="942792"/>
           </a:xfrm>
           <a:prstGeom prst="rect">
             <a:avLst/>
           </a:prstGeom>
           <a:noFill/>
           <a:ln>
-            <a:solidFill>
-              <a:srgbClr val="FFC000"/>
-            </a:solidFill>
+            <a:noFill/>
           </a:ln>
         </p:spPr>
         <p:style>
@@ -4647,26 +8164,228 @@
           <a:lstStyle/>
           <a:p>
             <a:pPr algn="ctr"/>
-            <a:endParaRPr lang="fr-CA"/>
+            <a:r>
+              <a:rPr lang="fr-CA" sz="3000">
+                <a:latin typeface="Pixel Operator 8" panose="02000503000000000000" pitchFamily="2" charset="0"/>
+              </a:rPr>
+              <a:t>Tâches effectuées par Alexis :</a:t>
+            </a:r>
           </a:p>
         </p:txBody>
       </p:sp>
-      <p:sp>
-        <p:nvSpPr>
-          <p:cNvPr id="15" name="Rectangle 14">
-            <a:extLst>
-              <a:ext uri="{FF2B5EF4-FFF2-40B4-BE49-F238E27FC236}">
-                <a16:creationId xmlns:a16="http://schemas.microsoft.com/office/drawing/2014/main" id="{2F0A2E73-1091-ECDF-AB20-0D69AA6DFE96}"/>
+      <p:pic>
+        <p:nvPicPr>
+          <p:cNvPr id="35" name="Image 34">
+            <a:extLst>
+              <a:ext uri="{FF2B5EF4-FFF2-40B4-BE49-F238E27FC236}">
+                <a16:creationId xmlns:a16="http://schemas.microsoft.com/office/drawing/2014/main" id="{E872862A-254C-C343-40AB-E1D6C7BB5F59}"/>
+              </a:ext>
+            </a:extLst>
+          </p:cNvPr>
+          <p:cNvPicPr>
+            <a:picLocks noChangeAspect="1"/>
+          </p:cNvPicPr>
+          <p:nvPr/>
+        </p:nvPicPr>
+        <p:blipFill>
+          <a:blip r:embed="rId10"/>
+          <a:srcRect l="14513" t="67288" r="46846" b="29566"/>
+          <a:stretch>
+            <a:fillRect/>
+          </a:stretch>
+        </p:blipFill>
+        <p:spPr>
+          <a:xfrm>
+            <a:off x="526797" y="1558944"/>
+            <a:ext cx="2113789" cy="423733"/>
+          </a:xfrm>
+          <a:prstGeom prst="rect">
+            <a:avLst/>
+          </a:prstGeom>
+        </p:spPr>
+      </p:pic>
+      <p:pic>
+        <p:nvPicPr>
+          <p:cNvPr id="37" name="Image 36">
+            <a:extLst>
+              <a:ext uri="{FF2B5EF4-FFF2-40B4-BE49-F238E27FC236}">
+                <a16:creationId xmlns:a16="http://schemas.microsoft.com/office/drawing/2014/main" id="{7948EA2C-416B-4992-42BF-D2FD6187DBFC}"/>
+              </a:ext>
+            </a:extLst>
+          </p:cNvPr>
+          <p:cNvPicPr>
+            <a:picLocks noChangeAspect="1"/>
+          </p:cNvPicPr>
+          <p:nvPr/>
+        </p:nvPicPr>
+        <p:blipFill>
+          <a:blip r:embed="rId11"/>
+          <a:stretch>
+            <a:fillRect/>
+          </a:stretch>
+        </p:blipFill>
+        <p:spPr>
+          <a:xfrm>
+            <a:off x="526797" y="2069202"/>
+            <a:ext cx="4813010" cy="2052607"/>
+          </a:xfrm>
+          <a:prstGeom prst="rect">
+            <a:avLst/>
+          </a:prstGeom>
+        </p:spPr>
+      </p:pic>
+      <p:pic>
+        <p:nvPicPr>
+          <p:cNvPr id="38" name="Image 37">
+            <a:extLst>
+              <a:ext uri="{FF2B5EF4-FFF2-40B4-BE49-F238E27FC236}">
+                <a16:creationId xmlns:a16="http://schemas.microsoft.com/office/drawing/2014/main" id="{8CCB0343-370A-8FDA-1420-1D4C5D5EFEC7}"/>
+              </a:ext>
+            </a:extLst>
+          </p:cNvPr>
+          <p:cNvPicPr>
+            <a:picLocks noChangeAspect="1"/>
+          </p:cNvPicPr>
+          <p:nvPr/>
+        </p:nvPicPr>
+        <p:blipFill>
+          <a:blip r:embed="rId10"/>
+          <a:srcRect l="14513" t="70297" r="45261" b="26557"/>
+          <a:stretch>
+            <a:fillRect/>
+          </a:stretch>
+        </p:blipFill>
+        <p:spPr>
+          <a:xfrm>
+            <a:off x="5433297" y="1603780"/>
+            <a:ext cx="2187796" cy="421294"/>
+          </a:xfrm>
+          <a:prstGeom prst="rect">
+            <a:avLst/>
+          </a:prstGeom>
+        </p:spPr>
+      </p:pic>
+      <p:pic>
+        <p:nvPicPr>
+          <p:cNvPr id="40" name="Image 39">
+            <a:extLst>
+              <a:ext uri="{FF2B5EF4-FFF2-40B4-BE49-F238E27FC236}">
+                <a16:creationId xmlns:a16="http://schemas.microsoft.com/office/drawing/2014/main" id="{436B1D9F-29F0-3DD0-AE75-5B668146ED47}"/>
+              </a:ext>
+            </a:extLst>
+          </p:cNvPr>
+          <p:cNvPicPr>
+            <a:picLocks noChangeAspect="1"/>
+          </p:cNvPicPr>
+          <p:nvPr/>
+        </p:nvPicPr>
+        <p:blipFill>
+          <a:blip r:embed="rId12"/>
+          <a:stretch>
+            <a:fillRect/>
+          </a:stretch>
+        </p:blipFill>
+        <p:spPr>
+          <a:xfrm>
+            <a:off x="5433296" y="2049299"/>
+            <a:ext cx="6117743" cy="3053643"/>
+          </a:xfrm>
+          <a:prstGeom prst="rect">
+            <a:avLst/>
+          </a:prstGeom>
+        </p:spPr>
+      </p:pic>
+    </p:spTree>
+    <p:extLst>
+      <p:ext uri="{BB962C8B-B14F-4D97-AF65-F5344CB8AC3E}">
+        <p14:creationId xmlns:p14="http://schemas.microsoft.com/office/powerpoint/2010/main" val="4043715842"/>
+      </p:ext>
+    </p:extLst>
+  </p:cSld>
+  <p:clrMapOvr>
+    <a:masterClrMapping/>
+  </p:clrMapOvr>
+</p:sld>
+</file>
+
+<file path=ppt/slides/slide4.xml><?xml version="1.0" encoding="utf-8"?>
+<p:sld xmlns:a="http://schemas.openxmlformats.org/drawingml/2006/main" xmlns:r="http://schemas.openxmlformats.org/officeDocument/2006/relationships" xmlns:p="http://schemas.openxmlformats.org/presentationml/2006/main">
+  <p:cSld>
+    <p:spTree>
+      <p:nvGrpSpPr>
+        <p:cNvPr id="1" name="">
+          <a:extLst>
+            <a:ext uri="{FF2B5EF4-FFF2-40B4-BE49-F238E27FC236}">
+              <a16:creationId xmlns:a16="http://schemas.microsoft.com/office/drawing/2014/main" id="{20768567-1BE8-1218-27A5-5ABA2E70ABCE}"/>
+            </a:ext>
+          </a:extLst>
+        </p:cNvPr>
+        <p:cNvGrpSpPr/>
+        <p:nvPr/>
+      </p:nvGrpSpPr>
+      <p:grpSpPr>
+        <a:xfrm>
+          <a:off x="0" y="0"/>
+          <a:ext cx="0" cy="0"/>
+          <a:chOff x="0" y="0"/>
+          <a:chExt cx="0" cy="0"/>
+        </a:xfrm>
+      </p:grpSpPr>
+      <p:pic>
+        <p:nvPicPr>
+          <p:cNvPr id="8" name="Image 7">
+            <a:extLst>
+              <a:ext uri="{FF2B5EF4-FFF2-40B4-BE49-F238E27FC236}">
+                <a16:creationId xmlns:a16="http://schemas.microsoft.com/office/drawing/2014/main" id="{015BA9C5-7420-A041-8973-91427C321202}"/>
+              </a:ext>
+            </a:extLst>
+          </p:cNvPr>
+          <p:cNvPicPr>
+            <a:picLocks noChangeAspect="1"/>
+          </p:cNvPicPr>
+          <p:nvPr>
+            <p:custDataLst>
+              <p:tags r:id="rId1"/>
+            </p:custDataLst>
+          </p:nvPr>
+        </p:nvPicPr>
+        <p:blipFill>
+          <a:blip r:embed="rId6"/>
+          <a:srcRect l="4895" t="76969" r="85984"/>
+          <a:stretch>
+            <a:fillRect/>
+          </a:stretch>
+        </p:blipFill>
+        <p:spPr>
+          <a:xfrm>
+            <a:off x="29496" y="0"/>
+            <a:ext cx="12192000" cy="6858000"/>
+          </a:xfrm>
+          <a:prstGeom prst="rect">
+            <a:avLst/>
+          </a:prstGeom>
+        </p:spPr>
+      </p:pic>
+      <p:sp>
+        <p:nvSpPr>
+          <p:cNvPr id="18" name="Rectangle 17">
+            <a:extLst>
+              <a:ext uri="{FF2B5EF4-FFF2-40B4-BE49-F238E27FC236}">
+                <a16:creationId xmlns:a16="http://schemas.microsoft.com/office/drawing/2014/main" id="{34A93035-8803-B68D-58F5-84FAFA71A31F}"/>
               </a:ext>
             </a:extLst>
           </p:cNvPr>
           <p:cNvSpPr/>
-          <p:nvPr/>
-        </p:nvSpPr>
-        <p:spPr>
-          <a:xfrm>
-            <a:off x="7701581" y="3370302"/>
-            <a:ext cx="1723130" cy="163744"/>
+          <p:nvPr>
+            <p:custDataLst>
+              <p:tags r:id="rId2"/>
+            </p:custDataLst>
+          </p:nvPr>
+        </p:nvSpPr>
+        <p:spPr>
+          <a:xfrm>
+            <a:off x="245806" y="403123"/>
+            <a:ext cx="11759381" cy="6194321"/>
           </a:xfrm>
           <a:prstGeom prst="rect">
             <a:avLst/>
@@ -4674,7 +8393,7 @@
           <a:noFill/>
           <a:ln>
             <a:solidFill>
-              <a:srgbClr val="FFC000"/>
+              <a:schemeClr val="bg1"/>
             </a:solidFill>
           </a:ln>
         </p:spPr>
@@ -4703,31 +8422,169 @@
           </a:p>
         </p:txBody>
       </p:sp>
-      <p:sp>
-        <p:nvSpPr>
-          <p:cNvPr id="16" name="Rectangle 15">
-            <a:extLst>
-              <a:ext uri="{FF2B5EF4-FFF2-40B4-BE49-F238E27FC236}">
-                <a16:creationId xmlns:a16="http://schemas.microsoft.com/office/drawing/2014/main" id="{3329828A-1695-9EAE-1245-F9E5D5D27BB8}"/>
+      <p:pic>
+        <p:nvPicPr>
+          <p:cNvPr id="6" name="Image 5">
+            <a:extLst>
+              <a:ext uri="{FF2B5EF4-FFF2-40B4-BE49-F238E27FC236}">
+                <a16:creationId xmlns:a16="http://schemas.microsoft.com/office/drawing/2014/main" id="{888D0B70-1005-C9F2-9295-F9C4CC346D61}"/>
+              </a:ext>
+            </a:extLst>
+          </p:cNvPr>
+          <p:cNvPicPr>
+            <a:picLocks noChangeAspect="1"/>
+          </p:cNvPicPr>
+          <p:nvPr/>
+        </p:nvPicPr>
+        <p:blipFill>
+          <a:blip r:embed="rId7">
+            <a:duotone>
+              <a:schemeClr val="bg2">
+                <a:shade val="45000"/>
+                <a:satMod val="135000"/>
+              </a:schemeClr>
+              <a:prstClr val="white"/>
+            </a:duotone>
+            <a:extLst>
+              <a:ext uri="{BEBA8EAE-BF5A-486C-A8C5-ECC9F3942E4B}">
+                <a14:imgProps xmlns:a14="http://schemas.microsoft.com/office/drawing/2010/main">
+                  <a14:imgLayer r:embed="rId8">
+                    <a14:imgEffect>
+                      <a14:colorTemperature colorTemp="4700"/>
+                    </a14:imgEffect>
+                    <a14:imgEffect>
+                      <a14:saturation sat="0"/>
+                    </a14:imgEffect>
+                  </a14:imgLayer>
+                </a14:imgProps>
+              </a:ext>
+            </a:extLst>
+          </a:blip>
+          <a:srcRect l="1287" t="17358" r="73201" b="14299"/>
+          <a:stretch>
+            <a:fillRect/>
+          </a:stretch>
+        </p:blipFill>
+        <p:spPr>
+          <a:xfrm rot="10800000">
+            <a:off x="11433373" y="6098266"/>
+            <a:ext cx="758627" cy="759734"/>
+          </a:xfrm>
+          <a:prstGeom prst="rect">
+            <a:avLst/>
+          </a:prstGeom>
+        </p:spPr>
+      </p:pic>
+      <p:pic>
+        <p:nvPicPr>
+          <p:cNvPr id="5" name="Image 4">
+            <a:extLst>
+              <a:ext uri="{FF2B5EF4-FFF2-40B4-BE49-F238E27FC236}">
+                <a16:creationId xmlns:a16="http://schemas.microsoft.com/office/drawing/2014/main" id="{03872119-6214-B975-EE83-DCC99D6C1945}"/>
+              </a:ext>
+            </a:extLst>
+          </p:cNvPr>
+          <p:cNvPicPr>
+            <a:picLocks noChangeAspect="1"/>
+          </p:cNvPicPr>
+          <p:nvPr/>
+        </p:nvPicPr>
+        <p:blipFill>
+          <a:blip r:embed="rId9"/>
+          <a:stretch>
+            <a:fillRect/>
+          </a:stretch>
+        </p:blipFill>
+        <p:spPr>
+          <a:xfrm>
+            <a:off x="1776083" y="120059"/>
+            <a:ext cx="8639833" cy="860963"/>
+          </a:xfrm>
+          <a:prstGeom prst="rect">
+            <a:avLst/>
+          </a:prstGeom>
+        </p:spPr>
+      </p:pic>
+      <p:pic>
+        <p:nvPicPr>
+          <p:cNvPr id="3" name="Image 2">
+            <a:extLst>
+              <a:ext uri="{FF2B5EF4-FFF2-40B4-BE49-F238E27FC236}">
+                <a16:creationId xmlns:a16="http://schemas.microsoft.com/office/drawing/2014/main" id="{E490BB10-BEB4-8807-3864-276ED5F66137}"/>
+              </a:ext>
+            </a:extLst>
+          </p:cNvPr>
+          <p:cNvPicPr>
+            <a:picLocks noChangeAspect="1"/>
+          </p:cNvPicPr>
+          <p:nvPr/>
+        </p:nvPicPr>
+        <p:blipFill>
+          <a:blip r:embed="rId7">
+            <a:duotone>
+              <a:schemeClr val="bg2">
+                <a:shade val="45000"/>
+                <a:satMod val="135000"/>
+              </a:schemeClr>
+              <a:prstClr val="white"/>
+            </a:duotone>
+            <a:extLst>
+              <a:ext uri="{BEBA8EAE-BF5A-486C-A8C5-ECC9F3942E4B}">
+                <a14:imgProps xmlns:a14="http://schemas.microsoft.com/office/drawing/2010/main">
+                  <a14:imgLayer r:embed="rId8">
+                    <a14:imgEffect>
+                      <a14:colorTemperature colorTemp="4700"/>
+                    </a14:imgEffect>
+                    <a14:imgEffect>
+                      <a14:saturation sat="0"/>
+                    </a14:imgEffect>
+                  </a14:imgLayer>
+                </a14:imgProps>
+              </a:ext>
+            </a:extLst>
+          </a:blip>
+          <a:srcRect l="1287" t="17358" r="73201" b="14299"/>
+          <a:stretch>
+            <a:fillRect/>
+          </a:stretch>
+        </p:blipFill>
+        <p:spPr>
+          <a:xfrm>
+            <a:off x="0" y="6098266"/>
+            <a:ext cx="758627" cy="759734"/>
+          </a:xfrm>
+          <a:prstGeom prst="rect">
+            <a:avLst/>
+          </a:prstGeom>
+        </p:spPr>
+      </p:pic>
+      <p:sp>
+        <p:nvSpPr>
+          <p:cNvPr id="4" name="Rectangle 3">
+            <a:extLst>
+              <a:ext uri="{FF2B5EF4-FFF2-40B4-BE49-F238E27FC236}">
+                <a16:creationId xmlns:a16="http://schemas.microsoft.com/office/drawing/2014/main" id="{689F2802-C9CE-3F87-3A38-4BD467651C39}"/>
               </a:ext>
             </a:extLst>
           </p:cNvPr>
           <p:cNvSpPr/>
-          <p:nvPr/>
-        </p:nvSpPr>
-        <p:spPr>
-          <a:xfrm>
-            <a:off x="7730523" y="3735607"/>
-            <a:ext cx="1723130" cy="163744"/>
+          <p:nvPr>
+            <p:custDataLst>
+              <p:tags r:id="rId3"/>
+            </p:custDataLst>
+          </p:nvPr>
+        </p:nvSpPr>
+        <p:spPr>
+          <a:xfrm>
+            <a:off x="655646" y="703384"/>
+            <a:ext cx="10880706" cy="942792"/>
           </a:xfrm>
           <a:prstGeom prst="rect">
             <a:avLst/>
           </a:prstGeom>
           <a:noFill/>
           <a:ln>
-            <a:solidFill>
-              <a:srgbClr val="FFC000"/>
-            </a:solidFill>
+            <a:noFill/>
           </a:ln>
         </p:spPr>
         <p:style>
@@ -4751,16 +8608,21 @@
           <a:lstStyle/>
           <a:p>
             <a:pPr algn="ctr"/>
-            <a:endParaRPr lang="fr-CA"/>
+            <a:r>
+              <a:rPr lang="fr-CA" sz="3000">
+                <a:latin typeface="Pixel Operator 8" panose="02000503000000000000" pitchFamily="2" charset="0"/>
+              </a:rPr>
+              <a:t>Tâches effectuées par Alexis :</a:t>
+            </a:r>
           </a:p>
         </p:txBody>
       </p:sp>
       <p:pic>
         <p:nvPicPr>
-          <p:cNvPr id="19" name="Image 18">
-            <a:extLst>
-              <a:ext uri="{FF2B5EF4-FFF2-40B4-BE49-F238E27FC236}">
-                <a16:creationId xmlns:a16="http://schemas.microsoft.com/office/drawing/2014/main" id="{216C9B9C-684F-11A1-A2D2-B5CA0127EDBD}"/>
+          <p:cNvPr id="2" name="Image 1">
+            <a:extLst>
+              <a:ext uri="{FF2B5EF4-FFF2-40B4-BE49-F238E27FC236}">
+                <a16:creationId xmlns:a16="http://schemas.microsoft.com/office/drawing/2014/main" id="{FFC3D382-817D-EE2F-57B0-7F1C5E361CE2}"/>
               </a:ext>
             </a:extLst>
           </p:cNvPr>
@@ -4770,134 +8632,213 @@
           <p:nvPr/>
         </p:nvPicPr>
         <p:blipFill>
-          <a:blip r:embed="rId13"/>
+          <a:blip r:embed="rId10"/>
+          <a:srcRect l="14512" t="85555" r="41058" b="11299"/>
           <a:stretch>
             <a:fillRect/>
           </a:stretch>
         </p:blipFill>
         <p:spPr>
           <a:xfrm>
-            <a:off x="3913769" y="4398887"/>
-            <a:ext cx="3607446" cy="853833"/>
+            <a:off x="6125496" y="1780828"/>
+            <a:ext cx="2187796" cy="381436"/>
           </a:xfrm>
           <a:prstGeom prst="rect">
             <a:avLst/>
           </a:prstGeom>
         </p:spPr>
       </p:pic>
-      <p:cxnSp>
-        <p:nvCxnSpPr>
-          <p:cNvPr id="21" name="Connecteur droit avec flèche 20">
-            <a:extLst>
-              <a:ext uri="{FF2B5EF4-FFF2-40B4-BE49-F238E27FC236}">
-                <a16:creationId xmlns:a16="http://schemas.microsoft.com/office/drawing/2014/main" id="{5B270111-F29C-8403-900D-3755569109CA}"/>
-              </a:ext>
-            </a:extLst>
-          </p:cNvPr>
-          <p:cNvCxnSpPr/>
+      <p:pic>
+        <p:nvPicPr>
+          <p:cNvPr id="7" name="Image 6">
+            <a:extLst>
+              <a:ext uri="{FF2B5EF4-FFF2-40B4-BE49-F238E27FC236}">
+                <a16:creationId xmlns:a16="http://schemas.microsoft.com/office/drawing/2014/main" id="{F35E596A-FAAA-4516-DBF6-E081F212FA14}"/>
+              </a:ext>
+            </a:extLst>
+          </p:cNvPr>
+          <p:cNvPicPr>
+            <a:picLocks noChangeAspect="1"/>
+          </p:cNvPicPr>
           <p:nvPr/>
-        </p:nvCxnSpPr>
-        <p:spPr>
-          <a:xfrm>
-            <a:off x="3799840" y="4003040"/>
-            <a:ext cx="904240" cy="395847"/>
-          </a:xfrm>
-          <a:prstGeom prst="straightConnector1">
-            <a:avLst/>
-          </a:prstGeom>
+        </p:nvPicPr>
+        <p:blipFill>
+          <a:blip r:embed="rId10"/>
+          <a:srcRect l="14513" t="91143" r="38630" b="5711"/>
+          <a:stretch>
+            <a:fillRect/>
+          </a:stretch>
+        </p:blipFill>
+        <p:spPr>
+          <a:xfrm>
+            <a:off x="566329" y="1658203"/>
+            <a:ext cx="2187797" cy="361676"/>
+          </a:xfrm>
+          <a:prstGeom prst="rect">
+            <a:avLst/>
+          </a:prstGeom>
+        </p:spPr>
+      </p:pic>
+      <p:pic>
+        <p:nvPicPr>
+          <p:cNvPr id="10" name="Image 9">
+            <a:extLst>
+              <a:ext uri="{FF2B5EF4-FFF2-40B4-BE49-F238E27FC236}">
+                <a16:creationId xmlns:a16="http://schemas.microsoft.com/office/drawing/2014/main" id="{823103C3-AFD8-24FC-37DA-131A59394081}"/>
+              </a:ext>
+            </a:extLst>
+          </p:cNvPr>
+          <p:cNvPicPr>
+            <a:picLocks noChangeAspect="1"/>
+          </p:cNvPicPr>
+          <p:nvPr/>
+        </p:nvPicPr>
+        <p:blipFill>
+          <a:blip r:embed="rId11"/>
+          <a:stretch>
+            <a:fillRect/>
+          </a:stretch>
+        </p:blipFill>
+        <p:spPr>
+          <a:xfrm>
+            <a:off x="453645" y="2063788"/>
+            <a:ext cx="5433808" cy="2857107"/>
+          </a:xfrm>
+          <a:prstGeom prst="rect">
+            <a:avLst/>
+          </a:prstGeom>
+        </p:spPr>
+      </p:pic>
+      <p:pic>
+        <p:nvPicPr>
+          <p:cNvPr id="12" name="Image 11">
+            <a:extLst>
+              <a:ext uri="{FF2B5EF4-FFF2-40B4-BE49-F238E27FC236}">
+                <a16:creationId xmlns:a16="http://schemas.microsoft.com/office/drawing/2014/main" id="{5BB95C31-8594-3715-02BF-47D2DE9FF77B}"/>
+              </a:ext>
+            </a:extLst>
+          </p:cNvPr>
+          <p:cNvPicPr>
+            <a:picLocks noChangeAspect="1"/>
+          </p:cNvPicPr>
+          <p:nvPr/>
+        </p:nvPicPr>
+        <p:blipFill>
+          <a:blip r:embed="rId12"/>
+          <a:stretch>
+            <a:fillRect/>
+          </a:stretch>
+        </p:blipFill>
+        <p:spPr>
+          <a:xfrm>
+            <a:off x="6125495" y="2162264"/>
+            <a:ext cx="4248915" cy="3564768"/>
+          </a:xfrm>
+          <a:prstGeom prst="rect">
+            <a:avLst/>
+          </a:prstGeom>
+        </p:spPr>
+      </p:pic>
+    </p:spTree>
+    <p:extLst>
+      <p:ext uri="{BB962C8B-B14F-4D97-AF65-F5344CB8AC3E}">
+        <p14:creationId xmlns:p14="http://schemas.microsoft.com/office/powerpoint/2010/main" val="3720413620"/>
+      </p:ext>
+    </p:extLst>
+  </p:cSld>
+  <p:clrMapOvr>
+    <a:masterClrMapping/>
+  </p:clrMapOvr>
+</p:sld>
+</file>
+
+<file path=ppt/slides/slide5.xml><?xml version="1.0" encoding="utf-8"?>
+<p:sld xmlns:a="http://schemas.openxmlformats.org/drawingml/2006/main" xmlns:r="http://schemas.openxmlformats.org/officeDocument/2006/relationships" xmlns:p="http://schemas.openxmlformats.org/presentationml/2006/main">
+  <p:cSld>
+    <p:spTree>
+      <p:nvGrpSpPr>
+        <p:cNvPr id="1" name="">
+          <a:extLst>
+            <a:ext uri="{FF2B5EF4-FFF2-40B4-BE49-F238E27FC236}">
+              <a16:creationId xmlns:a16="http://schemas.microsoft.com/office/drawing/2014/main" id="{E6A371E3-B492-13B8-5DA0-3564019F7FC3}"/>
+            </a:ext>
+          </a:extLst>
+        </p:cNvPr>
+        <p:cNvGrpSpPr/>
+        <p:nvPr/>
+      </p:nvGrpSpPr>
+      <p:grpSpPr>
+        <a:xfrm>
+          <a:off x="0" y="0"/>
+          <a:ext cx="0" cy="0"/>
+          <a:chOff x="0" y="0"/>
+          <a:chExt cx="0" cy="0"/>
+        </a:xfrm>
+      </p:grpSpPr>
+      <p:pic>
+        <p:nvPicPr>
+          <p:cNvPr id="8" name="Image 7">
+            <a:extLst>
+              <a:ext uri="{FF2B5EF4-FFF2-40B4-BE49-F238E27FC236}">
+                <a16:creationId xmlns:a16="http://schemas.microsoft.com/office/drawing/2014/main" id="{CA2835A2-3609-F86B-E39C-1F9706A07363}"/>
+              </a:ext>
+            </a:extLst>
+          </p:cNvPr>
+          <p:cNvPicPr>
+            <a:picLocks noChangeAspect="1"/>
+          </p:cNvPicPr>
+          <p:nvPr>
+            <p:custDataLst>
+              <p:tags r:id="rId1"/>
+            </p:custDataLst>
+          </p:nvPr>
+        </p:nvPicPr>
+        <p:blipFill>
+          <a:blip r:embed="rId6"/>
+          <a:srcRect l="4895" t="76969" r="85984"/>
+          <a:stretch>
+            <a:fillRect/>
+          </a:stretch>
+        </p:blipFill>
+        <p:spPr>
+          <a:xfrm>
+            <a:off x="29496" y="0"/>
+            <a:ext cx="12192000" cy="6858000"/>
+          </a:xfrm>
+          <a:prstGeom prst="rect">
+            <a:avLst/>
+          </a:prstGeom>
+        </p:spPr>
+      </p:pic>
+      <p:sp>
+        <p:nvSpPr>
+          <p:cNvPr id="18" name="Rectangle 17">
+            <a:extLst>
+              <a:ext uri="{FF2B5EF4-FFF2-40B4-BE49-F238E27FC236}">
+                <a16:creationId xmlns:a16="http://schemas.microsoft.com/office/drawing/2014/main" id="{719E3BF7-DEE2-718A-F0AA-5FEE53A9C976}"/>
+              </a:ext>
+            </a:extLst>
+          </p:cNvPr>
+          <p:cNvSpPr/>
+          <p:nvPr>
+            <p:custDataLst>
+              <p:tags r:id="rId2"/>
+            </p:custDataLst>
+          </p:nvPr>
+        </p:nvSpPr>
+        <p:spPr>
+          <a:xfrm>
+            <a:off x="245806" y="403123"/>
+            <a:ext cx="11759381" cy="6194321"/>
+          </a:xfrm>
+          <a:prstGeom prst="rect">
+            <a:avLst/>
+          </a:prstGeom>
+          <a:noFill/>
           <a:ln>
             <a:solidFill>
-              <a:srgbClr val="FFC000"/>
+              <a:schemeClr val="bg1"/>
             </a:solidFill>
-            <a:tailEnd type="triangle"/>
-          </a:ln>
-        </p:spPr>
-        <p:style>
-          <a:lnRef idx="2">
-            <a:schemeClr val="accent1"/>
-          </a:lnRef>
-          <a:fillRef idx="0">
-            <a:schemeClr val="accent1"/>
-          </a:fillRef>
-          <a:effectRef idx="1">
-            <a:schemeClr val="accent1"/>
-          </a:effectRef>
-          <a:fontRef idx="minor">
-            <a:schemeClr val="tx1"/>
-          </a:fontRef>
-        </p:style>
-      </p:cxnSp>
-      <p:cxnSp>
-        <p:nvCxnSpPr>
-          <p:cNvPr id="23" name="Connecteur droit avec flèche 22">
-            <a:extLst>
-              <a:ext uri="{FF2B5EF4-FFF2-40B4-BE49-F238E27FC236}">
-                <a16:creationId xmlns:a16="http://schemas.microsoft.com/office/drawing/2014/main" id="{0F3C4BF0-45F7-D0CD-DE44-4FADD2A61112}"/>
-              </a:ext>
-            </a:extLst>
-          </p:cNvPr>
-          <p:cNvCxnSpPr>
-            <a:stCxn id="16" idx="1"/>
-          </p:cNvCxnSpPr>
-          <p:nvPr/>
-        </p:nvCxnSpPr>
-        <p:spPr>
-          <a:xfrm flipH="1">
-            <a:off x="6451600" y="3817479"/>
-            <a:ext cx="1278923" cy="581408"/>
-          </a:xfrm>
-          <a:prstGeom prst="straightConnector1">
-            <a:avLst/>
-          </a:prstGeom>
-          <a:ln>
-            <a:solidFill>
-              <a:srgbClr val="FFC000"/>
-            </a:solidFill>
-            <a:tailEnd type="triangle"/>
-          </a:ln>
-        </p:spPr>
-        <p:style>
-          <a:lnRef idx="2">
-            <a:schemeClr val="accent1"/>
-          </a:lnRef>
-          <a:fillRef idx="0">
-            <a:schemeClr val="accent1"/>
-          </a:fillRef>
-          <a:effectRef idx="1">
-            <a:schemeClr val="accent1"/>
-          </a:effectRef>
-          <a:fontRef idx="minor">
-            <a:schemeClr val="tx1"/>
-          </a:fontRef>
-        </p:style>
-      </p:cxnSp>
-      <p:sp>
-        <p:nvSpPr>
-          <p:cNvPr id="4" name="Rectangle 3">
-            <a:extLst>
-              <a:ext uri="{FF2B5EF4-FFF2-40B4-BE49-F238E27FC236}">
-                <a16:creationId xmlns:a16="http://schemas.microsoft.com/office/drawing/2014/main" id="{65893BF0-0020-B479-3D5B-C4D0F944DD18}"/>
-              </a:ext>
-            </a:extLst>
-          </p:cNvPr>
-          <p:cNvSpPr/>
-          <p:nvPr>
-            <p:custDataLst>
-              <p:tags r:id="rId3"/>
-            </p:custDataLst>
-          </p:nvPr>
-        </p:nvSpPr>
-        <p:spPr>
-          <a:xfrm>
-            <a:off x="655646" y="703384"/>
-            <a:ext cx="10880706" cy="942792"/>
-          </a:xfrm>
-          <a:prstGeom prst="rect">
-            <a:avLst/>
-          </a:prstGeom>
-          <a:noFill/>
-          <a:ln>
-            <a:noFill/>
           </a:ln>
         </p:spPr>
         <p:style>
@@ -4921,19 +8862,390 @@
           <a:lstStyle/>
           <a:p>
             <a:pPr algn="ctr"/>
+            <a:endParaRPr lang="fr-CA"/>
+          </a:p>
+        </p:txBody>
+      </p:sp>
+      <p:pic>
+        <p:nvPicPr>
+          <p:cNvPr id="6" name="Image 5">
+            <a:extLst>
+              <a:ext uri="{FF2B5EF4-FFF2-40B4-BE49-F238E27FC236}">
+                <a16:creationId xmlns:a16="http://schemas.microsoft.com/office/drawing/2014/main" id="{EA6B4559-E932-B5CF-6F45-9A48CD39C848}"/>
+              </a:ext>
+            </a:extLst>
+          </p:cNvPr>
+          <p:cNvPicPr>
+            <a:picLocks noChangeAspect="1"/>
+          </p:cNvPicPr>
+          <p:nvPr/>
+        </p:nvPicPr>
+        <p:blipFill>
+          <a:blip r:embed="rId7">
+            <a:duotone>
+              <a:schemeClr val="bg2">
+                <a:shade val="45000"/>
+                <a:satMod val="135000"/>
+              </a:schemeClr>
+              <a:prstClr val="white"/>
+            </a:duotone>
+            <a:extLst>
+              <a:ext uri="{BEBA8EAE-BF5A-486C-A8C5-ECC9F3942E4B}">
+                <a14:imgProps xmlns:a14="http://schemas.microsoft.com/office/drawing/2010/main">
+                  <a14:imgLayer r:embed="rId8">
+                    <a14:imgEffect>
+                      <a14:colorTemperature colorTemp="4700"/>
+                    </a14:imgEffect>
+                    <a14:imgEffect>
+                      <a14:saturation sat="0"/>
+                    </a14:imgEffect>
+                  </a14:imgLayer>
+                </a14:imgProps>
+              </a:ext>
+            </a:extLst>
+          </a:blip>
+          <a:srcRect l="1287" t="17358" r="73201" b="14299"/>
+          <a:stretch>
+            <a:fillRect/>
+          </a:stretch>
+        </p:blipFill>
+        <p:spPr>
+          <a:xfrm rot="10800000">
+            <a:off x="11433373" y="6098266"/>
+            <a:ext cx="758627" cy="759734"/>
+          </a:xfrm>
+          <a:prstGeom prst="rect">
+            <a:avLst/>
+          </a:prstGeom>
+        </p:spPr>
+      </p:pic>
+      <p:pic>
+        <p:nvPicPr>
+          <p:cNvPr id="5" name="Image 4">
+            <a:extLst>
+              <a:ext uri="{FF2B5EF4-FFF2-40B4-BE49-F238E27FC236}">
+                <a16:creationId xmlns:a16="http://schemas.microsoft.com/office/drawing/2014/main" id="{7A446C53-31AC-EEC3-23B2-2B600D3BD476}"/>
+              </a:ext>
+            </a:extLst>
+          </p:cNvPr>
+          <p:cNvPicPr>
+            <a:picLocks noChangeAspect="1"/>
+          </p:cNvPicPr>
+          <p:nvPr/>
+        </p:nvPicPr>
+        <p:blipFill>
+          <a:blip r:embed="rId9"/>
+          <a:stretch>
+            <a:fillRect/>
+          </a:stretch>
+        </p:blipFill>
+        <p:spPr>
+          <a:xfrm>
+            <a:off x="1776083" y="120059"/>
+            <a:ext cx="8639833" cy="860963"/>
+          </a:xfrm>
+          <a:prstGeom prst="rect">
+            <a:avLst/>
+          </a:prstGeom>
+        </p:spPr>
+      </p:pic>
+      <p:pic>
+        <p:nvPicPr>
+          <p:cNvPr id="3" name="Image 2">
+            <a:extLst>
+              <a:ext uri="{FF2B5EF4-FFF2-40B4-BE49-F238E27FC236}">
+                <a16:creationId xmlns:a16="http://schemas.microsoft.com/office/drawing/2014/main" id="{D276FA92-63CF-0A9C-A865-AC0232F6C555}"/>
+              </a:ext>
+            </a:extLst>
+          </p:cNvPr>
+          <p:cNvPicPr>
+            <a:picLocks noChangeAspect="1"/>
+          </p:cNvPicPr>
+          <p:nvPr/>
+        </p:nvPicPr>
+        <p:blipFill>
+          <a:blip r:embed="rId7">
+            <a:duotone>
+              <a:schemeClr val="bg2">
+                <a:shade val="45000"/>
+                <a:satMod val="135000"/>
+              </a:schemeClr>
+              <a:prstClr val="white"/>
+            </a:duotone>
+            <a:extLst>
+              <a:ext uri="{BEBA8EAE-BF5A-486C-A8C5-ECC9F3942E4B}">
+                <a14:imgProps xmlns:a14="http://schemas.microsoft.com/office/drawing/2010/main">
+                  <a14:imgLayer r:embed="rId8">
+                    <a14:imgEffect>
+                      <a14:colorTemperature colorTemp="4700"/>
+                    </a14:imgEffect>
+                    <a14:imgEffect>
+                      <a14:saturation sat="0"/>
+                    </a14:imgEffect>
+                  </a14:imgLayer>
+                </a14:imgProps>
+              </a:ext>
+            </a:extLst>
+          </a:blip>
+          <a:srcRect l="1287" t="17358" r="73201" b="14299"/>
+          <a:stretch>
+            <a:fillRect/>
+          </a:stretch>
+        </p:blipFill>
+        <p:spPr>
+          <a:xfrm>
+            <a:off x="0" y="6098266"/>
+            <a:ext cx="758627" cy="759734"/>
+          </a:xfrm>
+          <a:prstGeom prst="rect">
+            <a:avLst/>
+          </a:prstGeom>
+        </p:spPr>
+      </p:pic>
+      <p:sp>
+        <p:nvSpPr>
+          <p:cNvPr id="4" name="Rectangle 3">
+            <a:extLst>
+              <a:ext uri="{FF2B5EF4-FFF2-40B4-BE49-F238E27FC236}">
+                <a16:creationId xmlns:a16="http://schemas.microsoft.com/office/drawing/2014/main" id="{7C07DD98-A753-D754-0BE5-55166104B7F0}"/>
+              </a:ext>
+            </a:extLst>
+          </p:cNvPr>
+          <p:cNvSpPr/>
+          <p:nvPr>
+            <p:custDataLst>
+              <p:tags r:id="rId3"/>
+            </p:custDataLst>
+          </p:nvPr>
+        </p:nvSpPr>
+        <p:spPr>
+          <a:xfrm>
+            <a:off x="655646" y="703384"/>
+            <a:ext cx="10880706" cy="942792"/>
+          </a:xfrm>
+          <a:prstGeom prst="rect">
+            <a:avLst/>
+          </a:prstGeom>
+          <a:noFill/>
+          <a:ln>
+            <a:noFill/>
+          </a:ln>
+        </p:spPr>
+        <p:style>
+          <a:lnRef idx="2">
+            <a:schemeClr val="accent1">
+              <a:shade val="15000"/>
+            </a:schemeClr>
+          </a:lnRef>
+          <a:fillRef idx="1">
+            <a:schemeClr val="accent1"/>
+          </a:fillRef>
+          <a:effectRef idx="0">
+            <a:schemeClr val="accent1"/>
+          </a:effectRef>
+          <a:fontRef idx="minor">
+            <a:schemeClr val="lt1"/>
+          </a:fontRef>
+        </p:style>
+        <p:txBody>
+          <a:bodyPr rtlCol="0" anchor="ctr"/>
+          <a:lstStyle/>
+          <a:p>
+            <a:pPr algn="ctr"/>
             <a:r>
-              <a:rPr lang="fr-CA" sz="3000" dirty="0">
+              <a:rPr lang="fr-CA" sz="3000">
                 <a:latin typeface="Pixel Operator 8" panose="02000503000000000000" pitchFamily="2" charset="0"/>
               </a:rPr>
-              <a:t>Difficultés rencontrées par Alexis :</a:t>
+              <a:t>Tâches effectuées par Alexis :</a:t>
             </a:r>
           </a:p>
         </p:txBody>
       </p:sp>
+      <p:pic>
+        <p:nvPicPr>
+          <p:cNvPr id="11" name="Image 10">
+            <a:extLst>
+              <a:ext uri="{FF2B5EF4-FFF2-40B4-BE49-F238E27FC236}">
+                <a16:creationId xmlns:a16="http://schemas.microsoft.com/office/drawing/2014/main" id="{8B9B2B33-6E2F-B8B1-43FA-BC008D9F23C2}"/>
+              </a:ext>
+            </a:extLst>
+          </p:cNvPr>
+          <p:cNvPicPr>
+            <a:picLocks noChangeAspect="1"/>
+          </p:cNvPicPr>
+          <p:nvPr/>
+        </p:nvPicPr>
+        <p:blipFill>
+          <a:blip r:embed="rId10"/>
+          <a:stretch>
+            <a:fillRect/>
+          </a:stretch>
+        </p:blipFill>
+        <p:spPr>
+          <a:xfrm>
+            <a:off x="655646" y="1599017"/>
+            <a:ext cx="4849883" cy="4357717"/>
+          </a:xfrm>
+          <a:prstGeom prst="rect">
+            <a:avLst/>
+          </a:prstGeom>
+        </p:spPr>
+      </p:pic>
+      <p:pic>
+        <p:nvPicPr>
+          <p:cNvPr id="14" name="Image 13">
+            <a:extLst>
+              <a:ext uri="{FF2B5EF4-FFF2-40B4-BE49-F238E27FC236}">
+                <a16:creationId xmlns:a16="http://schemas.microsoft.com/office/drawing/2014/main" id="{127E3838-8A24-B7A9-86A0-8F2165572925}"/>
+              </a:ext>
+            </a:extLst>
+          </p:cNvPr>
+          <p:cNvPicPr>
+            <a:picLocks noChangeAspect="1"/>
+          </p:cNvPicPr>
+          <p:nvPr/>
+        </p:nvPicPr>
+        <p:blipFill>
+          <a:blip r:embed="rId11"/>
+          <a:stretch>
+            <a:fillRect/>
+          </a:stretch>
+        </p:blipFill>
+        <p:spPr>
+          <a:xfrm>
+            <a:off x="5915369" y="1599017"/>
+            <a:ext cx="2747368" cy="3000583"/>
+          </a:xfrm>
+          <a:prstGeom prst="rect">
+            <a:avLst/>
+          </a:prstGeom>
+        </p:spPr>
+      </p:pic>
+      <p:pic>
+        <p:nvPicPr>
+          <p:cNvPr id="16" name="Image 15">
+            <a:extLst>
+              <a:ext uri="{FF2B5EF4-FFF2-40B4-BE49-F238E27FC236}">
+                <a16:creationId xmlns:a16="http://schemas.microsoft.com/office/drawing/2014/main" id="{49A3DBA5-C3F4-1998-ACAE-EE917589BD76}"/>
+              </a:ext>
+            </a:extLst>
+          </p:cNvPr>
+          <p:cNvPicPr>
+            <a:picLocks noChangeAspect="1"/>
+          </p:cNvPicPr>
+          <p:nvPr/>
+        </p:nvPicPr>
+        <p:blipFill>
+          <a:blip r:embed="rId12"/>
+          <a:stretch>
+            <a:fillRect/>
+          </a:stretch>
+        </p:blipFill>
+        <p:spPr>
+          <a:xfrm>
+            <a:off x="8820603" y="1599017"/>
+            <a:ext cx="2557883" cy="727114"/>
+          </a:xfrm>
+          <a:prstGeom prst="rect">
+            <a:avLst/>
+          </a:prstGeom>
+        </p:spPr>
+      </p:pic>
+      <p:pic>
+        <p:nvPicPr>
+          <p:cNvPr id="21" name="Image 20">
+            <a:extLst>
+              <a:ext uri="{FF2B5EF4-FFF2-40B4-BE49-F238E27FC236}">
+                <a16:creationId xmlns:a16="http://schemas.microsoft.com/office/drawing/2014/main" id="{10330782-7434-F0E3-DC56-0588866E74DD}"/>
+              </a:ext>
+            </a:extLst>
+          </p:cNvPr>
+          <p:cNvPicPr>
+            <a:picLocks noChangeAspect="1"/>
+          </p:cNvPicPr>
+          <p:nvPr/>
+        </p:nvPicPr>
+        <p:blipFill>
+          <a:blip r:embed="rId13"/>
+          <a:stretch>
+            <a:fillRect/>
+          </a:stretch>
+        </p:blipFill>
+        <p:spPr>
+          <a:xfrm>
+            <a:off x="5650786" y="5341767"/>
+            <a:ext cx="6281424" cy="155097"/>
+          </a:xfrm>
+          <a:prstGeom prst="rect">
+            <a:avLst/>
+          </a:prstGeom>
+        </p:spPr>
+      </p:pic>
+      <p:pic>
+        <p:nvPicPr>
+          <p:cNvPr id="23" name="Image 22">
+            <a:extLst>
+              <a:ext uri="{FF2B5EF4-FFF2-40B4-BE49-F238E27FC236}">
+                <a16:creationId xmlns:a16="http://schemas.microsoft.com/office/drawing/2014/main" id="{ADF7DCD5-3995-9179-AD54-F4CB5592335E}"/>
+              </a:ext>
+            </a:extLst>
+          </p:cNvPr>
+          <p:cNvPicPr>
+            <a:picLocks noChangeAspect="1"/>
+          </p:cNvPicPr>
+          <p:nvPr/>
+        </p:nvPicPr>
+        <p:blipFill>
+          <a:blip r:embed="rId14"/>
+          <a:stretch>
+            <a:fillRect/>
+          </a:stretch>
+        </p:blipFill>
+        <p:spPr>
+          <a:xfrm>
+            <a:off x="5650785" y="4740365"/>
+            <a:ext cx="3348315" cy="340846"/>
+          </a:xfrm>
+          <a:prstGeom prst="rect">
+            <a:avLst/>
+          </a:prstGeom>
+        </p:spPr>
+      </p:pic>
+      <p:pic>
+        <p:nvPicPr>
+          <p:cNvPr id="25" name="Image 24">
+            <a:extLst>
+              <a:ext uri="{FF2B5EF4-FFF2-40B4-BE49-F238E27FC236}">
+                <a16:creationId xmlns:a16="http://schemas.microsoft.com/office/drawing/2014/main" id="{344B2793-6C47-3BBE-7885-CD88ED4185F8}"/>
+              </a:ext>
+            </a:extLst>
+          </p:cNvPr>
+          <p:cNvPicPr>
+            <a:picLocks noChangeAspect="1"/>
+          </p:cNvPicPr>
+          <p:nvPr/>
+        </p:nvPicPr>
+        <p:blipFill>
+          <a:blip r:embed="rId15"/>
+          <a:srcRect t="1207" r="36382"/>
+          <a:stretch>
+            <a:fillRect/>
+          </a:stretch>
+        </p:blipFill>
+        <p:spPr>
+          <a:xfrm>
+            <a:off x="8791498" y="2342989"/>
+            <a:ext cx="2954699" cy="2301965"/>
+          </a:xfrm>
+          <a:prstGeom prst="rect">
+            <a:avLst/>
+          </a:prstGeom>
+        </p:spPr>
+      </p:pic>
     </p:spTree>
     <p:extLst>
       <p:ext uri="{BB962C8B-B14F-4D97-AF65-F5344CB8AC3E}">
-        <p14:creationId xmlns:p14="http://schemas.microsoft.com/office/powerpoint/2010/main" val="4043715842"/>
+        <p14:creationId xmlns:p14="http://schemas.microsoft.com/office/powerpoint/2010/main" val="830714067"/>
       </p:ext>
     </p:extLst>
   </p:cSld>
@@ -4943,7 +9255,1761 @@
 </p:sld>
 </file>
 
-<file path=ppt/slides/slide3.xml><?xml version="1.0" encoding="utf-8"?>
+<file path=ppt/slides/slide6.xml><?xml version="1.0" encoding="utf-8"?>
+<p:sld xmlns:a="http://schemas.openxmlformats.org/drawingml/2006/main" xmlns:r="http://schemas.openxmlformats.org/officeDocument/2006/relationships" xmlns:p="http://schemas.openxmlformats.org/presentationml/2006/main">
+  <p:cSld>
+    <p:spTree>
+      <p:nvGrpSpPr>
+        <p:cNvPr id="1" name="">
+          <a:extLst>
+            <a:ext uri="{FF2B5EF4-FFF2-40B4-BE49-F238E27FC236}">
+              <a16:creationId xmlns:a16="http://schemas.microsoft.com/office/drawing/2014/main" id="{E051F2D9-AFE0-F24B-714C-26D7779E1B56}"/>
+            </a:ext>
+          </a:extLst>
+        </p:cNvPr>
+        <p:cNvGrpSpPr/>
+        <p:nvPr/>
+      </p:nvGrpSpPr>
+      <p:grpSpPr>
+        <a:xfrm>
+          <a:off x="0" y="0"/>
+          <a:ext cx="0" cy="0"/>
+          <a:chOff x="0" y="0"/>
+          <a:chExt cx="0" cy="0"/>
+        </a:xfrm>
+      </p:grpSpPr>
+      <p:pic>
+        <p:nvPicPr>
+          <p:cNvPr id="8" name="Image 7">
+            <a:extLst>
+              <a:ext uri="{FF2B5EF4-FFF2-40B4-BE49-F238E27FC236}">
+                <a16:creationId xmlns:a16="http://schemas.microsoft.com/office/drawing/2014/main" id="{880C6969-B538-22C8-0F0F-7AEF026E5050}"/>
+              </a:ext>
+            </a:extLst>
+          </p:cNvPr>
+          <p:cNvPicPr>
+            <a:picLocks noChangeAspect="1"/>
+          </p:cNvPicPr>
+          <p:nvPr>
+            <p:custDataLst>
+              <p:tags r:id="rId1"/>
+            </p:custDataLst>
+          </p:nvPr>
+        </p:nvPicPr>
+        <p:blipFill>
+          <a:blip r:embed="rId6"/>
+          <a:srcRect l="4895" t="76969" r="85984"/>
+          <a:stretch>
+            <a:fillRect/>
+          </a:stretch>
+        </p:blipFill>
+        <p:spPr>
+          <a:xfrm>
+            <a:off x="0" y="0"/>
+            <a:ext cx="12192000" cy="6858000"/>
+          </a:xfrm>
+          <a:prstGeom prst="rect">
+            <a:avLst/>
+          </a:prstGeom>
+        </p:spPr>
+      </p:pic>
+      <p:sp>
+        <p:nvSpPr>
+          <p:cNvPr id="18" name="Rectangle 17">
+            <a:extLst>
+              <a:ext uri="{FF2B5EF4-FFF2-40B4-BE49-F238E27FC236}">
+                <a16:creationId xmlns:a16="http://schemas.microsoft.com/office/drawing/2014/main" id="{F701C7EB-F895-21B0-9737-A48944535BD9}"/>
+              </a:ext>
+            </a:extLst>
+          </p:cNvPr>
+          <p:cNvSpPr/>
+          <p:nvPr>
+            <p:custDataLst>
+              <p:tags r:id="rId2"/>
+            </p:custDataLst>
+          </p:nvPr>
+        </p:nvSpPr>
+        <p:spPr>
+          <a:xfrm>
+            <a:off x="245806" y="403123"/>
+            <a:ext cx="11759381" cy="6194321"/>
+          </a:xfrm>
+          <a:prstGeom prst="rect">
+            <a:avLst/>
+          </a:prstGeom>
+          <a:noFill/>
+          <a:ln>
+            <a:solidFill>
+              <a:schemeClr val="bg1"/>
+            </a:solidFill>
+          </a:ln>
+        </p:spPr>
+        <p:style>
+          <a:lnRef idx="2">
+            <a:schemeClr val="accent1">
+              <a:shade val="15000"/>
+            </a:schemeClr>
+          </a:lnRef>
+          <a:fillRef idx="1">
+            <a:schemeClr val="accent1"/>
+          </a:fillRef>
+          <a:effectRef idx="0">
+            <a:schemeClr val="accent1"/>
+          </a:effectRef>
+          <a:fontRef idx="minor">
+            <a:schemeClr val="lt1"/>
+          </a:fontRef>
+        </p:style>
+        <p:txBody>
+          <a:bodyPr rtlCol="0" anchor="ctr"/>
+          <a:lstStyle/>
+          <a:p>
+            <a:pPr algn="ctr"/>
+            <a:endParaRPr lang="fr-CA"/>
+          </a:p>
+        </p:txBody>
+      </p:sp>
+      <p:pic>
+        <p:nvPicPr>
+          <p:cNvPr id="6" name="Image 5">
+            <a:extLst>
+              <a:ext uri="{FF2B5EF4-FFF2-40B4-BE49-F238E27FC236}">
+                <a16:creationId xmlns:a16="http://schemas.microsoft.com/office/drawing/2014/main" id="{04CC1791-3DEC-51C5-F609-C66FA744BA0D}"/>
+              </a:ext>
+            </a:extLst>
+          </p:cNvPr>
+          <p:cNvPicPr>
+            <a:picLocks noChangeAspect="1"/>
+          </p:cNvPicPr>
+          <p:nvPr/>
+        </p:nvPicPr>
+        <p:blipFill>
+          <a:blip r:embed="rId7">
+            <a:duotone>
+              <a:schemeClr val="bg2">
+                <a:shade val="45000"/>
+                <a:satMod val="135000"/>
+              </a:schemeClr>
+              <a:prstClr val="white"/>
+            </a:duotone>
+            <a:extLst>
+              <a:ext uri="{BEBA8EAE-BF5A-486C-A8C5-ECC9F3942E4B}">
+                <a14:imgProps xmlns:a14="http://schemas.microsoft.com/office/drawing/2010/main">
+                  <a14:imgLayer r:embed="rId8">
+                    <a14:imgEffect>
+                      <a14:colorTemperature colorTemp="4700"/>
+                    </a14:imgEffect>
+                    <a14:imgEffect>
+                      <a14:saturation sat="0"/>
+                    </a14:imgEffect>
+                  </a14:imgLayer>
+                </a14:imgProps>
+              </a:ext>
+            </a:extLst>
+          </a:blip>
+          <a:srcRect l="1287" t="17358" r="73201" b="14299"/>
+          <a:stretch>
+            <a:fillRect/>
+          </a:stretch>
+        </p:blipFill>
+        <p:spPr>
+          <a:xfrm rot="10800000">
+            <a:off x="11433373" y="6098266"/>
+            <a:ext cx="758627" cy="759734"/>
+          </a:xfrm>
+          <a:prstGeom prst="rect">
+            <a:avLst/>
+          </a:prstGeom>
+        </p:spPr>
+      </p:pic>
+      <p:pic>
+        <p:nvPicPr>
+          <p:cNvPr id="5" name="Image 4">
+            <a:extLst>
+              <a:ext uri="{FF2B5EF4-FFF2-40B4-BE49-F238E27FC236}">
+                <a16:creationId xmlns:a16="http://schemas.microsoft.com/office/drawing/2014/main" id="{FB3EB6A0-2ADF-3BF6-B0B0-977D49901E9B}"/>
+              </a:ext>
+            </a:extLst>
+          </p:cNvPr>
+          <p:cNvPicPr>
+            <a:picLocks noChangeAspect="1"/>
+          </p:cNvPicPr>
+          <p:nvPr/>
+        </p:nvPicPr>
+        <p:blipFill>
+          <a:blip r:embed="rId9"/>
+          <a:stretch>
+            <a:fillRect/>
+          </a:stretch>
+        </p:blipFill>
+        <p:spPr>
+          <a:xfrm>
+            <a:off x="1776083" y="120059"/>
+            <a:ext cx="8639833" cy="860963"/>
+          </a:xfrm>
+          <a:prstGeom prst="rect">
+            <a:avLst/>
+          </a:prstGeom>
+        </p:spPr>
+      </p:pic>
+      <p:pic>
+        <p:nvPicPr>
+          <p:cNvPr id="3" name="Image 2">
+            <a:extLst>
+              <a:ext uri="{FF2B5EF4-FFF2-40B4-BE49-F238E27FC236}">
+                <a16:creationId xmlns:a16="http://schemas.microsoft.com/office/drawing/2014/main" id="{6F60E5A4-D264-7B3D-29A8-043C9D5E74D7}"/>
+              </a:ext>
+            </a:extLst>
+          </p:cNvPr>
+          <p:cNvPicPr>
+            <a:picLocks noChangeAspect="1"/>
+          </p:cNvPicPr>
+          <p:nvPr/>
+        </p:nvPicPr>
+        <p:blipFill>
+          <a:blip r:embed="rId7">
+            <a:duotone>
+              <a:schemeClr val="bg2">
+                <a:shade val="45000"/>
+                <a:satMod val="135000"/>
+              </a:schemeClr>
+              <a:prstClr val="white"/>
+            </a:duotone>
+            <a:extLst>
+              <a:ext uri="{BEBA8EAE-BF5A-486C-A8C5-ECC9F3942E4B}">
+                <a14:imgProps xmlns:a14="http://schemas.microsoft.com/office/drawing/2010/main">
+                  <a14:imgLayer r:embed="rId8">
+                    <a14:imgEffect>
+                      <a14:colorTemperature colorTemp="4700"/>
+                    </a14:imgEffect>
+                    <a14:imgEffect>
+                      <a14:saturation sat="0"/>
+                    </a14:imgEffect>
+                  </a14:imgLayer>
+                </a14:imgProps>
+              </a:ext>
+            </a:extLst>
+          </a:blip>
+          <a:srcRect l="1287" t="17358" r="73201" b="14299"/>
+          <a:stretch>
+            <a:fillRect/>
+          </a:stretch>
+        </p:blipFill>
+        <p:spPr>
+          <a:xfrm>
+            <a:off x="0" y="6098266"/>
+            <a:ext cx="758627" cy="759734"/>
+          </a:xfrm>
+          <a:prstGeom prst="rect">
+            <a:avLst/>
+          </a:prstGeom>
+        </p:spPr>
+      </p:pic>
+      <p:sp>
+        <p:nvSpPr>
+          <p:cNvPr id="4" name="Rectangle 3">
+            <a:extLst>
+              <a:ext uri="{FF2B5EF4-FFF2-40B4-BE49-F238E27FC236}">
+                <a16:creationId xmlns:a16="http://schemas.microsoft.com/office/drawing/2014/main" id="{F5869442-ECCC-7A0A-AE25-CF988EBE9286}"/>
+              </a:ext>
+            </a:extLst>
+          </p:cNvPr>
+          <p:cNvSpPr/>
+          <p:nvPr>
+            <p:custDataLst>
+              <p:tags r:id="rId3"/>
+            </p:custDataLst>
+          </p:nvPr>
+        </p:nvSpPr>
+        <p:spPr>
+          <a:xfrm>
+            <a:off x="655646" y="703384"/>
+            <a:ext cx="10880706" cy="942792"/>
+          </a:xfrm>
+          <a:prstGeom prst="rect">
+            <a:avLst/>
+          </a:prstGeom>
+          <a:noFill/>
+          <a:ln>
+            <a:noFill/>
+          </a:ln>
+        </p:spPr>
+        <p:style>
+          <a:lnRef idx="2">
+            <a:schemeClr val="accent1">
+              <a:shade val="15000"/>
+            </a:schemeClr>
+          </a:lnRef>
+          <a:fillRef idx="1">
+            <a:schemeClr val="accent1"/>
+          </a:fillRef>
+          <a:effectRef idx="0">
+            <a:schemeClr val="accent1"/>
+          </a:effectRef>
+          <a:fontRef idx="minor">
+            <a:schemeClr val="lt1"/>
+          </a:fontRef>
+        </p:style>
+        <p:txBody>
+          <a:bodyPr rtlCol="0" anchor="ctr"/>
+          <a:lstStyle/>
+          <a:p>
+            <a:pPr algn="ctr"/>
+            <a:r>
+              <a:rPr lang="fr-CA" sz="3000">
+                <a:latin typeface="Pixel Operator 8" panose="02000503000000000000" pitchFamily="2" charset="0"/>
+              </a:rPr>
+              <a:t>Tâches effectuées par Nicolas :</a:t>
+            </a:r>
+          </a:p>
+        </p:txBody>
+      </p:sp>
+      <p:pic>
+        <p:nvPicPr>
+          <p:cNvPr id="2" name="Image 1">
+            <a:extLst>
+              <a:ext uri="{FF2B5EF4-FFF2-40B4-BE49-F238E27FC236}">
+                <a16:creationId xmlns:a16="http://schemas.microsoft.com/office/drawing/2014/main" id="{005CA898-B699-1E6F-F0CF-51AAAEB39DC6}"/>
+              </a:ext>
+            </a:extLst>
+          </p:cNvPr>
+          <p:cNvPicPr>
+            <a:picLocks noChangeAspect="1"/>
+          </p:cNvPicPr>
+          <p:nvPr/>
+        </p:nvPicPr>
+        <p:blipFill>
+          <a:blip r:embed="rId10"/>
+          <a:srcRect l="14513" t="64295" r="44214" b="32559"/>
+          <a:stretch>
+            <a:fillRect/>
+          </a:stretch>
+        </p:blipFill>
+        <p:spPr>
+          <a:xfrm>
+            <a:off x="7761737" y="1579193"/>
+            <a:ext cx="1927123" cy="361676"/>
+          </a:xfrm>
+          <a:prstGeom prst="rect">
+            <a:avLst/>
+          </a:prstGeom>
+        </p:spPr>
+      </p:pic>
+      <p:pic>
+        <p:nvPicPr>
+          <p:cNvPr id="7" name="Image 6">
+            <a:extLst>
+              <a:ext uri="{FF2B5EF4-FFF2-40B4-BE49-F238E27FC236}">
+                <a16:creationId xmlns:a16="http://schemas.microsoft.com/office/drawing/2014/main" id="{5048645C-022C-4DC7-87A1-D9CB07C9788E}"/>
+              </a:ext>
+            </a:extLst>
+          </p:cNvPr>
+          <p:cNvPicPr>
+            <a:picLocks noChangeAspect="1"/>
+          </p:cNvPicPr>
+          <p:nvPr/>
+        </p:nvPicPr>
+        <p:blipFill>
+          <a:blip r:embed="rId10"/>
+          <a:srcRect l="14513" t="73442" r="45261" b="23635"/>
+          <a:stretch>
+            <a:fillRect/>
+          </a:stretch>
+        </p:blipFill>
+        <p:spPr>
+          <a:xfrm>
+            <a:off x="655645" y="1631751"/>
+            <a:ext cx="1878197" cy="336038"/>
+          </a:xfrm>
+          <a:prstGeom prst="rect">
+            <a:avLst/>
+          </a:prstGeom>
+        </p:spPr>
+      </p:pic>
+      <p:pic>
+        <p:nvPicPr>
+          <p:cNvPr id="9" name="Image 8">
+            <a:extLst>
+              <a:ext uri="{FF2B5EF4-FFF2-40B4-BE49-F238E27FC236}">
+                <a16:creationId xmlns:a16="http://schemas.microsoft.com/office/drawing/2014/main" id="{BCE595AA-1F4A-5139-48A3-A5AA729F9306}"/>
+              </a:ext>
+            </a:extLst>
+          </p:cNvPr>
+          <p:cNvPicPr>
+            <a:picLocks noChangeAspect="1"/>
+          </p:cNvPicPr>
+          <p:nvPr/>
+        </p:nvPicPr>
+        <p:blipFill>
+          <a:blip r:embed="rId10"/>
+          <a:srcRect l="14513" t="88662" r="42842" b="8192"/>
+          <a:stretch>
+            <a:fillRect/>
+          </a:stretch>
+        </p:blipFill>
+        <p:spPr>
+          <a:xfrm>
+            <a:off x="4378830" y="1579193"/>
+            <a:ext cx="1927123" cy="350047"/>
+          </a:xfrm>
+          <a:prstGeom prst="rect">
+            <a:avLst/>
+          </a:prstGeom>
+        </p:spPr>
+      </p:pic>
+      <p:pic>
+        <p:nvPicPr>
+          <p:cNvPr id="12" name="Image 11">
+            <a:extLst>
+              <a:ext uri="{FF2B5EF4-FFF2-40B4-BE49-F238E27FC236}">
+                <a16:creationId xmlns:a16="http://schemas.microsoft.com/office/drawing/2014/main" id="{58D1FF2A-DE4C-1FDF-FAD5-C247A427994E}"/>
+              </a:ext>
+            </a:extLst>
+          </p:cNvPr>
+          <p:cNvPicPr>
+            <a:picLocks noChangeAspect="1"/>
+          </p:cNvPicPr>
+          <p:nvPr/>
+        </p:nvPicPr>
+        <p:blipFill>
+          <a:blip r:embed="rId11"/>
+          <a:stretch>
+            <a:fillRect/>
+          </a:stretch>
+        </p:blipFill>
+        <p:spPr>
+          <a:xfrm>
+            <a:off x="655645" y="2296905"/>
+            <a:ext cx="2671755" cy="3651399"/>
+          </a:xfrm>
+          <a:prstGeom prst="rect">
+            <a:avLst/>
+          </a:prstGeom>
+        </p:spPr>
+      </p:pic>
+      <p:pic>
+        <p:nvPicPr>
+          <p:cNvPr id="14" name="Image 13">
+            <a:extLst>
+              <a:ext uri="{FF2B5EF4-FFF2-40B4-BE49-F238E27FC236}">
+                <a16:creationId xmlns:a16="http://schemas.microsoft.com/office/drawing/2014/main" id="{8C20582B-7C97-A9C7-B736-59F3F404F20E}"/>
+              </a:ext>
+            </a:extLst>
+          </p:cNvPr>
+          <p:cNvPicPr>
+            <a:picLocks noChangeAspect="1"/>
+          </p:cNvPicPr>
+          <p:nvPr/>
+        </p:nvPicPr>
+        <p:blipFill>
+          <a:blip r:embed="rId12"/>
+          <a:stretch>
+            <a:fillRect/>
+          </a:stretch>
+        </p:blipFill>
+        <p:spPr>
+          <a:xfrm>
+            <a:off x="4008213" y="2296905"/>
+            <a:ext cx="3210373" cy="1105054"/>
+          </a:xfrm>
+          <a:prstGeom prst="rect">
+            <a:avLst/>
+          </a:prstGeom>
+        </p:spPr>
+      </p:pic>
+      <p:pic>
+        <p:nvPicPr>
+          <p:cNvPr id="16" name="Image 15">
+            <a:extLst>
+              <a:ext uri="{FF2B5EF4-FFF2-40B4-BE49-F238E27FC236}">
+                <a16:creationId xmlns:a16="http://schemas.microsoft.com/office/drawing/2014/main" id="{C49B8D80-0C36-E7E5-046E-5314396E6489}"/>
+              </a:ext>
+            </a:extLst>
+          </p:cNvPr>
+          <p:cNvPicPr>
+            <a:picLocks noChangeAspect="1"/>
+          </p:cNvPicPr>
+          <p:nvPr/>
+        </p:nvPicPr>
+        <p:blipFill>
+          <a:blip r:embed="rId13"/>
+          <a:stretch>
+            <a:fillRect/>
+          </a:stretch>
+        </p:blipFill>
+        <p:spPr>
+          <a:xfrm>
+            <a:off x="7538521" y="2223933"/>
+            <a:ext cx="4300677" cy="942791"/>
+          </a:xfrm>
+          <a:prstGeom prst="rect">
+            <a:avLst/>
+          </a:prstGeom>
+        </p:spPr>
+      </p:pic>
+      <p:pic>
+        <p:nvPicPr>
+          <p:cNvPr id="19" name="Image 18">
+            <a:extLst>
+              <a:ext uri="{FF2B5EF4-FFF2-40B4-BE49-F238E27FC236}">
+                <a16:creationId xmlns:a16="http://schemas.microsoft.com/office/drawing/2014/main" id="{0D630B91-691F-94A7-DE6D-038B3AB5F186}"/>
+              </a:ext>
+            </a:extLst>
+          </p:cNvPr>
+          <p:cNvPicPr>
+            <a:picLocks noChangeAspect="1"/>
+          </p:cNvPicPr>
+          <p:nvPr/>
+        </p:nvPicPr>
+        <p:blipFill>
+          <a:blip r:embed="rId14"/>
+          <a:stretch>
+            <a:fillRect/>
+          </a:stretch>
+        </p:blipFill>
+        <p:spPr>
+          <a:xfrm>
+            <a:off x="7463465" y="3488851"/>
+            <a:ext cx="4375733" cy="272828"/>
+          </a:xfrm>
+          <a:prstGeom prst="rect">
+            <a:avLst/>
+          </a:prstGeom>
+        </p:spPr>
+      </p:pic>
+      <p:pic>
+        <p:nvPicPr>
+          <p:cNvPr id="21" name="Image 20">
+            <a:extLst>
+              <a:ext uri="{FF2B5EF4-FFF2-40B4-BE49-F238E27FC236}">
+                <a16:creationId xmlns:a16="http://schemas.microsoft.com/office/drawing/2014/main" id="{42F91A68-4CFA-5DAD-0D59-EE36080291A9}"/>
+              </a:ext>
+            </a:extLst>
+          </p:cNvPr>
+          <p:cNvPicPr>
+            <a:picLocks noChangeAspect="1"/>
+          </p:cNvPicPr>
+          <p:nvPr/>
+        </p:nvPicPr>
+        <p:blipFill>
+          <a:blip r:embed="rId15"/>
+          <a:stretch>
+            <a:fillRect/>
+          </a:stretch>
+        </p:blipFill>
+        <p:spPr>
+          <a:xfrm>
+            <a:off x="5944467" y="3982763"/>
+            <a:ext cx="5868219" cy="1152686"/>
+          </a:xfrm>
+          <a:prstGeom prst="rect">
+            <a:avLst/>
+          </a:prstGeom>
+        </p:spPr>
+      </p:pic>
+    </p:spTree>
+    <p:extLst>
+      <p:ext uri="{BB962C8B-B14F-4D97-AF65-F5344CB8AC3E}">
+        <p14:creationId xmlns:p14="http://schemas.microsoft.com/office/powerpoint/2010/main" val="2519303402"/>
+      </p:ext>
+    </p:extLst>
+  </p:cSld>
+  <p:clrMapOvr>
+    <a:masterClrMapping/>
+  </p:clrMapOvr>
+</p:sld>
+</file>
+
+<file path=ppt/slides/slide7.xml><?xml version="1.0" encoding="utf-8"?>
+<p:sld xmlns:a="http://schemas.openxmlformats.org/drawingml/2006/main" xmlns:r="http://schemas.openxmlformats.org/officeDocument/2006/relationships" xmlns:p="http://schemas.openxmlformats.org/presentationml/2006/main">
+  <p:cSld>
+    <p:spTree>
+      <p:nvGrpSpPr>
+        <p:cNvPr id="1" name="">
+          <a:extLst>
+            <a:ext uri="{FF2B5EF4-FFF2-40B4-BE49-F238E27FC236}">
+              <a16:creationId xmlns:a16="http://schemas.microsoft.com/office/drawing/2014/main" id="{19E89989-0C86-E10F-E1E8-B8A2F1BD79BE}"/>
+            </a:ext>
+          </a:extLst>
+        </p:cNvPr>
+        <p:cNvGrpSpPr/>
+        <p:nvPr/>
+      </p:nvGrpSpPr>
+      <p:grpSpPr>
+        <a:xfrm>
+          <a:off x="0" y="0"/>
+          <a:ext cx="0" cy="0"/>
+          <a:chOff x="0" y="0"/>
+          <a:chExt cx="0" cy="0"/>
+        </a:xfrm>
+      </p:grpSpPr>
+      <p:pic>
+        <p:nvPicPr>
+          <p:cNvPr id="8" name="Image 7">
+            <a:extLst>
+              <a:ext uri="{FF2B5EF4-FFF2-40B4-BE49-F238E27FC236}">
+                <a16:creationId xmlns:a16="http://schemas.microsoft.com/office/drawing/2014/main" id="{B212A6C1-1BC0-0DF1-5573-D4D5FE6A2762}"/>
+              </a:ext>
+            </a:extLst>
+          </p:cNvPr>
+          <p:cNvPicPr>
+            <a:picLocks noChangeAspect="1"/>
+          </p:cNvPicPr>
+          <p:nvPr>
+            <p:custDataLst>
+              <p:tags r:id="rId1"/>
+            </p:custDataLst>
+          </p:nvPr>
+        </p:nvPicPr>
+        <p:blipFill>
+          <a:blip r:embed="rId6"/>
+          <a:srcRect l="4895" t="76969" r="85984"/>
+          <a:stretch>
+            <a:fillRect/>
+          </a:stretch>
+        </p:blipFill>
+        <p:spPr>
+          <a:xfrm>
+            <a:off x="29496" y="0"/>
+            <a:ext cx="12192000" cy="6858000"/>
+          </a:xfrm>
+          <a:prstGeom prst="rect">
+            <a:avLst/>
+          </a:prstGeom>
+        </p:spPr>
+      </p:pic>
+      <p:sp>
+        <p:nvSpPr>
+          <p:cNvPr id="18" name="Rectangle 17">
+            <a:extLst>
+              <a:ext uri="{FF2B5EF4-FFF2-40B4-BE49-F238E27FC236}">
+                <a16:creationId xmlns:a16="http://schemas.microsoft.com/office/drawing/2014/main" id="{BB77FC93-4C87-E74B-7808-EF1AC42CB3E4}"/>
+              </a:ext>
+            </a:extLst>
+          </p:cNvPr>
+          <p:cNvSpPr/>
+          <p:nvPr>
+            <p:custDataLst>
+              <p:tags r:id="rId2"/>
+            </p:custDataLst>
+          </p:nvPr>
+        </p:nvSpPr>
+        <p:spPr>
+          <a:xfrm>
+            <a:off x="245806" y="403123"/>
+            <a:ext cx="11759381" cy="6194321"/>
+          </a:xfrm>
+          <a:prstGeom prst="rect">
+            <a:avLst/>
+          </a:prstGeom>
+          <a:noFill/>
+          <a:ln>
+            <a:solidFill>
+              <a:schemeClr val="bg1"/>
+            </a:solidFill>
+          </a:ln>
+        </p:spPr>
+        <p:style>
+          <a:lnRef idx="2">
+            <a:schemeClr val="accent1">
+              <a:shade val="15000"/>
+            </a:schemeClr>
+          </a:lnRef>
+          <a:fillRef idx="1">
+            <a:schemeClr val="accent1"/>
+          </a:fillRef>
+          <a:effectRef idx="0">
+            <a:schemeClr val="accent1"/>
+          </a:effectRef>
+          <a:fontRef idx="minor">
+            <a:schemeClr val="lt1"/>
+          </a:fontRef>
+        </p:style>
+        <p:txBody>
+          <a:bodyPr rtlCol="0" anchor="ctr"/>
+          <a:lstStyle/>
+          <a:p>
+            <a:pPr algn="ctr"/>
+            <a:endParaRPr lang="fr-CA"/>
+          </a:p>
+        </p:txBody>
+      </p:sp>
+      <p:pic>
+        <p:nvPicPr>
+          <p:cNvPr id="6" name="Image 5">
+            <a:extLst>
+              <a:ext uri="{FF2B5EF4-FFF2-40B4-BE49-F238E27FC236}">
+                <a16:creationId xmlns:a16="http://schemas.microsoft.com/office/drawing/2014/main" id="{4E7D1BFE-EC9A-DCAD-D3FA-2245E4A6EFB8}"/>
+              </a:ext>
+            </a:extLst>
+          </p:cNvPr>
+          <p:cNvPicPr>
+            <a:picLocks noChangeAspect="1"/>
+          </p:cNvPicPr>
+          <p:nvPr/>
+        </p:nvPicPr>
+        <p:blipFill>
+          <a:blip r:embed="rId7">
+            <a:duotone>
+              <a:schemeClr val="bg2">
+                <a:shade val="45000"/>
+                <a:satMod val="135000"/>
+              </a:schemeClr>
+              <a:prstClr val="white"/>
+            </a:duotone>
+            <a:extLst>
+              <a:ext uri="{BEBA8EAE-BF5A-486C-A8C5-ECC9F3942E4B}">
+                <a14:imgProps xmlns:a14="http://schemas.microsoft.com/office/drawing/2010/main">
+                  <a14:imgLayer r:embed="rId8">
+                    <a14:imgEffect>
+                      <a14:colorTemperature colorTemp="4700"/>
+                    </a14:imgEffect>
+                    <a14:imgEffect>
+                      <a14:saturation sat="0"/>
+                    </a14:imgEffect>
+                  </a14:imgLayer>
+                </a14:imgProps>
+              </a:ext>
+            </a:extLst>
+          </a:blip>
+          <a:srcRect l="1287" t="17358" r="73201" b="14299"/>
+          <a:stretch>
+            <a:fillRect/>
+          </a:stretch>
+        </p:blipFill>
+        <p:spPr>
+          <a:xfrm rot="10800000">
+            <a:off x="11433373" y="6098266"/>
+            <a:ext cx="758627" cy="759734"/>
+          </a:xfrm>
+          <a:prstGeom prst="rect">
+            <a:avLst/>
+          </a:prstGeom>
+        </p:spPr>
+      </p:pic>
+      <p:pic>
+        <p:nvPicPr>
+          <p:cNvPr id="5" name="Image 4">
+            <a:extLst>
+              <a:ext uri="{FF2B5EF4-FFF2-40B4-BE49-F238E27FC236}">
+                <a16:creationId xmlns:a16="http://schemas.microsoft.com/office/drawing/2014/main" id="{C4D140DB-6EF9-0346-9217-F69765AB8E1C}"/>
+              </a:ext>
+            </a:extLst>
+          </p:cNvPr>
+          <p:cNvPicPr>
+            <a:picLocks noChangeAspect="1"/>
+          </p:cNvPicPr>
+          <p:nvPr/>
+        </p:nvPicPr>
+        <p:blipFill>
+          <a:blip r:embed="rId9"/>
+          <a:stretch>
+            <a:fillRect/>
+          </a:stretch>
+        </p:blipFill>
+        <p:spPr>
+          <a:xfrm>
+            <a:off x="1776083" y="120059"/>
+            <a:ext cx="8639833" cy="860963"/>
+          </a:xfrm>
+          <a:prstGeom prst="rect">
+            <a:avLst/>
+          </a:prstGeom>
+        </p:spPr>
+      </p:pic>
+      <p:pic>
+        <p:nvPicPr>
+          <p:cNvPr id="3" name="Image 2">
+            <a:extLst>
+              <a:ext uri="{FF2B5EF4-FFF2-40B4-BE49-F238E27FC236}">
+                <a16:creationId xmlns:a16="http://schemas.microsoft.com/office/drawing/2014/main" id="{9A512E3C-0BDA-9EDF-3372-635E0194D94A}"/>
+              </a:ext>
+            </a:extLst>
+          </p:cNvPr>
+          <p:cNvPicPr>
+            <a:picLocks noChangeAspect="1"/>
+          </p:cNvPicPr>
+          <p:nvPr/>
+        </p:nvPicPr>
+        <p:blipFill>
+          <a:blip r:embed="rId7">
+            <a:duotone>
+              <a:schemeClr val="bg2">
+                <a:shade val="45000"/>
+                <a:satMod val="135000"/>
+              </a:schemeClr>
+              <a:prstClr val="white"/>
+            </a:duotone>
+            <a:extLst>
+              <a:ext uri="{BEBA8EAE-BF5A-486C-A8C5-ECC9F3942E4B}">
+                <a14:imgProps xmlns:a14="http://schemas.microsoft.com/office/drawing/2010/main">
+                  <a14:imgLayer r:embed="rId8">
+                    <a14:imgEffect>
+                      <a14:colorTemperature colorTemp="4700"/>
+                    </a14:imgEffect>
+                    <a14:imgEffect>
+                      <a14:saturation sat="0"/>
+                    </a14:imgEffect>
+                  </a14:imgLayer>
+                </a14:imgProps>
+              </a:ext>
+            </a:extLst>
+          </a:blip>
+          <a:srcRect l="1287" t="17358" r="73201" b="14299"/>
+          <a:stretch>
+            <a:fillRect/>
+          </a:stretch>
+        </p:blipFill>
+        <p:spPr>
+          <a:xfrm>
+            <a:off x="0" y="6098266"/>
+            <a:ext cx="758627" cy="759734"/>
+          </a:xfrm>
+          <a:prstGeom prst="rect">
+            <a:avLst/>
+          </a:prstGeom>
+        </p:spPr>
+      </p:pic>
+      <p:sp>
+        <p:nvSpPr>
+          <p:cNvPr id="4" name="Rectangle 3">
+            <a:extLst>
+              <a:ext uri="{FF2B5EF4-FFF2-40B4-BE49-F238E27FC236}">
+                <a16:creationId xmlns:a16="http://schemas.microsoft.com/office/drawing/2014/main" id="{41D300AC-AF83-8EDC-AC56-6AB7E26E697D}"/>
+              </a:ext>
+            </a:extLst>
+          </p:cNvPr>
+          <p:cNvSpPr/>
+          <p:nvPr>
+            <p:custDataLst>
+              <p:tags r:id="rId3"/>
+            </p:custDataLst>
+          </p:nvPr>
+        </p:nvSpPr>
+        <p:spPr>
+          <a:xfrm>
+            <a:off x="655646" y="703384"/>
+            <a:ext cx="10880706" cy="942792"/>
+          </a:xfrm>
+          <a:prstGeom prst="rect">
+            <a:avLst/>
+          </a:prstGeom>
+          <a:noFill/>
+          <a:ln>
+            <a:noFill/>
+          </a:ln>
+        </p:spPr>
+        <p:style>
+          <a:lnRef idx="2">
+            <a:schemeClr val="accent1">
+              <a:shade val="15000"/>
+            </a:schemeClr>
+          </a:lnRef>
+          <a:fillRef idx="1">
+            <a:schemeClr val="accent1"/>
+          </a:fillRef>
+          <a:effectRef idx="0">
+            <a:schemeClr val="accent1"/>
+          </a:effectRef>
+          <a:fontRef idx="minor">
+            <a:schemeClr val="lt1"/>
+          </a:fontRef>
+        </p:style>
+        <p:txBody>
+          <a:bodyPr rtlCol="0" anchor="ctr"/>
+          <a:lstStyle/>
+          <a:p>
+            <a:pPr algn="ctr"/>
+            <a:r>
+              <a:rPr lang="fr-CA" sz="3000">
+                <a:latin typeface="Pixel Operator 8" panose="02000503000000000000" pitchFamily="2" charset="0"/>
+              </a:rPr>
+              <a:t>Tâches effectuées par Nicolas :</a:t>
+            </a:r>
+          </a:p>
+        </p:txBody>
+      </p:sp>
+      <p:pic>
+        <p:nvPicPr>
+          <p:cNvPr id="10" name="Image 9">
+            <a:extLst>
+              <a:ext uri="{FF2B5EF4-FFF2-40B4-BE49-F238E27FC236}">
+                <a16:creationId xmlns:a16="http://schemas.microsoft.com/office/drawing/2014/main" id="{C1660596-80B4-F94E-2833-B291B2E610E7}"/>
+              </a:ext>
+            </a:extLst>
+          </p:cNvPr>
+          <p:cNvPicPr>
+            <a:picLocks noChangeAspect="1"/>
+          </p:cNvPicPr>
+          <p:nvPr/>
+        </p:nvPicPr>
+        <p:blipFill>
+          <a:blip r:embed="rId10"/>
+          <a:srcRect l="14513" t="94189" r="38630" b="2665"/>
+          <a:stretch>
+            <a:fillRect/>
+          </a:stretch>
+        </p:blipFill>
+        <p:spPr>
+          <a:xfrm>
+            <a:off x="5002100" y="1646176"/>
+            <a:ext cx="2187797" cy="361676"/>
+          </a:xfrm>
+          <a:prstGeom prst="rect">
+            <a:avLst/>
+          </a:prstGeom>
+        </p:spPr>
+      </p:pic>
+      <p:pic>
+        <p:nvPicPr>
+          <p:cNvPr id="13" name="Image 12">
+            <a:extLst>
+              <a:ext uri="{FF2B5EF4-FFF2-40B4-BE49-F238E27FC236}">
+                <a16:creationId xmlns:a16="http://schemas.microsoft.com/office/drawing/2014/main" id="{41B1B3F6-8AF9-70DC-A862-958A60532E3F}"/>
+              </a:ext>
+            </a:extLst>
+          </p:cNvPr>
+          <p:cNvPicPr>
+            <a:picLocks noChangeAspect="1"/>
+          </p:cNvPicPr>
+          <p:nvPr/>
+        </p:nvPicPr>
+        <p:blipFill>
+          <a:blip r:embed="rId11"/>
+          <a:stretch>
+            <a:fillRect/>
+          </a:stretch>
+        </p:blipFill>
+        <p:spPr>
+          <a:xfrm>
+            <a:off x="758627" y="2007852"/>
+            <a:ext cx="3105583" cy="447737"/>
+          </a:xfrm>
+          <a:prstGeom prst="rect">
+            <a:avLst/>
+          </a:prstGeom>
+        </p:spPr>
+      </p:pic>
+      <p:pic>
+        <p:nvPicPr>
+          <p:cNvPr id="17" name="Image 16">
+            <a:extLst>
+              <a:ext uri="{FF2B5EF4-FFF2-40B4-BE49-F238E27FC236}">
+                <a16:creationId xmlns:a16="http://schemas.microsoft.com/office/drawing/2014/main" id="{870448A9-B8BE-B922-65B3-C39D39906981}"/>
+              </a:ext>
+            </a:extLst>
+          </p:cNvPr>
+          <p:cNvPicPr>
+            <a:picLocks noChangeAspect="1"/>
+          </p:cNvPicPr>
+          <p:nvPr/>
+        </p:nvPicPr>
+        <p:blipFill>
+          <a:blip r:embed="rId12"/>
+          <a:stretch>
+            <a:fillRect/>
+          </a:stretch>
+        </p:blipFill>
+        <p:spPr>
+          <a:xfrm>
+            <a:off x="758627" y="2743188"/>
+            <a:ext cx="5715798" cy="1086002"/>
+          </a:xfrm>
+          <a:prstGeom prst="rect">
+            <a:avLst/>
+          </a:prstGeom>
+        </p:spPr>
+      </p:pic>
+      <p:pic>
+        <p:nvPicPr>
+          <p:cNvPr id="22" name="Image 21">
+            <a:extLst>
+              <a:ext uri="{FF2B5EF4-FFF2-40B4-BE49-F238E27FC236}">
+                <a16:creationId xmlns:a16="http://schemas.microsoft.com/office/drawing/2014/main" id="{5DE32401-5515-CBDE-D3FB-C696FD699463}"/>
+              </a:ext>
+            </a:extLst>
+          </p:cNvPr>
+          <p:cNvPicPr>
+            <a:picLocks noChangeAspect="1"/>
+          </p:cNvPicPr>
+          <p:nvPr/>
+        </p:nvPicPr>
+        <p:blipFill>
+          <a:blip r:embed="rId13"/>
+          <a:stretch>
+            <a:fillRect/>
+          </a:stretch>
+        </p:blipFill>
+        <p:spPr>
+          <a:xfrm>
+            <a:off x="758627" y="3943807"/>
+            <a:ext cx="6020640" cy="1952898"/>
+          </a:xfrm>
+          <a:prstGeom prst="rect">
+            <a:avLst/>
+          </a:prstGeom>
+        </p:spPr>
+      </p:pic>
+      <p:pic>
+        <p:nvPicPr>
+          <p:cNvPr id="26" name="Image 25">
+            <a:extLst>
+              <a:ext uri="{FF2B5EF4-FFF2-40B4-BE49-F238E27FC236}">
+                <a16:creationId xmlns:a16="http://schemas.microsoft.com/office/drawing/2014/main" id="{A878B985-E3D5-B27D-8888-BC863A273277}"/>
+              </a:ext>
+            </a:extLst>
+          </p:cNvPr>
+          <p:cNvPicPr>
+            <a:picLocks noChangeAspect="1"/>
+          </p:cNvPicPr>
+          <p:nvPr/>
+        </p:nvPicPr>
+        <p:blipFill>
+          <a:blip r:embed="rId14"/>
+          <a:stretch>
+            <a:fillRect/>
+          </a:stretch>
+        </p:blipFill>
+        <p:spPr>
+          <a:xfrm>
+            <a:off x="6690735" y="2099692"/>
+            <a:ext cx="5191850" cy="1629002"/>
+          </a:xfrm>
+          <a:prstGeom prst="rect">
+            <a:avLst/>
+          </a:prstGeom>
+        </p:spPr>
+      </p:pic>
+    </p:spTree>
+    <p:extLst>
+      <p:ext uri="{BB962C8B-B14F-4D97-AF65-F5344CB8AC3E}">
+        <p14:creationId xmlns:p14="http://schemas.microsoft.com/office/powerpoint/2010/main" val="1994134693"/>
+      </p:ext>
+    </p:extLst>
+  </p:cSld>
+  <p:clrMapOvr>
+    <a:masterClrMapping/>
+  </p:clrMapOvr>
+</p:sld>
+</file>
+
+<file path=ppt/slides/slide8.xml><?xml version="1.0" encoding="utf-8"?>
+<p:sld xmlns:a="http://schemas.openxmlformats.org/drawingml/2006/main" xmlns:r="http://schemas.openxmlformats.org/officeDocument/2006/relationships" xmlns:p="http://schemas.openxmlformats.org/presentationml/2006/main">
+  <p:cSld>
+    <p:spTree>
+      <p:nvGrpSpPr>
+        <p:cNvPr id="1" name="">
+          <a:extLst>
+            <a:ext uri="{FF2B5EF4-FFF2-40B4-BE49-F238E27FC236}">
+              <a16:creationId xmlns:a16="http://schemas.microsoft.com/office/drawing/2014/main" id="{2C17454D-F167-E2BA-CA2E-027D790DDD73}"/>
+            </a:ext>
+          </a:extLst>
+        </p:cNvPr>
+        <p:cNvGrpSpPr/>
+        <p:nvPr/>
+      </p:nvGrpSpPr>
+      <p:grpSpPr>
+        <a:xfrm>
+          <a:off x="0" y="0"/>
+          <a:ext cx="0" cy="0"/>
+          <a:chOff x="0" y="0"/>
+          <a:chExt cx="0" cy="0"/>
+        </a:xfrm>
+      </p:grpSpPr>
+      <p:pic>
+        <p:nvPicPr>
+          <p:cNvPr id="8" name="Image 7">
+            <a:extLst>
+              <a:ext uri="{FF2B5EF4-FFF2-40B4-BE49-F238E27FC236}">
+                <a16:creationId xmlns:a16="http://schemas.microsoft.com/office/drawing/2014/main" id="{BA6A440A-C5C0-8E14-A330-D0A2CB0A1531}"/>
+              </a:ext>
+            </a:extLst>
+          </p:cNvPr>
+          <p:cNvPicPr>
+            <a:picLocks noChangeAspect="1"/>
+          </p:cNvPicPr>
+          <p:nvPr>
+            <p:custDataLst>
+              <p:tags r:id="rId1"/>
+            </p:custDataLst>
+          </p:nvPr>
+        </p:nvPicPr>
+        <p:blipFill>
+          <a:blip r:embed="rId6"/>
+          <a:srcRect l="4895" t="76969" r="85984"/>
+          <a:stretch>
+            <a:fillRect/>
+          </a:stretch>
+        </p:blipFill>
+        <p:spPr>
+          <a:xfrm>
+            <a:off x="0" y="0"/>
+            <a:ext cx="12192000" cy="6858000"/>
+          </a:xfrm>
+          <a:prstGeom prst="rect">
+            <a:avLst/>
+          </a:prstGeom>
+        </p:spPr>
+      </p:pic>
+      <p:sp>
+        <p:nvSpPr>
+          <p:cNvPr id="18" name="Rectangle 17">
+            <a:extLst>
+              <a:ext uri="{FF2B5EF4-FFF2-40B4-BE49-F238E27FC236}">
+                <a16:creationId xmlns:a16="http://schemas.microsoft.com/office/drawing/2014/main" id="{F3A7E278-F0AD-3E39-F796-7D073FDC7C41}"/>
+              </a:ext>
+            </a:extLst>
+          </p:cNvPr>
+          <p:cNvSpPr/>
+          <p:nvPr>
+            <p:custDataLst>
+              <p:tags r:id="rId2"/>
+            </p:custDataLst>
+          </p:nvPr>
+        </p:nvSpPr>
+        <p:spPr>
+          <a:xfrm>
+            <a:off x="245806" y="403123"/>
+            <a:ext cx="11759381" cy="6194321"/>
+          </a:xfrm>
+          <a:prstGeom prst="rect">
+            <a:avLst/>
+          </a:prstGeom>
+          <a:noFill/>
+          <a:ln>
+            <a:solidFill>
+              <a:schemeClr val="bg1"/>
+            </a:solidFill>
+          </a:ln>
+        </p:spPr>
+        <p:style>
+          <a:lnRef idx="2">
+            <a:schemeClr val="accent1">
+              <a:shade val="15000"/>
+            </a:schemeClr>
+          </a:lnRef>
+          <a:fillRef idx="1">
+            <a:schemeClr val="accent1"/>
+          </a:fillRef>
+          <a:effectRef idx="0">
+            <a:schemeClr val="accent1"/>
+          </a:effectRef>
+          <a:fontRef idx="minor">
+            <a:schemeClr val="lt1"/>
+          </a:fontRef>
+        </p:style>
+        <p:txBody>
+          <a:bodyPr rtlCol="0" anchor="ctr"/>
+          <a:lstStyle/>
+          <a:p>
+            <a:pPr algn="ctr"/>
+            <a:endParaRPr lang="fr-CA"/>
+          </a:p>
+        </p:txBody>
+      </p:sp>
+      <p:pic>
+        <p:nvPicPr>
+          <p:cNvPr id="6" name="Image 5">
+            <a:extLst>
+              <a:ext uri="{FF2B5EF4-FFF2-40B4-BE49-F238E27FC236}">
+                <a16:creationId xmlns:a16="http://schemas.microsoft.com/office/drawing/2014/main" id="{B999B024-D0D2-A4F2-6D09-4481091EB8E3}"/>
+              </a:ext>
+            </a:extLst>
+          </p:cNvPr>
+          <p:cNvPicPr>
+            <a:picLocks noChangeAspect="1"/>
+          </p:cNvPicPr>
+          <p:nvPr/>
+        </p:nvPicPr>
+        <p:blipFill>
+          <a:blip r:embed="rId7">
+            <a:duotone>
+              <a:schemeClr val="bg2">
+                <a:shade val="45000"/>
+                <a:satMod val="135000"/>
+              </a:schemeClr>
+              <a:prstClr val="white"/>
+            </a:duotone>
+            <a:extLst>
+              <a:ext uri="{BEBA8EAE-BF5A-486C-A8C5-ECC9F3942E4B}">
+                <a14:imgProps xmlns:a14="http://schemas.microsoft.com/office/drawing/2010/main">
+                  <a14:imgLayer r:embed="rId8">
+                    <a14:imgEffect>
+                      <a14:colorTemperature colorTemp="4700"/>
+                    </a14:imgEffect>
+                    <a14:imgEffect>
+                      <a14:saturation sat="0"/>
+                    </a14:imgEffect>
+                  </a14:imgLayer>
+                </a14:imgProps>
+              </a:ext>
+            </a:extLst>
+          </a:blip>
+          <a:srcRect l="1287" t="17358" r="73201" b="14299"/>
+          <a:stretch>
+            <a:fillRect/>
+          </a:stretch>
+        </p:blipFill>
+        <p:spPr>
+          <a:xfrm rot="10800000">
+            <a:off x="11433373" y="6098266"/>
+            <a:ext cx="758627" cy="759734"/>
+          </a:xfrm>
+          <a:prstGeom prst="rect">
+            <a:avLst/>
+          </a:prstGeom>
+        </p:spPr>
+      </p:pic>
+      <p:pic>
+        <p:nvPicPr>
+          <p:cNvPr id="5" name="Image 4">
+            <a:extLst>
+              <a:ext uri="{FF2B5EF4-FFF2-40B4-BE49-F238E27FC236}">
+                <a16:creationId xmlns:a16="http://schemas.microsoft.com/office/drawing/2014/main" id="{F7C9E3EC-8209-220D-FDDF-45D976DAC2F9}"/>
+              </a:ext>
+            </a:extLst>
+          </p:cNvPr>
+          <p:cNvPicPr>
+            <a:picLocks noChangeAspect="1"/>
+          </p:cNvPicPr>
+          <p:nvPr/>
+        </p:nvPicPr>
+        <p:blipFill>
+          <a:blip r:embed="rId9"/>
+          <a:stretch>
+            <a:fillRect/>
+          </a:stretch>
+        </p:blipFill>
+        <p:spPr>
+          <a:xfrm>
+            <a:off x="1776083" y="120059"/>
+            <a:ext cx="8639833" cy="860963"/>
+          </a:xfrm>
+          <a:prstGeom prst="rect">
+            <a:avLst/>
+          </a:prstGeom>
+        </p:spPr>
+      </p:pic>
+      <p:pic>
+        <p:nvPicPr>
+          <p:cNvPr id="3" name="Image 2">
+            <a:extLst>
+              <a:ext uri="{FF2B5EF4-FFF2-40B4-BE49-F238E27FC236}">
+                <a16:creationId xmlns:a16="http://schemas.microsoft.com/office/drawing/2014/main" id="{7E10802B-705F-CE24-BAB4-D2F926464021}"/>
+              </a:ext>
+            </a:extLst>
+          </p:cNvPr>
+          <p:cNvPicPr>
+            <a:picLocks noChangeAspect="1"/>
+          </p:cNvPicPr>
+          <p:nvPr/>
+        </p:nvPicPr>
+        <p:blipFill>
+          <a:blip r:embed="rId7">
+            <a:duotone>
+              <a:schemeClr val="bg2">
+                <a:shade val="45000"/>
+                <a:satMod val="135000"/>
+              </a:schemeClr>
+              <a:prstClr val="white"/>
+            </a:duotone>
+            <a:extLst>
+              <a:ext uri="{BEBA8EAE-BF5A-486C-A8C5-ECC9F3942E4B}">
+                <a14:imgProps xmlns:a14="http://schemas.microsoft.com/office/drawing/2010/main">
+                  <a14:imgLayer r:embed="rId8">
+                    <a14:imgEffect>
+                      <a14:colorTemperature colorTemp="4700"/>
+                    </a14:imgEffect>
+                    <a14:imgEffect>
+                      <a14:saturation sat="0"/>
+                    </a14:imgEffect>
+                  </a14:imgLayer>
+                </a14:imgProps>
+              </a:ext>
+            </a:extLst>
+          </a:blip>
+          <a:srcRect l="1287" t="17358" r="73201" b="14299"/>
+          <a:stretch>
+            <a:fillRect/>
+          </a:stretch>
+        </p:blipFill>
+        <p:spPr>
+          <a:xfrm>
+            <a:off x="0" y="6098266"/>
+            <a:ext cx="758627" cy="759734"/>
+          </a:xfrm>
+          <a:prstGeom prst="rect">
+            <a:avLst/>
+          </a:prstGeom>
+        </p:spPr>
+      </p:pic>
+      <p:pic>
+        <p:nvPicPr>
+          <p:cNvPr id="7" name="Image 6">
+            <a:extLst>
+              <a:ext uri="{FF2B5EF4-FFF2-40B4-BE49-F238E27FC236}">
+                <a16:creationId xmlns:a16="http://schemas.microsoft.com/office/drawing/2014/main" id="{591BB339-FE59-65E1-3CDD-65EE41DF89FA}"/>
+              </a:ext>
+            </a:extLst>
+          </p:cNvPr>
+          <p:cNvPicPr>
+            <a:picLocks noChangeAspect="1"/>
+          </p:cNvPicPr>
+          <p:nvPr/>
+        </p:nvPicPr>
+        <p:blipFill>
+          <a:blip r:embed="rId10"/>
+          <a:stretch>
+            <a:fillRect/>
+          </a:stretch>
+        </p:blipFill>
+        <p:spPr>
+          <a:xfrm>
+            <a:off x="678258" y="1929609"/>
+            <a:ext cx="10894476" cy="942792"/>
+          </a:xfrm>
+          <a:prstGeom prst="rect">
+            <a:avLst/>
+          </a:prstGeom>
+        </p:spPr>
+      </p:pic>
+      <p:pic>
+        <p:nvPicPr>
+          <p:cNvPr id="10" name="Image 9">
+            <a:extLst>
+              <a:ext uri="{FF2B5EF4-FFF2-40B4-BE49-F238E27FC236}">
+                <a16:creationId xmlns:a16="http://schemas.microsoft.com/office/drawing/2014/main" id="{D8439A80-E161-A40D-9532-CD08DEBE50BE}"/>
+              </a:ext>
+            </a:extLst>
+          </p:cNvPr>
+          <p:cNvPicPr>
+            <a:picLocks noChangeAspect="1"/>
+          </p:cNvPicPr>
+          <p:nvPr/>
+        </p:nvPicPr>
+        <p:blipFill>
+          <a:blip r:embed="rId11"/>
+          <a:stretch>
+            <a:fillRect/>
+          </a:stretch>
+        </p:blipFill>
+        <p:spPr>
+          <a:xfrm>
+            <a:off x="678258" y="2934653"/>
+            <a:ext cx="1323577" cy="3348258"/>
+          </a:xfrm>
+          <a:prstGeom prst="rect">
+            <a:avLst/>
+          </a:prstGeom>
+        </p:spPr>
+      </p:pic>
+      <p:pic>
+        <p:nvPicPr>
+          <p:cNvPr id="13" name="Image 12">
+            <a:extLst>
+              <a:ext uri="{FF2B5EF4-FFF2-40B4-BE49-F238E27FC236}">
+                <a16:creationId xmlns:a16="http://schemas.microsoft.com/office/drawing/2014/main" id="{2186077F-5A81-6DED-686F-8034DA11138D}"/>
+              </a:ext>
+            </a:extLst>
+          </p:cNvPr>
+          <p:cNvPicPr>
+            <a:picLocks noChangeAspect="1"/>
+          </p:cNvPicPr>
+          <p:nvPr/>
+        </p:nvPicPr>
+        <p:blipFill>
+          <a:blip r:embed="rId12"/>
+          <a:srcRect b="57456"/>
+          <a:stretch>
+            <a:fillRect/>
+          </a:stretch>
+        </p:blipFill>
+        <p:spPr>
+          <a:xfrm>
+            <a:off x="1990367" y="2934653"/>
+            <a:ext cx="6122235" cy="3348258"/>
+          </a:xfrm>
+          <a:prstGeom prst="rect">
+            <a:avLst/>
+          </a:prstGeom>
+        </p:spPr>
+      </p:pic>
+      <p:pic>
+        <p:nvPicPr>
+          <p:cNvPr id="12" name="Image 11">
+            <a:extLst>
+              <a:ext uri="{FF2B5EF4-FFF2-40B4-BE49-F238E27FC236}">
+                <a16:creationId xmlns:a16="http://schemas.microsoft.com/office/drawing/2014/main" id="{DDB2B43A-1EA6-48E8-970D-FB16B07176D9}"/>
+              </a:ext>
+            </a:extLst>
+          </p:cNvPr>
+          <p:cNvPicPr>
+            <a:picLocks noChangeAspect="1"/>
+          </p:cNvPicPr>
+          <p:nvPr/>
+        </p:nvPicPr>
+        <p:blipFill>
+          <a:blip r:embed="rId12"/>
+          <a:srcRect t="41579"/>
+          <a:stretch>
+            <a:fillRect/>
+          </a:stretch>
+        </p:blipFill>
+        <p:spPr>
+          <a:xfrm>
+            <a:off x="6983111" y="2901986"/>
+            <a:ext cx="4511222" cy="3387933"/>
+          </a:xfrm>
+          <a:prstGeom prst="rect">
+            <a:avLst/>
+          </a:prstGeom>
+        </p:spPr>
+      </p:pic>
+      <p:sp>
+        <p:nvSpPr>
+          <p:cNvPr id="14" name="Rectangle 13">
+            <a:extLst>
+              <a:ext uri="{FF2B5EF4-FFF2-40B4-BE49-F238E27FC236}">
+                <a16:creationId xmlns:a16="http://schemas.microsoft.com/office/drawing/2014/main" id="{73C02196-0205-6902-BFCC-35111B66B465}"/>
+              </a:ext>
+            </a:extLst>
+          </p:cNvPr>
+          <p:cNvSpPr/>
+          <p:nvPr/>
+        </p:nvSpPr>
+        <p:spPr>
+          <a:xfrm>
+            <a:off x="2795985" y="3874238"/>
+            <a:ext cx="1003855" cy="2062480"/>
+          </a:xfrm>
+          <a:prstGeom prst="rect">
+            <a:avLst/>
+          </a:prstGeom>
+          <a:noFill/>
+          <a:ln>
+            <a:solidFill>
+              <a:srgbClr val="FFC000"/>
+            </a:solidFill>
+          </a:ln>
+        </p:spPr>
+        <p:style>
+          <a:lnRef idx="2">
+            <a:schemeClr val="accent1">
+              <a:shade val="15000"/>
+            </a:schemeClr>
+          </a:lnRef>
+          <a:fillRef idx="1">
+            <a:schemeClr val="accent1"/>
+          </a:fillRef>
+          <a:effectRef idx="0">
+            <a:schemeClr val="accent1"/>
+          </a:effectRef>
+          <a:fontRef idx="minor">
+            <a:schemeClr val="lt1"/>
+          </a:fontRef>
+        </p:style>
+        <p:txBody>
+          <a:bodyPr rtlCol="0" anchor="ctr"/>
+          <a:lstStyle/>
+          <a:p>
+            <a:pPr algn="ctr"/>
+            <a:endParaRPr lang="fr-CA"/>
+          </a:p>
+        </p:txBody>
+      </p:sp>
+      <p:sp>
+        <p:nvSpPr>
+          <p:cNvPr id="15" name="Rectangle 14">
+            <a:extLst>
+              <a:ext uri="{FF2B5EF4-FFF2-40B4-BE49-F238E27FC236}">
+                <a16:creationId xmlns:a16="http://schemas.microsoft.com/office/drawing/2014/main" id="{84B9FF5F-DCF1-3D3C-7F35-297C2F3B893A}"/>
+              </a:ext>
+            </a:extLst>
+          </p:cNvPr>
+          <p:cNvSpPr/>
+          <p:nvPr/>
+        </p:nvSpPr>
+        <p:spPr>
+          <a:xfrm>
+            <a:off x="7701581" y="3370302"/>
+            <a:ext cx="1723130" cy="163744"/>
+          </a:xfrm>
+          <a:prstGeom prst="rect">
+            <a:avLst/>
+          </a:prstGeom>
+          <a:noFill/>
+          <a:ln>
+            <a:solidFill>
+              <a:srgbClr val="FFC000"/>
+            </a:solidFill>
+          </a:ln>
+        </p:spPr>
+        <p:style>
+          <a:lnRef idx="2">
+            <a:schemeClr val="accent1">
+              <a:shade val="15000"/>
+            </a:schemeClr>
+          </a:lnRef>
+          <a:fillRef idx="1">
+            <a:schemeClr val="accent1"/>
+          </a:fillRef>
+          <a:effectRef idx="0">
+            <a:schemeClr val="accent1"/>
+          </a:effectRef>
+          <a:fontRef idx="minor">
+            <a:schemeClr val="lt1"/>
+          </a:fontRef>
+        </p:style>
+        <p:txBody>
+          <a:bodyPr rtlCol="0" anchor="ctr"/>
+          <a:lstStyle/>
+          <a:p>
+            <a:pPr algn="ctr"/>
+            <a:endParaRPr lang="fr-CA"/>
+          </a:p>
+        </p:txBody>
+      </p:sp>
+      <p:sp>
+        <p:nvSpPr>
+          <p:cNvPr id="16" name="Rectangle 15">
+            <a:extLst>
+              <a:ext uri="{FF2B5EF4-FFF2-40B4-BE49-F238E27FC236}">
+                <a16:creationId xmlns:a16="http://schemas.microsoft.com/office/drawing/2014/main" id="{EA2C97F3-8C81-66B6-98BA-EC8432C2A072}"/>
+              </a:ext>
+            </a:extLst>
+          </p:cNvPr>
+          <p:cNvSpPr/>
+          <p:nvPr/>
+        </p:nvSpPr>
+        <p:spPr>
+          <a:xfrm>
+            <a:off x="7730523" y="3735607"/>
+            <a:ext cx="1723130" cy="163744"/>
+          </a:xfrm>
+          <a:prstGeom prst="rect">
+            <a:avLst/>
+          </a:prstGeom>
+          <a:noFill/>
+          <a:ln>
+            <a:solidFill>
+              <a:srgbClr val="FFC000"/>
+            </a:solidFill>
+          </a:ln>
+        </p:spPr>
+        <p:style>
+          <a:lnRef idx="2">
+            <a:schemeClr val="accent1">
+              <a:shade val="15000"/>
+            </a:schemeClr>
+          </a:lnRef>
+          <a:fillRef idx="1">
+            <a:schemeClr val="accent1"/>
+          </a:fillRef>
+          <a:effectRef idx="0">
+            <a:schemeClr val="accent1"/>
+          </a:effectRef>
+          <a:fontRef idx="minor">
+            <a:schemeClr val="lt1"/>
+          </a:fontRef>
+        </p:style>
+        <p:txBody>
+          <a:bodyPr rtlCol="0" anchor="ctr"/>
+          <a:lstStyle/>
+          <a:p>
+            <a:pPr algn="ctr"/>
+            <a:endParaRPr lang="fr-CA"/>
+          </a:p>
+        </p:txBody>
+      </p:sp>
+      <p:pic>
+        <p:nvPicPr>
+          <p:cNvPr id="19" name="Image 18">
+            <a:extLst>
+              <a:ext uri="{FF2B5EF4-FFF2-40B4-BE49-F238E27FC236}">
+                <a16:creationId xmlns:a16="http://schemas.microsoft.com/office/drawing/2014/main" id="{A2DA1396-49E8-DBDF-BCBA-2E7CFEB768D5}"/>
+              </a:ext>
+            </a:extLst>
+          </p:cNvPr>
+          <p:cNvPicPr>
+            <a:picLocks noChangeAspect="1"/>
+          </p:cNvPicPr>
+          <p:nvPr/>
+        </p:nvPicPr>
+        <p:blipFill>
+          <a:blip r:embed="rId13"/>
+          <a:stretch>
+            <a:fillRect/>
+          </a:stretch>
+        </p:blipFill>
+        <p:spPr>
+          <a:xfrm>
+            <a:off x="3913769" y="4398887"/>
+            <a:ext cx="3607446" cy="853833"/>
+          </a:xfrm>
+          <a:prstGeom prst="rect">
+            <a:avLst/>
+          </a:prstGeom>
+        </p:spPr>
+      </p:pic>
+      <p:cxnSp>
+        <p:nvCxnSpPr>
+          <p:cNvPr id="21" name="Connecteur droit avec flèche 20">
+            <a:extLst>
+              <a:ext uri="{FF2B5EF4-FFF2-40B4-BE49-F238E27FC236}">
+                <a16:creationId xmlns:a16="http://schemas.microsoft.com/office/drawing/2014/main" id="{E4E5F57E-85B0-F89B-72C9-E4D9F762A897}"/>
+              </a:ext>
+            </a:extLst>
+          </p:cNvPr>
+          <p:cNvCxnSpPr/>
+          <p:nvPr/>
+        </p:nvCxnSpPr>
+        <p:spPr>
+          <a:xfrm>
+            <a:off x="3799840" y="4003040"/>
+            <a:ext cx="904240" cy="395847"/>
+          </a:xfrm>
+          <a:prstGeom prst="straightConnector1">
+            <a:avLst/>
+          </a:prstGeom>
+          <a:ln>
+            <a:solidFill>
+              <a:srgbClr val="FFC000"/>
+            </a:solidFill>
+            <a:tailEnd type="triangle"/>
+          </a:ln>
+        </p:spPr>
+        <p:style>
+          <a:lnRef idx="2">
+            <a:schemeClr val="accent1"/>
+          </a:lnRef>
+          <a:fillRef idx="0">
+            <a:schemeClr val="accent1"/>
+          </a:fillRef>
+          <a:effectRef idx="1">
+            <a:schemeClr val="accent1"/>
+          </a:effectRef>
+          <a:fontRef idx="minor">
+            <a:schemeClr val="tx1"/>
+          </a:fontRef>
+        </p:style>
+      </p:cxnSp>
+      <p:cxnSp>
+        <p:nvCxnSpPr>
+          <p:cNvPr id="23" name="Connecteur droit avec flèche 22">
+            <a:extLst>
+              <a:ext uri="{FF2B5EF4-FFF2-40B4-BE49-F238E27FC236}">
+                <a16:creationId xmlns:a16="http://schemas.microsoft.com/office/drawing/2014/main" id="{DAA0A0F7-0B8F-F1D3-185D-C9C2E8090B28}"/>
+              </a:ext>
+            </a:extLst>
+          </p:cNvPr>
+          <p:cNvCxnSpPr>
+            <a:stCxn id="16" idx="1"/>
+          </p:cNvCxnSpPr>
+          <p:nvPr/>
+        </p:nvCxnSpPr>
+        <p:spPr>
+          <a:xfrm flipH="1">
+            <a:off x="6451600" y="3817479"/>
+            <a:ext cx="1278923" cy="581408"/>
+          </a:xfrm>
+          <a:prstGeom prst="straightConnector1">
+            <a:avLst/>
+          </a:prstGeom>
+          <a:ln>
+            <a:solidFill>
+              <a:srgbClr val="FFC000"/>
+            </a:solidFill>
+            <a:tailEnd type="triangle"/>
+          </a:ln>
+        </p:spPr>
+        <p:style>
+          <a:lnRef idx="2">
+            <a:schemeClr val="accent1"/>
+          </a:lnRef>
+          <a:fillRef idx="0">
+            <a:schemeClr val="accent1"/>
+          </a:fillRef>
+          <a:effectRef idx="1">
+            <a:schemeClr val="accent1"/>
+          </a:effectRef>
+          <a:fontRef idx="minor">
+            <a:schemeClr val="tx1"/>
+          </a:fontRef>
+        </p:style>
+      </p:cxnSp>
+      <p:sp>
+        <p:nvSpPr>
+          <p:cNvPr id="4" name="Rectangle 3">
+            <a:extLst>
+              <a:ext uri="{FF2B5EF4-FFF2-40B4-BE49-F238E27FC236}">
+                <a16:creationId xmlns:a16="http://schemas.microsoft.com/office/drawing/2014/main" id="{38E53E4B-46ED-7B7B-CACF-44DD1D64BE25}"/>
+              </a:ext>
+            </a:extLst>
+          </p:cNvPr>
+          <p:cNvSpPr/>
+          <p:nvPr>
+            <p:custDataLst>
+              <p:tags r:id="rId3"/>
+            </p:custDataLst>
+          </p:nvPr>
+        </p:nvSpPr>
+        <p:spPr>
+          <a:xfrm>
+            <a:off x="655646" y="703384"/>
+            <a:ext cx="10880706" cy="942792"/>
+          </a:xfrm>
+          <a:prstGeom prst="rect">
+            <a:avLst/>
+          </a:prstGeom>
+          <a:noFill/>
+          <a:ln>
+            <a:noFill/>
+          </a:ln>
+        </p:spPr>
+        <p:style>
+          <a:lnRef idx="2">
+            <a:schemeClr val="accent1">
+              <a:shade val="15000"/>
+            </a:schemeClr>
+          </a:lnRef>
+          <a:fillRef idx="1">
+            <a:schemeClr val="accent1"/>
+          </a:fillRef>
+          <a:effectRef idx="0">
+            <a:schemeClr val="accent1"/>
+          </a:effectRef>
+          <a:fontRef idx="minor">
+            <a:schemeClr val="lt1"/>
+          </a:fontRef>
+        </p:style>
+        <p:txBody>
+          <a:bodyPr rtlCol="0" anchor="ctr"/>
+          <a:lstStyle/>
+          <a:p>
+            <a:pPr algn="ctr"/>
+            <a:r>
+              <a:rPr lang="fr-CA" sz="3000">
+                <a:latin typeface="Pixel Operator 8" panose="02000503000000000000" pitchFamily="2" charset="0"/>
+              </a:rPr>
+              <a:t>Difficultés rencontrées par Alexis :</a:t>
+            </a:r>
+          </a:p>
+        </p:txBody>
+      </p:sp>
+    </p:spTree>
+    <p:extLst>
+      <p:ext uri="{BB962C8B-B14F-4D97-AF65-F5344CB8AC3E}">
+        <p14:creationId xmlns:p14="http://schemas.microsoft.com/office/powerpoint/2010/main" val="2575498643"/>
+      </p:ext>
+    </p:extLst>
+  </p:cSld>
+  <p:clrMapOvr>
+    <a:masterClrMapping/>
+  </p:clrMapOvr>
+</p:sld>
+</file>
+
+<file path=ppt/slides/slide9.xml><?xml version="1.0" encoding="utf-8"?>
 <p:sld xmlns:a="http://schemas.openxmlformats.org/drawingml/2006/main" xmlns:r="http://schemas.openxmlformats.org/officeDocument/2006/relationships" xmlns:p="http://schemas.openxmlformats.org/presentationml/2006/main">
   <p:cSld>
     <p:spTree>
@@ -4985,7 +11051,7 @@
           </p:nvPr>
         </p:nvPicPr>
         <p:blipFill>
-          <a:blip r:embed="rId6"/>
+          <a:blip r:embed="rId7"/>
           <a:srcRect l="4895" t="76969" r="85984"/>
           <a:stretch>
             <a:fillRect/>
@@ -5072,7 +11138,7 @@
           <p:nvPr/>
         </p:nvPicPr>
         <p:blipFill>
-          <a:blip r:embed="rId7">
+          <a:blip r:embed="rId8">
             <a:duotone>
               <a:schemeClr val="bg2">
                 <a:shade val="45000"/>
@@ -5083,7 +11149,7 @@
             <a:extLst>
               <a:ext uri="{BEBA8EAE-BF5A-486C-A8C5-ECC9F3942E4B}">
                 <a14:imgProps xmlns:a14="http://schemas.microsoft.com/office/drawing/2010/main">
-                  <a14:imgLayer r:embed="rId8">
+                  <a14:imgLayer r:embed="rId9">
                     <a14:imgEffect>
                       <a14:colorTemperature colorTemp="4700"/>
                     </a14:imgEffect>
@@ -5125,7 +11191,7 @@
           <p:nvPr/>
         </p:nvPicPr>
         <p:blipFill>
-          <a:blip r:embed="rId9"/>
+          <a:blip r:embed="rId10"/>
           <a:stretch>
             <a:fillRect/>
           </a:stretch>
@@ -5155,7 +11221,7 @@
           <p:nvPr/>
         </p:nvPicPr>
         <p:blipFill>
-          <a:blip r:embed="rId7">
+          <a:blip r:embed="rId8">
             <a:duotone>
               <a:schemeClr val="bg2">
                 <a:shade val="45000"/>
@@ -5166,7 +11232,7 @@
             <a:extLst>
               <a:ext uri="{BEBA8EAE-BF5A-486C-A8C5-ECC9F3942E4B}">
                 <a14:imgProps xmlns:a14="http://schemas.microsoft.com/office/drawing/2010/main">
-                  <a14:imgLayer r:embed="rId8">
+                  <a14:imgLayer r:embed="rId9">
                     <a14:imgEffect>
                       <a14:colorTemperature colorTemp="4700"/>
                     </a14:imgEffect>
@@ -5244,7 +11310,7 @@
           <a:p>
             <a:pPr algn="ctr"/>
             <a:r>
-              <a:rPr lang="fr-CA" sz="3000" dirty="0">
+              <a:rPr lang="fr-CA" sz="3000">
                 <a:latin typeface="Pixel Operator 8" panose="02000503000000000000" pitchFamily="2" charset="0"/>
               </a:rPr>
               <a:t>Difficultés rencontrées par Alexis :</a:t>
@@ -5252,106 +11318,273 @@
           </a:p>
         </p:txBody>
       </p:sp>
-    </p:spTree>
-    <p:extLst>
-      <p:ext uri="{BB962C8B-B14F-4D97-AF65-F5344CB8AC3E}">
-        <p14:creationId xmlns:p14="http://schemas.microsoft.com/office/powerpoint/2010/main" val="129906060"/>
-      </p:ext>
-    </p:extLst>
-  </p:cSld>
-  <p:clrMapOvr>
-    <a:masterClrMapping/>
-  </p:clrMapOvr>
-</p:sld>
-</file>
-
-<file path=ppt/slides/slide4.xml><?xml version="1.0" encoding="utf-8"?>
-<p:sld xmlns:a="http://schemas.openxmlformats.org/drawingml/2006/main" xmlns:r="http://schemas.openxmlformats.org/officeDocument/2006/relationships" xmlns:p="http://schemas.openxmlformats.org/presentationml/2006/main">
-  <p:cSld>
-    <p:spTree>
-      <p:nvGrpSpPr>
-        <p:cNvPr id="1" name="">
-          <a:extLst>
-            <a:ext uri="{FF2B5EF4-FFF2-40B4-BE49-F238E27FC236}">
-              <a16:creationId xmlns:a16="http://schemas.microsoft.com/office/drawing/2014/main" id="{A65196FC-0B46-0EDB-5AEC-AA3D5581E253}"/>
-            </a:ext>
-          </a:extLst>
-        </p:cNvPr>
-        <p:cNvGrpSpPr/>
-        <p:nvPr/>
-      </p:nvGrpSpPr>
-      <p:grpSpPr>
-        <a:xfrm>
-          <a:off x="0" y="0"/>
-          <a:ext cx="0" cy="0"/>
-          <a:chOff x="0" y="0"/>
-          <a:chExt cx="0" cy="0"/>
-        </a:xfrm>
-      </p:grpSpPr>
       <p:pic>
         <p:nvPicPr>
-          <p:cNvPr id="8" name="Image 7">
-            <a:extLst>
-              <a:ext uri="{FF2B5EF4-FFF2-40B4-BE49-F238E27FC236}">
-                <a16:creationId xmlns:a16="http://schemas.microsoft.com/office/drawing/2014/main" id="{A5FBD2F9-C621-09DC-EFDD-0496965C5F24}"/>
+          <p:cNvPr id="7" name="Image 6">
+            <a:extLst>
+              <a:ext uri="{FF2B5EF4-FFF2-40B4-BE49-F238E27FC236}">
+                <a16:creationId xmlns:a16="http://schemas.microsoft.com/office/drawing/2014/main" id="{4EE390A4-E609-6B86-7011-9B52677AB247}"/>
               </a:ext>
             </a:extLst>
           </p:cNvPr>
           <p:cNvPicPr>
             <a:picLocks noChangeAspect="1"/>
           </p:cNvPicPr>
-          <p:nvPr>
-            <p:custDataLst>
-              <p:tags r:id="rId1"/>
-            </p:custDataLst>
-          </p:nvPr>
+          <p:nvPr/>
         </p:nvPicPr>
         <p:blipFill>
-          <a:blip r:embed="rId5"/>
-          <a:srcRect l="4895" t="76969" r="85984"/>
+          <a:blip r:embed="rId11"/>
+          <a:srcRect r="47070" b="971"/>
           <a:stretch>
             <a:fillRect/>
           </a:stretch>
         </p:blipFill>
         <p:spPr>
           <a:xfrm>
-            <a:off x="0" y="0"/>
-            <a:ext cx="12192000" cy="6858000"/>
+            <a:off x="533818" y="1646176"/>
+            <a:ext cx="9125465" cy="759734"/>
           </a:xfrm>
           <a:prstGeom prst="rect">
             <a:avLst/>
           </a:prstGeom>
         </p:spPr>
       </p:pic>
-      <p:sp>
-        <p:nvSpPr>
-          <p:cNvPr id="18" name="Rectangle 17">
-            <a:extLst>
-              <a:ext uri="{FF2B5EF4-FFF2-40B4-BE49-F238E27FC236}">
-                <a16:creationId xmlns:a16="http://schemas.microsoft.com/office/drawing/2014/main" id="{0BC01DBA-B6CC-8FF8-457B-86E0EB52E851}"/>
-              </a:ext>
-            </a:extLst>
-          </p:cNvPr>
-          <p:cNvSpPr/>
-          <p:nvPr>
-            <p:custDataLst>
-              <p:tags r:id="rId2"/>
-            </p:custDataLst>
-          </p:nvPr>
-        </p:nvSpPr>
-        <p:spPr>
-          <a:xfrm>
-            <a:off x="245806" y="403123"/>
-            <a:ext cx="11759381" cy="6194321"/>
-          </a:xfrm>
-          <a:prstGeom prst="rect">
-            <a:avLst/>
-          </a:prstGeom>
-          <a:noFill/>
-          <a:ln>
+      <p:pic>
+        <p:nvPicPr>
+          <p:cNvPr id="9" name="Image 8">
+            <a:extLst>
+              <a:ext uri="{FF2B5EF4-FFF2-40B4-BE49-F238E27FC236}">
+                <a16:creationId xmlns:a16="http://schemas.microsoft.com/office/drawing/2014/main" id="{AD996A08-F7E3-5C86-00CF-6C0F6BF35EDE}"/>
+              </a:ext>
+            </a:extLst>
+          </p:cNvPr>
+          <p:cNvPicPr>
+            <a:picLocks noChangeAspect="1"/>
+          </p:cNvPicPr>
+          <p:nvPr/>
+        </p:nvPicPr>
+        <p:blipFill>
+          <a:blip r:embed="rId11"/>
+          <a:srcRect l="88428" r="32" b="971"/>
+          <a:stretch>
+            <a:fillRect/>
+          </a:stretch>
+        </p:blipFill>
+        <p:spPr>
+          <a:xfrm>
+            <a:off x="9546779" y="1646176"/>
+            <a:ext cx="1989573" cy="759734"/>
+          </a:xfrm>
+          <a:prstGeom prst="rect">
+            <a:avLst/>
+          </a:prstGeom>
+        </p:spPr>
+      </p:pic>
+      <p:pic>
+        <p:nvPicPr>
+          <p:cNvPr id="13" name="Image 12">
+            <a:extLst>
+              <a:ext uri="{FF2B5EF4-FFF2-40B4-BE49-F238E27FC236}">
+                <a16:creationId xmlns:a16="http://schemas.microsoft.com/office/drawing/2014/main" id="{BE084562-AC06-279A-7F7B-585379DF1207}"/>
+              </a:ext>
+            </a:extLst>
+          </p:cNvPr>
+          <p:cNvPicPr>
+            <a:picLocks noChangeAspect="1"/>
+          </p:cNvPicPr>
+          <p:nvPr/>
+        </p:nvPicPr>
+        <p:blipFill>
+          <a:blip r:embed="rId12"/>
+          <a:srcRect r="77790"/>
+          <a:stretch>
+            <a:fillRect/>
+          </a:stretch>
+        </p:blipFill>
+        <p:spPr>
+          <a:xfrm>
+            <a:off x="533818" y="2517517"/>
+            <a:ext cx="3389253" cy="649891"/>
+          </a:xfrm>
+          <a:prstGeom prst="rect">
+            <a:avLst/>
+          </a:prstGeom>
+        </p:spPr>
+      </p:pic>
+      <p:pic>
+        <p:nvPicPr>
+          <p:cNvPr id="15" name="Image 14">
+            <a:extLst>
+              <a:ext uri="{FF2B5EF4-FFF2-40B4-BE49-F238E27FC236}">
+                <a16:creationId xmlns:a16="http://schemas.microsoft.com/office/drawing/2014/main" id="{20C93B8A-903D-2407-3AAA-F444C8793C6E}"/>
+              </a:ext>
+            </a:extLst>
+          </p:cNvPr>
+          <p:cNvPicPr>
+            <a:picLocks noChangeAspect="1"/>
+          </p:cNvPicPr>
+          <p:nvPr/>
+        </p:nvPicPr>
+        <p:blipFill>
+          <a:blip r:embed="rId12"/>
+          <a:srcRect l="89371" r="28"/>
+          <a:stretch>
+            <a:fillRect/>
+          </a:stretch>
+        </p:blipFill>
+        <p:spPr>
+          <a:xfrm>
+            <a:off x="3923071" y="2517517"/>
+            <a:ext cx="1617785" cy="649891"/>
+          </a:xfrm>
+          <a:prstGeom prst="rect">
+            <a:avLst/>
+          </a:prstGeom>
+        </p:spPr>
+      </p:pic>
+      <p:pic>
+        <p:nvPicPr>
+          <p:cNvPr id="17" name="Image 16">
+            <a:extLst>
+              <a:ext uri="{FF2B5EF4-FFF2-40B4-BE49-F238E27FC236}">
+                <a16:creationId xmlns:a16="http://schemas.microsoft.com/office/drawing/2014/main" id="{91F1D97D-125B-681F-6876-38D26A92953B}"/>
+              </a:ext>
+            </a:extLst>
+          </p:cNvPr>
+          <p:cNvPicPr>
+            <a:picLocks noChangeAspect="1"/>
+          </p:cNvPicPr>
+          <p:nvPr/>
+        </p:nvPicPr>
+        <p:blipFill>
+          <a:blip r:embed="rId13"/>
+          <a:stretch>
+            <a:fillRect/>
+          </a:stretch>
+        </p:blipFill>
+        <p:spPr>
+          <a:xfrm>
+            <a:off x="2805069" y="3690351"/>
+            <a:ext cx="1774090" cy="1884971"/>
+          </a:xfrm>
+          <a:prstGeom prst="rect">
+            <a:avLst/>
+          </a:prstGeom>
+        </p:spPr>
+      </p:pic>
+      <p:pic>
+        <p:nvPicPr>
+          <p:cNvPr id="19" name="Image 18">
+            <a:extLst>
+              <a:ext uri="{FF2B5EF4-FFF2-40B4-BE49-F238E27FC236}">
+                <a16:creationId xmlns:a16="http://schemas.microsoft.com/office/drawing/2014/main" id="{663C248C-2687-284F-1111-5F72DD76B26B}"/>
+              </a:ext>
+            </a:extLst>
+          </p:cNvPr>
+          <p:cNvPicPr>
+            <a:picLocks noChangeAspect="1"/>
+          </p:cNvPicPr>
+          <p:nvPr/>
+        </p:nvPicPr>
+        <p:blipFill>
+          <a:blip r:embed="rId14">
+            <a:extLst>
+              <a:ext uri="{BEBA8EAE-BF5A-486C-A8C5-ECC9F3942E4B}">
+                <a14:imgProps xmlns:a14="http://schemas.microsoft.com/office/drawing/2010/main">
+                  <a14:imgLayer r:embed="rId15">
+                    <a14:imgEffect>
+                      <a14:artisticPencilGrayscale/>
+                    </a14:imgEffect>
+                  </a14:imgLayer>
+                </a14:imgProps>
+              </a:ext>
+            </a:extLst>
+          </a:blip>
+          <a:stretch>
+            <a:fillRect/>
+          </a:stretch>
+        </p:blipFill>
+        <p:spPr>
+          <a:xfrm>
+            <a:off x="6735630" y="3638515"/>
+            <a:ext cx="1774090" cy="1884971"/>
+          </a:xfrm>
+          <a:prstGeom prst="rect">
+            <a:avLst/>
+          </a:prstGeom>
+        </p:spPr>
+      </p:pic>
+      <p:cxnSp>
+        <p:nvCxnSpPr>
+          <p:cNvPr id="21" name="Connecteur droit avec flèche 20">
+            <a:extLst>
+              <a:ext uri="{FF2B5EF4-FFF2-40B4-BE49-F238E27FC236}">
+                <a16:creationId xmlns:a16="http://schemas.microsoft.com/office/drawing/2014/main" id="{4D579D4D-211E-46D0-CD06-C44CE66461C7}"/>
+              </a:ext>
+            </a:extLst>
+          </p:cNvPr>
+          <p:cNvCxnSpPr>
+            <a:cxnSpLocks/>
+          </p:cNvCxnSpPr>
+          <p:nvPr/>
+        </p:nvCxnSpPr>
+        <p:spPr>
+          <a:xfrm>
+            <a:off x="4369102" y="4452091"/>
+            <a:ext cx="2366528" cy="0"/>
+          </a:xfrm>
+          <a:prstGeom prst="straightConnector1">
+            <a:avLst/>
+          </a:prstGeom>
+          <a:ln w="76200">
             <a:solidFill>
               <a:schemeClr val="bg1"/>
             </a:solidFill>
+            <a:tailEnd type="triangle"/>
+          </a:ln>
+        </p:spPr>
+        <p:style>
+          <a:lnRef idx="2">
+            <a:schemeClr val="accent1"/>
+          </a:lnRef>
+          <a:fillRef idx="0">
+            <a:schemeClr val="accent1"/>
+          </a:fillRef>
+          <a:effectRef idx="1">
+            <a:schemeClr val="accent1"/>
+          </a:effectRef>
+          <a:fontRef idx="minor">
+            <a:schemeClr val="tx1"/>
+          </a:fontRef>
+        </p:style>
+      </p:cxnSp>
+      <p:sp>
+        <p:nvSpPr>
+          <p:cNvPr id="26" name="Rectangle 25">
+            <a:extLst>
+              <a:ext uri="{FF2B5EF4-FFF2-40B4-BE49-F238E27FC236}">
+                <a16:creationId xmlns:a16="http://schemas.microsoft.com/office/drawing/2014/main" id="{391BDA3A-2015-07F5-DFF3-D62BAD5011B0}"/>
+              </a:ext>
+            </a:extLst>
+          </p:cNvPr>
+          <p:cNvSpPr/>
+          <p:nvPr>
+            <p:custDataLst>
+              <p:tags r:id="rId4"/>
+            </p:custDataLst>
+          </p:nvPr>
+        </p:nvSpPr>
+        <p:spPr>
+          <a:xfrm>
+            <a:off x="4914890" y="2395562"/>
+            <a:ext cx="7716264" cy="942792"/>
+          </a:xfrm>
+          <a:prstGeom prst="rect">
+            <a:avLst/>
+          </a:prstGeom>
+          <a:noFill/>
+          <a:ln>
+            <a:noFill/>
           </a:ln>
         </p:spPr>
         <p:style>
@@ -5375,16 +11608,24 @@
           <a:lstStyle/>
           <a:p>
             <a:pPr algn="ctr"/>
-            <a:endParaRPr lang="fr-CA"/>
+            <a:r>
+              <a:rPr lang="fr-FR" sz="3000">
+                <a:latin typeface="Pixel Operator 8" panose="02000503000000000000" pitchFamily="2" charset="0"/>
+              </a:rPr>
+              <a:t>+1 = +1000000000000</a:t>
+            </a:r>
+            <a:endParaRPr lang="fr-CA" sz="3000">
+              <a:latin typeface="Pixel Operator 8" panose="02000503000000000000" pitchFamily="2" charset="0"/>
+            </a:endParaRPr>
           </a:p>
         </p:txBody>
       </p:sp>
       <p:pic>
         <p:nvPicPr>
-          <p:cNvPr id="5" name="Image 4">
-            <a:extLst>
-              <a:ext uri="{FF2B5EF4-FFF2-40B4-BE49-F238E27FC236}">
-                <a16:creationId xmlns:a16="http://schemas.microsoft.com/office/drawing/2014/main" id="{9617497B-C0AA-5E50-35E0-B4FFA39CDBBF}"/>
+          <p:cNvPr id="28" name="Image 27">
+            <a:extLst>
+              <a:ext uri="{FF2B5EF4-FFF2-40B4-BE49-F238E27FC236}">
+                <a16:creationId xmlns:a16="http://schemas.microsoft.com/office/drawing/2014/main" id="{48E425B4-D33D-06C1-93DB-0975C53427DE}"/>
               </a:ext>
             </a:extLst>
           </p:cNvPr>
@@ -5394,137 +11635,25 @@
           <p:nvPr/>
         </p:nvPicPr>
         <p:blipFill>
-          <a:blip r:embed="rId6"/>
+          <a:blip r:embed="rId16"/>
           <a:stretch>
             <a:fillRect/>
           </a:stretch>
         </p:blipFill>
         <p:spPr>
           <a:xfrm>
-            <a:off x="1776083" y="120059"/>
-            <a:ext cx="8639833" cy="860963"/>
+            <a:off x="3638774" y="5645552"/>
+            <a:ext cx="4116774" cy="665786"/>
           </a:xfrm>
           <a:prstGeom prst="rect">
             <a:avLst/>
           </a:prstGeom>
         </p:spPr>
       </p:pic>
-      <p:pic>
-        <p:nvPicPr>
-          <p:cNvPr id="3" name="Image 2">
-            <a:extLst>
-              <a:ext uri="{FF2B5EF4-FFF2-40B4-BE49-F238E27FC236}">
-                <a16:creationId xmlns:a16="http://schemas.microsoft.com/office/drawing/2014/main" id="{D02D078E-DA87-D5DC-C22F-5DC46374FF16}"/>
-              </a:ext>
-            </a:extLst>
-          </p:cNvPr>
-          <p:cNvPicPr>
-            <a:picLocks noChangeAspect="1"/>
-          </p:cNvPicPr>
-          <p:nvPr/>
-        </p:nvPicPr>
-        <p:blipFill>
-          <a:blip r:embed="rId7">
-            <a:duotone>
-              <a:schemeClr val="bg2">
-                <a:shade val="45000"/>
-                <a:satMod val="135000"/>
-              </a:schemeClr>
-              <a:prstClr val="white"/>
-            </a:duotone>
-            <a:extLst>
-              <a:ext uri="{BEBA8EAE-BF5A-486C-A8C5-ECC9F3942E4B}">
-                <a14:imgProps xmlns:a14="http://schemas.microsoft.com/office/drawing/2010/main">
-                  <a14:imgLayer r:embed="rId8">
-                    <a14:imgEffect>
-                      <a14:colorTemperature colorTemp="4700"/>
-                    </a14:imgEffect>
-                    <a14:imgEffect>
-                      <a14:saturation sat="0"/>
-                    </a14:imgEffect>
-                  </a14:imgLayer>
-                </a14:imgProps>
-              </a:ext>
-            </a:extLst>
-          </a:blip>
-          <a:srcRect l="1287" t="17358" r="73201" b="14299"/>
-          <a:stretch>
-            <a:fillRect/>
-          </a:stretch>
-        </p:blipFill>
-        <p:spPr>
-          <a:xfrm>
-            <a:off x="0" y="6098266"/>
-            <a:ext cx="758627" cy="759734"/>
-          </a:xfrm>
-          <a:prstGeom prst="rect">
-            <a:avLst/>
-          </a:prstGeom>
-        </p:spPr>
-      </p:pic>
-      <p:sp>
-        <p:nvSpPr>
-          <p:cNvPr id="7" name="Rectangle 6">
-            <a:extLst>
-              <a:ext uri="{FF2B5EF4-FFF2-40B4-BE49-F238E27FC236}">
-                <a16:creationId xmlns:a16="http://schemas.microsoft.com/office/drawing/2014/main" id="{1770D01E-791E-5D48-EBA3-103791B7F16A}"/>
-              </a:ext>
-            </a:extLst>
-          </p:cNvPr>
-          <p:cNvSpPr/>
-          <p:nvPr>
-            <p:custDataLst>
-              <p:tags r:id="rId3"/>
-            </p:custDataLst>
-          </p:nvPr>
-        </p:nvSpPr>
-        <p:spPr>
-          <a:xfrm>
-            <a:off x="450725" y="700864"/>
-            <a:ext cx="11290548" cy="942792"/>
-          </a:xfrm>
-          <a:prstGeom prst="rect">
-            <a:avLst/>
-          </a:prstGeom>
-          <a:noFill/>
-          <a:ln>
-            <a:noFill/>
-          </a:ln>
-        </p:spPr>
-        <p:style>
-          <a:lnRef idx="2">
-            <a:schemeClr val="accent1">
-              <a:shade val="15000"/>
-            </a:schemeClr>
-          </a:lnRef>
-          <a:fillRef idx="1">
-            <a:schemeClr val="accent1"/>
-          </a:fillRef>
-          <a:effectRef idx="0">
-            <a:schemeClr val="accent1"/>
-          </a:effectRef>
-          <a:fontRef idx="minor">
-            <a:schemeClr val="lt1"/>
-          </a:fontRef>
-        </p:style>
-        <p:txBody>
-          <a:bodyPr rtlCol="0" anchor="ctr"/>
-          <a:lstStyle/>
-          <a:p>
-            <a:pPr algn="ctr"/>
-            <a:r>
-              <a:rPr lang="fr-CA" sz="3000" dirty="0">
-                <a:latin typeface="Pixel Operator 8" panose="02000503000000000000" pitchFamily="2" charset="0"/>
-              </a:rPr>
-              <a:t>Difficultés rencontrées par Nicolas :</a:t>
-            </a:r>
-          </a:p>
-        </p:txBody>
-      </p:sp>
     </p:spTree>
     <p:extLst>
       <p:ext uri="{BB962C8B-B14F-4D97-AF65-F5344CB8AC3E}">
-        <p14:creationId xmlns:p14="http://schemas.microsoft.com/office/powerpoint/2010/main" val="1792551695"/>
+        <p14:creationId xmlns:p14="http://schemas.microsoft.com/office/powerpoint/2010/main" val="129906060"/>
       </p:ext>
     </p:extLst>
   </p:cSld>
@@ -5542,11 +11671,59 @@
 
 <file path=ppt/tags/tag10.xml><?xml version="1.0" encoding="utf-8"?>
 <p:tagLst xmlns:a="http://schemas.openxmlformats.org/drawingml/2006/main" xmlns:r="http://schemas.openxmlformats.org/officeDocument/2006/relationships" xmlns:p="http://schemas.openxmlformats.org/presentationml/2006/main">
+  <p:tag name="NUM" val="2"/>
+</p:tagLst>
+</file>
+
+<file path=ppt/tags/tag11.xml><?xml version="1.0" encoding="utf-8"?>
+<p:tagLst xmlns:a="http://schemas.openxmlformats.org/drawingml/2006/main" xmlns:r="http://schemas.openxmlformats.org/officeDocument/2006/relationships" xmlns:p="http://schemas.openxmlformats.org/presentationml/2006/main">
+  <p:tag name="NUM" val="1"/>
+</p:tagLst>
+</file>
+
+<file path=ppt/tags/tag12.xml><?xml version="1.0" encoding="utf-8"?>
+<p:tagLst xmlns:a="http://schemas.openxmlformats.org/drawingml/2006/main" xmlns:r="http://schemas.openxmlformats.org/officeDocument/2006/relationships" xmlns:p="http://schemas.openxmlformats.org/presentationml/2006/main">
   <p:tag name="NUM" val="10"/>
 </p:tagLst>
 </file>
 
-<file path=ppt/tags/tag11.xml><?xml version="1.0" encoding="utf-8"?>
+<file path=ppt/tags/tag13.xml><?xml version="1.0" encoding="utf-8"?>
+<p:tagLst xmlns:a="http://schemas.openxmlformats.org/drawingml/2006/main" xmlns:r="http://schemas.openxmlformats.org/officeDocument/2006/relationships" xmlns:p="http://schemas.openxmlformats.org/presentationml/2006/main">
+  <p:tag name="NUM" val="2"/>
+</p:tagLst>
+</file>
+
+<file path=ppt/tags/tag14.xml><?xml version="1.0" encoding="utf-8"?>
+<p:tagLst xmlns:a="http://schemas.openxmlformats.org/drawingml/2006/main" xmlns:r="http://schemas.openxmlformats.org/officeDocument/2006/relationships" xmlns:p="http://schemas.openxmlformats.org/presentationml/2006/main">
+  <p:tag name="NUM" val="1"/>
+</p:tagLst>
+</file>
+
+<file path=ppt/tags/tag15.xml><?xml version="1.0" encoding="utf-8"?>
+<p:tagLst xmlns:a="http://schemas.openxmlformats.org/drawingml/2006/main" xmlns:r="http://schemas.openxmlformats.org/officeDocument/2006/relationships" xmlns:p="http://schemas.openxmlformats.org/presentationml/2006/main">
+  <p:tag name="NUM" val="10"/>
+</p:tagLst>
+</file>
+
+<file path=ppt/tags/tag16.xml><?xml version="1.0" encoding="utf-8"?>
+<p:tagLst xmlns:a="http://schemas.openxmlformats.org/drawingml/2006/main" xmlns:r="http://schemas.openxmlformats.org/officeDocument/2006/relationships" xmlns:p="http://schemas.openxmlformats.org/presentationml/2006/main">
+  <p:tag name="NUM" val="2"/>
+</p:tagLst>
+</file>
+
+<file path=ppt/tags/tag17.xml><?xml version="1.0" encoding="utf-8"?>
+<p:tagLst xmlns:a="http://schemas.openxmlformats.org/drawingml/2006/main" xmlns:r="http://schemas.openxmlformats.org/officeDocument/2006/relationships" xmlns:p="http://schemas.openxmlformats.org/presentationml/2006/main">
+  <p:tag name="NUM" val="1"/>
+</p:tagLst>
+</file>
+
+<file path=ppt/tags/tag18.xml><?xml version="1.0" encoding="utf-8"?>
+<p:tagLst xmlns:a="http://schemas.openxmlformats.org/drawingml/2006/main" xmlns:r="http://schemas.openxmlformats.org/officeDocument/2006/relationships" xmlns:p="http://schemas.openxmlformats.org/presentationml/2006/main">
+  <p:tag name="NUM" val="10"/>
+</p:tagLst>
+</file>
+
+<file path=ppt/tags/tag19.xml><?xml version="1.0" encoding="utf-8"?>
 <p:tagLst xmlns:a="http://schemas.openxmlformats.org/drawingml/2006/main" xmlns:r="http://schemas.openxmlformats.org/officeDocument/2006/relationships" xmlns:p="http://schemas.openxmlformats.org/presentationml/2006/main">
   <p:tag name="NUM" val="2"/>
 </p:tagLst>
@@ -5558,9 +11735,123 @@
 </p:tagLst>
 </file>
 
+<file path=ppt/tags/tag20.xml><?xml version="1.0" encoding="utf-8"?>
+<p:tagLst xmlns:a="http://schemas.openxmlformats.org/drawingml/2006/main" xmlns:r="http://schemas.openxmlformats.org/officeDocument/2006/relationships" xmlns:p="http://schemas.openxmlformats.org/presentationml/2006/main">
+  <p:tag name="NUM" val="1"/>
+</p:tagLst>
+</file>
+
+<file path=ppt/tags/tag21.xml><?xml version="1.0" encoding="utf-8"?>
+<p:tagLst xmlns:a="http://schemas.openxmlformats.org/drawingml/2006/main" xmlns:r="http://schemas.openxmlformats.org/officeDocument/2006/relationships" xmlns:p="http://schemas.openxmlformats.org/presentationml/2006/main">
+  <p:tag name="NUM" val="10"/>
+</p:tagLst>
+</file>
+
+<file path=ppt/tags/tag22.xml><?xml version="1.0" encoding="utf-8"?>
+<p:tagLst xmlns:a="http://schemas.openxmlformats.org/drawingml/2006/main" xmlns:r="http://schemas.openxmlformats.org/officeDocument/2006/relationships" xmlns:p="http://schemas.openxmlformats.org/presentationml/2006/main">
+  <p:tag name="NUM" val="2"/>
+</p:tagLst>
+</file>
+
+<file path=ppt/tags/tag23.xml><?xml version="1.0" encoding="utf-8"?>
+<p:tagLst xmlns:a="http://schemas.openxmlformats.org/drawingml/2006/main" xmlns:r="http://schemas.openxmlformats.org/officeDocument/2006/relationships" xmlns:p="http://schemas.openxmlformats.org/presentationml/2006/main">
+  <p:tag name="NUM" val="1"/>
+</p:tagLst>
+</file>
+
+<file path=ppt/tags/tag24.xml><?xml version="1.0" encoding="utf-8"?>
+<p:tagLst xmlns:a="http://schemas.openxmlformats.org/drawingml/2006/main" xmlns:r="http://schemas.openxmlformats.org/officeDocument/2006/relationships" xmlns:p="http://schemas.openxmlformats.org/presentationml/2006/main">
+  <p:tag name="NUM" val="10"/>
+</p:tagLst>
+</file>
+
+<file path=ppt/tags/tag25.xml><?xml version="1.0" encoding="utf-8"?>
+<p:tagLst xmlns:a="http://schemas.openxmlformats.org/drawingml/2006/main" xmlns:r="http://schemas.openxmlformats.org/officeDocument/2006/relationships" xmlns:p="http://schemas.openxmlformats.org/presentationml/2006/main">
+  <p:tag name="NUM" val="2"/>
+</p:tagLst>
+</file>
+
+<file path=ppt/tags/tag26.xml><?xml version="1.0" encoding="utf-8"?>
+<p:tagLst xmlns:a="http://schemas.openxmlformats.org/drawingml/2006/main" xmlns:r="http://schemas.openxmlformats.org/officeDocument/2006/relationships" xmlns:p="http://schemas.openxmlformats.org/presentationml/2006/main">
+  <p:tag name="NUM" val="1"/>
+</p:tagLst>
+</file>
+
+<file path=ppt/tags/tag27.xml><?xml version="1.0" encoding="utf-8"?>
+<p:tagLst xmlns:a="http://schemas.openxmlformats.org/drawingml/2006/main" xmlns:r="http://schemas.openxmlformats.org/officeDocument/2006/relationships" xmlns:p="http://schemas.openxmlformats.org/presentationml/2006/main">
+  <p:tag name="NUM" val="10"/>
+</p:tagLst>
+</file>
+
+<file path=ppt/tags/tag28.xml><?xml version="1.0" encoding="utf-8"?>
+<p:tagLst xmlns:a="http://schemas.openxmlformats.org/drawingml/2006/main" xmlns:r="http://schemas.openxmlformats.org/officeDocument/2006/relationships" xmlns:p="http://schemas.openxmlformats.org/presentationml/2006/main">
+  <p:tag name="NUM" val="2"/>
+</p:tagLst>
+</file>
+
+<file path=ppt/tags/tag29.xml><?xml version="1.0" encoding="utf-8"?>
+<p:tagLst xmlns:a="http://schemas.openxmlformats.org/drawingml/2006/main" xmlns:r="http://schemas.openxmlformats.org/officeDocument/2006/relationships" xmlns:p="http://schemas.openxmlformats.org/presentationml/2006/main">
+  <p:tag name="NUM" val="2"/>
+</p:tagLst>
+</file>
+
 <file path=ppt/tags/tag3.xml><?xml version="1.0" encoding="utf-8"?>
 <p:tagLst xmlns:a="http://schemas.openxmlformats.org/drawingml/2006/main" xmlns:r="http://schemas.openxmlformats.org/officeDocument/2006/relationships" xmlns:p="http://schemas.openxmlformats.org/presentationml/2006/main">
   <p:tag name="NUM" val="1"/>
+</p:tagLst>
+</file>
+
+<file path=ppt/tags/tag30.xml><?xml version="1.0" encoding="utf-8"?>
+<p:tagLst xmlns:a="http://schemas.openxmlformats.org/drawingml/2006/main" xmlns:r="http://schemas.openxmlformats.org/officeDocument/2006/relationships" xmlns:p="http://schemas.openxmlformats.org/presentationml/2006/main">
+  <p:tag name="NUM" val="1"/>
+</p:tagLst>
+</file>
+
+<file path=ppt/tags/tag31.xml><?xml version="1.0" encoding="utf-8"?>
+<p:tagLst xmlns:a="http://schemas.openxmlformats.org/drawingml/2006/main" xmlns:r="http://schemas.openxmlformats.org/officeDocument/2006/relationships" xmlns:p="http://schemas.openxmlformats.org/presentationml/2006/main">
+  <p:tag name="NUM" val="10"/>
+</p:tagLst>
+</file>
+
+<file path=ppt/tags/tag32.xml><?xml version="1.0" encoding="utf-8"?>
+<p:tagLst xmlns:a="http://schemas.openxmlformats.org/drawingml/2006/main" xmlns:r="http://schemas.openxmlformats.org/officeDocument/2006/relationships" xmlns:p="http://schemas.openxmlformats.org/presentationml/2006/main">
+  <p:tag name="NUM" val="2"/>
+</p:tagLst>
+</file>
+
+<file path=ppt/tags/tag33.xml><?xml version="1.0" encoding="utf-8"?>
+<p:tagLst xmlns:a="http://schemas.openxmlformats.org/drawingml/2006/main" xmlns:r="http://schemas.openxmlformats.org/officeDocument/2006/relationships" xmlns:p="http://schemas.openxmlformats.org/presentationml/2006/main">
+  <p:tag name="NUM" val="1"/>
+</p:tagLst>
+</file>
+
+<file path=ppt/tags/tag34.xml><?xml version="1.0" encoding="utf-8"?>
+<p:tagLst xmlns:a="http://schemas.openxmlformats.org/drawingml/2006/main" xmlns:r="http://schemas.openxmlformats.org/officeDocument/2006/relationships" xmlns:p="http://schemas.openxmlformats.org/presentationml/2006/main">
+  <p:tag name="NUM" val="10"/>
+</p:tagLst>
+</file>
+
+<file path=ppt/tags/tag35.xml><?xml version="1.0" encoding="utf-8"?>
+<p:tagLst xmlns:a="http://schemas.openxmlformats.org/drawingml/2006/main" xmlns:r="http://schemas.openxmlformats.org/officeDocument/2006/relationships" xmlns:p="http://schemas.openxmlformats.org/presentationml/2006/main">
+  <p:tag name="NUM" val="2"/>
+</p:tagLst>
+</file>
+
+<file path=ppt/tags/tag36.xml><?xml version="1.0" encoding="utf-8"?>
+<p:tagLst xmlns:a="http://schemas.openxmlformats.org/drawingml/2006/main" xmlns:r="http://schemas.openxmlformats.org/officeDocument/2006/relationships" xmlns:p="http://schemas.openxmlformats.org/presentationml/2006/main">
+  <p:tag name="NUM" val="1"/>
+</p:tagLst>
+</file>
+
+<file path=ppt/tags/tag37.xml><?xml version="1.0" encoding="utf-8"?>
+<p:tagLst xmlns:a="http://schemas.openxmlformats.org/drawingml/2006/main" xmlns:r="http://schemas.openxmlformats.org/officeDocument/2006/relationships" xmlns:p="http://schemas.openxmlformats.org/presentationml/2006/main">
+  <p:tag name="NUM" val="10"/>
+</p:tagLst>
+</file>
+
+<file path=ppt/tags/tag38.xml><?xml version="1.0" encoding="utf-8"?>
+<p:tagLst xmlns:a="http://schemas.openxmlformats.org/drawingml/2006/main" xmlns:r="http://schemas.openxmlformats.org/officeDocument/2006/relationships" xmlns:p="http://schemas.openxmlformats.org/presentationml/2006/main">
+  <p:tag name="NUM" val="2"/>
 </p:tagLst>
 </file>
 
@@ -5578,25 +11869,25 @@
 
 <file path=ppt/tags/tag6.xml><?xml version="1.0" encoding="utf-8"?>
 <p:tagLst xmlns:a="http://schemas.openxmlformats.org/drawingml/2006/main" xmlns:r="http://schemas.openxmlformats.org/officeDocument/2006/relationships" xmlns:p="http://schemas.openxmlformats.org/presentationml/2006/main">
-  <p:tag name="NUM" val="1"/>
+  <p:tag name="NUM" val="2"/>
 </p:tagLst>
 </file>
 
 <file path=ppt/tags/tag7.xml><?xml version="1.0" encoding="utf-8"?>
 <p:tagLst xmlns:a="http://schemas.openxmlformats.org/drawingml/2006/main" xmlns:r="http://schemas.openxmlformats.org/officeDocument/2006/relationships" xmlns:p="http://schemas.openxmlformats.org/presentationml/2006/main">
-  <p:tag name="NUM" val="10"/>
+  <p:tag name="NUM" val="2"/>
 </p:tagLst>
 </file>
 
 <file path=ppt/tags/tag8.xml><?xml version="1.0" encoding="utf-8"?>
 <p:tagLst xmlns:a="http://schemas.openxmlformats.org/drawingml/2006/main" xmlns:r="http://schemas.openxmlformats.org/officeDocument/2006/relationships" xmlns:p="http://schemas.openxmlformats.org/presentationml/2006/main">
-  <p:tag name="NUM" val="2"/>
+  <p:tag name="NUM" val="1"/>
 </p:tagLst>
 </file>
 
 <file path=ppt/tags/tag9.xml><?xml version="1.0" encoding="utf-8"?>
 <p:tagLst xmlns:a="http://schemas.openxmlformats.org/drawingml/2006/main" xmlns:r="http://schemas.openxmlformats.org/officeDocument/2006/relationships" xmlns:p="http://schemas.openxmlformats.org/presentationml/2006/main">
-  <p:tag name="NUM" val="1"/>
+  <p:tag name="NUM" val="10"/>
 </p:tagLst>
 </file>
 
@@ -5887,18 +12178,28 @@
   </a:themeElements>
   <a:objectDefaults>
     <a:lnDef>
-      <a:spPr/>
+      <a:spPr>
+        <a:ln w="19050" cap="flat" cmpd="sng" algn="ctr">
+          <a:solidFill>
+            <a:schemeClr val="accent1"/>
+          </a:solidFill>
+          <a:prstDash val="solid"/>
+          <a:round/>
+          <a:headEnd type="none" w="med" len="med"/>
+          <a:tailEnd type="arrow" w="med" len="med"/>
+        </a:ln>
+      </a:spPr>
       <a:bodyPr/>
       <a:lstStyle/>
       <a:style>
-        <a:lnRef idx="2">
-          <a:schemeClr val="accent1"/>
+        <a:lnRef idx="0">
+          <a:scrgbClr r="0" g="0" b="0"/>
         </a:lnRef>
         <a:fillRef idx="0">
-          <a:schemeClr val="accent1"/>
+          <a:scrgbClr r="0" g="0" b="0"/>
         </a:fillRef>
-        <a:effectRef idx="1">
-          <a:schemeClr val="accent1"/>
+        <a:effectRef idx="0">
+          <a:scrgbClr r="0" g="0" b="0"/>
         </a:effectRef>
         <a:fontRef idx="minor">
           <a:schemeClr val="tx1"/>
